--- a/docs/Pulsefy_Defense_Presentation.pptx
+++ b/docs/Pulsefy_Defense_Presentation.pptx
@@ -513,7 +513,7 @@
           <a:lstStyle/>
           <a:p>
             <a:r>
-              <a:t>Good morning. I'm Vlad Dumitru, and I'm presenting Pulsefy, an AI-assisted ad creation platform built as my diploma project under the guidance of Conf. dr. ing. Iuliana Marin.</a:t>
+              <a:t>Good morning. I'm Vlad Dumitru, presenting my diploma project, Pulsefy — an AI-assisted ad creation platform built under the guidance of Conf. dr. ing. Iuliana Marin at the Faculty of Engineering in Foreign Languages.</a:t>
             </a:r>
           </a:p>
         </p:txBody>
@@ -583,7 +583,7 @@
           <a:lstStyle/>
           <a:p>
             <a:r>
-              <a:t>Architecturally, Pulsefy is a thin Express server backed by PostgreSQL. The heavy work happens in spawned subprocesses: Python for MusicGen, Pulsefy AI, and gTTS, plus FFmpeg for video. External APIs cover image generation through Pollinations.ai and the licensed music catalog through Jamendo. This keeps the web tier responsive while the generations run in the background.</a:t>
+              <a:t>I benchmarked the platform on a Mac M2 Pro across three Instagram Reel scenarios. The free-tier pipeline completes a full ad in around three minutes; the premium tier takes about nine minutes, with MusicGen accounting for most of that time. Quality assessment of the generated content is out of scope for this benchmark — the goal here was to verify the latency claim from Chapter 1.</a:t>
             </a:r>
           </a:p>
         </p:txBody>
@@ -653,7 +653,7 @@
           <a:lstStyle/>
           <a:p>
             <a:r>
-              <a:t>Five concrete next steps: GPU-backed inference to remove the MusicGen latency bottleneck; a larger validation study with at least twenty listeners and a quality metric like Fréchet Audio Distance; a mobile-responsive layout; real payment processing; and expanded training data for Pulsefy AI beyond folk music. Each of these is achievable in a few weeks of focused work.</a:t>
+              <a:t>Four current limitations: the benchmark is small, MusicGen latency dominates the premium pipeline, the UI is desktop-only, and premium upgrades are simulated. Four corresponding future-work items address each of these: GPU-backed inference for MusicGen, a larger listening study with objective quality metrics, a mobile-responsive layout, and integration with a real payment processor along with multi-language UI support.</a:t>
             </a:r>
           </a:p>
         </p:txBody>
@@ -723,7 +723,7 @@
           <a:lstStyle/>
           <a:p>
             <a:r>
-              <a:t>Thank you for your attention. I'm happy to answer questions.</a:t>
+              <a:t>Thank you for your attention. I welcome your questions.</a:t>
             </a:r>
           </a:p>
         </p:txBody>
@@ -793,7 +793,7 @@
           <a:lstStyle/>
           <a:p>
             <a:r>
-              <a:t>Small businesses and solo creators need to advertise on TikTok, Reels, and Shorts at high frequency. The options are agency work, which costs thousands per campaign, stitching together four separate tools, which costs hours per ad, or skipping advertising entirely and losing visibility. There is a clear gap for a single, low-cost, fast tool.</a:t>
+              <a:t>Short-form social video is now the dominant advertising surface for small businesses and creators. The current options are narrow: hire an agency at thousands of euros per campaign, stitch together four separate creative tools at the cost of hours per ad, or skip advertising and lose visibility. This is the gap Pulsefy targets.</a:t>
             </a:r>
           </a:p>
         </p:txBody>
@@ -863,7 +863,7 @@
           <a:lstStyle/>
           <a:p>
             <a:r>
-              <a:t>Pulsefy bundles the four asset-creation stages behind a single account: scene image generation, background music generation, voiceover synthesis, and video assembly. The user enters a product brief and gets back a finished MP4 ready to upload to TikTok or Reels.</a:t>
+              <a:t>Pulsefy unifies the four generation steps that normally live in separate apps into a single web application. The user enters a brief, the system produces a finished MP4 in the requested aspect ratio, and the same account covers both free and premium workflows plus a thin social layer with the Jamendo catalog and a creator leaderboard.</a:t>
             </a:r>
           </a:p>
         </p:txBody>
@@ -933,7 +933,7 @@
           <a:lstStyle/>
           <a:p>
             <a:r>
-              <a:t>Each stage is backed by a dedicated AI subsystem. Pollinations.ai produces the scene images. MusicGen or a custom LSTM I trained handles the background music. gTTS synthesizes the voiceover. FFmpeg assembles everything into the final MP4 at the requested aspect ratio.</a:t>
+              <a:t>Six core features. The four AI subsystems on the left side of the slide handle generation. The two on the right cover catalog browsing and the social-layer leaderboard. Together they cover the full lifecycle of a short-form ad from brief to publish-ready asset, with no need to leave the application.</a:t>
             </a:r>
           </a:p>
         </p:txBody>
@@ -1003,7 +1003,7 @@
           <a:lstStyle/>
           <a:p>
             <a:r>
-              <a:t>The part of the project I'm most proud of is Pulsefy AI, a custom LSTM music generator I trained from scratch on a curated MIDI corpus. Building this rather than just plugging in an off-the-shelf model means the free tier of the platform never depends on a paid third-party service, and it required me to learn PyTorch, MIDI tokenisation, and sequence modelling end to end.</a:t>
+              <a:t>The pipeline takes a single product brief, fans out into four parallel generation stages, and converges on FFmpeg assembly. The result is a single MP4 in the user's chosen aspect ratio, ready for upload to the target social platform.</a:t>
             </a:r>
           </a:p>
         </p:txBody>
@@ -1073,7 +1073,7 @@
           <a:lstStyle/>
           <a:p>
             <a:r>
-              <a:t>The training corpus was 1,034 MIDI files parsed into 573,692 tokens. The model has roughly 908 thousand parameters across two LSTM layers with a 256-unit hidden dimension. Training ran for 30 epochs on Apple Metal acceleration, and the validation loss converged from approximately 0.51 to 0.43 within the first three epochs, confirming the model fits the dataset.</a:t>
+              <a:t>The most substantive original contribution is Pulsefy AI, a custom LSTM music generator I trained from scratch. Building this myself rather than only plugging in Meta's MusicGen meant I had to implement the full pipeline — MIDI preprocessing and tokenisation, the PyTorch training loop on Apple Metal, and subprocess integration with the Node backend. Inference is fast enough that the free tier feels instant, which was the design goal.</a:t>
             </a:r>
           </a:p>
         </p:txBody>
@@ -1143,7 +1143,7 @@
           <a:lstStyle/>
           <a:p>
             <a:r>
-              <a:t>The tier separation is honest rather than feature-gated. Free users get Pulsefy AI, which is instant but acoustically simpler. Premium users get Meta's MusicGen, which produces higher-quality output but takes minutes per request and unlocks non-English voiceover. Both engines are real options. The free tier is not a teaser.</a:t>
+              <a:t>The training corpus was 1,034 MIDI files, parsed into 573,692 tokens, used to train an LSTM with roughly 908 thousand parameters across two recurrent layers. Training ran for 30 epochs on Apple Metal hardware. Validation loss converged from 0.51 to 0.43 in the first three epochs, which indicates the architecture fits the dataset cleanly. The final checkpoint ships with the application.</a:t>
             </a:r>
           </a:p>
         </p:txBody>
@@ -1213,7 +1213,7 @@
           <a:lstStyle/>
           <a:p>
             <a:r>
-              <a:t>This is the Sound Studio, the single authoring surface. Four tabs — Music, Voiceover, Video, and Upload — mirror the four AI subsystems. Users move through them at their own pace, can pick a Jamendo Creative Commons track instead of generating one, and can upload their own video for the audio-overlay path.</a:t>
+              <a:t>The tier model is deliberately quality-gated rather than feature-gated. Free users get the Pulsefy AI engine, instant but acoustically simpler, with English voiceover and three scene images. Premium users substitute Meta's MusicGen, slower but higher quality, and unlock multilingual voiceover and the fourth scene. The free tier is functionally complete — it is not a trial.</a:t>
             </a:r>
           </a:p>
         </p:txBody>
@@ -1283,7 +1283,7 @@
           <a:lstStyle/>
           <a:p>
             <a:r>
-              <a:t>I benchmarked the platform on a Mac M2 Pro across three Instagram Reel scenarios, each with a different product theme. The free-tier pipeline finishes a complete ad in about three minutes — roughly one hundred and fifty times faster than the eight-hour manual baseline. The premium tier finishes in nine minutes, slower because MusicGen takes the bulk of the time, but still over fifty times faster than the manual path.</a:t>
+              <a:t>This is the Sound Studio, the central authoring surface. Four tabs — Music, Voiceover, Video, and Upload — correspond to the four AI subsystems. The session state persists as the user moves between tabs, so they can generate the music and the voiceover separately and combine them in the Video tab without losing their work.</a:t>
             </a:r>
           </a:p>
         </p:txBody>
@@ -4282,6 +4282,14 @@
 <file path=ppt/slides/slide1.xml><?xml version="1.0" encoding="utf-8"?>
 <p:sld xmlns:a="http://schemas.openxmlformats.org/drawingml/2006/main" xmlns:p="http://schemas.openxmlformats.org/presentationml/2006/main" xmlns:r="http://schemas.openxmlformats.org/officeDocument/2006/relationships">
   <p:cSld>
+    <p:bg>
+      <p:bgPr>
+        <a:solidFill>
+          <a:srgbClr val="0F172A"/>
+        </a:solidFill>
+        <a:effectLst/>
+      </p:bgPr>
+    </p:bg>
     <p:spTree>
       <p:nvGrpSpPr>
         <p:cNvPr id="1" name=""/>
@@ -4304,7 +4312,7 @@
             <a:avLst/>
           </a:prstGeom>
           <a:solidFill>
-            <a:srgbClr val="7C3AED"/>
+            <a:srgbClr val="A78BFA"/>
           </a:solidFill>
           <a:ln>
             <a:noFill/>
@@ -4340,8 +4348,8 @@
         </p:nvSpPr>
         <p:spPr>
           <a:xfrm>
-            <a:off x="914400" y="2194560"/>
-            <a:ext cx="10332720" cy="914400"/>
+            <a:off x="914400" y="2103120"/>
+            <a:ext cx="10332720" cy="1005840"/>
           </a:xfrm>
           <a:prstGeom prst="rect">
             <a:avLst/>
@@ -4356,9 +4364,9 @@
           <a:p>
             <a:pPr algn="l"/>
             <a:r>
-              <a:rPr sz="7200" b="1" i="0">
-                <a:solidFill>
-                  <a:srgbClr val="0F172A"/>
+              <a:rPr sz="8000" b="1" i="0">
+                <a:solidFill>
+                  <a:srgbClr val="F8FAFC"/>
                 </a:solidFill>
                 <a:latin typeface="Calibri"/>
               </a:rPr>
@@ -4393,7 +4401,7 @@
             <a:r>
               <a:rPr sz="2200" b="0" i="0">
                 <a:solidFill>
-                  <a:srgbClr val="64748B"/>
+                  <a:srgbClr val="94A3B8"/>
                 </a:solidFill>
                 <a:latin typeface="Calibri"/>
               </a:rPr>
@@ -4426,9 +4434,9 @@
           <a:p>
             <a:pPr algn="l"/>
             <a:r>
-              <a:rPr sz="1600" b="1" i="0">
-                <a:solidFill>
-                  <a:srgbClr val="0F172A"/>
+              <a:rPr sz="1500" b="1" i="0">
+                <a:solidFill>
+                  <a:srgbClr val="F8FAFC"/>
                 </a:solidFill>
                 <a:latin typeface="Calibri"/>
               </a:rPr>
@@ -4461,9 +4469,9 @@
           <a:p>
             <a:pPr algn="l"/>
             <a:r>
-              <a:rPr sz="1300" b="0" i="0">
-                <a:solidFill>
-                  <a:srgbClr val="64748B"/>
+              <a:rPr sz="1200" b="0" i="0">
+                <a:solidFill>
+                  <a:srgbClr val="94A3B8"/>
                 </a:solidFill>
                 <a:latin typeface="Calibri"/>
               </a:rPr>
@@ -4496,9 +4504,9 @@
           <a:p>
             <a:pPr algn="r"/>
             <a:r>
-              <a:rPr sz="1200" b="0" i="0">
-                <a:solidFill>
-                  <a:srgbClr val="64748B"/>
+              <a:rPr sz="1100" b="0" i="0">
+                <a:solidFill>
+                  <a:srgbClr val="94A3B8"/>
                 </a:solidFill>
                 <a:latin typeface="Calibri"/>
               </a:rPr>
@@ -4533,7 +4541,7 @@
             <a:r>
               <a:rPr sz="1400" b="1" i="0">
                 <a:solidFill>
-                  <a:srgbClr val="0F172A"/>
+                  <a:srgbClr val="F8FAFC"/>
                 </a:solidFill>
                 <a:latin typeface="Calibri"/>
               </a:rPr>
@@ -4566,9 +4574,9 @@
           <a:p>
             <a:pPr algn="r"/>
             <a:r>
-              <a:rPr sz="1100" b="0" i="0">
-                <a:solidFill>
-                  <a:srgbClr val="64748B"/>
+              <a:rPr sz="1000" b="0" i="0">
+                <a:solidFill>
+                  <a:srgbClr val="94A3B8"/>
                 </a:solidFill>
                 <a:latin typeface="Calibri"/>
               </a:rPr>
@@ -4588,6 +4596,14 @@
 <file path=ppt/slides/slide10.xml><?xml version="1.0" encoding="utf-8"?>
 <p:sld xmlns:a="http://schemas.openxmlformats.org/drawingml/2006/main" xmlns:p="http://schemas.openxmlformats.org/presentationml/2006/main" xmlns:r="http://schemas.openxmlformats.org/officeDocument/2006/relationships">
   <p:cSld>
+    <p:bg>
+      <p:bgPr>
+        <a:solidFill>
+          <a:srgbClr val="0F172A"/>
+        </a:solidFill>
+        <a:effectLst/>
+      </p:bgPr>
+    </p:bg>
     <p:spTree>
       <p:nvGrpSpPr>
         <p:cNvPr id="1" name=""/>
@@ -4603,14 +4619,14 @@
         </p:nvSpPr>
         <p:spPr>
           <a:xfrm>
-            <a:off x="914400" y="822960"/>
-            <a:ext cx="73152" cy="457200"/>
+            <a:off x="914400" y="868680"/>
+            <a:ext cx="73152" cy="411480"/>
           </a:xfrm>
           <a:prstGeom prst="rect">
             <a:avLst/>
           </a:prstGeom>
           <a:solidFill>
-            <a:srgbClr val="7C3AED"/>
+            <a:srgbClr val="A78BFA"/>
           </a:solidFill>
           <a:ln>
             <a:noFill/>
@@ -4646,8 +4662,8 @@
         </p:nvSpPr>
         <p:spPr>
           <a:xfrm>
-            <a:off x="1097280" y="731520"/>
-            <a:ext cx="10515600" cy="640080"/>
+            <a:off x="1143000" y="777240"/>
+            <a:ext cx="10515600" cy="594360"/>
           </a:xfrm>
           <a:prstGeom prst="rect">
             <a:avLst/>
@@ -4662,13 +4678,13 @@
           <a:p>
             <a:pPr algn="l"/>
             <a:r>
-              <a:rPr sz="3200" b="1" i="0">
-                <a:solidFill>
-                  <a:srgbClr val="0F172A"/>
+              <a:rPr sz="2800" b="1" i="0">
+                <a:solidFill>
+                  <a:srgbClr val="F8FAFC"/>
                 </a:solidFill>
                 <a:latin typeface="Calibri"/>
               </a:rPr>
-              <a:t>Architecture</a:t>
+              <a:t>Performance benchmark</a:t>
             </a:r>
           </a:p>
         </p:txBody>
@@ -4681,8 +4697,8 @@
         </p:nvSpPr>
         <p:spPr>
           <a:xfrm>
-            <a:off x="914400" y="1645920"/>
-            <a:ext cx="10515600" cy="457200"/>
+            <a:off x="914400" y="1691640"/>
+            <a:ext cx="10332720" cy="457200"/>
           </a:xfrm>
           <a:prstGeom prst="rect">
             <a:avLst/>
@@ -4697,37 +4713,37 @@
           <a:p>
             <a:pPr algn="l"/>
             <a:r>
-              <a:rPr sz="1600" b="0" i="1">
-                <a:solidFill>
-                  <a:srgbClr val="64748B"/>
+              <a:rPr sz="1400" b="0" i="1">
+                <a:solidFill>
+                  <a:srgbClr val="94A3B8"/>
                 </a:solidFill>
                 <a:latin typeface="Calibri"/>
               </a:rPr>
-              <a:t>Thin web tier, heavy work in spawned subprocesses</a:t>
-            </a:r>
-          </a:p>
-        </p:txBody>
-      </p:sp>
-      <p:sp>
-        <p:nvSpPr>
-          <p:cNvPr id="5" name="Rectangle 4"/>
+              <a:t>Three Instagram Reel scenarios, measured on Mac M2 Pro.</a:t>
+            </a:r>
+          </a:p>
+        </p:txBody>
+      </p:sp>
+      <p:sp>
+        <p:nvSpPr>
+          <p:cNvPr id="5" name="Rounded Rectangle 4"/>
           <p:cNvSpPr/>
           <p:nvPr/>
         </p:nvSpPr>
         <p:spPr>
           <a:xfrm>
-            <a:off x="914400" y="2377440"/>
-            <a:ext cx="10332720" cy="4023360"/>
-          </a:xfrm>
-          <a:prstGeom prst="rect">
+            <a:off x="914400" y="2606040"/>
+            <a:ext cx="10332720" cy="777240"/>
+          </a:xfrm>
+          <a:prstGeom prst="roundRect">
             <a:avLst/>
           </a:prstGeom>
           <a:solidFill>
-            <a:srgbClr val="F1F5F9"/>
+            <a:srgbClr val="1E293B"/>
           </a:solidFill>
           <a:ln w="12700">
             <a:solidFill>
-              <a:srgbClr val="CBD5E1"/>
+              <a:srgbClr val="334155"/>
             </a:solidFill>
           </a:ln>
         </p:spPr>
@@ -4746,58 +4762,139 @@
           </a:fontRef>
         </p:style>
         <p:txBody>
-          <a:bodyPr rtlCol="0" anchor="ctr" wrap="square"/>
+          <a:bodyPr rtlCol="0" anchor="ctr"/>
           <a:lstStyle/>
           <a:p>
             <a:pPr algn="ctr"/>
-            <a:r>
-              <a:rPr sz="1400" i="1">
-                <a:solidFill>
-                  <a:srgbClr val="64748B"/>
-                </a:solidFill>
-              </a:rPr>
-              <a:t>[Insert: Pulsefy architecture block diagram — Figure 22 from Chapter 4]</a:t>
-            </a:r>
-          </a:p>
-        </p:txBody>
-      </p:sp>
-    </p:spTree>
-  </p:cSld>
-  <p:clrMapOvr>
-    <a:masterClrMapping/>
-  </p:clrMapOvr>
-</p:sld>
-</file>
-
-<file path=ppt/slides/slide11.xml><?xml version="1.0" encoding="utf-8"?>
-<p:sld xmlns:a="http://schemas.openxmlformats.org/drawingml/2006/main" xmlns:p="http://schemas.openxmlformats.org/presentationml/2006/main" xmlns:r="http://schemas.openxmlformats.org/officeDocument/2006/relationships">
-  <p:cSld>
-    <p:spTree>
-      <p:nvGrpSpPr>
-        <p:cNvPr id="1" name=""/>
-        <p:cNvGrpSpPr/>
-        <p:nvPr/>
-      </p:nvGrpSpPr>
-      <p:grpSpPr/>
-      <p:sp>
-        <p:nvSpPr>
-          <p:cNvPr id="2" name="Rectangle 1"/>
+          </a:p>
+        </p:txBody>
+      </p:sp>
+      <p:sp>
+        <p:nvSpPr>
+          <p:cNvPr id="6" name="TextBox 5"/>
+          <p:cNvSpPr txBox="1"/>
+          <p:nvPr/>
+        </p:nvSpPr>
+        <p:spPr>
+          <a:xfrm>
+            <a:off x="1188720" y="2651760"/>
+            <a:ext cx="4114800" cy="685800"/>
+          </a:xfrm>
+          <a:prstGeom prst="rect">
+            <a:avLst/>
+          </a:prstGeom>
+          <a:noFill/>
+        </p:spPr>
+        <p:txBody>
+          <a:bodyPr wrap="square" anchor="ctr">
+            <a:spAutoFit/>
+          </a:bodyPr>
+          <a:lstStyle/>
+          <a:p>
+            <a:pPr algn="l"/>
+            <a:r>
+              <a:rPr sz="1500" b="0" i="0">
+                <a:solidFill>
+                  <a:srgbClr val="F8FAFC"/>
+                </a:solidFill>
+                <a:latin typeface="Calibri"/>
+              </a:rPr>
+              <a:t>Manual workflow (Canva + Suno + ElevenLabs + CapCut)</a:t>
+            </a:r>
+          </a:p>
+        </p:txBody>
+      </p:sp>
+      <p:sp>
+        <p:nvSpPr>
+          <p:cNvPr id="7" name="TextBox 6"/>
+          <p:cNvSpPr txBox="1"/>
+          <p:nvPr/>
+        </p:nvSpPr>
+        <p:spPr>
+          <a:xfrm>
+            <a:off x="5303520" y="2651760"/>
+            <a:ext cx="3200400" cy="685800"/>
+          </a:xfrm>
+          <a:prstGeom prst="rect">
+            <a:avLst/>
+          </a:prstGeom>
+          <a:noFill/>
+        </p:spPr>
+        <p:txBody>
+          <a:bodyPr wrap="square" anchor="ctr">
+            <a:spAutoFit/>
+          </a:bodyPr>
+          <a:lstStyle/>
+          <a:p>
+            <a:pPr algn="ctr"/>
+            <a:r>
+              <a:rPr sz="2200" b="1" i="0">
+                <a:solidFill>
+                  <a:srgbClr val="94A3B8"/>
+                </a:solidFill>
+                <a:latin typeface="Calibri"/>
+              </a:rPr>
+              <a:t>~8 hours</a:t>
+            </a:r>
+          </a:p>
+        </p:txBody>
+      </p:sp>
+      <p:sp>
+        <p:nvSpPr>
+          <p:cNvPr id="8" name="TextBox 7"/>
+          <p:cNvSpPr txBox="1"/>
+          <p:nvPr/>
+        </p:nvSpPr>
+        <p:spPr>
+          <a:xfrm>
+            <a:off x="8686800" y="2651760"/>
+            <a:ext cx="2468880" cy="685800"/>
+          </a:xfrm>
+          <a:prstGeom prst="rect">
+            <a:avLst/>
+          </a:prstGeom>
+          <a:noFill/>
+        </p:spPr>
+        <p:txBody>
+          <a:bodyPr wrap="square" anchor="ctr">
+            <a:spAutoFit/>
+          </a:bodyPr>
+          <a:lstStyle/>
+          <a:p>
+            <a:pPr algn="r"/>
+            <a:r>
+              <a:rPr sz="1100" b="0" i="1">
+                <a:solidFill>
+                  <a:srgbClr val="94A3B8"/>
+                </a:solidFill>
+                <a:latin typeface="Calibri"/>
+              </a:rPr>
+              <a:t>baseline</a:t>
+            </a:r>
+          </a:p>
+        </p:txBody>
+      </p:sp>
+      <p:sp>
+        <p:nvSpPr>
+          <p:cNvPr id="9" name="Rounded Rectangle 8"/>
           <p:cNvSpPr/>
           <p:nvPr/>
         </p:nvSpPr>
         <p:spPr>
           <a:xfrm>
-            <a:off x="914400" y="822960"/>
-            <a:ext cx="73152" cy="457200"/>
-          </a:xfrm>
-          <a:prstGeom prst="rect">
+            <a:off x="914400" y="3611880"/>
+            <a:ext cx="10332720" cy="777240"/>
+          </a:xfrm>
+          <a:prstGeom prst="roundRect">
             <a:avLst/>
           </a:prstGeom>
           <a:solidFill>
-            <a:srgbClr val="7C3AED"/>
+            <a:srgbClr val="1E293B"/>
           </a:solidFill>
-          <a:ln>
-            <a:noFill/>
+          <a:ln w="12700">
+            <a:solidFill>
+              <a:srgbClr val="334155"/>
+            </a:solidFill>
           </a:ln>
         </p:spPr>
         <p:style>
@@ -4824,14 +4921,14 @@
       </p:sp>
       <p:sp>
         <p:nvSpPr>
-          <p:cNvPr id="3" name="TextBox 2"/>
+          <p:cNvPr id="10" name="TextBox 9"/>
           <p:cNvSpPr txBox="1"/>
           <p:nvPr/>
         </p:nvSpPr>
         <p:spPr>
           <a:xfrm>
-            <a:off x="1097280" y="731520"/>
-            <a:ext cx="10515600" cy="640080"/>
+            <a:off x="1188720" y="3657600"/>
+            <a:ext cx="4114800" cy="685800"/>
           </a:xfrm>
           <a:prstGeom prst="rect">
             <a:avLst/>
@@ -4839,34 +4936,34 @@
           <a:noFill/>
         </p:spPr>
         <p:txBody>
-          <a:bodyPr wrap="square" anchor="t">
+          <a:bodyPr wrap="square" anchor="ctr">
             <a:spAutoFit/>
           </a:bodyPr>
           <a:lstStyle/>
           <a:p>
             <a:pPr algn="l"/>
             <a:r>
-              <a:rPr sz="3200" b="1" i="0">
-                <a:solidFill>
-                  <a:srgbClr val="0F172A"/>
+              <a:rPr sz="1500" b="0" i="0">
+                <a:solidFill>
+                  <a:srgbClr val="F8FAFC"/>
                 </a:solidFill>
                 <a:latin typeface="Calibri"/>
               </a:rPr>
-              <a:t>What's next</a:t>
-            </a:r>
-          </a:p>
-        </p:txBody>
-      </p:sp>
-      <p:sp>
-        <p:nvSpPr>
-          <p:cNvPr id="4" name="TextBox 3"/>
+              <a:t>Pulsefy free tier (Pulsefy AI music)</a:t>
+            </a:r>
+          </a:p>
+        </p:txBody>
+      </p:sp>
+      <p:sp>
+        <p:nvSpPr>
+          <p:cNvPr id="11" name="TextBox 10"/>
           <p:cNvSpPr txBox="1"/>
           <p:nvPr/>
         </p:nvSpPr>
         <p:spPr>
           <a:xfrm>
-            <a:off x="914400" y="2194560"/>
-            <a:ext cx="5029200" cy="365760"/>
+            <a:off x="5303520" y="3657600"/>
+            <a:ext cx="3200400" cy="685800"/>
           </a:xfrm>
           <a:prstGeom prst="rect">
             <a:avLst/>
@@ -4874,34 +4971,34 @@
           <a:noFill/>
         </p:spPr>
         <p:txBody>
-          <a:bodyPr wrap="square" anchor="t">
+          <a:bodyPr wrap="square" anchor="ctr">
             <a:spAutoFit/>
           </a:bodyPr>
           <a:lstStyle/>
           <a:p>
-            <a:pPr algn="l"/>
-            <a:r>
-              <a:rPr sz="1800" b="1" i="0">
-                <a:solidFill>
-                  <a:srgbClr val="7C3AED"/>
+            <a:pPr algn="ctr"/>
+            <a:r>
+              <a:rPr sz="2200" b="1" i="0">
+                <a:solidFill>
+                  <a:srgbClr val="4ADE80"/>
                 </a:solidFill>
                 <a:latin typeface="Calibri"/>
               </a:rPr>
-              <a:t>GPU-backed inference</a:t>
-            </a:r>
-          </a:p>
-        </p:txBody>
-      </p:sp>
-      <p:sp>
-        <p:nvSpPr>
-          <p:cNvPr id="5" name="TextBox 4"/>
+              <a:t>~3 min 11 s</a:t>
+            </a:r>
+          </a:p>
+        </p:txBody>
+      </p:sp>
+      <p:sp>
+        <p:nvSpPr>
+          <p:cNvPr id="12" name="TextBox 11"/>
           <p:cNvSpPr txBox="1"/>
           <p:nvPr/>
         </p:nvSpPr>
         <p:spPr>
           <a:xfrm>
-            <a:off x="914400" y="2651760"/>
-            <a:ext cx="5029200" cy="1371600"/>
+            <a:off x="8686800" y="3657600"/>
+            <a:ext cx="2468880" cy="685800"/>
           </a:xfrm>
           <a:prstGeom prst="rect">
             <a:avLst/>
@@ -4909,330 +5006,45 @@
           <a:noFill/>
         </p:spPr>
         <p:txBody>
-          <a:bodyPr wrap="square" anchor="t">
+          <a:bodyPr wrap="square" anchor="ctr">
             <a:spAutoFit/>
           </a:bodyPr>
           <a:lstStyle/>
           <a:p>
-            <a:pPr algn="l"/>
-            <a:r>
-              <a:rPr sz="1400" b="0" i="0">
-                <a:solidFill>
-                  <a:srgbClr val="0F172A"/>
+            <a:pPr algn="r"/>
+            <a:r>
+              <a:rPr sz="1100" b="0" i="1">
+                <a:solidFill>
+                  <a:srgbClr val="94A3B8"/>
                 </a:solidFill>
                 <a:latin typeface="Calibri"/>
               </a:rPr>
-              <a:t>Reduce MusicGen latency from minutes to seconds with a worker pool on GPU hardware.</a:t>
-            </a:r>
-          </a:p>
-        </p:txBody>
-      </p:sp>
-      <p:sp>
-        <p:nvSpPr>
-          <p:cNvPr id="6" name="TextBox 5"/>
-          <p:cNvSpPr txBox="1"/>
-          <p:nvPr/>
-        </p:nvSpPr>
-        <p:spPr>
-          <a:xfrm>
-            <a:off x="6217920" y="2194560"/>
-            <a:ext cx="5029200" cy="365760"/>
-          </a:xfrm>
-          <a:prstGeom prst="rect">
-            <a:avLst/>
-          </a:prstGeom>
-          <a:noFill/>
-        </p:spPr>
-        <p:txBody>
-          <a:bodyPr wrap="square" anchor="t">
-            <a:spAutoFit/>
-          </a:bodyPr>
-          <a:lstStyle/>
-          <a:p>
-            <a:pPr algn="l"/>
-            <a:r>
-              <a:rPr sz="1800" b="1" i="0">
-                <a:solidFill>
-                  <a:srgbClr val="7C3AED"/>
-                </a:solidFill>
-                <a:latin typeface="Calibri"/>
-              </a:rPr>
-              <a:t>Larger validation study</a:t>
-            </a:r>
-          </a:p>
-        </p:txBody>
-      </p:sp>
-      <p:sp>
-        <p:nvSpPr>
-          <p:cNvPr id="7" name="TextBox 6"/>
-          <p:cNvSpPr txBox="1"/>
-          <p:nvPr/>
-        </p:nvSpPr>
-        <p:spPr>
-          <a:xfrm>
-            <a:off x="6217920" y="2651760"/>
-            <a:ext cx="5029200" cy="1371600"/>
-          </a:xfrm>
-          <a:prstGeom prst="rect">
-            <a:avLst/>
-          </a:prstGeom>
-          <a:noFill/>
-        </p:spPr>
-        <p:txBody>
-          <a:bodyPr wrap="square" anchor="t">
-            <a:spAutoFit/>
-          </a:bodyPr>
-          <a:lstStyle/>
-          <a:p>
-            <a:pPr algn="l"/>
-            <a:r>
-              <a:rPr sz="1400" b="0" i="0">
-                <a:solidFill>
-                  <a:srgbClr val="0F172A"/>
-                </a:solidFill>
-                <a:latin typeface="Calibri"/>
-              </a:rPr>
-              <a:t>N ≥ 20 listeners with MUSHRA scoring and Fréchet Audio Distance against a reference catalog.</a:t>
-            </a:r>
-          </a:p>
-        </p:txBody>
-      </p:sp>
-      <p:sp>
-        <p:nvSpPr>
-          <p:cNvPr id="8" name="TextBox 7"/>
-          <p:cNvSpPr txBox="1"/>
-          <p:nvPr/>
-        </p:nvSpPr>
-        <p:spPr>
-          <a:xfrm>
-            <a:off x="914400" y="4023360"/>
-            <a:ext cx="5029200" cy="365760"/>
-          </a:xfrm>
-          <a:prstGeom prst="rect">
-            <a:avLst/>
-          </a:prstGeom>
-          <a:noFill/>
-        </p:spPr>
-        <p:txBody>
-          <a:bodyPr wrap="square" anchor="t">
-            <a:spAutoFit/>
-          </a:bodyPr>
-          <a:lstStyle/>
-          <a:p>
-            <a:pPr algn="l"/>
-            <a:r>
-              <a:rPr sz="1800" b="1" i="0">
-                <a:solidFill>
-                  <a:srgbClr val="7C3AED"/>
-                </a:solidFill>
-                <a:latin typeface="Calibri"/>
-              </a:rPr>
-              <a:t>Mobile-responsive layout</a:t>
-            </a:r>
-          </a:p>
-        </p:txBody>
-      </p:sp>
-      <p:sp>
-        <p:nvSpPr>
-          <p:cNvPr id="9" name="TextBox 8"/>
-          <p:cNvSpPr txBox="1"/>
-          <p:nvPr/>
-        </p:nvSpPr>
-        <p:spPr>
-          <a:xfrm>
-            <a:off x="914400" y="4480560"/>
-            <a:ext cx="5029200" cy="1371600"/>
-          </a:xfrm>
-          <a:prstGeom prst="rect">
-            <a:avLst/>
-          </a:prstGeom>
-          <a:noFill/>
-        </p:spPr>
-        <p:txBody>
-          <a:bodyPr wrap="square" anchor="t">
-            <a:spAutoFit/>
-          </a:bodyPr>
-          <a:lstStyle/>
-          <a:p>
-            <a:pPr algn="l"/>
-            <a:r>
-              <a:rPr sz="1400" b="0" i="0">
-                <a:solidFill>
-                  <a:srgbClr val="0F172A"/>
-                </a:solidFill>
-                <a:latin typeface="Calibri"/>
-              </a:rPr>
-              <a:t>Meet creators on the device they shoot their content on.</a:t>
-            </a:r>
-          </a:p>
-        </p:txBody>
-      </p:sp>
-      <p:sp>
-        <p:nvSpPr>
-          <p:cNvPr id="10" name="TextBox 9"/>
-          <p:cNvSpPr txBox="1"/>
-          <p:nvPr/>
-        </p:nvSpPr>
-        <p:spPr>
-          <a:xfrm>
-            <a:off x="6217920" y="4023360"/>
-            <a:ext cx="5029200" cy="365760"/>
-          </a:xfrm>
-          <a:prstGeom prst="rect">
-            <a:avLst/>
-          </a:prstGeom>
-          <a:noFill/>
-        </p:spPr>
-        <p:txBody>
-          <a:bodyPr wrap="square" anchor="t">
-            <a:spAutoFit/>
-          </a:bodyPr>
-          <a:lstStyle/>
-          <a:p>
-            <a:pPr algn="l"/>
-            <a:r>
-              <a:rPr sz="1800" b="1" i="0">
-                <a:solidFill>
-                  <a:srgbClr val="7C3AED"/>
-                </a:solidFill>
-                <a:latin typeface="Calibri"/>
-              </a:rPr>
-              <a:t>Real payment processing</a:t>
-            </a:r>
-          </a:p>
-        </p:txBody>
-      </p:sp>
-      <p:sp>
-        <p:nvSpPr>
-          <p:cNvPr id="11" name="TextBox 10"/>
-          <p:cNvSpPr txBox="1"/>
-          <p:nvPr/>
-        </p:nvSpPr>
-        <p:spPr>
-          <a:xfrm>
-            <a:off x="6217920" y="4480560"/>
-            <a:ext cx="5029200" cy="1371600"/>
-          </a:xfrm>
-          <a:prstGeom prst="rect">
-            <a:avLst/>
-          </a:prstGeom>
-          <a:noFill/>
-        </p:spPr>
-        <p:txBody>
-          <a:bodyPr wrap="square" anchor="t">
-            <a:spAutoFit/>
-          </a:bodyPr>
-          <a:lstStyle/>
-          <a:p>
-            <a:pPr algn="l"/>
-            <a:r>
-              <a:rPr sz="1400" b="0" i="0">
-                <a:solidFill>
-                  <a:srgbClr val="0F172A"/>
-                </a:solidFill>
-                <a:latin typeface="Calibri"/>
-              </a:rPr>
-              <a:t>Replace the simulated tier upgrade with a Stripe-backed subscription flow.</a:t>
-            </a:r>
-          </a:p>
-        </p:txBody>
-      </p:sp>
-      <p:sp>
-        <p:nvSpPr>
-          <p:cNvPr id="12" name="TextBox 11"/>
-          <p:cNvSpPr txBox="1"/>
-          <p:nvPr/>
-        </p:nvSpPr>
-        <p:spPr>
-          <a:xfrm>
-            <a:off x="914400" y="5669280"/>
-            <a:ext cx="10332720" cy="365760"/>
-          </a:xfrm>
-          <a:prstGeom prst="rect">
-            <a:avLst/>
-          </a:prstGeom>
-          <a:noFill/>
-        </p:spPr>
-        <p:txBody>
-          <a:bodyPr wrap="square" anchor="t">
-            <a:spAutoFit/>
-          </a:bodyPr>
-          <a:lstStyle/>
-          <a:p>
-            <a:pPr algn="l"/>
-            <a:r>
-              <a:rPr sz="1800" b="1" i="0">
-                <a:solidFill>
-                  <a:srgbClr val="7C3AED"/>
-                </a:solidFill>
-                <a:latin typeface="Calibri"/>
-              </a:rPr>
-              <a:t>Multi-language interface  +  expanded Pulsefy AI training corpus beyond Nottingham folk MIDI</a:t>
-            </a:r>
-          </a:p>
-        </p:txBody>
-      </p:sp>
-      <p:sp>
-        <p:nvSpPr>
-          <p:cNvPr id="13" name="TextBox 12"/>
-          <p:cNvSpPr txBox="1"/>
-          <p:nvPr/>
-        </p:nvSpPr>
-        <p:spPr>
-          <a:xfrm>
-            <a:off x="914400" y="6126480"/>
-            <a:ext cx="10332720" cy="1371600"/>
-          </a:xfrm>
-          <a:prstGeom prst="rect">
-            <a:avLst/>
-          </a:prstGeom>
-          <a:noFill/>
-        </p:spPr>
-        <p:txBody>
-          <a:bodyPr wrap="square" anchor="t">
-            <a:spAutoFit/>
-          </a:bodyPr>
-          <a:lstStyle/>
-          <a:p/>
-        </p:txBody>
-      </p:sp>
-    </p:spTree>
-  </p:cSld>
-  <p:clrMapOvr>
-    <a:masterClrMapping/>
-  </p:clrMapOvr>
-</p:sld>
-</file>
-
-<file path=ppt/slides/slide12.xml><?xml version="1.0" encoding="utf-8"?>
-<p:sld xmlns:a="http://schemas.openxmlformats.org/drawingml/2006/main" xmlns:p="http://schemas.openxmlformats.org/presentationml/2006/main" xmlns:r="http://schemas.openxmlformats.org/officeDocument/2006/relationships">
-  <p:cSld>
-    <p:spTree>
-      <p:nvGrpSpPr>
-        <p:cNvPr id="1" name=""/>
-        <p:cNvGrpSpPr/>
-        <p:nvPr/>
-      </p:nvGrpSpPr>
-      <p:grpSpPr/>
-      <p:sp>
-        <p:nvSpPr>
-          <p:cNvPr id="2" name="Rectangle 1"/>
+              <a:t>instant feedback loop</a:t>
+            </a:r>
+          </a:p>
+        </p:txBody>
+      </p:sp>
+      <p:sp>
+        <p:nvSpPr>
+          <p:cNvPr id="13" name="Rounded Rectangle 12"/>
           <p:cNvSpPr/>
           <p:nvPr/>
         </p:nvSpPr>
         <p:spPr>
           <a:xfrm>
-            <a:off x="0" y="3108960"/>
-            <a:ext cx="12191695" cy="36576"/>
-          </a:xfrm>
-          <a:prstGeom prst="rect">
+            <a:off x="914400" y="4617720"/>
+            <a:ext cx="10332720" cy="777240"/>
+          </a:xfrm>
+          <a:prstGeom prst="roundRect">
             <a:avLst/>
           </a:prstGeom>
           <a:solidFill>
-            <a:srgbClr val="7C3AED"/>
+            <a:srgbClr val="1E293B"/>
           </a:solidFill>
-          <a:ln>
-            <a:noFill/>
+          <a:ln w="12700">
+            <a:solidFill>
+              <a:srgbClr val="334155"/>
+            </a:solidFill>
           </a:ln>
         </p:spPr>
         <p:style>
@@ -5259,14 +5071,119 @@
       </p:sp>
       <p:sp>
         <p:nvSpPr>
-          <p:cNvPr id="3" name="TextBox 2"/>
+          <p:cNvPr id="14" name="TextBox 13"/>
           <p:cNvSpPr txBox="1"/>
           <p:nvPr/>
         </p:nvSpPr>
         <p:spPr>
           <a:xfrm>
-            <a:off x="457200" y="2377440"/>
-            <a:ext cx="11247120" cy="1280160"/>
+            <a:off x="1188720" y="4663440"/>
+            <a:ext cx="4114800" cy="685800"/>
+          </a:xfrm>
+          <a:prstGeom prst="rect">
+            <a:avLst/>
+          </a:prstGeom>
+          <a:noFill/>
+        </p:spPr>
+        <p:txBody>
+          <a:bodyPr wrap="square" anchor="ctr">
+            <a:spAutoFit/>
+          </a:bodyPr>
+          <a:lstStyle/>
+          <a:p>
+            <a:pPr algn="l"/>
+            <a:r>
+              <a:rPr sz="1500" b="0" i="0">
+                <a:solidFill>
+                  <a:srgbClr val="F8FAFC"/>
+                </a:solidFill>
+                <a:latin typeface="Calibri"/>
+              </a:rPr>
+              <a:t>Pulsefy premium tier (MusicGen music)</a:t>
+            </a:r>
+          </a:p>
+        </p:txBody>
+      </p:sp>
+      <p:sp>
+        <p:nvSpPr>
+          <p:cNvPr id="15" name="TextBox 14"/>
+          <p:cNvSpPr txBox="1"/>
+          <p:nvPr/>
+        </p:nvSpPr>
+        <p:spPr>
+          <a:xfrm>
+            <a:off x="5303520" y="4663440"/>
+            <a:ext cx="3200400" cy="685800"/>
+          </a:xfrm>
+          <a:prstGeom prst="rect">
+            <a:avLst/>
+          </a:prstGeom>
+          <a:noFill/>
+        </p:spPr>
+        <p:txBody>
+          <a:bodyPr wrap="square" anchor="ctr">
+            <a:spAutoFit/>
+          </a:bodyPr>
+          <a:lstStyle/>
+          <a:p>
+            <a:pPr algn="ctr"/>
+            <a:r>
+              <a:rPr sz="2200" b="1" i="0">
+                <a:solidFill>
+                  <a:srgbClr val="FB923C"/>
+                </a:solidFill>
+                <a:latin typeface="Calibri"/>
+              </a:rPr>
+              <a:t>~9 min 12 s</a:t>
+            </a:r>
+          </a:p>
+        </p:txBody>
+      </p:sp>
+      <p:sp>
+        <p:nvSpPr>
+          <p:cNvPr id="16" name="TextBox 15"/>
+          <p:cNvSpPr txBox="1"/>
+          <p:nvPr/>
+        </p:nvSpPr>
+        <p:spPr>
+          <a:xfrm>
+            <a:off x="8686800" y="4663440"/>
+            <a:ext cx="2468880" cy="685800"/>
+          </a:xfrm>
+          <a:prstGeom prst="rect">
+            <a:avLst/>
+          </a:prstGeom>
+          <a:noFill/>
+        </p:spPr>
+        <p:txBody>
+          <a:bodyPr wrap="square" anchor="ctr">
+            <a:spAutoFit/>
+          </a:bodyPr>
+          <a:lstStyle/>
+          <a:p>
+            <a:pPr algn="r"/>
+            <a:r>
+              <a:rPr sz="1100" b="0" i="1">
+                <a:solidFill>
+                  <a:srgbClr val="94A3B8"/>
+                </a:solidFill>
+                <a:latin typeface="Calibri"/>
+              </a:rPr>
+              <a:t>MusicGen dominates the time</a:t>
+            </a:r>
+          </a:p>
+        </p:txBody>
+      </p:sp>
+      <p:sp>
+        <p:nvSpPr>
+          <p:cNvPr id="17" name="TextBox 16"/>
+          <p:cNvSpPr txBox="1"/>
+          <p:nvPr/>
+        </p:nvSpPr>
+        <p:spPr>
+          <a:xfrm>
+            <a:off x="914400" y="5760720"/>
+            <a:ext cx="10332720" cy="548640"/>
           </a:xfrm>
           <a:prstGeom prst="rect">
             <a:avLst/>
@@ -5279,85 +5196,15 @@
           </a:bodyPr>
           <a:lstStyle/>
           <a:p>
-            <a:pPr algn="ctr"/>
-            <a:r>
-              <a:rPr sz="7200" b="1" i="0">
-                <a:solidFill>
-                  <a:srgbClr val="0F172A"/>
+            <a:pPr algn="l"/>
+            <a:r>
+              <a:rPr sz="1100" b="0" i="1">
+                <a:solidFill>
+                  <a:srgbClr val="94A3B8"/>
                 </a:solidFill>
                 <a:latin typeface="Calibri"/>
               </a:rPr>
-              <a:t>Thank you.</a:t>
-            </a:r>
-          </a:p>
-        </p:txBody>
-      </p:sp>
-      <p:sp>
-        <p:nvSpPr>
-          <p:cNvPr id="4" name="TextBox 3"/>
-          <p:cNvSpPr txBox="1"/>
-          <p:nvPr/>
-        </p:nvSpPr>
-        <p:spPr>
-          <a:xfrm>
-            <a:off x="457200" y="3657600"/>
-            <a:ext cx="11247120" cy="731520"/>
-          </a:xfrm>
-          <a:prstGeom prst="rect">
-            <a:avLst/>
-          </a:prstGeom>
-          <a:noFill/>
-        </p:spPr>
-        <p:txBody>
-          <a:bodyPr wrap="square" anchor="t">
-            <a:spAutoFit/>
-          </a:bodyPr>
-          <a:lstStyle/>
-          <a:p>
-            <a:pPr algn="ctr"/>
-            <a:r>
-              <a:rPr sz="3200" b="0" i="1">
-                <a:solidFill>
-                  <a:srgbClr val="7C3AED"/>
-                </a:solidFill>
-                <a:latin typeface="Calibri"/>
-              </a:rPr>
-              <a:t>Questions?</a:t>
-            </a:r>
-          </a:p>
-        </p:txBody>
-      </p:sp>
-      <p:sp>
-        <p:nvSpPr>
-          <p:cNvPr id="5" name="TextBox 4"/>
-          <p:cNvSpPr txBox="1"/>
-          <p:nvPr/>
-        </p:nvSpPr>
-        <p:spPr>
-          <a:xfrm>
-            <a:off x="457200" y="5943600"/>
-            <a:ext cx="11247120" cy="365760"/>
-          </a:xfrm>
-          <a:prstGeom prst="rect">
-            <a:avLst/>
-          </a:prstGeom>
-          <a:noFill/>
-        </p:spPr>
-        <p:txBody>
-          <a:bodyPr wrap="square" anchor="t">
-            <a:spAutoFit/>
-          </a:bodyPr>
-          <a:lstStyle/>
-          <a:p>
-            <a:pPr algn="ctr"/>
-            <a:r>
-              <a:rPr sz="1200" b="0" i="0">
-                <a:solidFill>
-                  <a:srgbClr val="64748B"/>
-                </a:solidFill>
-                <a:latin typeface="Calibri"/>
-              </a:rPr>
-              <a:t>Vlad DUMITRU  ·  Pulsefy  ·  UPB FILS 2026</a:t>
+              <a:t>Quality assessment was out of scope for the thesis benchmark. A larger listening study with objective audio metrics is identified as future work.</a:t>
             </a:r>
           </a:p>
         </p:txBody>
@@ -5370,9 +5217,17 @@
 </p:sld>
 </file>
 
-<file path=ppt/slides/slide2.xml><?xml version="1.0" encoding="utf-8"?>
+<file path=ppt/slides/slide11.xml><?xml version="1.0" encoding="utf-8"?>
 <p:sld xmlns:a="http://schemas.openxmlformats.org/drawingml/2006/main" xmlns:p="http://schemas.openxmlformats.org/presentationml/2006/main" xmlns:r="http://schemas.openxmlformats.org/officeDocument/2006/relationships">
   <p:cSld>
+    <p:bg>
+      <p:bgPr>
+        <a:solidFill>
+          <a:srgbClr val="0F172A"/>
+        </a:solidFill>
+        <a:effectLst/>
+      </p:bgPr>
+    </p:bg>
     <p:spTree>
       <p:nvGrpSpPr>
         <p:cNvPr id="1" name=""/>
@@ -5388,14 +5243,14 @@
         </p:nvSpPr>
         <p:spPr>
           <a:xfrm>
-            <a:off x="914400" y="822960"/>
-            <a:ext cx="73152" cy="457200"/>
+            <a:off x="914400" y="868680"/>
+            <a:ext cx="73152" cy="411480"/>
           </a:xfrm>
           <a:prstGeom prst="rect">
             <a:avLst/>
           </a:prstGeom>
           <a:solidFill>
-            <a:srgbClr val="7C3AED"/>
+            <a:srgbClr val="A78BFA"/>
           </a:solidFill>
           <a:ln>
             <a:noFill/>
@@ -5431,8 +5286,8 @@
         </p:nvSpPr>
         <p:spPr>
           <a:xfrm>
-            <a:off x="1097280" y="731520"/>
-            <a:ext cx="10515600" cy="640080"/>
+            <a:off x="1143000" y="777240"/>
+            <a:ext cx="10515600" cy="594360"/>
           </a:xfrm>
           <a:prstGeom prst="rect">
             <a:avLst/>
@@ -5447,13 +5302,13 @@
           <a:p>
             <a:pPr algn="l"/>
             <a:r>
-              <a:rPr sz="3200" b="1" i="0">
-                <a:solidFill>
-                  <a:srgbClr val="0F172A"/>
+              <a:rPr sz="2800" b="1" i="0">
+                <a:solidFill>
+                  <a:srgbClr val="F8FAFC"/>
                 </a:solidFill>
                 <a:latin typeface="Calibri"/>
               </a:rPr>
-              <a:t>Short-form social ads are expensive to produce</a:t>
+              <a:t>Limitations and future work</a:t>
             </a:r>
           </a:p>
         </p:txBody>
@@ -5466,8 +5321,8 @@
         </p:nvSpPr>
         <p:spPr>
           <a:xfrm>
-            <a:off x="914400" y="2194560"/>
-            <a:ext cx="10515600" cy="457200"/>
+            <a:off x="914400" y="1691640"/>
+            <a:ext cx="5029200" cy="457200"/>
           </a:xfrm>
           <a:prstGeom prst="rect">
             <a:avLst/>
@@ -5482,13 +5337,13 @@
           <a:p>
             <a:pPr algn="l"/>
             <a:r>
-              <a:rPr sz="1800" b="0" i="1">
-                <a:solidFill>
-                  <a:srgbClr val="64748B"/>
+              <a:rPr sz="1600" b="1" i="0">
+                <a:solidFill>
+                  <a:srgbClr val="FB923C"/>
                 </a:solidFill>
                 <a:latin typeface="Calibri"/>
               </a:rPr>
-              <a:t>Three options, none of them good for solo creators:</a:t>
+              <a:t>Current limitations</a:t>
             </a:r>
           </a:p>
         </p:txBody>
@@ -5501,8 +5356,8 @@
         </p:nvSpPr>
         <p:spPr>
           <a:xfrm>
-            <a:off x="914400" y="2926080"/>
-            <a:ext cx="10515600" cy="548640"/>
+            <a:off x="914400" y="2286000"/>
+            <a:ext cx="5029200" cy="320040"/>
           </a:xfrm>
           <a:prstGeom prst="rect">
             <a:avLst/>
@@ -5517,25 +5372,13 @@
           <a:p>
             <a:pPr algn="l"/>
             <a:r>
-              <a:rPr sz="2400" b="1" i="0">
-                <a:solidFill>
-                  <a:srgbClr val="7C3AED"/>
+              <a:rPr sz="1200" b="1" i="0">
+                <a:solidFill>
+                  <a:srgbClr val="F8FAFC"/>
                 </a:solidFill>
                 <a:latin typeface="Calibri"/>
               </a:rPr>
-              <a:t>Hire an agency</a:t>
-            </a:r>
-          </a:p>
-          <a:p>
-            <a:pPr algn="l"/>
-            <a:r>
-              <a:rPr sz="1800" b="0" i="0">
-                <a:solidFill>
-                  <a:srgbClr val="0F172A"/>
-                </a:solidFill>
-                <a:latin typeface="Calibri"/>
-              </a:rPr>
-              <a:t>    ~1,000–10,000 € per campaign</a:t>
+              <a:t>Benchmark scope</a:t>
             </a:r>
           </a:p>
         </p:txBody>
@@ -5548,8 +5391,8 @@
         </p:nvSpPr>
         <p:spPr>
           <a:xfrm>
-            <a:off x="914400" y="3931920"/>
-            <a:ext cx="10515600" cy="548640"/>
+            <a:off x="914400" y="2606040"/>
+            <a:ext cx="5029200" cy="640080"/>
           </a:xfrm>
           <a:prstGeom prst="rect">
             <a:avLst/>
@@ -5564,25 +5407,13 @@
           <a:p>
             <a:pPr algn="l"/>
             <a:r>
-              <a:rPr sz="2400" b="1" i="0">
-                <a:solidFill>
-                  <a:srgbClr val="7C3AED"/>
+              <a:rPr sz="1100" b="0" i="0">
+                <a:solidFill>
+                  <a:srgbClr val="94A3B8"/>
                 </a:solidFill>
                 <a:latin typeface="Calibri"/>
               </a:rPr>
-              <a:t>Stitch together four DIY tools</a:t>
-            </a:r>
-          </a:p>
-          <a:p>
-            <a:pPr algn="l"/>
-            <a:r>
-              <a:rPr sz="1800" b="0" i="0">
-                <a:solidFill>
-                  <a:srgbClr val="0F172A"/>
-                </a:solidFill>
-                <a:latin typeface="Calibri"/>
-              </a:rPr>
-              <a:t>    Canva + Suno + ElevenLabs + CapCut, four subscriptions, four interfaces</a:t>
+              <a:t>N=3, single hardware, latency-only (no quality assessment).</a:t>
             </a:r>
           </a:p>
         </p:txBody>
@@ -5595,8 +5426,8 @@
         </p:nvSpPr>
         <p:spPr>
           <a:xfrm>
-            <a:off x="914400" y="4937760"/>
-            <a:ext cx="10515600" cy="548640"/>
+            <a:off x="914400" y="3429000"/>
+            <a:ext cx="5029200" cy="320040"/>
           </a:xfrm>
           <a:prstGeom prst="rect">
             <a:avLst/>
@@ -5611,25 +5442,503 @@
           <a:p>
             <a:pPr algn="l"/>
             <a:r>
-              <a:rPr sz="2400" b="1" i="0">
-                <a:solidFill>
-                  <a:srgbClr val="7C3AED"/>
+              <a:rPr sz="1200" b="1" i="0">
+                <a:solidFill>
+                  <a:srgbClr val="F8FAFC"/>
                 </a:solidFill>
                 <a:latin typeface="Calibri"/>
               </a:rPr>
-              <a:t>Skip advertising altogether</a:t>
-            </a:r>
-          </a:p>
+              <a:t>MusicGen latency</a:t>
+            </a:r>
+          </a:p>
+        </p:txBody>
+      </p:sp>
+      <p:sp>
+        <p:nvSpPr>
+          <p:cNvPr id="8" name="TextBox 7"/>
+          <p:cNvSpPr txBox="1"/>
+          <p:nvPr/>
+        </p:nvSpPr>
+        <p:spPr>
+          <a:xfrm>
+            <a:off x="914400" y="3749039"/>
+            <a:ext cx="5029200" cy="640080"/>
+          </a:xfrm>
+          <a:prstGeom prst="rect">
+            <a:avLst/>
+          </a:prstGeom>
+          <a:noFill/>
+        </p:spPr>
+        <p:txBody>
+          <a:bodyPr wrap="square" anchor="t">
+            <a:spAutoFit/>
+          </a:bodyPr>
+          <a:lstStyle/>
           <a:p>
             <a:pPr algn="l"/>
             <a:r>
-              <a:rPr sz="1800" b="0" i="0">
-                <a:solidFill>
-                  <a:srgbClr val="0F172A"/>
+              <a:rPr sz="1100" b="0" i="0">
+                <a:solidFill>
+                  <a:srgbClr val="94A3B8"/>
                 </a:solidFill>
                 <a:latin typeface="Calibri"/>
               </a:rPr>
-              <a:t>    Lose visibility on platforms that reward consistent posting</a:t>
+              <a:t>5–7 minutes per request on CPU is the slowest stage of the pipeline.</a:t>
+            </a:r>
+          </a:p>
+        </p:txBody>
+      </p:sp>
+      <p:sp>
+        <p:nvSpPr>
+          <p:cNvPr id="9" name="TextBox 8"/>
+          <p:cNvSpPr txBox="1"/>
+          <p:nvPr/>
+        </p:nvSpPr>
+        <p:spPr>
+          <a:xfrm>
+            <a:off x="914400" y="4572000"/>
+            <a:ext cx="5029200" cy="320040"/>
+          </a:xfrm>
+          <a:prstGeom prst="rect">
+            <a:avLst/>
+          </a:prstGeom>
+          <a:noFill/>
+        </p:spPr>
+        <p:txBody>
+          <a:bodyPr wrap="square" anchor="t">
+            <a:spAutoFit/>
+          </a:bodyPr>
+          <a:lstStyle/>
+          <a:p>
+            <a:pPr algn="l"/>
+            <a:r>
+              <a:rPr sz="1200" b="1" i="0">
+                <a:solidFill>
+                  <a:srgbClr val="F8FAFC"/>
+                </a:solidFill>
+                <a:latin typeface="Calibri"/>
+              </a:rPr>
+              <a:t>Desktop-only UI</a:t>
+            </a:r>
+          </a:p>
+        </p:txBody>
+      </p:sp>
+      <p:sp>
+        <p:nvSpPr>
+          <p:cNvPr id="10" name="TextBox 9"/>
+          <p:cNvSpPr txBox="1"/>
+          <p:nvPr/>
+        </p:nvSpPr>
+        <p:spPr>
+          <a:xfrm>
+            <a:off x="914400" y="4892040"/>
+            <a:ext cx="5029200" cy="640080"/>
+          </a:xfrm>
+          <a:prstGeom prst="rect">
+            <a:avLst/>
+          </a:prstGeom>
+          <a:noFill/>
+        </p:spPr>
+        <p:txBody>
+          <a:bodyPr wrap="square" anchor="t">
+            <a:spAutoFit/>
+          </a:bodyPr>
+          <a:lstStyle/>
+          <a:p>
+            <a:pPr algn="l"/>
+            <a:r>
+              <a:rPr sz="1100" b="0" i="0">
+                <a:solidFill>
+                  <a:srgbClr val="94A3B8"/>
+                </a:solidFill>
+                <a:latin typeface="Calibri"/>
+              </a:rPr>
+              <a:t>The four-tab Sound Studio expects a desktop-class viewport.</a:t>
+            </a:r>
+          </a:p>
+        </p:txBody>
+      </p:sp>
+      <p:sp>
+        <p:nvSpPr>
+          <p:cNvPr id="11" name="TextBox 10"/>
+          <p:cNvSpPr txBox="1"/>
+          <p:nvPr/>
+        </p:nvSpPr>
+        <p:spPr>
+          <a:xfrm>
+            <a:off x="914400" y="5715000"/>
+            <a:ext cx="5029200" cy="320040"/>
+          </a:xfrm>
+          <a:prstGeom prst="rect">
+            <a:avLst/>
+          </a:prstGeom>
+          <a:noFill/>
+        </p:spPr>
+        <p:txBody>
+          <a:bodyPr wrap="square" anchor="t">
+            <a:spAutoFit/>
+          </a:bodyPr>
+          <a:lstStyle/>
+          <a:p>
+            <a:pPr algn="l"/>
+            <a:r>
+              <a:rPr sz="1200" b="1" i="0">
+                <a:solidFill>
+                  <a:srgbClr val="F8FAFC"/>
+                </a:solidFill>
+                <a:latin typeface="Calibri"/>
+              </a:rPr>
+              <a:t>Simulated subscriptions</a:t>
+            </a:r>
+          </a:p>
+        </p:txBody>
+      </p:sp>
+      <p:sp>
+        <p:nvSpPr>
+          <p:cNvPr id="12" name="TextBox 11"/>
+          <p:cNvSpPr txBox="1"/>
+          <p:nvPr/>
+        </p:nvSpPr>
+        <p:spPr>
+          <a:xfrm>
+            <a:off x="914400" y="6035040"/>
+            <a:ext cx="5029200" cy="640080"/>
+          </a:xfrm>
+          <a:prstGeom prst="rect">
+            <a:avLst/>
+          </a:prstGeom>
+          <a:noFill/>
+        </p:spPr>
+        <p:txBody>
+          <a:bodyPr wrap="square" anchor="t">
+            <a:spAutoFit/>
+          </a:bodyPr>
+          <a:lstStyle/>
+          <a:p>
+            <a:pPr algn="l"/>
+            <a:r>
+              <a:rPr sz="1100" b="0" i="0">
+                <a:solidFill>
+                  <a:srgbClr val="94A3B8"/>
+                </a:solidFill>
+                <a:latin typeface="Calibri"/>
+              </a:rPr>
+              <a:t>Premium upgrade is self-service without a real payment processor.</a:t>
+            </a:r>
+          </a:p>
+        </p:txBody>
+      </p:sp>
+      <p:sp>
+        <p:nvSpPr>
+          <p:cNvPr id="13" name="TextBox 12"/>
+          <p:cNvSpPr txBox="1"/>
+          <p:nvPr/>
+        </p:nvSpPr>
+        <p:spPr>
+          <a:xfrm>
+            <a:off x="6400800" y="1691640"/>
+            <a:ext cx="5029200" cy="457200"/>
+          </a:xfrm>
+          <a:prstGeom prst="rect">
+            <a:avLst/>
+          </a:prstGeom>
+          <a:noFill/>
+        </p:spPr>
+        <p:txBody>
+          <a:bodyPr wrap="square" anchor="t">
+            <a:spAutoFit/>
+          </a:bodyPr>
+          <a:lstStyle/>
+          <a:p>
+            <a:pPr algn="l"/>
+            <a:r>
+              <a:rPr sz="1600" b="1" i="0">
+                <a:solidFill>
+                  <a:srgbClr val="A78BFA"/>
+                </a:solidFill>
+                <a:latin typeface="Calibri"/>
+              </a:rPr>
+              <a:t>Future work</a:t>
+            </a:r>
+          </a:p>
+        </p:txBody>
+      </p:sp>
+      <p:sp>
+        <p:nvSpPr>
+          <p:cNvPr id="14" name="TextBox 13"/>
+          <p:cNvSpPr txBox="1"/>
+          <p:nvPr/>
+        </p:nvSpPr>
+        <p:spPr>
+          <a:xfrm>
+            <a:off x="6400800" y="2286000"/>
+            <a:ext cx="5029200" cy="320040"/>
+          </a:xfrm>
+          <a:prstGeom prst="rect">
+            <a:avLst/>
+          </a:prstGeom>
+          <a:noFill/>
+        </p:spPr>
+        <p:txBody>
+          <a:bodyPr wrap="square" anchor="t">
+            <a:spAutoFit/>
+          </a:bodyPr>
+          <a:lstStyle/>
+          <a:p>
+            <a:pPr algn="l"/>
+            <a:r>
+              <a:rPr sz="1200" b="1" i="0">
+                <a:solidFill>
+                  <a:srgbClr val="F8FAFC"/>
+                </a:solidFill>
+                <a:latin typeface="Calibri"/>
+              </a:rPr>
+              <a:t>GPU-backed inference</a:t>
+            </a:r>
+          </a:p>
+        </p:txBody>
+      </p:sp>
+      <p:sp>
+        <p:nvSpPr>
+          <p:cNvPr id="15" name="TextBox 14"/>
+          <p:cNvSpPr txBox="1"/>
+          <p:nvPr/>
+        </p:nvSpPr>
+        <p:spPr>
+          <a:xfrm>
+            <a:off x="6400800" y="2606040"/>
+            <a:ext cx="5029200" cy="640080"/>
+          </a:xfrm>
+          <a:prstGeom prst="rect">
+            <a:avLst/>
+          </a:prstGeom>
+          <a:noFill/>
+        </p:spPr>
+        <p:txBody>
+          <a:bodyPr wrap="square" anchor="t">
+            <a:spAutoFit/>
+          </a:bodyPr>
+          <a:lstStyle/>
+          <a:p>
+            <a:pPr algn="l"/>
+            <a:r>
+              <a:rPr sz="1100" b="0" i="0">
+                <a:solidFill>
+                  <a:srgbClr val="94A3B8"/>
+                </a:solidFill>
+                <a:latin typeface="Calibri"/>
+              </a:rPr>
+              <a:t>Worker pool on GPU hardware to reduce MusicGen latency to seconds.</a:t>
+            </a:r>
+          </a:p>
+        </p:txBody>
+      </p:sp>
+      <p:sp>
+        <p:nvSpPr>
+          <p:cNvPr id="16" name="TextBox 15"/>
+          <p:cNvSpPr txBox="1"/>
+          <p:nvPr/>
+        </p:nvSpPr>
+        <p:spPr>
+          <a:xfrm>
+            <a:off x="6400800" y="3429000"/>
+            <a:ext cx="5029200" cy="320040"/>
+          </a:xfrm>
+          <a:prstGeom prst="rect">
+            <a:avLst/>
+          </a:prstGeom>
+          <a:noFill/>
+        </p:spPr>
+        <p:txBody>
+          <a:bodyPr wrap="square" anchor="t">
+            <a:spAutoFit/>
+          </a:bodyPr>
+          <a:lstStyle/>
+          <a:p>
+            <a:pPr algn="l"/>
+            <a:r>
+              <a:rPr sz="1200" b="1" i="0">
+                <a:solidFill>
+                  <a:srgbClr val="F8FAFC"/>
+                </a:solidFill>
+                <a:latin typeface="Calibri"/>
+              </a:rPr>
+              <a:t>Larger validation study</a:t>
+            </a:r>
+          </a:p>
+        </p:txBody>
+      </p:sp>
+      <p:sp>
+        <p:nvSpPr>
+          <p:cNvPr id="17" name="TextBox 16"/>
+          <p:cNvSpPr txBox="1"/>
+          <p:nvPr/>
+        </p:nvSpPr>
+        <p:spPr>
+          <a:xfrm>
+            <a:off x="6400800" y="3749039"/>
+            <a:ext cx="5029200" cy="640080"/>
+          </a:xfrm>
+          <a:prstGeom prst="rect">
+            <a:avLst/>
+          </a:prstGeom>
+          <a:noFill/>
+        </p:spPr>
+        <p:txBody>
+          <a:bodyPr wrap="square" anchor="t">
+            <a:spAutoFit/>
+          </a:bodyPr>
+          <a:lstStyle/>
+          <a:p>
+            <a:pPr algn="l"/>
+            <a:r>
+              <a:rPr sz="1100" b="0" i="0">
+                <a:solidFill>
+                  <a:srgbClr val="94A3B8"/>
+                </a:solidFill>
+                <a:latin typeface="Calibri"/>
+              </a:rPr>
+              <a:t>N≥20 listeners, MUSHRA scoring, Fréchet Audio Distance for quality.</a:t>
+            </a:r>
+          </a:p>
+        </p:txBody>
+      </p:sp>
+      <p:sp>
+        <p:nvSpPr>
+          <p:cNvPr id="18" name="TextBox 17"/>
+          <p:cNvSpPr txBox="1"/>
+          <p:nvPr/>
+        </p:nvSpPr>
+        <p:spPr>
+          <a:xfrm>
+            <a:off x="6400800" y="4572000"/>
+            <a:ext cx="5029200" cy="320040"/>
+          </a:xfrm>
+          <a:prstGeom prst="rect">
+            <a:avLst/>
+          </a:prstGeom>
+          <a:noFill/>
+        </p:spPr>
+        <p:txBody>
+          <a:bodyPr wrap="square" anchor="t">
+            <a:spAutoFit/>
+          </a:bodyPr>
+          <a:lstStyle/>
+          <a:p>
+            <a:pPr algn="l"/>
+            <a:r>
+              <a:rPr sz="1200" b="1" i="0">
+                <a:solidFill>
+                  <a:srgbClr val="F8FAFC"/>
+                </a:solidFill>
+                <a:latin typeface="Calibri"/>
+              </a:rPr>
+              <a:t>Mobile-responsive UI</a:t>
+            </a:r>
+          </a:p>
+        </p:txBody>
+      </p:sp>
+      <p:sp>
+        <p:nvSpPr>
+          <p:cNvPr id="19" name="TextBox 18"/>
+          <p:cNvSpPr txBox="1"/>
+          <p:nvPr/>
+        </p:nvSpPr>
+        <p:spPr>
+          <a:xfrm>
+            <a:off x="6400800" y="4892040"/>
+            <a:ext cx="5029200" cy="640080"/>
+          </a:xfrm>
+          <a:prstGeom prst="rect">
+            <a:avLst/>
+          </a:prstGeom>
+          <a:noFill/>
+        </p:spPr>
+        <p:txBody>
+          <a:bodyPr wrap="square" anchor="t">
+            <a:spAutoFit/>
+          </a:bodyPr>
+          <a:lstStyle/>
+          <a:p>
+            <a:pPr algn="l"/>
+            <a:r>
+              <a:rPr sz="1100" b="0" i="0">
+                <a:solidFill>
+                  <a:srgbClr val="94A3B8"/>
+                </a:solidFill>
+                <a:latin typeface="Calibri"/>
+              </a:rPr>
+              <a:t>Meet creators on the device they shoot their content on.</a:t>
+            </a:r>
+          </a:p>
+        </p:txBody>
+      </p:sp>
+      <p:sp>
+        <p:nvSpPr>
+          <p:cNvPr id="20" name="TextBox 19"/>
+          <p:cNvSpPr txBox="1"/>
+          <p:nvPr/>
+        </p:nvSpPr>
+        <p:spPr>
+          <a:xfrm>
+            <a:off x="6400800" y="5715000"/>
+            <a:ext cx="5029200" cy="320040"/>
+          </a:xfrm>
+          <a:prstGeom prst="rect">
+            <a:avLst/>
+          </a:prstGeom>
+          <a:noFill/>
+        </p:spPr>
+        <p:txBody>
+          <a:bodyPr wrap="square" anchor="t">
+            <a:spAutoFit/>
+          </a:bodyPr>
+          <a:lstStyle/>
+          <a:p>
+            <a:pPr algn="l"/>
+            <a:r>
+              <a:rPr sz="1200" b="1" i="0">
+                <a:solidFill>
+                  <a:srgbClr val="F8FAFC"/>
+                </a:solidFill>
+                <a:latin typeface="Calibri"/>
+              </a:rPr>
+              <a:t>Production payment + multi-language UI</a:t>
+            </a:r>
+          </a:p>
+        </p:txBody>
+      </p:sp>
+      <p:sp>
+        <p:nvSpPr>
+          <p:cNvPr id="21" name="TextBox 20"/>
+          <p:cNvSpPr txBox="1"/>
+          <p:nvPr/>
+        </p:nvSpPr>
+        <p:spPr>
+          <a:xfrm>
+            <a:off x="6400800" y="6035040"/>
+            <a:ext cx="5029200" cy="640080"/>
+          </a:xfrm>
+          <a:prstGeom prst="rect">
+            <a:avLst/>
+          </a:prstGeom>
+          <a:noFill/>
+        </p:spPr>
+        <p:txBody>
+          <a:bodyPr wrap="square" anchor="t">
+            <a:spAutoFit/>
+          </a:bodyPr>
+          <a:lstStyle/>
+          <a:p>
+            <a:pPr algn="l"/>
+            <a:r>
+              <a:rPr sz="1100" b="0" i="0">
+                <a:solidFill>
+                  <a:srgbClr val="94A3B8"/>
+                </a:solidFill>
+                <a:latin typeface="Calibri"/>
+              </a:rPr>
+              <a:t>Stripe integration; Romanian and other regional language support.</a:t>
             </a:r>
           </a:p>
         </p:txBody>
@@ -5642,9 +5951,17 @@
 </p:sld>
 </file>
 
-<file path=ppt/slides/slide3.xml><?xml version="1.0" encoding="utf-8"?>
+<file path=ppt/slides/slide12.xml><?xml version="1.0" encoding="utf-8"?>
 <p:sld xmlns:a="http://schemas.openxmlformats.org/drawingml/2006/main" xmlns:p="http://schemas.openxmlformats.org/presentationml/2006/main" xmlns:r="http://schemas.openxmlformats.org/officeDocument/2006/relationships">
   <p:cSld>
+    <p:bg>
+      <p:bgPr>
+        <a:solidFill>
+          <a:srgbClr val="0F172A"/>
+        </a:solidFill>
+        <a:effectLst/>
+      </p:bgPr>
+    </p:bg>
     <p:spTree>
       <p:nvGrpSpPr>
         <p:cNvPr id="1" name=""/>
@@ -5654,178 +5971,20 @@
       <p:grpSpPr/>
       <p:sp>
         <p:nvSpPr>
-          <p:cNvPr id="2" name="TextBox 1"/>
-          <p:cNvSpPr txBox="1"/>
-          <p:nvPr/>
-        </p:nvSpPr>
-        <p:spPr>
-          <a:xfrm>
-            <a:off x="457200" y="2377440"/>
-            <a:ext cx="11247120" cy="1371600"/>
-          </a:xfrm>
-          <a:prstGeom prst="rect">
-            <a:avLst/>
-          </a:prstGeom>
-          <a:noFill/>
-        </p:spPr>
-        <p:txBody>
-          <a:bodyPr wrap="square" anchor="t">
-            <a:spAutoFit/>
-          </a:bodyPr>
-          <a:lstStyle/>
-          <a:p>
-            <a:pPr algn="ctr"/>
-            <a:r>
-              <a:rPr sz="5400" b="1" i="0">
-                <a:solidFill>
-                  <a:srgbClr val="0F172A"/>
-                </a:solidFill>
-                <a:latin typeface="Calibri"/>
-              </a:rPr>
-              <a:t>One application.</a:t>
-            </a:r>
-          </a:p>
-        </p:txBody>
-      </p:sp>
-      <p:sp>
-        <p:nvSpPr>
-          <p:cNvPr id="3" name="TextBox 2"/>
-          <p:cNvSpPr txBox="1"/>
-          <p:nvPr/>
-        </p:nvSpPr>
-        <p:spPr>
-          <a:xfrm>
-            <a:off x="457200" y="3291840"/>
-            <a:ext cx="11247120" cy="1371600"/>
-          </a:xfrm>
-          <a:prstGeom prst="rect">
-            <a:avLst/>
-          </a:prstGeom>
-          <a:noFill/>
-        </p:spPr>
-        <p:txBody>
-          <a:bodyPr wrap="square" anchor="t">
-            <a:spAutoFit/>
-          </a:bodyPr>
-          <a:lstStyle/>
-          <a:p>
-            <a:pPr algn="ctr"/>
-            <a:r>
-              <a:rPr sz="5400" b="1" i="0">
-                <a:solidFill>
-                  <a:srgbClr val="7C3AED"/>
-                </a:solidFill>
-                <a:latin typeface="Calibri"/>
-              </a:rPr>
-              <a:t>Four AI subsystems.</a:t>
-            </a:r>
-          </a:p>
-        </p:txBody>
-      </p:sp>
-      <p:sp>
-        <p:nvSpPr>
-          <p:cNvPr id="4" name="TextBox 3"/>
-          <p:cNvSpPr txBox="1"/>
-          <p:nvPr/>
-        </p:nvSpPr>
-        <p:spPr>
-          <a:xfrm>
-            <a:off x="457200" y="4206240"/>
-            <a:ext cx="11247120" cy="1371600"/>
-          </a:xfrm>
-          <a:prstGeom prst="rect">
-            <a:avLst/>
-          </a:prstGeom>
-          <a:noFill/>
-        </p:spPr>
-        <p:txBody>
-          <a:bodyPr wrap="square" anchor="t">
-            <a:spAutoFit/>
-          </a:bodyPr>
-          <a:lstStyle/>
-          <a:p>
-            <a:pPr algn="ctr"/>
-            <a:r>
-              <a:rPr sz="5400" b="1" i="0">
-                <a:solidFill>
-                  <a:srgbClr val="0F172A"/>
-                </a:solidFill>
-                <a:latin typeface="Calibri"/>
-              </a:rPr>
-              <a:t>One finished ad.</a:t>
-            </a:r>
-          </a:p>
-        </p:txBody>
-      </p:sp>
-      <p:sp>
-        <p:nvSpPr>
-          <p:cNvPr id="5" name="TextBox 4"/>
-          <p:cNvSpPr txBox="1"/>
-          <p:nvPr/>
-        </p:nvSpPr>
-        <p:spPr>
-          <a:xfrm>
-            <a:off x="457200" y="5852160"/>
-            <a:ext cx="11247120" cy="457200"/>
-          </a:xfrm>
-          <a:prstGeom prst="rect">
-            <a:avLst/>
-          </a:prstGeom>
-          <a:noFill/>
-        </p:spPr>
-        <p:txBody>
-          <a:bodyPr wrap="square" anchor="t">
-            <a:spAutoFit/>
-          </a:bodyPr>
-          <a:lstStyle/>
-          <a:p>
-            <a:pPr algn="ctr"/>
-            <a:r>
-              <a:rPr sz="1600" b="0" i="1">
-                <a:solidFill>
-                  <a:srgbClr val="64748B"/>
-                </a:solidFill>
-                <a:latin typeface="Calibri"/>
-              </a:rPr>
-              <a:t>Image generation, music generation, voiceover synthesis, video assembly.</a:t>
-            </a:r>
-          </a:p>
-        </p:txBody>
-      </p:sp>
-    </p:spTree>
-  </p:cSld>
-  <p:clrMapOvr>
-    <a:masterClrMapping/>
-  </p:clrMapOvr>
-</p:sld>
-</file>
-
-<file path=ppt/slides/slide4.xml><?xml version="1.0" encoding="utf-8"?>
-<p:sld xmlns:a="http://schemas.openxmlformats.org/drawingml/2006/main" xmlns:p="http://schemas.openxmlformats.org/presentationml/2006/main" xmlns:r="http://schemas.openxmlformats.org/officeDocument/2006/relationships">
-  <p:cSld>
-    <p:spTree>
-      <p:nvGrpSpPr>
-        <p:cNvPr id="1" name=""/>
-        <p:cNvGrpSpPr/>
-        <p:nvPr/>
-      </p:nvGrpSpPr>
-      <p:grpSpPr/>
-      <p:sp>
-        <p:nvSpPr>
           <p:cNvPr id="2" name="Rectangle 1"/>
           <p:cNvSpPr/>
           <p:nvPr/>
         </p:nvSpPr>
         <p:spPr>
           <a:xfrm>
-            <a:off x="914400" y="822960"/>
-            <a:ext cx="73152" cy="457200"/>
+            <a:off x="0" y="3108960"/>
+            <a:ext cx="12191695" cy="36576"/>
           </a:xfrm>
           <a:prstGeom prst="rect">
             <a:avLst/>
           </a:prstGeom>
           <a:solidFill>
-            <a:srgbClr val="7C3AED"/>
+            <a:srgbClr val="A78BFA"/>
           </a:solidFill>
           <a:ln>
             <a:noFill/>
@@ -5861,8 +6020,8 @@
         </p:nvSpPr>
         <p:spPr>
           <a:xfrm>
-            <a:off x="1097280" y="731520"/>
-            <a:ext cx="10515600" cy="640080"/>
+            <a:off x="457200" y="2468880"/>
+            <a:ext cx="11247120" cy="914400"/>
           </a:xfrm>
           <a:prstGeom prst="rect">
             <a:avLst/>
@@ -5875,40 +6034,134 @@
           </a:bodyPr>
           <a:lstStyle/>
           <a:p>
-            <a:pPr algn="l"/>
-            <a:r>
-              <a:rPr sz="3000" b="1" i="0">
-                <a:solidFill>
-                  <a:srgbClr val="0F172A"/>
+            <a:pPr algn="ctr"/>
+            <a:r>
+              <a:rPr sz="4400" b="1" i="0">
+                <a:solidFill>
+                  <a:srgbClr val="F8FAFC"/>
                 </a:solidFill>
                 <a:latin typeface="Calibri"/>
               </a:rPr>
-              <a:t>Four AI subsystems behind one interface</a:t>
-            </a:r>
-          </a:p>
-        </p:txBody>
-      </p:sp>
-      <p:sp>
-        <p:nvSpPr>
-          <p:cNvPr id="4" name="Rounded Rectangle 3"/>
+              <a:t>Thank you for your attention.</a:t>
+            </a:r>
+          </a:p>
+        </p:txBody>
+      </p:sp>
+      <p:sp>
+        <p:nvSpPr>
+          <p:cNvPr id="4" name="TextBox 3"/>
+          <p:cNvSpPr txBox="1"/>
+          <p:nvPr/>
+        </p:nvSpPr>
+        <p:spPr>
+          <a:xfrm>
+            <a:off x="457200" y="3657600"/>
+            <a:ext cx="11247120" cy="548640"/>
+          </a:xfrm>
+          <a:prstGeom prst="rect">
+            <a:avLst/>
+          </a:prstGeom>
+          <a:noFill/>
+        </p:spPr>
+        <p:txBody>
+          <a:bodyPr wrap="square" anchor="t">
+            <a:spAutoFit/>
+          </a:bodyPr>
+          <a:lstStyle/>
+          <a:p>
+            <a:pPr algn="ctr"/>
+            <a:r>
+              <a:rPr sz="2200" b="0" i="1">
+                <a:solidFill>
+                  <a:srgbClr val="A78BFA"/>
+                </a:solidFill>
+                <a:latin typeface="Calibri"/>
+              </a:rPr>
+              <a:t>I welcome your questions.</a:t>
+            </a:r>
+          </a:p>
+        </p:txBody>
+      </p:sp>
+      <p:sp>
+        <p:nvSpPr>
+          <p:cNvPr id="5" name="TextBox 4"/>
+          <p:cNvSpPr txBox="1"/>
+          <p:nvPr/>
+        </p:nvSpPr>
+        <p:spPr>
+          <a:xfrm>
+            <a:off x="457200" y="6126480"/>
+            <a:ext cx="11247120" cy="365760"/>
+          </a:xfrm>
+          <a:prstGeom prst="rect">
+            <a:avLst/>
+          </a:prstGeom>
+          <a:noFill/>
+        </p:spPr>
+        <p:txBody>
+          <a:bodyPr wrap="square" anchor="t">
+            <a:spAutoFit/>
+          </a:bodyPr>
+          <a:lstStyle/>
+          <a:p>
+            <a:pPr algn="ctr"/>
+            <a:r>
+              <a:rPr sz="1100" b="0" i="0">
+                <a:solidFill>
+                  <a:srgbClr val="94A3B8"/>
+                </a:solidFill>
+                <a:latin typeface="Calibri"/>
+              </a:rPr>
+              <a:t>Vlad DUMITRU  ·  Pulsefy  ·  UPB FILS 2026</a:t>
+            </a:r>
+          </a:p>
+        </p:txBody>
+      </p:sp>
+    </p:spTree>
+  </p:cSld>
+  <p:clrMapOvr>
+    <a:masterClrMapping/>
+  </p:clrMapOvr>
+</p:sld>
+</file>
+
+<file path=ppt/slides/slide2.xml><?xml version="1.0" encoding="utf-8"?>
+<p:sld xmlns:a="http://schemas.openxmlformats.org/drawingml/2006/main" xmlns:p="http://schemas.openxmlformats.org/presentationml/2006/main" xmlns:r="http://schemas.openxmlformats.org/officeDocument/2006/relationships">
+  <p:cSld>
+    <p:bg>
+      <p:bgPr>
+        <a:solidFill>
+          <a:srgbClr val="0F172A"/>
+        </a:solidFill>
+        <a:effectLst/>
+      </p:bgPr>
+    </p:bg>
+    <p:spTree>
+      <p:nvGrpSpPr>
+        <p:cNvPr id="1" name=""/>
+        <p:cNvGrpSpPr/>
+        <p:nvPr/>
+      </p:nvGrpSpPr>
+      <p:grpSpPr/>
+      <p:sp>
+        <p:nvSpPr>
+          <p:cNvPr id="2" name="Rectangle 1"/>
           <p:cNvSpPr/>
           <p:nvPr/>
         </p:nvSpPr>
         <p:spPr>
           <a:xfrm>
-            <a:off x="548640" y="2743200"/>
-            <a:ext cx="1828800" cy="1371600"/>
-          </a:xfrm>
-          <a:prstGeom prst="roundRect">
+            <a:off x="914400" y="868680"/>
+            <a:ext cx="73152" cy="411480"/>
+          </a:xfrm>
+          <a:prstGeom prst="rect">
             <a:avLst/>
           </a:prstGeom>
           <a:solidFill>
-            <a:srgbClr val="F1F5F9"/>
+            <a:srgbClr val="A78BFA"/>
           </a:solidFill>
-          <a:ln w="15875">
-            <a:solidFill>
-              <a:srgbClr val="7C3AED"/>
-            </a:solidFill>
+          <a:ln>
+            <a:noFill/>
           </a:ln>
         </p:spPr>
         <p:style>
@@ -5930,24 +6183,75 @@
           <a:lstStyle/>
           <a:p>
             <a:pPr algn="ctr"/>
-            <a:r>
-              <a:rPr sz="1400" b="1">
-                <a:solidFill>
-                  <a:srgbClr val="0F172A"/>
-                </a:solidFill>
-              </a:rPr>
-              <a:t>Product brief</a:t>
-            </a:r>
-          </a:p>
-          <a:p>
-            <a:pPr algn="ctr"/>
-            <a:r>
-              <a:rPr sz="1000" i="1">
-                <a:solidFill>
-                  <a:srgbClr val="64748B"/>
-                </a:solidFill>
-              </a:rPr>
-              <a:t>name, style, ratio</a:t>
+          </a:p>
+        </p:txBody>
+      </p:sp>
+      <p:sp>
+        <p:nvSpPr>
+          <p:cNvPr id="3" name="TextBox 2"/>
+          <p:cNvSpPr txBox="1"/>
+          <p:nvPr/>
+        </p:nvSpPr>
+        <p:spPr>
+          <a:xfrm>
+            <a:off x="1143000" y="777240"/>
+            <a:ext cx="10515600" cy="594360"/>
+          </a:xfrm>
+          <a:prstGeom prst="rect">
+            <a:avLst/>
+          </a:prstGeom>
+          <a:noFill/>
+        </p:spPr>
+        <p:txBody>
+          <a:bodyPr wrap="square" anchor="t">
+            <a:spAutoFit/>
+          </a:bodyPr>
+          <a:lstStyle/>
+          <a:p>
+            <a:pPr algn="l"/>
+            <a:r>
+              <a:rPr sz="2800" b="1" i="0">
+                <a:solidFill>
+                  <a:srgbClr val="F8FAFC"/>
+                </a:solidFill>
+                <a:latin typeface="Calibri"/>
+              </a:rPr>
+              <a:t>Context: short-form social video advertising</a:t>
+            </a:r>
+          </a:p>
+        </p:txBody>
+      </p:sp>
+      <p:sp>
+        <p:nvSpPr>
+          <p:cNvPr id="4" name="TextBox 3"/>
+          <p:cNvSpPr txBox="1"/>
+          <p:nvPr/>
+        </p:nvSpPr>
+        <p:spPr>
+          <a:xfrm>
+            <a:off x="914400" y="1737360"/>
+            <a:ext cx="10332720" cy="1463040"/>
+          </a:xfrm>
+          <a:prstGeom prst="rect">
+            <a:avLst/>
+          </a:prstGeom>
+          <a:noFill/>
+        </p:spPr>
+        <p:txBody>
+          <a:bodyPr wrap="square" anchor="t">
+            <a:spAutoFit/>
+          </a:bodyPr>
+          <a:lstStyle/>
+          <a:p>
+            <a:pPr algn="l"/>
+            <a:r>
+              <a:rPr sz="1500" b="0" i="0">
+                <a:solidFill>
+                  <a:srgbClr val="F8FAFC"/>
+                </a:solidFill>
+                <a:latin typeface="Calibri"/>
+              </a:rPr>
+              <a:t>TikTok, Instagram Reels, and YouTube Shorts have become the dominant surface for product advertising. The format demands frequent posting, vertical video, and audio-first content. The production cost gap between professional agency work and what an individual creator can produce alone has widened.</a:t>
             </a:r>
           </a:p>
         </p:txBody>
@@ -5960,18 +6264,18 @@
         </p:nvSpPr>
         <p:spPr>
           <a:xfrm>
-            <a:off x="3108960" y="1554480"/>
-            <a:ext cx="2926080" cy="1005840"/>
+            <a:off x="914400" y="3383280"/>
+            <a:ext cx="10332720" cy="2926080"/>
           </a:xfrm>
           <a:prstGeom prst="roundRect">
             <a:avLst/>
           </a:prstGeom>
           <a:solidFill>
-            <a:srgbClr val="E9D5FF"/>
+            <a:srgbClr val="1E293B"/>
           </a:solidFill>
-          <a:ln w="15875">
+          <a:ln w="12700">
             <a:solidFill>
-              <a:srgbClr val="7C3AED"/>
+              <a:srgbClr val="334155"/>
             </a:solidFill>
           </a:ln>
         </p:spPr>
@@ -5994,49 +6298,299 @@
           <a:lstStyle/>
           <a:p>
             <a:pPr algn="ctr"/>
-            <a:r>
-              <a:rPr sz="1400" b="1">
-                <a:solidFill>
-                  <a:srgbClr val="0F172A"/>
-                </a:solidFill>
-              </a:rPr>
-              <a:t>Scene images</a:t>
-            </a:r>
-          </a:p>
-          <a:p>
-            <a:pPr algn="ctr"/>
-            <a:r>
-              <a:rPr sz="1000" i="1">
-                <a:solidFill>
-                  <a:srgbClr val="64748B"/>
-                </a:solidFill>
-              </a:rPr>
-              <a:t>Pollinations.ai</a:t>
-            </a:r>
-          </a:p>
-        </p:txBody>
-      </p:sp>
-      <p:sp>
-        <p:nvSpPr>
-          <p:cNvPr id="6" name="Rounded Rectangle 5"/>
+          </a:p>
+        </p:txBody>
+      </p:sp>
+      <p:sp>
+        <p:nvSpPr>
+          <p:cNvPr id="6" name="TextBox 5"/>
+          <p:cNvSpPr txBox="1"/>
+          <p:nvPr/>
+        </p:nvSpPr>
+        <p:spPr>
+          <a:xfrm>
+            <a:off x="1280160" y="3566160"/>
+            <a:ext cx="9601200" cy="457200"/>
+          </a:xfrm>
+          <a:prstGeom prst="rect">
+            <a:avLst/>
+          </a:prstGeom>
+          <a:noFill/>
+        </p:spPr>
+        <p:txBody>
+          <a:bodyPr wrap="square" anchor="t">
+            <a:spAutoFit/>
+          </a:bodyPr>
+          <a:lstStyle/>
+          <a:p>
+            <a:pPr algn="l"/>
+            <a:r>
+              <a:rPr sz="1600" b="1" i="0">
+                <a:solidFill>
+                  <a:srgbClr val="A78BFA"/>
+                </a:solidFill>
+                <a:latin typeface="Calibri"/>
+              </a:rPr>
+              <a:t>Three options currently available to a small advertiser</a:t>
+            </a:r>
+          </a:p>
+        </p:txBody>
+      </p:sp>
+      <p:sp>
+        <p:nvSpPr>
+          <p:cNvPr id="7" name="TextBox 6"/>
+          <p:cNvSpPr txBox="1"/>
+          <p:nvPr/>
+        </p:nvSpPr>
+        <p:spPr>
+          <a:xfrm>
+            <a:off x="1280160" y="4206240"/>
+            <a:ext cx="3108960" cy="365760"/>
+          </a:xfrm>
+          <a:prstGeom prst="rect">
+            <a:avLst/>
+          </a:prstGeom>
+          <a:noFill/>
+        </p:spPr>
+        <p:txBody>
+          <a:bodyPr wrap="square" anchor="t">
+            <a:spAutoFit/>
+          </a:bodyPr>
+          <a:lstStyle/>
+          <a:p>
+            <a:pPr algn="l"/>
+            <a:r>
+              <a:rPr sz="1500" b="1" i="0">
+                <a:solidFill>
+                  <a:srgbClr val="F8FAFC"/>
+                </a:solidFill>
+                <a:latin typeface="Calibri"/>
+              </a:rPr>
+              <a:t>Hire an agency</a:t>
+            </a:r>
+          </a:p>
+        </p:txBody>
+      </p:sp>
+      <p:sp>
+        <p:nvSpPr>
+          <p:cNvPr id="8" name="TextBox 7"/>
+          <p:cNvSpPr txBox="1"/>
+          <p:nvPr/>
+        </p:nvSpPr>
+        <p:spPr>
+          <a:xfrm>
+            <a:off x="1280160" y="4617720"/>
+            <a:ext cx="3108960" cy="1463040"/>
+          </a:xfrm>
+          <a:prstGeom prst="rect">
+            <a:avLst/>
+          </a:prstGeom>
+          <a:noFill/>
+        </p:spPr>
+        <p:txBody>
+          <a:bodyPr wrap="square" anchor="t">
+            <a:spAutoFit/>
+          </a:bodyPr>
+          <a:lstStyle/>
+          <a:p>
+            <a:pPr algn="l"/>
+            <a:r>
+              <a:rPr sz="1200" b="0" i="0">
+                <a:solidFill>
+                  <a:srgbClr val="94A3B8"/>
+                </a:solidFill>
+                <a:latin typeface="Calibri"/>
+              </a:rPr>
+              <a:t>Roughly one to ten thousand euros per campaign. Out of reach for recurring use.</a:t>
+            </a:r>
+          </a:p>
+        </p:txBody>
+      </p:sp>
+      <p:sp>
+        <p:nvSpPr>
+          <p:cNvPr id="9" name="TextBox 8"/>
+          <p:cNvSpPr txBox="1"/>
+          <p:nvPr/>
+        </p:nvSpPr>
+        <p:spPr>
+          <a:xfrm>
+            <a:off x="4572000" y="4206240"/>
+            <a:ext cx="3108960" cy="365760"/>
+          </a:xfrm>
+          <a:prstGeom prst="rect">
+            <a:avLst/>
+          </a:prstGeom>
+          <a:noFill/>
+        </p:spPr>
+        <p:txBody>
+          <a:bodyPr wrap="square" anchor="t">
+            <a:spAutoFit/>
+          </a:bodyPr>
+          <a:lstStyle/>
+          <a:p>
+            <a:pPr algn="l"/>
+            <a:r>
+              <a:rPr sz="1500" b="1" i="0">
+                <a:solidFill>
+                  <a:srgbClr val="F8FAFC"/>
+                </a:solidFill>
+                <a:latin typeface="Calibri"/>
+              </a:rPr>
+              <a:t>Stitch four DIY tools</a:t>
+            </a:r>
+          </a:p>
+        </p:txBody>
+      </p:sp>
+      <p:sp>
+        <p:nvSpPr>
+          <p:cNvPr id="10" name="TextBox 9"/>
+          <p:cNvSpPr txBox="1"/>
+          <p:nvPr/>
+        </p:nvSpPr>
+        <p:spPr>
+          <a:xfrm>
+            <a:off x="4572000" y="4617720"/>
+            <a:ext cx="3108960" cy="1463040"/>
+          </a:xfrm>
+          <a:prstGeom prst="rect">
+            <a:avLst/>
+          </a:prstGeom>
+          <a:noFill/>
+        </p:spPr>
+        <p:txBody>
+          <a:bodyPr wrap="square" anchor="t">
+            <a:spAutoFit/>
+          </a:bodyPr>
+          <a:lstStyle/>
+          <a:p>
+            <a:pPr algn="l"/>
+            <a:r>
+              <a:rPr sz="1200" b="0" i="0">
+                <a:solidFill>
+                  <a:srgbClr val="94A3B8"/>
+                </a:solidFill>
+                <a:latin typeface="Calibri"/>
+              </a:rPr>
+              <a:t>Canva, Suno, ElevenLabs, CapCut. Four subscriptions, four interfaces, hours of friction per ad.</a:t>
+            </a:r>
+          </a:p>
+        </p:txBody>
+      </p:sp>
+      <p:sp>
+        <p:nvSpPr>
+          <p:cNvPr id="11" name="TextBox 10"/>
+          <p:cNvSpPr txBox="1"/>
+          <p:nvPr/>
+        </p:nvSpPr>
+        <p:spPr>
+          <a:xfrm>
+            <a:off x="7863840" y="4206240"/>
+            <a:ext cx="3108960" cy="365760"/>
+          </a:xfrm>
+          <a:prstGeom prst="rect">
+            <a:avLst/>
+          </a:prstGeom>
+          <a:noFill/>
+        </p:spPr>
+        <p:txBody>
+          <a:bodyPr wrap="square" anchor="t">
+            <a:spAutoFit/>
+          </a:bodyPr>
+          <a:lstStyle/>
+          <a:p>
+            <a:pPr algn="l"/>
+            <a:r>
+              <a:rPr sz="1500" b="1" i="0">
+                <a:solidFill>
+                  <a:srgbClr val="F8FAFC"/>
+                </a:solidFill>
+                <a:latin typeface="Calibri"/>
+              </a:rPr>
+              <a:t>Skip advertising</a:t>
+            </a:r>
+          </a:p>
+        </p:txBody>
+      </p:sp>
+      <p:sp>
+        <p:nvSpPr>
+          <p:cNvPr id="12" name="TextBox 11"/>
+          <p:cNvSpPr txBox="1"/>
+          <p:nvPr/>
+        </p:nvSpPr>
+        <p:spPr>
+          <a:xfrm>
+            <a:off x="7863840" y="4617720"/>
+            <a:ext cx="3108960" cy="1463040"/>
+          </a:xfrm>
+          <a:prstGeom prst="rect">
+            <a:avLst/>
+          </a:prstGeom>
+          <a:noFill/>
+        </p:spPr>
+        <p:txBody>
+          <a:bodyPr wrap="square" anchor="t">
+            <a:spAutoFit/>
+          </a:bodyPr>
+          <a:lstStyle/>
+          <a:p>
+            <a:pPr algn="l"/>
+            <a:r>
+              <a:rPr sz="1200" b="0" i="0">
+                <a:solidFill>
+                  <a:srgbClr val="94A3B8"/>
+                </a:solidFill>
+                <a:latin typeface="Calibri"/>
+              </a:rPr>
+              <a:t>Lose reach on platforms whose algorithms reward consistent posting cadence.</a:t>
+            </a:r>
+          </a:p>
+        </p:txBody>
+      </p:sp>
+    </p:spTree>
+  </p:cSld>
+  <p:clrMapOvr>
+    <a:masterClrMapping/>
+  </p:clrMapOvr>
+</p:sld>
+</file>
+
+<file path=ppt/slides/slide3.xml><?xml version="1.0" encoding="utf-8"?>
+<p:sld xmlns:a="http://schemas.openxmlformats.org/drawingml/2006/main" xmlns:p="http://schemas.openxmlformats.org/presentationml/2006/main" xmlns:r="http://schemas.openxmlformats.org/officeDocument/2006/relationships">
+  <p:cSld>
+    <p:bg>
+      <p:bgPr>
+        <a:solidFill>
+          <a:srgbClr val="0F172A"/>
+        </a:solidFill>
+        <a:effectLst/>
+      </p:bgPr>
+    </p:bg>
+    <p:spTree>
+      <p:nvGrpSpPr>
+        <p:cNvPr id="1" name=""/>
+        <p:cNvGrpSpPr/>
+        <p:nvPr/>
+      </p:nvGrpSpPr>
+      <p:grpSpPr/>
+      <p:sp>
+        <p:nvSpPr>
+          <p:cNvPr id="2" name="Rectangle 1"/>
           <p:cNvSpPr/>
           <p:nvPr/>
         </p:nvSpPr>
         <p:spPr>
           <a:xfrm>
-            <a:off x="3108960" y="2743200"/>
-            <a:ext cx="2926080" cy="1005840"/>
-          </a:xfrm>
-          <a:prstGeom prst="roundRect">
+            <a:off x="914400" y="868680"/>
+            <a:ext cx="73152" cy="411480"/>
+          </a:xfrm>
+          <a:prstGeom prst="rect">
             <a:avLst/>
           </a:prstGeom>
           <a:solidFill>
-            <a:srgbClr val="E9D5FF"/>
+            <a:srgbClr val="A78BFA"/>
           </a:solidFill>
-          <a:ln w="15875">
-            <a:solidFill>
-              <a:srgbClr val="7C3AED"/>
-            </a:solidFill>
+          <a:ln>
+            <a:noFill/>
           </a:ln>
         </p:spPr>
         <p:style>
@@ -6058,48 +6612,99 @@
           <a:lstStyle/>
           <a:p>
             <a:pPr algn="ctr"/>
-            <a:r>
-              <a:rPr sz="1400" b="1">
-                <a:solidFill>
-                  <a:srgbClr val="0F172A"/>
-                </a:solidFill>
-              </a:rPr>
-              <a:t>Music</a:t>
-            </a:r>
-          </a:p>
-          <a:p>
-            <a:pPr algn="ctr"/>
-            <a:r>
-              <a:rPr sz="1000" i="1">
-                <a:solidFill>
-                  <a:srgbClr val="64748B"/>
-                </a:solidFill>
-              </a:rPr>
-              <a:t>MusicGen / Pulsefy AI</a:t>
-            </a:r>
-          </a:p>
-        </p:txBody>
-      </p:sp>
-      <p:sp>
-        <p:nvSpPr>
-          <p:cNvPr id="7" name="Rounded Rectangle 6"/>
+          </a:p>
+        </p:txBody>
+      </p:sp>
+      <p:sp>
+        <p:nvSpPr>
+          <p:cNvPr id="3" name="TextBox 2"/>
+          <p:cNvSpPr txBox="1"/>
+          <p:nvPr/>
+        </p:nvSpPr>
+        <p:spPr>
+          <a:xfrm>
+            <a:off x="1143000" y="777240"/>
+            <a:ext cx="10515600" cy="594360"/>
+          </a:xfrm>
+          <a:prstGeom prst="rect">
+            <a:avLst/>
+          </a:prstGeom>
+          <a:noFill/>
+        </p:spPr>
+        <p:txBody>
+          <a:bodyPr wrap="square" anchor="t">
+            <a:spAutoFit/>
+          </a:bodyPr>
+          <a:lstStyle/>
+          <a:p>
+            <a:pPr algn="l"/>
+            <a:r>
+              <a:rPr sz="2800" b="1" i="0">
+                <a:solidFill>
+                  <a:srgbClr val="F8FAFC"/>
+                </a:solidFill>
+                <a:latin typeface="Calibri"/>
+              </a:rPr>
+              <a:t>What Pulsefy is</a:t>
+            </a:r>
+          </a:p>
+        </p:txBody>
+      </p:sp>
+      <p:sp>
+        <p:nvSpPr>
+          <p:cNvPr id="4" name="TextBox 3"/>
+          <p:cNvSpPr txBox="1"/>
+          <p:nvPr/>
+        </p:nvSpPr>
+        <p:spPr>
+          <a:xfrm>
+            <a:off x="914400" y="1828800"/>
+            <a:ext cx="10332720" cy="2560320"/>
+          </a:xfrm>
+          <a:prstGeom prst="rect">
+            <a:avLst/>
+          </a:prstGeom>
+          <a:noFill/>
+        </p:spPr>
+        <p:txBody>
+          <a:bodyPr wrap="square" anchor="t">
+            <a:spAutoFit/>
+          </a:bodyPr>
+          <a:lstStyle/>
+          <a:p>
+            <a:pPr algn="l"/>
+            <a:r>
+              <a:rPr sz="1800" b="0" i="0">
+                <a:solidFill>
+                  <a:srgbClr val="F8FAFC"/>
+                </a:solidFill>
+                <a:latin typeface="Calibri"/>
+              </a:rPr>
+              <a:t>Pulsefy is a web application that unifies four AI generation subsystems behind a single user account: scene image generation, background music generation, voiceover synthesis, and video assembly. The user enters a short product brief and receives a finished MP4 ready for upload to TikTok, Instagram Reels, or YouTube Shorts.</a:t>
+            </a:r>
+          </a:p>
+        </p:txBody>
+      </p:sp>
+      <p:sp>
+        <p:nvSpPr>
+          <p:cNvPr id="5" name="Rounded Rectangle 4"/>
           <p:cNvSpPr/>
           <p:nvPr/>
         </p:nvSpPr>
         <p:spPr>
           <a:xfrm>
-            <a:off x="3108960" y="3931920"/>
-            <a:ext cx="2926080" cy="1005840"/>
+            <a:off x="914400" y="4480560"/>
+            <a:ext cx="10332720" cy="1737360"/>
           </a:xfrm>
           <a:prstGeom prst="roundRect">
             <a:avLst/>
           </a:prstGeom>
           <a:solidFill>
-            <a:srgbClr val="E9D5FF"/>
+            <a:srgbClr val="1E293B"/>
           </a:solidFill>
-          <a:ln w="15875">
+          <a:ln w="12700">
             <a:solidFill>
-              <a:srgbClr val="7C3AED"/>
+              <a:srgbClr val="334155"/>
             </a:solidFill>
           </a:ln>
         </p:spPr>
@@ -6122,49 +6727,124 @@
           <a:lstStyle/>
           <a:p>
             <a:pPr algn="ctr"/>
-            <a:r>
-              <a:rPr sz="1400" b="1">
-                <a:solidFill>
-                  <a:srgbClr val="0F172A"/>
-                </a:solidFill>
-              </a:rPr>
-              <a:t>Voiceover</a:t>
-            </a:r>
-          </a:p>
-          <a:p>
-            <a:pPr algn="ctr"/>
-            <a:r>
-              <a:rPr sz="1000" i="1">
-                <a:solidFill>
-                  <a:srgbClr val="64748B"/>
-                </a:solidFill>
-              </a:rPr>
-              <a:t>gTTS</a:t>
-            </a:r>
-          </a:p>
-        </p:txBody>
-      </p:sp>
-      <p:sp>
-        <p:nvSpPr>
-          <p:cNvPr id="8" name="Rounded Rectangle 7"/>
+          </a:p>
+        </p:txBody>
+      </p:sp>
+      <p:sp>
+        <p:nvSpPr>
+          <p:cNvPr id="6" name="TextBox 5"/>
+          <p:cNvSpPr txBox="1"/>
+          <p:nvPr/>
+        </p:nvSpPr>
+        <p:spPr>
+          <a:xfrm>
+            <a:off x="1280160" y="4663440"/>
+            <a:ext cx="9601200" cy="457200"/>
+          </a:xfrm>
+          <a:prstGeom prst="rect">
+            <a:avLst/>
+          </a:prstGeom>
+          <a:noFill/>
+        </p:spPr>
+        <p:txBody>
+          <a:bodyPr wrap="square" anchor="t">
+            <a:spAutoFit/>
+          </a:bodyPr>
+          <a:lstStyle/>
+          <a:p>
+            <a:pPr algn="l"/>
+            <a:r>
+              <a:rPr sz="1400" b="1" i="0">
+                <a:solidFill>
+                  <a:srgbClr val="A78BFA"/>
+                </a:solidFill>
+                <a:latin typeface="Calibri"/>
+              </a:rPr>
+              <a:t>Scope of the platform</a:t>
+            </a:r>
+          </a:p>
+        </p:txBody>
+      </p:sp>
+      <p:sp>
+        <p:nvSpPr>
+          <p:cNvPr id="7" name="TextBox 6"/>
+          <p:cNvSpPr txBox="1"/>
+          <p:nvPr/>
+        </p:nvSpPr>
+        <p:spPr>
+          <a:xfrm>
+            <a:off x="1280160" y="5120640"/>
+            <a:ext cx="9601200" cy="1005840"/>
+          </a:xfrm>
+          <a:prstGeom prst="rect">
+            <a:avLst/>
+          </a:prstGeom>
+          <a:noFill/>
+        </p:spPr>
+        <p:txBody>
+          <a:bodyPr wrap="square" anchor="t">
+            <a:spAutoFit/>
+          </a:bodyPr>
+          <a:lstStyle/>
+          <a:p>
+            <a:pPr algn="l"/>
+            <a:r>
+              <a:rPr sz="1300" b="0" i="0">
+                <a:solidFill>
+                  <a:srgbClr val="F8FAFC"/>
+                </a:solidFill>
+                <a:latin typeface="Calibri"/>
+              </a:rPr>
+              <a:t>A free tier with functional coverage across all four subsystems, a premium tier that substitutes higher-quality engines for the same workflows, and a social layer (Jamendo catalog browser and creator leaderboard) that connects users to one another and to Creative Commons music sources.</a:t>
+            </a:r>
+          </a:p>
+        </p:txBody>
+      </p:sp>
+    </p:spTree>
+  </p:cSld>
+  <p:clrMapOvr>
+    <a:masterClrMapping/>
+  </p:clrMapOvr>
+</p:sld>
+</file>
+
+<file path=ppt/slides/slide4.xml><?xml version="1.0" encoding="utf-8"?>
+<p:sld xmlns:a="http://schemas.openxmlformats.org/drawingml/2006/main" xmlns:p="http://schemas.openxmlformats.org/presentationml/2006/main" xmlns:r="http://schemas.openxmlformats.org/officeDocument/2006/relationships">
+  <p:cSld>
+    <p:bg>
+      <p:bgPr>
+        <a:solidFill>
+          <a:srgbClr val="0F172A"/>
+        </a:solidFill>
+        <a:effectLst/>
+      </p:bgPr>
+    </p:bg>
+    <p:spTree>
+      <p:nvGrpSpPr>
+        <p:cNvPr id="1" name=""/>
+        <p:cNvGrpSpPr/>
+        <p:nvPr/>
+      </p:nvGrpSpPr>
+      <p:grpSpPr/>
+      <p:sp>
+        <p:nvSpPr>
+          <p:cNvPr id="2" name="Rectangle 1"/>
           <p:cNvSpPr/>
           <p:nvPr/>
         </p:nvSpPr>
         <p:spPr>
           <a:xfrm>
-            <a:off x="3108960" y="5120640"/>
-            <a:ext cx="2926080" cy="1005840"/>
-          </a:xfrm>
-          <a:prstGeom prst="roundRect">
+            <a:off x="914400" y="868680"/>
+            <a:ext cx="73152" cy="411480"/>
+          </a:xfrm>
+          <a:prstGeom prst="rect">
             <a:avLst/>
           </a:prstGeom>
           <a:solidFill>
-            <a:srgbClr val="E9D5FF"/>
+            <a:srgbClr val="A78BFA"/>
           </a:solidFill>
-          <a:ln w="15875">
-            <a:solidFill>
-              <a:srgbClr val="7C3AED"/>
-            </a:solidFill>
+          <a:ln>
+            <a:noFill/>
           </a:ln>
         </p:spPr>
         <p:style>
@@ -6186,48 +6866,64 @@
           <a:lstStyle/>
           <a:p>
             <a:pPr algn="ctr"/>
-            <a:r>
-              <a:rPr sz="1400" b="1">
-                <a:solidFill>
-                  <a:srgbClr val="0F172A"/>
-                </a:solidFill>
-              </a:rPr>
-              <a:t>Assembly</a:t>
-            </a:r>
-          </a:p>
-          <a:p>
-            <a:pPr algn="ctr"/>
-            <a:r>
-              <a:rPr sz="1000" i="1">
-                <a:solidFill>
-                  <a:srgbClr val="64748B"/>
-                </a:solidFill>
-              </a:rPr>
-              <a:t>FFmpeg</a:t>
-            </a:r>
-          </a:p>
-        </p:txBody>
-      </p:sp>
-      <p:sp>
-        <p:nvSpPr>
-          <p:cNvPr id="9" name="Rounded Rectangle 8"/>
+          </a:p>
+        </p:txBody>
+      </p:sp>
+      <p:sp>
+        <p:nvSpPr>
+          <p:cNvPr id="3" name="TextBox 2"/>
+          <p:cNvSpPr txBox="1"/>
+          <p:nvPr/>
+        </p:nvSpPr>
+        <p:spPr>
+          <a:xfrm>
+            <a:off x="1143000" y="777240"/>
+            <a:ext cx="10515600" cy="594360"/>
+          </a:xfrm>
+          <a:prstGeom prst="rect">
+            <a:avLst/>
+          </a:prstGeom>
+          <a:noFill/>
+        </p:spPr>
+        <p:txBody>
+          <a:bodyPr wrap="square" anchor="t">
+            <a:spAutoFit/>
+          </a:bodyPr>
+          <a:lstStyle/>
+          <a:p>
+            <a:pPr algn="l"/>
+            <a:r>
+              <a:rPr sz="2800" b="1" i="0">
+                <a:solidFill>
+                  <a:srgbClr val="F8FAFC"/>
+                </a:solidFill>
+                <a:latin typeface="Calibri"/>
+              </a:rPr>
+              <a:t>Core features</a:t>
+            </a:r>
+          </a:p>
+        </p:txBody>
+      </p:sp>
+      <p:sp>
+        <p:nvSpPr>
+          <p:cNvPr id="4" name="Rounded Rectangle 3"/>
           <p:cNvSpPr/>
           <p:nvPr/>
         </p:nvSpPr>
         <p:spPr>
           <a:xfrm>
-            <a:off x="7315200" y="2743200"/>
-            <a:ext cx="1828800" cy="1371600"/>
+            <a:off x="914400" y="1691640"/>
+            <a:ext cx="5029200" cy="1325880"/>
           </a:xfrm>
           <a:prstGeom prst="roundRect">
             <a:avLst/>
           </a:prstGeom>
           <a:solidFill>
-            <a:srgbClr val="DCFCE7"/>
+            <a:srgbClr val="1E293B"/>
           </a:solidFill>
-          <a:ln w="15875">
+          <a:ln w="12700">
             <a:solidFill>
-              <a:srgbClr val="7C3AED"/>
+              <a:srgbClr val="334155"/>
             </a:solidFill>
           </a:ln>
         </p:spPr>
@@ -6250,48 +6946,99 @@
           <a:lstStyle/>
           <a:p>
             <a:pPr algn="ctr"/>
-            <a:r>
-              <a:rPr sz="1400" b="1">
-                <a:solidFill>
-                  <a:srgbClr val="0F172A"/>
-                </a:solidFill>
-              </a:rPr>
-              <a:t>MP4 ad</a:t>
-            </a:r>
-          </a:p>
-          <a:p>
-            <a:pPr algn="ctr"/>
-            <a:r>
-              <a:rPr sz="1000" i="1">
-                <a:solidFill>
-                  <a:srgbClr val="64748B"/>
-                </a:solidFill>
-              </a:rPr>
-              <a:t>9:16 / 1:1 / 16:9</a:t>
-            </a:r>
-          </a:p>
-        </p:txBody>
-      </p:sp>
-      <p:sp>
-        <p:nvSpPr>
-          <p:cNvPr id="10" name="Rounded Rectangle 9"/>
+          </a:p>
+        </p:txBody>
+      </p:sp>
+      <p:sp>
+        <p:nvSpPr>
+          <p:cNvPr id="5" name="TextBox 4"/>
+          <p:cNvSpPr txBox="1"/>
+          <p:nvPr/>
+        </p:nvSpPr>
+        <p:spPr>
+          <a:xfrm>
+            <a:off x="1143000" y="1828800"/>
+            <a:ext cx="4572000" cy="365760"/>
+          </a:xfrm>
+          <a:prstGeom prst="rect">
+            <a:avLst/>
+          </a:prstGeom>
+          <a:noFill/>
+        </p:spPr>
+        <p:txBody>
+          <a:bodyPr wrap="square" anchor="t">
+            <a:spAutoFit/>
+          </a:bodyPr>
+          <a:lstStyle/>
+          <a:p>
+            <a:pPr algn="l"/>
+            <a:r>
+              <a:rPr sz="1300" b="1" i="0">
+                <a:solidFill>
+                  <a:srgbClr val="A78BFA"/>
+                </a:solidFill>
+                <a:latin typeface="Calibri"/>
+              </a:rPr>
+              <a:t>AI scene image generation</a:t>
+            </a:r>
+          </a:p>
+        </p:txBody>
+      </p:sp>
+      <p:sp>
+        <p:nvSpPr>
+          <p:cNvPr id="6" name="TextBox 5"/>
+          <p:cNvSpPr txBox="1"/>
+          <p:nvPr/>
+        </p:nvSpPr>
+        <p:spPr>
+          <a:xfrm>
+            <a:off x="1143000" y="2240280"/>
+            <a:ext cx="4572000" cy="685800"/>
+          </a:xfrm>
+          <a:prstGeom prst="rect">
+            <a:avLst/>
+          </a:prstGeom>
+          <a:noFill/>
+        </p:spPr>
+        <p:txBody>
+          <a:bodyPr wrap="square" anchor="t">
+            <a:spAutoFit/>
+          </a:bodyPr>
+          <a:lstStyle/>
+          <a:p>
+            <a:pPr algn="l"/>
+            <a:r>
+              <a:rPr sz="1100" b="0" i="0">
+                <a:solidFill>
+                  <a:srgbClr val="F8FAFC"/>
+                </a:solidFill>
+                <a:latin typeface="Calibri"/>
+              </a:rPr>
+              <a:t>Pollinations.ai integration with four named ad shot types and three social aspect ratios (9:16, 1:1, 16:9).</a:t>
+            </a:r>
+          </a:p>
+        </p:txBody>
+      </p:sp>
+      <p:sp>
+        <p:nvSpPr>
+          <p:cNvPr id="7" name="Rounded Rectangle 6"/>
           <p:cNvSpPr/>
           <p:nvPr/>
         </p:nvSpPr>
         <p:spPr>
           <a:xfrm>
-            <a:off x="9875520" y="2743200"/>
-            <a:ext cx="1828800" cy="1371600"/>
+            <a:off x="6217920" y="1691640"/>
+            <a:ext cx="5029200" cy="1325880"/>
           </a:xfrm>
           <a:prstGeom prst="roundRect">
             <a:avLst/>
           </a:prstGeom>
           <a:solidFill>
-            <a:srgbClr val="F1F5F9"/>
+            <a:srgbClr val="1E293B"/>
           </a:solidFill>
-          <a:ln w="15875">
+          <a:ln w="12700">
             <a:solidFill>
-              <a:srgbClr val="7C3AED"/>
+              <a:srgbClr val="334155"/>
             </a:solidFill>
           </a:ln>
         </p:spPr>
@@ -6314,65 +7061,100 @@
           <a:lstStyle/>
           <a:p>
             <a:pPr algn="ctr"/>
-            <a:r>
-              <a:rPr sz="1400" b="1">
-                <a:solidFill>
-                  <a:srgbClr val="0F172A"/>
-                </a:solidFill>
-              </a:rPr>
-              <a:t>TikTok • Reels • Shorts</a:t>
-            </a:r>
-          </a:p>
-          <a:p>
-            <a:pPr algn="ctr"/>
-            <a:r>
-              <a:rPr sz="1000" i="1">
-                <a:solidFill>
-                  <a:srgbClr val="64748B"/>
-                </a:solidFill>
-              </a:rPr>
-              <a:t>ready to upload</a:t>
-            </a:r>
-          </a:p>
-        </p:txBody>
-      </p:sp>
-    </p:spTree>
-  </p:cSld>
-  <p:clrMapOvr>
-    <a:masterClrMapping/>
-  </p:clrMapOvr>
-</p:sld>
-</file>
-
-<file path=ppt/slides/slide5.xml><?xml version="1.0" encoding="utf-8"?>
-<p:sld xmlns:a="http://schemas.openxmlformats.org/drawingml/2006/main" xmlns:p="http://schemas.openxmlformats.org/presentationml/2006/main" xmlns:r="http://schemas.openxmlformats.org/officeDocument/2006/relationships">
-  <p:cSld>
-    <p:spTree>
-      <p:nvGrpSpPr>
-        <p:cNvPr id="1" name=""/>
-        <p:cNvGrpSpPr/>
-        <p:nvPr/>
-      </p:nvGrpSpPr>
-      <p:grpSpPr/>
-      <p:sp>
-        <p:nvSpPr>
-          <p:cNvPr id="2" name="Rectangle 1"/>
+          </a:p>
+        </p:txBody>
+      </p:sp>
+      <p:sp>
+        <p:nvSpPr>
+          <p:cNvPr id="8" name="TextBox 7"/>
+          <p:cNvSpPr txBox="1"/>
+          <p:nvPr/>
+        </p:nvSpPr>
+        <p:spPr>
+          <a:xfrm>
+            <a:off x="6446520" y="1828800"/>
+            <a:ext cx="4572000" cy="365760"/>
+          </a:xfrm>
+          <a:prstGeom prst="rect">
+            <a:avLst/>
+          </a:prstGeom>
+          <a:noFill/>
+        </p:spPr>
+        <p:txBody>
+          <a:bodyPr wrap="square" anchor="t">
+            <a:spAutoFit/>
+          </a:bodyPr>
+          <a:lstStyle/>
+          <a:p>
+            <a:pPr algn="l"/>
+            <a:r>
+              <a:rPr sz="1300" b="1" i="0">
+                <a:solidFill>
+                  <a:srgbClr val="A78BFA"/>
+                </a:solidFill>
+                <a:latin typeface="Calibri"/>
+              </a:rPr>
+              <a:t>Two music engines</a:t>
+            </a:r>
+          </a:p>
+        </p:txBody>
+      </p:sp>
+      <p:sp>
+        <p:nvSpPr>
+          <p:cNvPr id="9" name="TextBox 8"/>
+          <p:cNvSpPr txBox="1"/>
+          <p:nvPr/>
+        </p:nvSpPr>
+        <p:spPr>
+          <a:xfrm>
+            <a:off x="6446520" y="2240280"/>
+            <a:ext cx="4572000" cy="685800"/>
+          </a:xfrm>
+          <a:prstGeom prst="rect">
+            <a:avLst/>
+          </a:prstGeom>
+          <a:noFill/>
+        </p:spPr>
+        <p:txBody>
+          <a:bodyPr wrap="square" anchor="t">
+            <a:spAutoFit/>
+          </a:bodyPr>
+          <a:lstStyle/>
+          <a:p>
+            <a:pPr algn="l"/>
+            <a:r>
+              <a:rPr sz="1100" b="0" i="0">
+                <a:solidFill>
+                  <a:srgbClr val="F8FAFC"/>
+                </a:solidFill>
+                <a:latin typeface="Calibri"/>
+              </a:rPr>
+              <a:t>Pulsefy AI custom LSTM for instant free-tier output, MusicGen for higher-quality premium output.</a:t>
+            </a:r>
+          </a:p>
+        </p:txBody>
+      </p:sp>
+      <p:sp>
+        <p:nvSpPr>
+          <p:cNvPr id="10" name="Rounded Rectangle 9"/>
           <p:cNvSpPr/>
           <p:nvPr/>
         </p:nvSpPr>
         <p:spPr>
           <a:xfrm>
-            <a:off x="914400" y="822960"/>
-            <a:ext cx="73152" cy="457200"/>
-          </a:xfrm>
-          <a:prstGeom prst="rect">
+            <a:off x="914400" y="3154680"/>
+            <a:ext cx="5029200" cy="1325880"/>
+          </a:xfrm>
+          <a:prstGeom prst="roundRect">
             <a:avLst/>
           </a:prstGeom>
           <a:solidFill>
-            <a:srgbClr val="7C3AED"/>
+            <a:srgbClr val="1E293B"/>
           </a:solidFill>
-          <a:ln>
-            <a:noFill/>
+          <a:ln w="12700">
+            <a:solidFill>
+              <a:srgbClr val="334155"/>
+            </a:solidFill>
           </a:ln>
         </p:spPr>
         <p:style>
@@ -6399,14 +7181,14 @@
       </p:sp>
       <p:sp>
         <p:nvSpPr>
-          <p:cNvPr id="3" name="TextBox 2"/>
+          <p:cNvPr id="11" name="TextBox 10"/>
           <p:cNvSpPr txBox="1"/>
           <p:nvPr/>
         </p:nvSpPr>
         <p:spPr>
           <a:xfrm>
-            <a:off x="1097280" y="731520"/>
-            <a:ext cx="10515600" cy="640080"/>
+            <a:off x="1143000" y="3291840"/>
+            <a:ext cx="4572000" cy="365760"/>
           </a:xfrm>
           <a:prstGeom prst="rect">
             <a:avLst/>
@@ -6421,27 +7203,27 @@
           <a:p>
             <a:pPr algn="l"/>
             <a:r>
-              <a:rPr sz="3200" b="1" i="0">
-                <a:solidFill>
-                  <a:srgbClr val="0F172A"/>
+              <a:rPr sz="1300" b="1" i="0">
+                <a:solidFill>
+                  <a:srgbClr val="A78BFA"/>
                 </a:solidFill>
                 <a:latin typeface="Calibri"/>
               </a:rPr>
-              <a:t>My main contribution: Pulsefy AI</a:t>
-            </a:r>
-          </a:p>
-        </p:txBody>
-      </p:sp>
-      <p:sp>
-        <p:nvSpPr>
-          <p:cNvPr id="4" name="TextBox 3"/>
+              <a:t>Multilingual voiceover</a:t>
+            </a:r>
+          </a:p>
+        </p:txBody>
+      </p:sp>
+      <p:sp>
+        <p:nvSpPr>
+          <p:cNvPr id="12" name="TextBox 11"/>
           <p:cNvSpPr txBox="1"/>
           <p:nvPr/>
         </p:nvSpPr>
         <p:spPr>
           <a:xfrm>
-            <a:off x="914400" y="1737360"/>
-            <a:ext cx="10515600" cy="457200"/>
+            <a:off x="1143000" y="3703320"/>
+            <a:ext cx="4572000" cy="685800"/>
           </a:xfrm>
           <a:prstGeom prst="rect">
             <a:avLst/>
@@ -6456,155 +7238,37 @@
           <a:p>
             <a:pPr algn="l"/>
             <a:r>
-              <a:rPr sz="2000" b="0" i="1">
-                <a:solidFill>
-                  <a:srgbClr val="7C3AED"/>
+              <a:rPr sz="1100" b="0" i="0">
+                <a:solidFill>
+                  <a:srgbClr val="F8FAFC"/>
                 </a:solidFill>
                 <a:latin typeface="Calibri"/>
               </a:rPr>
-              <a:t>A custom LSTM music generator trained from scratch</a:t>
-            </a:r>
-          </a:p>
-        </p:txBody>
-      </p:sp>
-      <p:sp>
-        <p:nvSpPr>
-          <p:cNvPr id="5" name="TextBox 4"/>
-          <p:cNvSpPr txBox="1"/>
-          <p:nvPr/>
-        </p:nvSpPr>
-        <p:spPr>
-          <a:xfrm>
-            <a:off x="914400" y="2743200"/>
-            <a:ext cx="5303520" cy="548640"/>
-          </a:xfrm>
-          <a:prstGeom prst="rect">
-            <a:avLst/>
-          </a:prstGeom>
-          <a:noFill/>
-        </p:spPr>
-        <p:txBody>
-          <a:bodyPr wrap="square" anchor="t">
-            <a:spAutoFit/>
-          </a:bodyPr>
-          <a:lstStyle/>
-          <a:p>
-            <a:pPr algn="l"/>
-            <a:r>
-              <a:rPr sz="2000" b="1" i="0">
-                <a:solidFill>
-                  <a:srgbClr val="0F172A"/>
-                </a:solidFill>
-                <a:latin typeface="Calibri"/>
-              </a:rPr>
-              <a:t>Why it matters</a:t>
-            </a:r>
-          </a:p>
-        </p:txBody>
-      </p:sp>
-      <p:sp>
-        <p:nvSpPr>
-          <p:cNvPr id="6" name="TextBox 5"/>
-          <p:cNvSpPr txBox="1"/>
-          <p:nvPr/>
-        </p:nvSpPr>
-        <p:spPr>
-          <a:xfrm>
-            <a:off x="914400" y="3383280"/>
-            <a:ext cx="5303520" cy="365760"/>
-          </a:xfrm>
-          <a:prstGeom prst="rect">
-            <a:avLst/>
-          </a:prstGeom>
-          <a:noFill/>
-        </p:spPr>
-        <p:txBody>
-          <a:bodyPr wrap="square" anchor="t">
-            <a:spAutoFit/>
-          </a:bodyPr>
-          <a:lstStyle/>
-          <a:p>
-            <a:pPr algn="l"/>
-            <a:r>
-              <a:rPr sz="1400" b="0" i="0">
-                <a:solidFill>
-                  <a:srgbClr val="0F172A"/>
-                </a:solidFill>
-                <a:latin typeface="Calibri"/>
-              </a:rPr>
-              <a:t>The free tier never depends on a paid third-party model.</a:t>
-            </a:r>
-          </a:p>
-          <a:p>
-            <a:pPr algn="l"/>
-            <a:r>
-              <a:rPr sz="1800" b="0" i="0">
-                <a:solidFill>
-                  <a:srgbClr val="0F172A"/>
-                </a:solidFill>
-                <a:latin typeface="Calibri"/>
-              </a:rPr>
-              <a:t/>
-            </a:r>
-          </a:p>
-          <a:p>
-            <a:pPr algn="l"/>
-            <a:r>
-              <a:rPr sz="1400" b="0" i="0">
-                <a:solidFill>
-                  <a:srgbClr val="0F172A"/>
-                </a:solidFill>
-                <a:latin typeface="Calibri"/>
-              </a:rPr>
-              <a:t>Required learning PyTorch, MIDI tokenisation, and sequence modelling end-to-end.</a:t>
-            </a:r>
-          </a:p>
-          <a:p>
-            <a:pPr algn="l"/>
-            <a:r>
-              <a:rPr sz="1800" b="0" i="0">
-                <a:solidFill>
-                  <a:srgbClr val="0F172A"/>
-                </a:solidFill>
-                <a:latin typeface="Calibri"/>
-              </a:rPr>
-              <a:t/>
-            </a:r>
-          </a:p>
-          <a:p>
-            <a:pPr algn="l"/>
-            <a:r>
-              <a:rPr sz="1400" b="0" i="0">
-                <a:solidFill>
-                  <a:srgbClr val="0F172A"/>
-                </a:solidFill>
-                <a:latin typeface="Calibri"/>
-              </a:rPr>
-              <a:t>Generates a track in single-digit seconds — instant feedback for the creator.</a:t>
-            </a:r>
-          </a:p>
-        </p:txBody>
-      </p:sp>
-      <p:sp>
-        <p:nvSpPr>
-          <p:cNvPr id="7" name="Rectangle 6"/>
+              <a:t>gTTS-based voiceover synthesis. English on the free tier, dozens of languages on premium.</a:t>
+            </a:r>
+          </a:p>
+        </p:txBody>
+      </p:sp>
+      <p:sp>
+        <p:nvSpPr>
+          <p:cNvPr id="13" name="Rounded Rectangle 12"/>
           <p:cNvSpPr/>
           <p:nvPr/>
         </p:nvSpPr>
         <p:spPr>
           <a:xfrm>
-            <a:off x="6858000" y="2651760"/>
-            <a:ext cx="4572000" cy="3291840"/>
-          </a:xfrm>
-          <a:prstGeom prst="rect">
+            <a:off x="6217920" y="3154680"/>
+            <a:ext cx="5029200" cy="1325880"/>
+          </a:xfrm>
+          <a:prstGeom prst="roundRect">
             <a:avLst/>
           </a:prstGeom>
           <a:solidFill>
-            <a:srgbClr val="F1F5F9"/>
+            <a:srgbClr val="1E293B"/>
           </a:solidFill>
           <a:ln w="12700">
             <a:solidFill>
-              <a:srgbClr val="CBD5E1"/>
+              <a:srgbClr val="334155"/>
             </a:solidFill>
           </a:ln>
         </p:spPr>
@@ -6623,58 +7287,104 @@
           </a:fontRef>
         </p:style>
         <p:txBody>
-          <a:bodyPr rtlCol="0" anchor="ctr" wrap="square"/>
+          <a:bodyPr rtlCol="0" anchor="ctr"/>
           <a:lstStyle/>
           <a:p>
             <a:pPr algn="ctr"/>
-            <a:r>
-              <a:rPr sz="1400" i="1">
-                <a:solidFill>
-                  <a:srgbClr val="64748B"/>
-                </a:solidFill>
-              </a:rPr>
-              <a:t>[Insert: training screenshot from Ch 5 / Figure 43]</a:t>
-            </a:r>
-          </a:p>
-        </p:txBody>
-      </p:sp>
-    </p:spTree>
-  </p:cSld>
-  <p:clrMapOvr>
-    <a:masterClrMapping/>
-  </p:clrMapOvr>
-</p:sld>
-</file>
-
-<file path=ppt/slides/slide6.xml><?xml version="1.0" encoding="utf-8"?>
-<p:sld xmlns:a="http://schemas.openxmlformats.org/drawingml/2006/main" xmlns:p="http://schemas.openxmlformats.org/presentationml/2006/main" xmlns:r="http://schemas.openxmlformats.org/officeDocument/2006/relationships">
-  <p:cSld>
-    <p:spTree>
-      <p:nvGrpSpPr>
-        <p:cNvPr id="1" name=""/>
-        <p:cNvGrpSpPr/>
-        <p:nvPr/>
-      </p:nvGrpSpPr>
-      <p:grpSpPr/>
-      <p:sp>
-        <p:nvSpPr>
-          <p:cNvPr id="2" name="Rectangle 1"/>
+          </a:p>
+        </p:txBody>
+      </p:sp>
+      <p:sp>
+        <p:nvSpPr>
+          <p:cNvPr id="14" name="TextBox 13"/>
+          <p:cNvSpPr txBox="1"/>
+          <p:nvPr/>
+        </p:nvSpPr>
+        <p:spPr>
+          <a:xfrm>
+            <a:off x="6446520" y="3291840"/>
+            <a:ext cx="4572000" cy="365760"/>
+          </a:xfrm>
+          <a:prstGeom prst="rect">
+            <a:avLst/>
+          </a:prstGeom>
+          <a:noFill/>
+        </p:spPr>
+        <p:txBody>
+          <a:bodyPr wrap="square" anchor="t">
+            <a:spAutoFit/>
+          </a:bodyPr>
+          <a:lstStyle/>
+          <a:p>
+            <a:pPr algn="l"/>
+            <a:r>
+              <a:rPr sz="1300" b="1" i="0">
+                <a:solidFill>
+                  <a:srgbClr val="A78BFA"/>
+                </a:solidFill>
+                <a:latin typeface="Calibri"/>
+              </a:rPr>
+              <a:t>Video assembly and upload</a:t>
+            </a:r>
+          </a:p>
+        </p:txBody>
+      </p:sp>
+      <p:sp>
+        <p:nvSpPr>
+          <p:cNvPr id="15" name="TextBox 14"/>
+          <p:cNvSpPr txBox="1"/>
+          <p:nvPr/>
+        </p:nvSpPr>
+        <p:spPr>
+          <a:xfrm>
+            <a:off x="6446520" y="3703320"/>
+            <a:ext cx="4572000" cy="685800"/>
+          </a:xfrm>
+          <a:prstGeom prst="rect">
+            <a:avLst/>
+          </a:prstGeom>
+          <a:noFill/>
+        </p:spPr>
+        <p:txBody>
+          <a:bodyPr wrap="square" anchor="t">
+            <a:spAutoFit/>
+          </a:bodyPr>
+          <a:lstStyle/>
+          <a:p>
+            <a:pPr algn="l"/>
+            <a:r>
+              <a:rPr sz="1100" b="0" i="0">
+                <a:solidFill>
+                  <a:srgbClr val="F8FAFC"/>
+                </a:solidFill>
+                <a:latin typeface="Calibri"/>
+              </a:rPr>
+              <a:t>FFmpeg-based assembly with Ken Burns effect, plus a separate upload path that overlays generated audio onto user video.</a:t>
+            </a:r>
+          </a:p>
+        </p:txBody>
+      </p:sp>
+      <p:sp>
+        <p:nvSpPr>
+          <p:cNvPr id="16" name="Rounded Rectangle 15"/>
           <p:cNvSpPr/>
           <p:nvPr/>
         </p:nvSpPr>
         <p:spPr>
           <a:xfrm>
-            <a:off x="914400" y="822960"/>
-            <a:ext cx="73152" cy="457200"/>
-          </a:xfrm>
-          <a:prstGeom prst="rect">
+            <a:off x="914400" y="4617720"/>
+            <a:ext cx="5029200" cy="1325880"/>
+          </a:xfrm>
+          <a:prstGeom prst="roundRect">
             <a:avLst/>
           </a:prstGeom>
           <a:solidFill>
-            <a:srgbClr val="7C3AED"/>
+            <a:srgbClr val="1E293B"/>
           </a:solidFill>
-          <a:ln>
-            <a:noFill/>
+          <a:ln w="12700">
+            <a:solidFill>
+              <a:srgbClr val="334155"/>
+            </a:solidFill>
           </a:ln>
         </p:spPr>
         <p:style>
@@ -6701,14 +7411,14 @@
       </p:sp>
       <p:sp>
         <p:nvSpPr>
-          <p:cNvPr id="3" name="TextBox 2"/>
+          <p:cNvPr id="17" name="TextBox 16"/>
           <p:cNvSpPr txBox="1"/>
           <p:nvPr/>
         </p:nvSpPr>
         <p:spPr>
           <a:xfrm>
-            <a:off x="1097280" y="731520"/>
-            <a:ext cx="10515600" cy="640080"/>
+            <a:off x="1143000" y="4754880"/>
+            <a:ext cx="4572000" cy="365760"/>
           </a:xfrm>
           <a:prstGeom prst="rect">
             <a:avLst/>
@@ -6723,27 +7433,27 @@
           <a:p>
             <a:pPr algn="l"/>
             <a:r>
-              <a:rPr sz="3200" b="1" i="0">
-                <a:solidFill>
-                  <a:srgbClr val="0F172A"/>
+              <a:rPr sz="1300" b="1" i="0">
+                <a:solidFill>
+                  <a:srgbClr val="A78BFA"/>
                 </a:solidFill>
                 <a:latin typeface="Calibri"/>
               </a:rPr>
-              <a:t>Training Pulsefy AI</a:t>
-            </a:r>
-          </a:p>
-        </p:txBody>
-      </p:sp>
-      <p:sp>
-        <p:nvSpPr>
-          <p:cNvPr id="4" name="TextBox 3"/>
+              <a:t>Licensed music catalog</a:t>
+            </a:r>
+          </a:p>
+        </p:txBody>
+      </p:sp>
+      <p:sp>
+        <p:nvSpPr>
+          <p:cNvPr id="18" name="TextBox 17"/>
           <p:cNvSpPr txBox="1"/>
           <p:nvPr/>
         </p:nvSpPr>
         <p:spPr>
           <a:xfrm>
-            <a:off x="457200" y="2377440"/>
-            <a:ext cx="2743200" cy="457200"/>
+            <a:off x="1143000" y="5166359"/>
+            <a:ext cx="4572000" cy="685800"/>
           </a:xfrm>
           <a:prstGeom prst="rect">
             <a:avLst/>
@@ -6756,476 +7466,40 @@
           </a:bodyPr>
           <a:lstStyle/>
           <a:p>
-            <a:pPr algn="ctr"/>
-            <a:r>
-              <a:rPr sz="1400" b="0" i="0">
-                <a:solidFill>
-                  <a:srgbClr val="64748B"/>
+            <a:pPr algn="l"/>
+            <a:r>
+              <a:rPr sz="1100" b="0" i="0">
+                <a:solidFill>
+                  <a:srgbClr val="F8FAFC"/>
                 </a:solidFill>
                 <a:latin typeface="Calibri"/>
               </a:rPr>
-              <a:t>Input corpus</a:t>
-            </a:r>
-          </a:p>
-        </p:txBody>
-      </p:sp>
-      <p:sp>
-        <p:nvSpPr>
-          <p:cNvPr id="5" name="TextBox 4"/>
-          <p:cNvSpPr txBox="1"/>
-          <p:nvPr/>
-        </p:nvSpPr>
-        <p:spPr>
-          <a:xfrm>
-            <a:off x="457200" y="2834640"/>
-            <a:ext cx="2743200" cy="914400"/>
-          </a:xfrm>
-          <a:prstGeom prst="rect">
-            <a:avLst/>
-          </a:prstGeom>
-          <a:noFill/>
-        </p:spPr>
-        <p:txBody>
-          <a:bodyPr wrap="square" anchor="t">
-            <a:spAutoFit/>
-          </a:bodyPr>
-          <a:lstStyle/>
-          <a:p>
-            <a:pPr algn="ctr"/>
-            <a:r>
-              <a:rPr sz="4200" b="1" i="0">
-                <a:solidFill>
-                  <a:srgbClr val="7C3AED"/>
-                </a:solidFill>
-                <a:latin typeface="Calibri"/>
-              </a:rPr>
-              <a:t>1,034</a:t>
-            </a:r>
-          </a:p>
-        </p:txBody>
-      </p:sp>
-      <p:sp>
-        <p:nvSpPr>
-          <p:cNvPr id="6" name="TextBox 5"/>
-          <p:cNvSpPr txBox="1"/>
-          <p:nvPr/>
-        </p:nvSpPr>
-        <p:spPr>
-          <a:xfrm>
-            <a:off x="457200" y="4114800"/>
-            <a:ext cx="2743200" cy="457200"/>
-          </a:xfrm>
-          <a:prstGeom prst="rect">
-            <a:avLst/>
-          </a:prstGeom>
-          <a:noFill/>
-        </p:spPr>
-        <p:txBody>
-          <a:bodyPr wrap="square" anchor="t">
-            <a:spAutoFit/>
-          </a:bodyPr>
-          <a:lstStyle/>
-          <a:p>
-            <a:pPr algn="ctr"/>
-            <a:r>
-              <a:rPr sz="1200" b="0" i="1">
-                <a:solidFill>
-                  <a:srgbClr val="64748B"/>
-                </a:solidFill>
-                <a:latin typeface="Calibri"/>
-              </a:rPr>
-              <a:t>MIDI files</a:t>
-            </a:r>
-          </a:p>
-        </p:txBody>
-      </p:sp>
-      <p:sp>
-        <p:nvSpPr>
-          <p:cNvPr id="7" name="TextBox 6"/>
-          <p:cNvSpPr txBox="1"/>
-          <p:nvPr/>
-        </p:nvSpPr>
-        <p:spPr>
-          <a:xfrm>
-            <a:off x="3291840" y="2377440"/>
-            <a:ext cx="2743200" cy="457200"/>
-          </a:xfrm>
-          <a:prstGeom prst="rect">
-            <a:avLst/>
-          </a:prstGeom>
-          <a:noFill/>
-        </p:spPr>
-        <p:txBody>
-          <a:bodyPr wrap="square" anchor="t">
-            <a:spAutoFit/>
-          </a:bodyPr>
-          <a:lstStyle/>
-          <a:p>
-            <a:pPr algn="ctr"/>
-            <a:r>
-              <a:rPr sz="1400" b="0" i="0">
-                <a:solidFill>
-                  <a:srgbClr val="64748B"/>
-                </a:solidFill>
-                <a:latin typeface="Calibri"/>
-              </a:rPr>
-              <a:t>Tokens</a:t>
-            </a:r>
-          </a:p>
-        </p:txBody>
-      </p:sp>
-      <p:sp>
-        <p:nvSpPr>
-          <p:cNvPr id="8" name="TextBox 7"/>
-          <p:cNvSpPr txBox="1"/>
-          <p:nvPr/>
-        </p:nvSpPr>
-        <p:spPr>
-          <a:xfrm>
-            <a:off x="3291840" y="2834640"/>
-            <a:ext cx="2743200" cy="914400"/>
-          </a:xfrm>
-          <a:prstGeom prst="rect">
-            <a:avLst/>
-          </a:prstGeom>
-          <a:noFill/>
-        </p:spPr>
-        <p:txBody>
-          <a:bodyPr wrap="square" anchor="t">
-            <a:spAutoFit/>
-          </a:bodyPr>
-          <a:lstStyle/>
-          <a:p>
-            <a:pPr algn="ctr"/>
-            <a:r>
-              <a:rPr sz="4200" b="1" i="0">
-                <a:solidFill>
-                  <a:srgbClr val="7C3AED"/>
-                </a:solidFill>
-                <a:latin typeface="Calibri"/>
-              </a:rPr>
-              <a:t>573,692</a:t>
-            </a:r>
-          </a:p>
-        </p:txBody>
-      </p:sp>
-      <p:sp>
-        <p:nvSpPr>
-          <p:cNvPr id="9" name="TextBox 8"/>
-          <p:cNvSpPr txBox="1"/>
-          <p:nvPr/>
-        </p:nvSpPr>
-        <p:spPr>
-          <a:xfrm>
-            <a:off x="3291840" y="4114800"/>
-            <a:ext cx="2743200" cy="457200"/>
-          </a:xfrm>
-          <a:prstGeom prst="rect">
-            <a:avLst/>
-          </a:prstGeom>
-          <a:noFill/>
-        </p:spPr>
-        <p:txBody>
-          <a:bodyPr wrap="square" anchor="t">
-            <a:spAutoFit/>
-          </a:bodyPr>
-          <a:lstStyle/>
-          <a:p>
-            <a:pPr algn="ctr"/>
-            <a:r>
-              <a:rPr sz="1200" b="0" i="1">
-                <a:solidFill>
-                  <a:srgbClr val="64748B"/>
-                </a:solidFill>
-                <a:latin typeface="Calibri"/>
-              </a:rPr>
-              <a:t>after preprocessing</a:t>
-            </a:r>
-          </a:p>
-        </p:txBody>
-      </p:sp>
-      <p:sp>
-        <p:nvSpPr>
-          <p:cNvPr id="10" name="TextBox 9"/>
-          <p:cNvSpPr txBox="1"/>
-          <p:nvPr/>
-        </p:nvSpPr>
-        <p:spPr>
-          <a:xfrm>
-            <a:off x="6126480" y="2377440"/>
-            <a:ext cx="2743200" cy="457200"/>
-          </a:xfrm>
-          <a:prstGeom prst="rect">
-            <a:avLst/>
-          </a:prstGeom>
-          <a:noFill/>
-        </p:spPr>
-        <p:txBody>
-          <a:bodyPr wrap="square" anchor="t">
-            <a:spAutoFit/>
-          </a:bodyPr>
-          <a:lstStyle/>
-          <a:p>
-            <a:pPr algn="ctr"/>
-            <a:r>
-              <a:rPr sz="1400" b="0" i="0">
-                <a:solidFill>
-                  <a:srgbClr val="64748B"/>
-                </a:solidFill>
-                <a:latin typeface="Calibri"/>
-              </a:rPr>
-              <a:t>Parameters</a:t>
-            </a:r>
-          </a:p>
-        </p:txBody>
-      </p:sp>
-      <p:sp>
-        <p:nvSpPr>
-          <p:cNvPr id="11" name="TextBox 10"/>
-          <p:cNvSpPr txBox="1"/>
-          <p:nvPr/>
-        </p:nvSpPr>
-        <p:spPr>
-          <a:xfrm>
-            <a:off x="6126480" y="2834640"/>
-            <a:ext cx="2743200" cy="914400"/>
-          </a:xfrm>
-          <a:prstGeom prst="rect">
-            <a:avLst/>
-          </a:prstGeom>
-          <a:noFill/>
-        </p:spPr>
-        <p:txBody>
-          <a:bodyPr wrap="square" anchor="t">
-            <a:spAutoFit/>
-          </a:bodyPr>
-          <a:lstStyle/>
-          <a:p>
-            <a:pPr algn="ctr"/>
-            <a:r>
-              <a:rPr sz="4200" b="1" i="0">
-                <a:solidFill>
-                  <a:srgbClr val="7C3AED"/>
-                </a:solidFill>
-                <a:latin typeface="Calibri"/>
-              </a:rPr>
-              <a:t>908,708</a:t>
-            </a:r>
-          </a:p>
-        </p:txBody>
-      </p:sp>
-      <p:sp>
-        <p:nvSpPr>
-          <p:cNvPr id="12" name="TextBox 11"/>
-          <p:cNvSpPr txBox="1"/>
-          <p:nvPr/>
-        </p:nvSpPr>
-        <p:spPr>
-          <a:xfrm>
-            <a:off x="6126480" y="4114800"/>
-            <a:ext cx="2743200" cy="457200"/>
-          </a:xfrm>
-          <a:prstGeom prst="rect">
-            <a:avLst/>
-          </a:prstGeom>
-          <a:noFill/>
-        </p:spPr>
-        <p:txBody>
-          <a:bodyPr wrap="square" anchor="t">
-            <a:spAutoFit/>
-          </a:bodyPr>
-          <a:lstStyle/>
-          <a:p>
-            <a:pPr algn="ctr"/>
-            <a:r>
-              <a:rPr sz="1200" b="0" i="1">
-                <a:solidFill>
-                  <a:srgbClr val="64748B"/>
-                </a:solidFill>
-                <a:latin typeface="Calibri"/>
-              </a:rPr>
-              <a:t>across 2 LSTM layers</a:t>
-            </a:r>
-          </a:p>
-        </p:txBody>
-      </p:sp>
-      <p:sp>
-        <p:nvSpPr>
-          <p:cNvPr id="13" name="TextBox 12"/>
-          <p:cNvSpPr txBox="1"/>
-          <p:nvPr/>
-        </p:nvSpPr>
-        <p:spPr>
-          <a:xfrm>
-            <a:off x="8961120" y="2377440"/>
-            <a:ext cx="2743200" cy="457200"/>
-          </a:xfrm>
-          <a:prstGeom prst="rect">
-            <a:avLst/>
-          </a:prstGeom>
-          <a:noFill/>
-        </p:spPr>
-        <p:txBody>
-          <a:bodyPr wrap="square" anchor="t">
-            <a:spAutoFit/>
-          </a:bodyPr>
-          <a:lstStyle/>
-          <a:p>
-            <a:pPr algn="ctr"/>
-            <a:r>
-              <a:rPr sz="1400" b="0" i="0">
-                <a:solidFill>
-                  <a:srgbClr val="64748B"/>
-                </a:solidFill>
-                <a:latin typeface="Calibri"/>
-              </a:rPr>
-              <a:t>Training</a:t>
-            </a:r>
-          </a:p>
-        </p:txBody>
-      </p:sp>
-      <p:sp>
-        <p:nvSpPr>
-          <p:cNvPr id="14" name="TextBox 13"/>
-          <p:cNvSpPr txBox="1"/>
-          <p:nvPr/>
-        </p:nvSpPr>
-        <p:spPr>
-          <a:xfrm>
-            <a:off x="8961120" y="2834640"/>
-            <a:ext cx="2743200" cy="914400"/>
-          </a:xfrm>
-          <a:prstGeom prst="rect">
-            <a:avLst/>
-          </a:prstGeom>
-          <a:noFill/>
-        </p:spPr>
-        <p:txBody>
-          <a:bodyPr wrap="square" anchor="t">
-            <a:spAutoFit/>
-          </a:bodyPr>
-          <a:lstStyle/>
-          <a:p>
-            <a:pPr algn="ctr"/>
-            <a:r>
-              <a:rPr sz="4200" b="1" i="0">
-                <a:solidFill>
-                  <a:srgbClr val="7C3AED"/>
-                </a:solidFill>
-                <a:latin typeface="Calibri"/>
-              </a:rPr>
-              <a:t>30</a:t>
-            </a:r>
-          </a:p>
-        </p:txBody>
-      </p:sp>
-      <p:sp>
-        <p:nvSpPr>
-          <p:cNvPr id="15" name="TextBox 14"/>
-          <p:cNvSpPr txBox="1"/>
-          <p:nvPr/>
-        </p:nvSpPr>
-        <p:spPr>
-          <a:xfrm>
-            <a:off x="8961120" y="4114800"/>
-            <a:ext cx="2743200" cy="457200"/>
-          </a:xfrm>
-          <a:prstGeom prst="rect">
-            <a:avLst/>
-          </a:prstGeom>
-          <a:noFill/>
-        </p:spPr>
-        <p:txBody>
-          <a:bodyPr wrap="square" anchor="t">
-            <a:spAutoFit/>
-          </a:bodyPr>
-          <a:lstStyle/>
-          <a:p>
-            <a:pPr algn="ctr"/>
-            <a:r>
-              <a:rPr sz="1200" b="0" i="1">
-                <a:solidFill>
-                  <a:srgbClr val="64748B"/>
-                </a:solidFill>
-                <a:latin typeface="Calibri"/>
-              </a:rPr>
-              <a:t>epochs on Apple MPS</a:t>
-            </a:r>
-          </a:p>
-        </p:txBody>
-      </p:sp>
-      <p:sp>
-        <p:nvSpPr>
-          <p:cNvPr id="16" name="TextBox 15"/>
-          <p:cNvSpPr txBox="1"/>
-          <p:nvPr/>
-        </p:nvSpPr>
-        <p:spPr>
-          <a:xfrm>
-            <a:off x="914400" y="5303520"/>
-            <a:ext cx="10332720" cy="457200"/>
-          </a:xfrm>
-          <a:prstGeom prst="rect">
-            <a:avLst/>
-          </a:prstGeom>
-          <a:noFill/>
-        </p:spPr>
-        <p:txBody>
-          <a:bodyPr wrap="square" anchor="t">
-            <a:spAutoFit/>
-          </a:bodyPr>
-          <a:lstStyle/>
-          <a:p>
-            <a:pPr algn="ctr"/>
-            <a:r>
-              <a:rPr sz="1500" b="0" i="1">
-                <a:solidFill>
-                  <a:srgbClr val="0F172A"/>
-                </a:solidFill>
-                <a:latin typeface="Calibri"/>
-              </a:rPr>
-              <a:t>Validation loss converged from 0.51 to 0.43 within the first three epochs.</a:t>
-            </a:r>
-          </a:p>
-        </p:txBody>
-      </p:sp>
-    </p:spTree>
-  </p:cSld>
-  <p:clrMapOvr>
-    <a:masterClrMapping/>
-  </p:clrMapOvr>
-</p:sld>
-</file>
-
-<file path=ppt/slides/slide7.xml><?xml version="1.0" encoding="utf-8"?>
-<p:sld xmlns:a="http://schemas.openxmlformats.org/drawingml/2006/main" xmlns:p="http://schemas.openxmlformats.org/presentationml/2006/main" xmlns:r="http://schemas.openxmlformats.org/officeDocument/2006/relationships">
-  <p:cSld>
-    <p:spTree>
-      <p:nvGrpSpPr>
-        <p:cNvPr id="1" name=""/>
-        <p:cNvGrpSpPr/>
-        <p:nvPr/>
-      </p:nvGrpSpPr>
-      <p:grpSpPr/>
-      <p:sp>
-        <p:nvSpPr>
-          <p:cNvPr id="2" name="Rectangle 1"/>
+              <a:t>Jamendo Creative Commons proxy with search, genre filtering, inline preview, and direct attachment.</a:t>
+            </a:r>
+          </a:p>
+        </p:txBody>
+      </p:sp>
+      <p:sp>
+        <p:nvSpPr>
+          <p:cNvPr id="19" name="Rounded Rectangle 18"/>
           <p:cNvSpPr/>
           <p:nvPr/>
         </p:nvSpPr>
         <p:spPr>
           <a:xfrm>
-            <a:off x="914400" y="822960"/>
-            <a:ext cx="73152" cy="457200"/>
-          </a:xfrm>
-          <a:prstGeom prst="rect">
+            <a:off x="6217920" y="4617720"/>
+            <a:ext cx="5029200" cy="1325880"/>
+          </a:xfrm>
+          <a:prstGeom prst="roundRect">
             <a:avLst/>
           </a:prstGeom>
           <a:solidFill>
-            <a:srgbClr val="7C3AED"/>
+            <a:srgbClr val="1E293B"/>
           </a:solidFill>
-          <a:ln>
-            <a:noFill/>
+          <a:ln w="12700">
+            <a:solidFill>
+              <a:srgbClr val="334155"/>
+            </a:solidFill>
           </a:ln>
         </p:spPr>
         <p:style>
@@ -7252,14 +7526,14 @@
       </p:sp>
       <p:sp>
         <p:nvSpPr>
-          <p:cNvPr id="3" name="TextBox 2"/>
+          <p:cNvPr id="20" name="TextBox 19"/>
           <p:cNvSpPr txBox="1"/>
           <p:nvPr/>
         </p:nvSpPr>
         <p:spPr>
           <a:xfrm>
-            <a:off x="1097280" y="731520"/>
-            <a:ext cx="10515600" cy="640080"/>
+            <a:off x="6446520" y="4754880"/>
+            <a:ext cx="4572000" cy="365760"/>
           </a:xfrm>
           <a:prstGeom prst="rect">
             <a:avLst/>
@@ -7274,27 +7548,27 @@
           <a:p>
             <a:pPr algn="l"/>
             <a:r>
-              <a:rPr sz="3200" b="1" i="0">
-                <a:solidFill>
-                  <a:srgbClr val="0F172A"/>
+              <a:rPr sz="1300" b="1" i="0">
+                <a:solidFill>
+                  <a:srgbClr val="A78BFA"/>
                 </a:solidFill>
                 <a:latin typeface="Calibri"/>
               </a:rPr>
-              <a:t>Honest tier separation</a:t>
-            </a:r>
-          </a:p>
-        </p:txBody>
-      </p:sp>
-      <p:sp>
-        <p:nvSpPr>
-          <p:cNvPr id="4" name="TextBox 3"/>
+              <a:t>Creator leaderboard</a:t>
+            </a:r>
+          </a:p>
+        </p:txBody>
+      </p:sp>
+      <p:sp>
+        <p:nvSpPr>
+          <p:cNvPr id="21" name="TextBox 20"/>
           <p:cNvSpPr txBox="1"/>
           <p:nvPr/>
         </p:nvSpPr>
         <p:spPr>
           <a:xfrm>
-            <a:off x="914400" y="1645920"/>
-            <a:ext cx="10515600" cy="457200"/>
+            <a:off x="6446520" y="5166359"/>
+            <a:ext cx="4572000" cy="685800"/>
           </a:xfrm>
           <a:prstGeom prst="rect">
             <a:avLst/>
@@ -7309,38 +7583,62 @@
           <a:p>
             <a:pPr algn="l"/>
             <a:r>
-              <a:rPr sz="1800" b="0" i="1">
-                <a:solidFill>
-                  <a:srgbClr val="64748B"/>
+              <a:rPr sz="1100" b="0" i="0">
+                <a:solidFill>
+                  <a:srgbClr val="F8FAFC"/>
                 </a:solidFill>
                 <a:latin typeface="Calibri"/>
               </a:rPr>
-              <a:t>Free is functional. Premium adds quality, not access.</a:t>
-            </a:r>
-          </a:p>
-        </p:txBody>
-      </p:sp>
-      <p:sp>
-        <p:nvSpPr>
-          <p:cNvPr id="5" name="Rounded Rectangle 4"/>
+              <a:t>Public ranking by generation count, surfacing active creators without requiring an explicit follow graph.</a:t>
+            </a:r>
+          </a:p>
+        </p:txBody>
+      </p:sp>
+    </p:spTree>
+  </p:cSld>
+  <p:clrMapOvr>
+    <a:masterClrMapping/>
+  </p:clrMapOvr>
+</p:sld>
+</file>
+
+<file path=ppt/slides/slide5.xml><?xml version="1.0" encoding="utf-8"?>
+<p:sld xmlns:a="http://schemas.openxmlformats.org/drawingml/2006/main" xmlns:p="http://schemas.openxmlformats.org/presentationml/2006/main" xmlns:r="http://schemas.openxmlformats.org/officeDocument/2006/relationships">
+  <p:cSld>
+    <p:bg>
+      <p:bgPr>
+        <a:solidFill>
+          <a:srgbClr val="0F172A"/>
+        </a:solidFill>
+        <a:effectLst/>
+      </p:bgPr>
+    </p:bg>
+    <p:spTree>
+      <p:nvGrpSpPr>
+        <p:cNvPr id="1" name=""/>
+        <p:cNvGrpSpPr/>
+        <p:nvPr/>
+      </p:nvGrpSpPr>
+      <p:grpSpPr/>
+      <p:sp>
+        <p:nvSpPr>
+          <p:cNvPr id="2" name="Rectangle 1"/>
           <p:cNvSpPr/>
           <p:nvPr/>
         </p:nvSpPr>
         <p:spPr>
           <a:xfrm>
-            <a:off x="548640" y="2560320"/>
-            <a:ext cx="5029200" cy="3474720"/>
-          </a:xfrm>
-          <a:prstGeom prst="roundRect">
+            <a:off x="914400" y="868680"/>
+            <a:ext cx="73152" cy="411480"/>
+          </a:xfrm>
+          <a:prstGeom prst="rect">
             <a:avLst/>
           </a:prstGeom>
           <a:solidFill>
-            <a:srgbClr val="FFFFFF"/>
+            <a:srgbClr val="A78BFA"/>
           </a:solidFill>
-          <a:ln w="25400">
-            <a:solidFill>
-              <a:srgbClr val="7C3AED"/>
-            </a:solidFill>
+          <a:ln>
+            <a:noFill/>
           </a:ln>
         </p:spPr>
         <p:style>
@@ -7367,14 +7665,14 @@
       </p:sp>
       <p:sp>
         <p:nvSpPr>
-          <p:cNvPr id="6" name="TextBox 5"/>
+          <p:cNvPr id="3" name="TextBox 2"/>
           <p:cNvSpPr txBox="1"/>
           <p:nvPr/>
         </p:nvSpPr>
         <p:spPr>
           <a:xfrm>
-            <a:off x="822959" y="2743200"/>
-            <a:ext cx="4572000" cy="457200"/>
+            <a:off x="1143000" y="777240"/>
+            <a:ext cx="10515600" cy="594360"/>
           </a:xfrm>
           <a:prstGeom prst="rect">
             <a:avLst/>
@@ -7389,120 +7687,37 @@
           <a:p>
             <a:pPr algn="l"/>
             <a:r>
-              <a:rPr sz="2200" b="1" i="0">
-                <a:solidFill>
-                  <a:srgbClr val="7C3AED"/>
+              <a:rPr sz="2800" b="1" i="0">
+                <a:solidFill>
+                  <a:srgbClr val="F8FAFC"/>
                 </a:solidFill>
                 <a:latin typeface="Calibri"/>
               </a:rPr>
-              <a:t>Free  ·  Pulsefy AI</a:t>
-            </a:r>
-          </a:p>
-        </p:txBody>
-      </p:sp>
-      <p:sp>
-        <p:nvSpPr>
-          <p:cNvPr id="7" name="TextBox 6"/>
-          <p:cNvSpPr txBox="1"/>
-          <p:nvPr/>
-        </p:nvSpPr>
-        <p:spPr>
-          <a:xfrm>
-            <a:off x="822959" y="3383280"/>
-            <a:ext cx="4572000" cy="365760"/>
-          </a:xfrm>
-          <a:prstGeom prst="rect">
-            <a:avLst/>
-          </a:prstGeom>
-          <a:noFill/>
-        </p:spPr>
-        <p:txBody>
-          <a:bodyPr wrap="square" anchor="t">
-            <a:spAutoFit/>
-          </a:bodyPr>
-          <a:lstStyle/>
-          <a:p>
-            <a:pPr algn="l"/>
-            <a:r>
-              <a:rPr sz="1400" b="0" i="0">
-                <a:solidFill>
-                  <a:srgbClr val="0F172A"/>
-                </a:solidFill>
-                <a:latin typeface="Calibri"/>
-              </a:rPr>
-              <a:t>Custom LSTM, 908k params</a:t>
-            </a:r>
-          </a:p>
-          <a:p>
-            <a:pPr algn="l"/>
-            <a:r>
-              <a:rPr sz="1800" b="0" i="0">
-                <a:solidFill>
-                  <a:srgbClr val="0F172A"/>
-                </a:solidFill>
-                <a:latin typeface="Calibri"/>
-              </a:rPr>
-              <a:t/>
-            </a:r>
-          </a:p>
-          <a:p>
-            <a:pPr algn="l"/>
-            <a:r>
-              <a:rPr sz="1400" b="0" i="0">
-                <a:solidFill>
-                  <a:srgbClr val="0F172A"/>
-                </a:solidFill>
-                <a:latin typeface="Calibri"/>
-              </a:rPr>
-              <a:t>~3–7 seconds per track</a:t>
-            </a:r>
-          </a:p>
-          <a:p>
-            <a:pPr algn="l"/>
-            <a:r>
-              <a:rPr sz="1800" b="0" i="0">
-                <a:solidFill>
-                  <a:srgbClr val="0F172A"/>
-                </a:solidFill>
-                <a:latin typeface="Calibri"/>
-              </a:rPr>
-              <a:t/>
-            </a:r>
-          </a:p>
-          <a:p>
-            <a:pPr algn="l"/>
-            <a:r>
-              <a:rPr sz="1400" b="0" i="0">
-                <a:solidFill>
-                  <a:srgbClr val="0F172A"/>
-                </a:solidFill>
-                <a:latin typeface="Calibri"/>
-              </a:rPr>
-              <a:t>No third-party dependency</a:t>
-            </a:r>
-          </a:p>
-        </p:txBody>
-      </p:sp>
-      <p:sp>
-        <p:nvSpPr>
-          <p:cNvPr id="8" name="Rounded Rectangle 7"/>
+              <a:t>Generation pipeline</a:t>
+            </a:r>
+          </a:p>
+        </p:txBody>
+      </p:sp>
+      <p:sp>
+        <p:nvSpPr>
+          <p:cNvPr id="4" name="Rounded Rectangle 3"/>
           <p:cNvSpPr/>
           <p:nvPr/>
         </p:nvSpPr>
         <p:spPr>
           <a:xfrm>
-            <a:off x="6583680" y="2560320"/>
-            <a:ext cx="5029200" cy="3474720"/>
+            <a:off x="548640" y="2926080"/>
+            <a:ext cx="1828800" cy="1371600"/>
           </a:xfrm>
           <a:prstGeom prst="roundRect">
             <a:avLst/>
           </a:prstGeom>
           <a:solidFill>
-            <a:srgbClr val="FFFFFF"/>
+            <a:srgbClr val="1E293B"/>
           </a:solidFill>
-          <a:ln w="25400">
+          <a:ln w="15875">
             <a:solidFill>
-              <a:srgbClr val="F97316"/>
+              <a:srgbClr val="A78BFA"/>
             </a:solidFill>
           </a:ln>
         </p:spPr>
@@ -7525,164 +7740,49 @@
           <a:lstStyle/>
           <a:p>
             <a:pPr algn="ctr"/>
-          </a:p>
-        </p:txBody>
-      </p:sp>
-      <p:sp>
-        <p:nvSpPr>
-          <p:cNvPr id="9" name="TextBox 8"/>
-          <p:cNvSpPr txBox="1"/>
-          <p:nvPr/>
-        </p:nvSpPr>
-        <p:spPr>
-          <a:xfrm>
-            <a:off x="6858000" y="2743200"/>
-            <a:ext cx="4572000" cy="457200"/>
-          </a:xfrm>
-          <a:prstGeom prst="rect">
-            <a:avLst/>
-          </a:prstGeom>
-          <a:noFill/>
-        </p:spPr>
-        <p:txBody>
-          <a:bodyPr wrap="square" anchor="t">
-            <a:spAutoFit/>
-          </a:bodyPr>
-          <a:lstStyle/>
-          <a:p>
-            <a:pPr algn="l"/>
-            <a:r>
-              <a:rPr sz="2200" b="1" i="0">
-                <a:solidFill>
-                  <a:srgbClr val="F97316"/>
-                </a:solidFill>
-                <a:latin typeface="Calibri"/>
-              </a:rPr>
-              <a:t>Premium  ·  MusicGen</a:t>
-            </a:r>
-          </a:p>
-        </p:txBody>
-      </p:sp>
-      <p:sp>
-        <p:nvSpPr>
-          <p:cNvPr id="10" name="TextBox 9"/>
-          <p:cNvSpPr txBox="1"/>
-          <p:nvPr/>
-        </p:nvSpPr>
-        <p:spPr>
-          <a:xfrm>
-            <a:off x="6858000" y="3383280"/>
-            <a:ext cx="4572000" cy="365760"/>
-          </a:xfrm>
-          <a:prstGeom prst="rect">
-            <a:avLst/>
-          </a:prstGeom>
-          <a:noFill/>
-        </p:spPr>
-        <p:txBody>
-          <a:bodyPr wrap="square" anchor="t">
-            <a:spAutoFit/>
-          </a:bodyPr>
-          <a:lstStyle/>
-          <a:p>
-            <a:pPr algn="l"/>
-            <a:r>
-              <a:rPr sz="1400" b="0" i="0">
-                <a:solidFill>
-                  <a:srgbClr val="0F172A"/>
-                </a:solidFill>
-                <a:latin typeface="Calibri"/>
-              </a:rPr>
-              <a:t>Meta audiocraft, balanced quality</a:t>
-            </a:r>
-          </a:p>
-          <a:p>
-            <a:pPr algn="l"/>
-            <a:r>
-              <a:rPr sz="1800" b="0" i="0">
-                <a:solidFill>
-                  <a:srgbClr val="0F172A"/>
-                </a:solidFill>
-                <a:latin typeface="Calibri"/>
-              </a:rPr>
-              <a:t/>
-            </a:r>
-          </a:p>
-          <a:p>
-            <a:pPr algn="l"/>
-            <a:r>
-              <a:rPr sz="1400" b="0" i="0">
-                <a:solidFill>
-                  <a:srgbClr val="0F172A"/>
-                </a:solidFill>
-                <a:latin typeface="Calibri"/>
-              </a:rPr>
-              <a:t>~5–7 minutes per track on CPU</a:t>
-            </a:r>
-          </a:p>
-          <a:p>
-            <a:pPr algn="l"/>
-            <a:r>
-              <a:rPr sz="1800" b="0" i="0">
-                <a:solidFill>
-                  <a:srgbClr val="0F172A"/>
-                </a:solidFill>
-                <a:latin typeface="Calibri"/>
-              </a:rPr>
-              <a:t/>
-            </a:r>
-          </a:p>
-          <a:p>
-            <a:pPr algn="l"/>
-            <a:r>
-              <a:rPr sz="1400" b="0" i="0">
-                <a:solidFill>
-                  <a:srgbClr val="0F172A"/>
-                </a:solidFill>
-                <a:latin typeface="Calibri"/>
-              </a:rPr>
-              <a:t>Multilingual voiceover unlocked too</a:t>
-            </a:r>
-          </a:p>
-        </p:txBody>
-      </p:sp>
-    </p:spTree>
-  </p:cSld>
-  <p:clrMapOvr>
-    <a:masterClrMapping/>
-  </p:clrMapOvr>
-</p:sld>
-</file>
-
-<file path=ppt/slides/slide8.xml><?xml version="1.0" encoding="utf-8"?>
-<p:sld xmlns:a="http://schemas.openxmlformats.org/drawingml/2006/main" xmlns:p="http://schemas.openxmlformats.org/presentationml/2006/main" xmlns:r="http://schemas.openxmlformats.org/officeDocument/2006/relationships">
-  <p:cSld>
-    <p:spTree>
-      <p:nvGrpSpPr>
-        <p:cNvPr id="1" name=""/>
-        <p:cNvGrpSpPr/>
-        <p:nvPr/>
-      </p:nvGrpSpPr>
-      <p:grpSpPr/>
-      <p:sp>
-        <p:nvSpPr>
-          <p:cNvPr id="2" name="Rectangle 1"/>
+            <a:r>
+              <a:rPr sz="1400" b="1">
+                <a:solidFill>
+                  <a:srgbClr val="F8FAFC"/>
+                </a:solidFill>
+              </a:rPr>
+              <a:t>Product brief</a:t>
+            </a:r>
+          </a:p>
+          <a:p>
+            <a:pPr algn="ctr"/>
+            <a:r>
+              <a:rPr sz="1000" i="1">
+                <a:solidFill>
+                  <a:srgbClr val="94A3B8"/>
+                </a:solidFill>
+              </a:rPr>
+              <a:t>name, style, ratio</a:t>
+            </a:r>
+          </a:p>
+        </p:txBody>
+      </p:sp>
+      <p:sp>
+        <p:nvSpPr>
+          <p:cNvPr id="5" name="Rounded Rectangle 4"/>
           <p:cNvSpPr/>
           <p:nvPr/>
         </p:nvSpPr>
         <p:spPr>
           <a:xfrm>
-            <a:off x="914400" y="822960"/>
-            <a:ext cx="73152" cy="457200"/>
-          </a:xfrm>
-          <a:prstGeom prst="rect">
+            <a:off x="3108960" y="1554480"/>
+            <a:ext cx="3017520" cy="1005840"/>
+          </a:xfrm>
+          <a:prstGeom prst="roundRect">
             <a:avLst/>
           </a:prstGeom>
           <a:solidFill>
-            <a:srgbClr val="7C3AED"/>
+            <a:srgbClr val="1E293B"/>
           </a:solidFill>
-          <a:ln>
-            <a:noFill/>
+          <a:ln w="15875">
+            <a:solidFill>
+              <a:srgbClr val="A78BFA"/>
+            </a:solidFill>
           </a:ln>
         </p:spPr>
         <p:style>
@@ -7704,64 +7804,48 @@
           <a:lstStyle/>
           <a:p>
             <a:pPr algn="ctr"/>
-          </a:p>
-        </p:txBody>
-      </p:sp>
-      <p:sp>
-        <p:nvSpPr>
-          <p:cNvPr id="3" name="TextBox 2"/>
-          <p:cNvSpPr txBox="1"/>
-          <p:nvPr/>
-        </p:nvSpPr>
-        <p:spPr>
-          <a:xfrm>
-            <a:off x="1097280" y="731520"/>
-            <a:ext cx="10515600" cy="640080"/>
-          </a:xfrm>
-          <a:prstGeom prst="rect">
-            <a:avLst/>
-          </a:prstGeom>
-          <a:noFill/>
-        </p:spPr>
-        <p:txBody>
-          <a:bodyPr wrap="square" anchor="t">
-            <a:spAutoFit/>
-          </a:bodyPr>
-          <a:lstStyle/>
-          <a:p>
-            <a:pPr algn="l"/>
-            <a:r>
-              <a:rPr sz="3000" b="1" i="0">
-                <a:solidFill>
-                  <a:srgbClr val="0F172A"/>
-                </a:solidFill>
-                <a:latin typeface="Calibri"/>
-              </a:rPr>
-              <a:t>Sound Studio: the single authoring surface</a:t>
-            </a:r>
-          </a:p>
-        </p:txBody>
-      </p:sp>
-      <p:sp>
-        <p:nvSpPr>
-          <p:cNvPr id="4" name="Rectangle 3"/>
+            <a:r>
+              <a:rPr sz="1400" b="1">
+                <a:solidFill>
+                  <a:srgbClr val="F8FAFC"/>
+                </a:solidFill>
+              </a:rPr>
+              <a:t>Scene images</a:t>
+            </a:r>
+          </a:p>
+          <a:p>
+            <a:pPr algn="ctr"/>
+            <a:r>
+              <a:rPr sz="1000" i="1">
+                <a:solidFill>
+                  <a:srgbClr val="94A3B8"/>
+                </a:solidFill>
+              </a:rPr>
+              <a:t>Pollinations.ai</a:t>
+            </a:r>
+          </a:p>
+        </p:txBody>
+      </p:sp>
+      <p:sp>
+        <p:nvSpPr>
+          <p:cNvPr id="6" name="Rounded Rectangle 5"/>
           <p:cNvSpPr/>
           <p:nvPr/>
         </p:nvSpPr>
         <p:spPr>
           <a:xfrm>
-            <a:off x="914400" y="1645920"/>
-            <a:ext cx="10332720" cy="4754880"/>
-          </a:xfrm>
-          <a:prstGeom prst="rect">
+            <a:off x="3108960" y="2743200"/>
+            <a:ext cx="3017520" cy="1005840"/>
+          </a:xfrm>
+          <a:prstGeom prst="roundRect">
             <a:avLst/>
           </a:prstGeom>
           <a:solidFill>
-            <a:srgbClr val="F1F5F9"/>
+            <a:srgbClr val="1E293B"/>
           </a:solidFill>
-          <a:ln w="12700">
+          <a:ln w="15875">
             <a:solidFill>
-              <a:srgbClr val="CBD5E1"/>
+              <a:srgbClr val="A78BFA"/>
             </a:solidFill>
           </a:ln>
         </p:spPr>
@@ -7780,58 +7864,53 @@
           </a:fontRef>
         </p:style>
         <p:txBody>
-          <a:bodyPr rtlCol="0" anchor="ctr" wrap="square"/>
+          <a:bodyPr rtlCol="0" anchor="ctr"/>
           <a:lstStyle/>
           <a:p>
             <a:pPr algn="ctr"/>
             <a:r>
-              <a:rPr sz="1400" i="1">
-                <a:solidFill>
-                  <a:srgbClr val="64748B"/>
-                </a:solidFill>
-              </a:rPr>
-              <a:t>[Insert: Sound Studio screenshot — the Music tab with Pulsefy AI vs MusicGen selector]</a:t>
-            </a:r>
-          </a:p>
-        </p:txBody>
-      </p:sp>
-    </p:spTree>
-  </p:cSld>
-  <p:clrMapOvr>
-    <a:masterClrMapping/>
-  </p:clrMapOvr>
-</p:sld>
-</file>
-
-<file path=ppt/slides/slide9.xml><?xml version="1.0" encoding="utf-8"?>
-<p:sld xmlns:a="http://schemas.openxmlformats.org/drawingml/2006/main" xmlns:p="http://schemas.openxmlformats.org/presentationml/2006/main" xmlns:r="http://schemas.openxmlformats.org/officeDocument/2006/relationships">
-  <p:cSld>
-    <p:spTree>
-      <p:nvGrpSpPr>
-        <p:cNvPr id="1" name=""/>
-        <p:cNvGrpSpPr/>
-        <p:nvPr/>
-      </p:nvGrpSpPr>
-      <p:grpSpPr/>
-      <p:sp>
-        <p:nvSpPr>
-          <p:cNvPr id="2" name="Rectangle 1"/>
+              <a:rPr sz="1400" b="1">
+                <a:solidFill>
+                  <a:srgbClr val="F8FAFC"/>
+                </a:solidFill>
+              </a:rPr>
+              <a:t>Music</a:t>
+            </a:r>
+          </a:p>
+          <a:p>
+            <a:pPr algn="ctr"/>
+            <a:r>
+              <a:rPr sz="1000" i="1">
+                <a:solidFill>
+                  <a:srgbClr val="94A3B8"/>
+                </a:solidFill>
+              </a:rPr>
+              <a:t>MusicGen / Pulsefy AI</a:t>
+            </a:r>
+          </a:p>
+        </p:txBody>
+      </p:sp>
+      <p:sp>
+        <p:nvSpPr>
+          <p:cNvPr id="7" name="Rounded Rectangle 6"/>
           <p:cNvSpPr/>
           <p:nvPr/>
         </p:nvSpPr>
         <p:spPr>
           <a:xfrm>
-            <a:off x="914400" y="822960"/>
-            <a:ext cx="73152" cy="457200"/>
-          </a:xfrm>
-          <a:prstGeom prst="rect">
+            <a:off x="3108960" y="3931920"/>
+            <a:ext cx="3017520" cy="1005840"/>
+          </a:xfrm>
+          <a:prstGeom prst="roundRect">
             <a:avLst/>
           </a:prstGeom>
           <a:solidFill>
-            <a:srgbClr val="7C3AED"/>
+            <a:srgbClr val="1E293B"/>
           </a:solidFill>
-          <a:ln>
-            <a:noFill/>
+          <a:ln w="15875">
+            <a:solidFill>
+              <a:srgbClr val="A78BFA"/>
+            </a:solidFill>
           </a:ln>
         </p:spPr>
         <p:style>
@@ -7853,19 +7932,230 @@
           <a:lstStyle/>
           <a:p>
             <a:pPr algn="ctr"/>
-          </a:p>
-        </p:txBody>
-      </p:sp>
-      <p:sp>
-        <p:nvSpPr>
-          <p:cNvPr id="3" name="TextBox 2"/>
+            <a:r>
+              <a:rPr sz="1400" b="1">
+                <a:solidFill>
+                  <a:srgbClr val="F8FAFC"/>
+                </a:solidFill>
+              </a:rPr>
+              <a:t>Voiceover</a:t>
+            </a:r>
+          </a:p>
+          <a:p>
+            <a:pPr algn="ctr"/>
+            <a:r>
+              <a:rPr sz="1000" i="1">
+                <a:solidFill>
+                  <a:srgbClr val="94A3B8"/>
+                </a:solidFill>
+              </a:rPr>
+              <a:t>gTTS</a:t>
+            </a:r>
+          </a:p>
+        </p:txBody>
+      </p:sp>
+      <p:sp>
+        <p:nvSpPr>
+          <p:cNvPr id="8" name="Rounded Rectangle 7"/>
+          <p:cNvSpPr/>
+          <p:nvPr/>
+        </p:nvSpPr>
+        <p:spPr>
+          <a:xfrm>
+            <a:off x="3108960" y="5120640"/>
+            <a:ext cx="3017520" cy="1005840"/>
+          </a:xfrm>
+          <a:prstGeom prst="roundRect">
+            <a:avLst/>
+          </a:prstGeom>
+          <a:solidFill>
+            <a:srgbClr val="1E293B"/>
+          </a:solidFill>
+          <a:ln w="15875">
+            <a:solidFill>
+              <a:srgbClr val="A78BFA"/>
+            </a:solidFill>
+          </a:ln>
+        </p:spPr>
+        <p:style>
+          <a:lnRef idx="1">
+            <a:schemeClr val="accent1"/>
+          </a:lnRef>
+          <a:fillRef idx="3">
+            <a:schemeClr val="accent1"/>
+          </a:fillRef>
+          <a:effectRef idx="2">
+            <a:schemeClr val="accent1"/>
+          </a:effectRef>
+          <a:fontRef idx="minor">
+            <a:schemeClr val="lt1"/>
+          </a:fontRef>
+        </p:style>
+        <p:txBody>
+          <a:bodyPr rtlCol="0" anchor="ctr"/>
+          <a:lstStyle/>
+          <a:p>
+            <a:pPr algn="ctr"/>
+            <a:r>
+              <a:rPr sz="1400" b="1">
+                <a:solidFill>
+                  <a:srgbClr val="F8FAFC"/>
+                </a:solidFill>
+              </a:rPr>
+              <a:t>Assembly</a:t>
+            </a:r>
+          </a:p>
+          <a:p>
+            <a:pPr algn="ctr"/>
+            <a:r>
+              <a:rPr sz="1000" i="1">
+                <a:solidFill>
+                  <a:srgbClr val="94A3B8"/>
+                </a:solidFill>
+              </a:rPr>
+              <a:t>FFmpeg + Ken Burns</a:t>
+            </a:r>
+          </a:p>
+        </p:txBody>
+      </p:sp>
+      <p:sp>
+        <p:nvSpPr>
+          <p:cNvPr id="9" name="Rounded Rectangle 8"/>
+          <p:cNvSpPr/>
+          <p:nvPr/>
+        </p:nvSpPr>
+        <p:spPr>
+          <a:xfrm>
+            <a:off x="7315200" y="2926080"/>
+            <a:ext cx="1828800" cy="1371600"/>
+          </a:xfrm>
+          <a:prstGeom prst="roundRect">
+            <a:avLst/>
+          </a:prstGeom>
+          <a:solidFill>
+            <a:srgbClr val="1E293B"/>
+          </a:solidFill>
+          <a:ln w="15875">
+            <a:solidFill>
+              <a:srgbClr val="A78BFA"/>
+            </a:solidFill>
+          </a:ln>
+        </p:spPr>
+        <p:style>
+          <a:lnRef idx="1">
+            <a:schemeClr val="accent1"/>
+          </a:lnRef>
+          <a:fillRef idx="3">
+            <a:schemeClr val="accent1"/>
+          </a:fillRef>
+          <a:effectRef idx="2">
+            <a:schemeClr val="accent1"/>
+          </a:effectRef>
+          <a:fontRef idx="minor">
+            <a:schemeClr val="lt1"/>
+          </a:fontRef>
+        </p:style>
+        <p:txBody>
+          <a:bodyPr rtlCol="0" anchor="ctr"/>
+          <a:lstStyle/>
+          <a:p>
+            <a:pPr algn="ctr"/>
+            <a:r>
+              <a:rPr sz="1400" b="1">
+                <a:solidFill>
+                  <a:srgbClr val="F8FAFC"/>
+                </a:solidFill>
+              </a:rPr>
+              <a:t>MP4 ad</a:t>
+            </a:r>
+          </a:p>
+          <a:p>
+            <a:pPr algn="ctr"/>
+            <a:r>
+              <a:rPr sz="1000" i="1">
+                <a:solidFill>
+                  <a:srgbClr val="94A3B8"/>
+                </a:solidFill>
+              </a:rPr>
+              <a:t>9:16 / 1:1 / 16:9</a:t>
+            </a:r>
+          </a:p>
+        </p:txBody>
+      </p:sp>
+      <p:sp>
+        <p:nvSpPr>
+          <p:cNvPr id="10" name="Rounded Rectangle 9"/>
+          <p:cNvSpPr/>
+          <p:nvPr/>
+        </p:nvSpPr>
+        <p:spPr>
+          <a:xfrm>
+            <a:off x="9875520" y="2926080"/>
+            <a:ext cx="1828800" cy="1371600"/>
+          </a:xfrm>
+          <a:prstGeom prst="roundRect">
+            <a:avLst/>
+          </a:prstGeom>
+          <a:solidFill>
+            <a:srgbClr val="162F1F"/>
+          </a:solidFill>
+          <a:ln w="15875">
+            <a:solidFill>
+              <a:srgbClr val="A78BFA"/>
+            </a:solidFill>
+          </a:ln>
+        </p:spPr>
+        <p:style>
+          <a:lnRef idx="1">
+            <a:schemeClr val="accent1"/>
+          </a:lnRef>
+          <a:fillRef idx="3">
+            <a:schemeClr val="accent1"/>
+          </a:fillRef>
+          <a:effectRef idx="2">
+            <a:schemeClr val="accent1"/>
+          </a:effectRef>
+          <a:fontRef idx="minor">
+            <a:schemeClr val="lt1"/>
+          </a:fontRef>
+        </p:style>
+        <p:txBody>
+          <a:bodyPr rtlCol="0" anchor="ctr"/>
+          <a:lstStyle/>
+          <a:p>
+            <a:pPr algn="ctr"/>
+            <a:r>
+              <a:rPr sz="1400" b="1">
+                <a:solidFill>
+                  <a:srgbClr val="F8FAFC"/>
+                </a:solidFill>
+              </a:rPr>
+              <a:t>Publish</a:t>
+            </a:r>
+          </a:p>
+          <a:p>
+            <a:pPr algn="ctr"/>
+            <a:r>
+              <a:rPr sz="1000" i="1">
+                <a:solidFill>
+                  <a:srgbClr val="94A3B8"/>
+                </a:solidFill>
+              </a:rPr>
+              <a:t>TikTok / Reels / Shorts</a:t>
+            </a:r>
+          </a:p>
+        </p:txBody>
+      </p:sp>
+      <p:sp>
+        <p:nvSpPr>
+          <p:cNvPr id="11" name="TextBox 10"/>
           <p:cNvSpPr txBox="1"/>
           <p:nvPr/>
         </p:nvSpPr>
         <p:spPr>
           <a:xfrm>
-            <a:off x="1097280" y="731520"/>
-            <a:ext cx="10515600" cy="640080"/>
+            <a:off x="914400" y="6355080"/>
+            <a:ext cx="10332720" cy="411480"/>
           </a:xfrm>
           <a:prstGeom prst="rect">
             <a:avLst/>
@@ -7878,29 +8168,98 @@
           </a:bodyPr>
           <a:lstStyle/>
           <a:p>
-            <a:pPr algn="l"/>
-            <a:r>
-              <a:rPr sz="3200" b="1" i="0">
-                <a:solidFill>
-                  <a:srgbClr val="0F172A"/>
+            <a:pPr algn="ctr"/>
+            <a:r>
+              <a:rPr sz="1100" b="0" i="1">
+                <a:solidFill>
+                  <a:srgbClr val="94A3B8"/>
                 </a:solidFill>
                 <a:latin typeface="Calibri"/>
               </a:rPr>
-              <a:t>How fast it actually is</a:t>
-            </a:r>
-          </a:p>
-        </p:txBody>
-      </p:sp>
-      <p:sp>
-        <p:nvSpPr>
-          <p:cNvPr id="4" name="TextBox 3"/>
+              <a:t>Single request from the brief, four parallel asset stages, assembly into a single MP4 at the chosen social-platform ratio.</a:t>
+            </a:r>
+          </a:p>
+        </p:txBody>
+      </p:sp>
+    </p:spTree>
+  </p:cSld>
+  <p:clrMapOvr>
+    <a:masterClrMapping/>
+  </p:clrMapOvr>
+</p:sld>
+</file>
+
+<file path=ppt/slides/slide6.xml><?xml version="1.0" encoding="utf-8"?>
+<p:sld xmlns:a="http://schemas.openxmlformats.org/drawingml/2006/main" xmlns:p="http://schemas.openxmlformats.org/presentationml/2006/main" xmlns:r="http://schemas.openxmlformats.org/officeDocument/2006/relationships">
+  <p:cSld>
+    <p:bg>
+      <p:bgPr>
+        <a:solidFill>
+          <a:srgbClr val="0F172A"/>
+        </a:solidFill>
+        <a:effectLst/>
+      </p:bgPr>
+    </p:bg>
+    <p:spTree>
+      <p:nvGrpSpPr>
+        <p:cNvPr id="1" name=""/>
+        <p:cNvGrpSpPr/>
+        <p:nvPr/>
+      </p:nvGrpSpPr>
+      <p:grpSpPr/>
+      <p:sp>
+        <p:nvSpPr>
+          <p:cNvPr id="2" name="Rectangle 1"/>
+          <p:cNvSpPr/>
+          <p:nvPr/>
+        </p:nvSpPr>
+        <p:spPr>
+          <a:xfrm>
+            <a:off x="914400" y="868680"/>
+            <a:ext cx="73152" cy="411480"/>
+          </a:xfrm>
+          <a:prstGeom prst="rect">
+            <a:avLst/>
+          </a:prstGeom>
+          <a:solidFill>
+            <a:srgbClr val="A78BFA"/>
+          </a:solidFill>
+          <a:ln>
+            <a:noFill/>
+          </a:ln>
+        </p:spPr>
+        <p:style>
+          <a:lnRef idx="1">
+            <a:schemeClr val="accent1"/>
+          </a:lnRef>
+          <a:fillRef idx="3">
+            <a:schemeClr val="accent1"/>
+          </a:fillRef>
+          <a:effectRef idx="2">
+            <a:schemeClr val="accent1"/>
+          </a:effectRef>
+          <a:fontRef idx="minor">
+            <a:schemeClr val="lt1"/>
+          </a:fontRef>
+        </p:style>
+        <p:txBody>
+          <a:bodyPr rtlCol="0" anchor="ctr"/>
+          <a:lstStyle/>
+          <a:p>
+            <a:pPr algn="ctr"/>
+          </a:p>
+        </p:txBody>
+      </p:sp>
+      <p:sp>
+        <p:nvSpPr>
+          <p:cNvPr id="3" name="TextBox 2"/>
           <p:cNvSpPr txBox="1"/>
           <p:nvPr/>
         </p:nvSpPr>
         <p:spPr>
           <a:xfrm>
-            <a:off x="914400" y="1737360"/>
-            <a:ext cx="10515600" cy="457200"/>
+            <a:off x="1143000" y="777240"/>
+            <a:ext cx="10515600" cy="594360"/>
           </a:xfrm>
           <a:prstGeom prst="rect">
             <a:avLst/>
@@ -7915,13 +8274,48 @@
           <a:p>
             <a:pPr algn="l"/>
             <a:r>
+              <a:rPr sz="2800" b="1" i="0">
+                <a:solidFill>
+                  <a:srgbClr val="F8FAFC"/>
+                </a:solidFill>
+                <a:latin typeface="Calibri"/>
+              </a:rPr>
+              <a:t>Original contribution: Pulsefy AI</a:t>
+            </a:r>
+          </a:p>
+        </p:txBody>
+      </p:sp>
+      <p:sp>
+        <p:nvSpPr>
+          <p:cNvPr id="4" name="TextBox 3"/>
+          <p:cNvSpPr txBox="1"/>
+          <p:nvPr/>
+        </p:nvSpPr>
+        <p:spPr>
+          <a:xfrm>
+            <a:off x="914400" y="1691640"/>
+            <a:ext cx="6400800" cy="457200"/>
+          </a:xfrm>
+          <a:prstGeom prst="rect">
+            <a:avLst/>
+          </a:prstGeom>
+          <a:noFill/>
+        </p:spPr>
+        <p:txBody>
+          <a:bodyPr wrap="square" anchor="t">
+            <a:spAutoFit/>
+          </a:bodyPr>
+          <a:lstStyle/>
+          <a:p>
+            <a:pPr algn="l"/>
+            <a:r>
               <a:rPr sz="1600" b="0" i="1">
                 <a:solidFill>
-                  <a:srgbClr val="64748B"/>
+                  <a:srgbClr val="A78BFA"/>
                 </a:solidFill>
                 <a:latin typeface="Calibri"/>
               </a:rPr>
-              <a:t>Three Instagram Reel scenarios, measured on Mac M2 Pro:</a:t>
+              <a:t>A custom LSTM music generator trained from scratch</a:t>
             </a:r>
           </a:p>
         </p:txBody>
@@ -7934,8 +8328,8 @@
         </p:nvSpPr>
         <p:spPr>
           <a:xfrm>
-            <a:off x="914400" y="2743200"/>
-            <a:ext cx="4572000" cy="548640"/>
+            <a:off x="914400" y="2468880"/>
+            <a:ext cx="6400800" cy="3657600"/>
           </a:xfrm>
           <a:prstGeom prst="rect">
             <a:avLst/>
@@ -7943,20 +8337,296 @@
           <a:noFill/>
         </p:spPr>
         <p:txBody>
-          <a:bodyPr wrap="square" anchor="ctr">
+          <a:bodyPr wrap="square" anchor="t">
             <a:spAutoFit/>
           </a:bodyPr>
           <a:lstStyle/>
           <a:p>
             <a:pPr algn="l"/>
             <a:r>
-              <a:rPr sz="2000" b="0" i="0">
-                <a:solidFill>
-                  <a:srgbClr val="0F172A"/>
+              <a:rPr sz="1400" b="0" i="0">
+                <a:solidFill>
+                  <a:srgbClr val="F8FAFC"/>
                 </a:solidFill>
                 <a:latin typeface="Calibri"/>
               </a:rPr>
-              <a:t>Manual workflow</a:t>
+              <a:t>Pulsefy AI is the original technical contribution of the project. It is a token-level next-event LSTM model that generates background music for the free tier of the platform without depending on any third-party service.</a:t>
+            </a:r>
+          </a:p>
+          <a:p>
+            <a:pPr algn="l"/>
+            <a:r>
+              <a:rPr sz="1600" b="0" i="0">
+                <a:solidFill>
+                  <a:srgbClr val="F8FAFC"/>
+                </a:solidFill>
+                <a:latin typeface="Calibri"/>
+              </a:rPr>
+              <a:t/>
+            </a:r>
+          </a:p>
+          <a:p>
+            <a:pPr algn="l"/>
+            <a:r>
+              <a:rPr sz="1400" b="0" i="0">
+                <a:solidFill>
+                  <a:srgbClr val="F8FAFC"/>
+                </a:solidFill>
+                <a:latin typeface="Calibri"/>
+              </a:rPr>
+              <a:t>Building this rather than relying solely on Meta's MusicGen required end-to-end implementation of three components: a MIDI preprocessing and tokenisation pipeline, a PyTorch training loop with Apple Metal acceleration, and an inference path integrated with the Node.js backend through a Python subprocess.</a:t>
+            </a:r>
+          </a:p>
+          <a:p>
+            <a:pPr algn="l"/>
+            <a:r>
+              <a:rPr sz="1600" b="0" i="0">
+                <a:solidFill>
+                  <a:srgbClr val="F8FAFC"/>
+                </a:solidFill>
+                <a:latin typeface="Calibri"/>
+              </a:rPr>
+              <a:t/>
+            </a:r>
+          </a:p>
+          <a:p>
+            <a:pPr algn="l"/>
+            <a:r>
+              <a:rPr sz="1400" b="0" i="1">
+                <a:solidFill>
+                  <a:srgbClr val="F8FAFC"/>
+                </a:solidFill>
+                <a:latin typeface="Calibri"/>
+              </a:rPr>
+              <a:t>Inference completes in single-digit seconds on consumer hardware, which makes the free tier feel instant.</a:t>
+            </a:r>
+          </a:p>
+        </p:txBody>
+      </p:sp>
+      <p:sp>
+        <p:nvSpPr>
+          <p:cNvPr id="6" name="Rectangle 5"/>
+          <p:cNvSpPr/>
+          <p:nvPr/>
+        </p:nvSpPr>
+        <p:spPr>
+          <a:xfrm>
+            <a:off x="7680960" y="2286000"/>
+            <a:ext cx="4114800" cy="3931920"/>
+          </a:xfrm>
+          <a:prstGeom prst="rect">
+            <a:avLst/>
+          </a:prstGeom>
+          <a:solidFill>
+            <a:srgbClr val="1E293B"/>
+          </a:solidFill>
+          <a:ln w="12700">
+            <a:solidFill>
+              <a:srgbClr val="334155"/>
+            </a:solidFill>
+          </a:ln>
+        </p:spPr>
+        <p:style>
+          <a:lnRef idx="1">
+            <a:schemeClr val="accent1"/>
+          </a:lnRef>
+          <a:fillRef idx="3">
+            <a:schemeClr val="accent1"/>
+          </a:fillRef>
+          <a:effectRef idx="2">
+            <a:schemeClr val="accent1"/>
+          </a:effectRef>
+          <a:fontRef idx="minor">
+            <a:schemeClr val="lt1"/>
+          </a:fontRef>
+        </p:style>
+        <p:txBody>
+          <a:bodyPr rtlCol="0" anchor="ctr" wrap="square"/>
+          <a:lstStyle/>
+          <a:p>
+            <a:pPr algn="ctr"/>
+            <a:r>
+              <a:rPr sz="1300" i="1">
+                <a:solidFill>
+                  <a:srgbClr val="94A3B8"/>
+                </a:solidFill>
+              </a:rPr>
+              <a:t>[Insert: training screenshot from
+thesis Figure 43]</a:t>
+            </a:r>
+          </a:p>
+        </p:txBody>
+      </p:sp>
+    </p:spTree>
+  </p:cSld>
+  <p:clrMapOvr>
+    <a:masterClrMapping/>
+  </p:clrMapOvr>
+</p:sld>
+</file>
+
+<file path=ppt/slides/slide7.xml><?xml version="1.0" encoding="utf-8"?>
+<p:sld xmlns:a="http://schemas.openxmlformats.org/drawingml/2006/main" xmlns:p="http://schemas.openxmlformats.org/presentationml/2006/main" xmlns:r="http://schemas.openxmlformats.org/officeDocument/2006/relationships">
+  <p:cSld>
+    <p:bg>
+      <p:bgPr>
+        <a:solidFill>
+          <a:srgbClr val="0F172A"/>
+        </a:solidFill>
+        <a:effectLst/>
+      </p:bgPr>
+    </p:bg>
+    <p:spTree>
+      <p:nvGrpSpPr>
+        <p:cNvPr id="1" name=""/>
+        <p:cNvGrpSpPr/>
+        <p:nvPr/>
+      </p:nvGrpSpPr>
+      <p:grpSpPr/>
+      <p:sp>
+        <p:nvSpPr>
+          <p:cNvPr id="2" name="Rectangle 1"/>
+          <p:cNvSpPr/>
+          <p:nvPr/>
+        </p:nvSpPr>
+        <p:spPr>
+          <a:xfrm>
+            <a:off x="914400" y="868680"/>
+            <a:ext cx="73152" cy="411480"/>
+          </a:xfrm>
+          <a:prstGeom prst="rect">
+            <a:avLst/>
+          </a:prstGeom>
+          <a:solidFill>
+            <a:srgbClr val="A78BFA"/>
+          </a:solidFill>
+          <a:ln>
+            <a:noFill/>
+          </a:ln>
+        </p:spPr>
+        <p:style>
+          <a:lnRef idx="1">
+            <a:schemeClr val="accent1"/>
+          </a:lnRef>
+          <a:fillRef idx="3">
+            <a:schemeClr val="accent1"/>
+          </a:fillRef>
+          <a:effectRef idx="2">
+            <a:schemeClr val="accent1"/>
+          </a:effectRef>
+          <a:fontRef idx="minor">
+            <a:schemeClr val="lt1"/>
+          </a:fontRef>
+        </p:style>
+        <p:txBody>
+          <a:bodyPr rtlCol="0" anchor="ctr"/>
+          <a:lstStyle/>
+          <a:p>
+            <a:pPr algn="ctr"/>
+          </a:p>
+        </p:txBody>
+      </p:sp>
+      <p:sp>
+        <p:nvSpPr>
+          <p:cNvPr id="3" name="TextBox 2"/>
+          <p:cNvSpPr txBox="1"/>
+          <p:nvPr/>
+        </p:nvSpPr>
+        <p:spPr>
+          <a:xfrm>
+            <a:off x="1143000" y="777240"/>
+            <a:ext cx="10515600" cy="594360"/>
+          </a:xfrm>
+          <a:prstGeom prst="rect">
+            <a:avLst/>
+          </a:prstGeom>
+          <a:noFill/>
+        </p:spPr>
+        <p:txBody>
+          <a:bodyPr wrap="square" anchor="t">
+            <a:spAutoFit/>
+          </a:bodyPr>
+          <a:lstStyle/>
+          <a:p>
+            <a:pPr algn="l"/>
+            <a:r>
+              <a:rPr sz="2800" b="1" i="0">
+                <a:solidFill>
+                  <a:srgbClr val="F8FAFC"/>
+                </a:solidFill>
+                <a:latin typeface="Calibri"/>
+              </a:rPr>
+              <a:t>Training methodology and results</a:t>
+            </a:r>
+          </a:p>
+        </p:txBody>
+      </p:sp>
+      <p:sp>
+        <p:nvSpPr>
+          <p:cNvPr id="4" name="TextBox 3"/>
+          <p:cNvSpPr txBox="1"/>
+          <p:nvPr/>
+        </p:nvSpPr>
+        <p:spPr>
+          <a:xfrm>
+            <a:off x="914400" y="1691640"/>
+            <a:ext cx="10332720" cy="457200"/>
+          </a:xfrm>
+          <a:prstGeom prst="rect">
+            <a:avLst/>
+          </a:prstGeom>
+          <a:noFill/>
+        </p:spPr>
+        <p:txBody>
+          <a:bodyPr wrap="square" anchor="t">
+            <a:spAutoFit/>
+          </a:bodyPr>
+          <a:lstStyle/>
+          <a:p>
+            <a:pPr algn="l"/>
+            <a:r>
+              <a:rPr sz="1400" b="0" i="1">
+                <a:solidFill>
+                  <a:srgbClr val="94A3B8"/>
+                </a:solidFill>
+                <a:latin typeface="Calibri"/>
+              </a:rPr>
+              <a:t>Pulsefy AI was trained on a curated MIDI corpus over thirty epochs.</a:t>
+            </a:r>
+          </a:p>
+        </p:txBody>
+      </p:sp>
+      <p:sp>
+        <p:nvSpPr>
+          <p:cNvPr id="5" name="TextBox 4"/>
+          <p:cNvSpPr txBox="1"/>
+          <p:nvPr/>
+        </p:nvSpPr>
+        <p:spPr>
+          <a:xfrm>
+            <a:off x="365760" y="2468880"/>
+            <a:ext cx="2743200" cy="365760"/>
+          </a:xfrm>
+          <a:prstGeom prst="rect">
+            <a:avLst/>
+          </a:prstGeom>
+          <a:noFill/>
+        </p:spPr>
+        <p:txBody>
+          <a:bodyPr wrap="square" anchor="t">
+            <a:spAutoFit/>
+          </a:bodyPr>
+          <a:lstStyle/>
+          <a:p>
+            <a:pPr algn="ctr"/>
+            <a:r>
+              <a:rPr sz="1200" b="0" i="0">
+                <a:solidFill>
+                  <a:srgbClr val="94A3B8"/>
+                </a:solidFill>
+                <a:latin typeface="Calibri"/>
+              </a:rPr>
+              <a:t>Input corpus</a:t>
             </a:r>
           </a:p>
         </p:txBody>
@@ -7969,8 +8639,8 @@
         </p:nvSpPr>
         <p:spPr>
           <a:xfrm>
-            <a:off x="5486400" y="2743200"/>
-            <a:ext cx="3474720" cy="548640"/>
+            <a:off x="365760" y="2880360"/>
+            <a:ext cx="2743200" cy="914400"/>
           </a:xfrm>
           <a:prstGeom prst="rect">
             <a:avLst/>
@@ -7978,20 +8648,20 @@
           <a:noFill/>
         </p:spPr>
         <p:txBody>
-          <a:bodyPr wrap="square" anchor="ctr">
+          <a:bodyPr wrap="square" anchor="t">
             <a:spAutoFit/>
           </a:bodyPr>
           <a:lstStyle/>
           <a:p>
-            <a:pPr algn="l"/>
-            <a:r>
-              <a:rPr sz="3600" b="1" i="0">
-                <a:solidFill>
-                  <a:srgbClr val="64748B"/>
+            <a:pPr algn="ctr"/>
+            <a:r>
+              <a:rPr sz="3800" b="1" i="0">
+                <a:solidFill>
+                  <a:srgbClr val="A78BFA"/>
                 </a:solidFill>
                 <a:latin typeface="Calibri"/>
               </a:rPr>
-              <a:t>~8 hours</a:t>
+              <a:t>1,034</a:t>
             </a:r>
           </a:p>
         </p:txBody>
@@ -8004,8 +8674,8 @@
         </p:nvSpPr>
         <p:spPr>
           <a:xfrm>
-            <a:off x="9052560" y="2743200"/>
-            <a:ext cx="2743200" cy="548640"/>
+            <a:off x="365760" y="4114800"/>
+            <a:ext cx="2743200" cy="457200"/>
           </a:xfrm>
           <a:prstGeom prst="rect">
             <a:avLst/>
@@ -8013,20 +8683,20 @@
           <a:noFill/>
         </p:spPr>
         <p:txBody>
-          <a:bodyPr wrap="square" anchor="ctr">
+          <a:bodyPr wrap="square" anchor="t">
             <a:spAutoFit/>
           </a:bodyPr>
           <a:lstStyle/>
           <a:p>
-            <a:pPr algn="l"/>
-            <a:r>
-              <a:rPr sz="1400" b="0" i="1">
-                <a:solidFill>
-                  <a:srgbClr val="64748B"/>
+            <a:pPr algn="ctr"/>
+            <a:r>
+              <a:rPr sz="1100" b="0" i="1">
+                <a:solidFill>
+                  <a:srgbClr val="94A3B8"/>
                 </a:solidFill>
                 <a:latin typeface="Calibri"/>
               </a:rPr>
-              <a:t>baseline</a:t>
+              <a:t>MIDI files (folk + Christmas)</a:t>
             </a:r>
           </a:p>
         </p:txBody>
@@ -8039,8 +8709,8 @@
         </p:nvSpPr>
         <p:spPr>
           <a:xfrm>
-            <a:off x="914400" y="3931920"/>
-            <a:ext cx="4572000" cy="548640"/>
+            <a:off x="3291840" y="2468880"/>
+            <a:ext cx="2743200" cy="365760"/>
           </a:xfrm>
           <a:prstGeom prst="rect">
             <a:avLst/>
@@ -8048,20 +8718,20 @@
           <a:noFill/>
         </p:spPr>
         <p:txBody>
-          <a:bodyPr wrap="square" anchor="ctr">
+          <a:bodyPr wrap="square" anchor="t">
             <a:spAutoFit/>
           </a:bodyPr>
           <a:lstStyle/>
           <a:p>
-            <a:pPr algn="l"/>
-            <a:r>
-              <a:rPr sz="2000" b="0" i="0">
-                <a:solidFill>
-                  <a:srgbClr val="0F172A"/>
+            <a:pPr algn="ctr"/>
+            <a:r>
+              <a:rPr sz="1200" b="0" i="0">
+                <a:solidFill>
+                  <a:srgbClr val="94A3B8"/>
                 </a:solidFill>
                 <a:latin typeface="Calibri"/>
               </a:rPr>
-              <a:t>Pulsefy free</a:t>
+              <a:t>Tokens</a:t>
             </a:r>
           </a:p>
         </p:txBody>
@@ -8074,8 +8744,8 @@
         </p:nvSpPr>
         <p:spPr>
           <a:xfrm>
-            <a:off x="5486400" y="3931920"/>
-            <a:ext cx="3474720" cy="548640"/>
+            <a:off x="3291840" y="2880360"/>
+            <a:ext cx="2743200" cy="914400"/>
           </a:xfrm>
           <a:prstGeom prst="rect">
             <a:avLst/>
@@ -8083,20 +8753,20 @@
           <a:noFill/>
         </p:spPr>
         <p:txBody>
-          <a:bodyPr wrap="square" anchor="ctr">
+          <a:bodyPr wrap="square" anchor="t">
             <a:spAutoFit/>
           </a:bodyPr>
           <a:lstStyle/>
           <a:p>
-            <a:pPr algn="l"/>
-            <a:r>
-              <a:rPr sz="3600" b="1" i="0">
-                <a:solidFill>
-                  <a:srgbClr val="7C3AED"/>
+            <a:pPr algn="ctr"/>
+            <a:r>
+              <a:rPr sz="3800" b="1" i="0">
+                <a:solidFill>
+                  <a:srgbClr val="A78BFA"/>
                 </a:solidFill>
                 <a:latin typeface="Calibri"/>
               </a:rPr>
-              <a:t>~3 min 11 s</a:t>
+              <a:t>573,692</a:t>
             </a:r>
           </a:p>
         </p:txBody>
@@ -8109,8 +8779,8 @@
         </p:nvSpPr>
         <p:spPr>
           <a:xfrm>
-            <a:off x="9052560" y="3931920"/>
-            <a:ext cx="2743200" cy="548640"/>
+            <a:off x="3291840" y="4114800"/>
+            <a:ext cx="2743200" cy="457200"/>
           </a:xfrm>
           <a:prstGeom prst="rect">
             <a:avLst/>
@@ -8118,20 +8788,20 @@
           <a:noFill/>
         </p:spPr>
         <p:txBody>
-          <a:bodyPr wrap="square" anchor="ctr">
+          <a:bodyPr wrap="square" anchor="t">
             <a:spAutoFit/>
           </a:bodyPr>
           <a:lstStyle/>
           <a:p>
-            <a:pPr algn="l"/>
-            <a:r>
-              <a:rPr sz="1400" b="0" i="1">
-                <a:solidFill>
-                  <a:srgbClr val="64748B"/>
+            <a:pPr algn="ctr"/>
+            <a:r>
+              <a:rPr sz="1100" b="0" i="1">
+                <a:solidFill>
+                  <a:srgbClr val="94A3B8"/>
                 </a:solidFill>
                 <a:latin typeface="Calibri"/>
               </a:rPr>
-              <a:t>≈ 150× faster</a:t>
+              <a:t>after preprocessing</a:t>
             </a:r>
           </a:p>
         </p:txBody>
@@ -8144,8 +8814,8 @@
         </p:nvSpPr>
         <p:spPr>
           <a:xfrm>
-            <a:off x="914400" y="5120640"/>
-            <a:ext cx="4572000" cy="548640"/>
+            <a:off x="6126480" y="2468880"/>
+            <a:ext cx="2743200" cy="365760"/>
           </a:xfrm>
           <a:prstGeom prst="rect">
             <a:avLst/>
@@ -8153,20 +8823,20 @@
           <a:noFill/>
         </p:spPr>
         <p:txBody>
-          <a:bodyPr wrap="square" anchor="ctr">
+          <a:bodyPr wrap="square" anchor="t">
             <a:spAutoFit/>
           </a:bodyPr>
           <a:lstStyle/>
           <a:p>
-            <a:pPr algn="l"/>
-            <a:r>
-              <a:rPr sz="2000" b="0" i="0">
-                <a:solidFill>
-                  <a:srgbClr val="0F172A"/>
+            <a:pPr algn="ctr"/>
+            <a:r>
+              <a:rPr sz="1200" b="0" i="0">
+                <a:solidFill>
+                  <a:srgbClr val="94A3B8"/>
                 </a:solidFill>
                 <a:latin typeface="Calibri"/>
               </a:rPr>
-              <a:t>Pulsefy premium</a:t>
+              <a:t>Parameters</a:t>
             </a:r>
           </a:p>
         </p:txBody>
@@ -8179,8 +8849,8 @@
         </p:nvSpPr>
         <p:spPr>
           <a:xfrm>
-            <a:off x="5486400" y="5120640"/>
-            <a:ext cx="3474720" cy="548640"/>
+            <a:off x="6126480" y="2880360"/>
+            <a:ext cx="2743200" cy="914400"/>
           </a:xfrm>
           <a:prstGeom prst="rect">
             <a:avLst/>
@@ -8188,20 +8858,20 @@
           <a:noFill/>
         </p:spPr>
         <p:txBody>
-          <a:bodyPr wrap="square" anchor="ctr">
+          <a:bodyPr wrap="square" anchor="t">
             <a:spAutoFit/>
           </a:bodyPr>
           <a:lstStyle/>
           <a:p>
-            <a:pPr algn="l"/>
-            <a:r>
-              <a:rPr sz="3600" b="1" i="0">
-                <a:solidFill>
-                  <a:srgbClr val="F97316"/>
+            <a:pPr algn="ctr"/>
+            <a:r>
+              <a:rPr sz="3800" b="1" i="0">
+                <a:solidFill>
+                  <a:srgbClr val="A78BFA"/>
                 </a:solidFill>
                 <a:latin typeface="Calibri"/>
               </a:rPr>
-              <a:t>~9 min 12 s</a:t>
+              <a:t>908,708</a:t>
             </a:r>
           </a:p>
         </p:txBody>
@@ -8214,8 +8884,8 @@
         </p:nvSpPr>
         <p:spPr>
           <a:xfrm>
-            <a:off x="9052560" y="5120640"/>
-            <a:ext cx="2743200" cy="548640"/>
+            <a:off x="6126480" y="4114800"/>
+            <a:ext cx="2743200" cy="457200"/>
           </a:xfrm>
           <a:prstGeom prst="rect">
             <a:avLst/>
@@ -8223,20 +8893,1012 @@
           <a:noFill/>
         </p:spPr>
         <p:txBody>
-          <a:bodyPr wrap="square" anchor="ctr">
+          <a:bodyPr wrap="square" anchor="t">
             <a:spAutoFit/>
           </a:bodyPr>
           <a:lstStyle/>
           <a:p>
+            <a:pPr algn="ctr"/>
+            <a:r>
+              <a:rPr sz="1100" b="0" i="1">
+                <a:solidFill>
+                  <a:srgbClr val="94A3B8"/>
+                </a:solidFill>
+                <a:latin typeface="Calibri"/>
+              </a:rPr>
+              <a:t>2 LSTM layers, 256 hidden</a:t>
+            </a:r>
+          </a:p>
+        </p:txBody>
+      </p:sp>
+      <p:sp>
+        <p:nvSpPr>
+          <p:cNvPr id="14" name="TextBox 13"/>
+          <p:cNvSpPr txBox="1"/>
+          <p:nvPr/>
+        </p:nvSpPr>
+        <p:spPr>
+          <a:xfrm>
+            <a:off x="8961120" y="2468880"/>
+            <a:ext cx="2743200" cy="365760"/>
+          </a:xfrm>
+          <a:prstGeom prst="rect">
+            <a:avLst/>
+          </a:prstGeom>
+          <a:noFill/>
+        </p:spPr>
+        <p:txBody>
+          <a:bodyPr wrap="square" anchor="t">
+            <a:spAutoFit/>
+          </a:bodyPr>
+          <a:lstStyle/>
+          <a:p>
+            <a:pPr algn="ctr"/>
+            <a:r>
+              <a:rPr sz="1200" b="0" i="0">
+                <a:solidFill>
+                  <a:srgbClr val="94A3B8"/>
+                </a:solidFill>
+                <a:latin typeface="Calibri"/>
+              </a:rPr>
+              <a:t>Epochs</a:t>
+            </a:r>
+          </a:p>
+        </p:txBody>
+      </p:sp>
+      <p:sp>
+        <p:nvSpPr>
+          <p:cNvPr id="15" name="TextBox 14"/>
+          <p:cNvSpPr txBox="1"/>
+          <p:nvPr/>
+        </p:nvSpPr>
+        <p:spPr>
+          <a:xfrm>
+            <a:off x="8961120" y="2880360"/>
+            <a:ext cx="2743200" cy="914400"/>
+          </a:xfrm>
+          <a:prstGeom prst="rect">
+            <a:avLst/>
+          </a:prstGeom>
+          <a:noFill/>
+        </p:spPr>
+        <p:txBody>
+          <a:bodyPr wrap="square" anchor="t">
+            <a:spAutoFit/>
+          </a:bodyPr>
+          <a:lstStyle/>
+          <a:p>
+            <a:pPr algn="ctr"/>
+            <a:r>
+              <a:rPr sz="3800" b="1" i="0">
+                <a:solidFill>
+                  <a:srgbClr val="A78BFA"/>
+                </a:solidFill>
+                <a:latin typeface="Calibri"/>
+              </a:rPr>
+              <a:t>30</a:t>
+            </a:r>
+          </a:p>
+        </p:txBody>
+      </p:sp>
+      <p:sp>
+        <p:nvSpPr>
+          <p:cNvPr id="16" name="TextBox 15"/>
+          <p:cNvSpPr txBox="1"/>
+          <p:nvPr/>
+        </p:nvSpPr>
+        <p:spPr>
+          <a:xfrm>
+            <a:off x="8961120" y="4114800"/>
+            <a:ext cx="2743200" cy="457200"/>
+          </a:xfrm>
+          <a:prstGeom prst="rect">
+            <a:avLst/>
+          </a:prstGeom>
+          <a:noFill/>
+        </p:spPr>
+        <p:txBody>
+          <a:bodyPr wrap="square" anchor="t">
+            <a:spAutoFit/>
+          </a:bodyPr>
+          <a:lstStyle/>
+          <a:p>
+            <a:pPr algn="ctr"/>
+            <a:r>
+              <a:rPr sz="1100" b="0" i="1">
+                <a:solidFill>
+                  <a:srgbClr val="94A3B8"/>
+                </a:solidFill>
+                <a:latin typeface="Calibri"/>
+              </a:rPr>
+              <a:t>on Apple Metal (MPS)</a:t>
+            </a:r>
+          </a:p>
+        </p:txBody>
+      </p:sp>
+      <p:sp>
+        <p:nvSpPr>
+          <p:cNvPr id="17" name="Rounded Rectangle 16"/>
+          <p:cNvSpPr/>
+          <p:nvPr/>
+        </p:nvSpPr>
+        <p:spPr>
+          <a:xfrm>
+            <a:off x="914400" y="4846320"/>
+            <a:ext cx="10332720" cy="1463040"/>
+          </a:xfrm>
+          <a:prstGeom prst="roundRect">
+            <a:avLst/>
+          </a:prstGeom>
+          <a:solidFill>
+            <a:srgbClr val="1E293B"/>
+          </a:solidFill>
+          <a:ln w="12700">
+            <a:solidFill>
+              <a:srgbClr val="334155"/>
+            </a:solidFill>
+          </a:ln>
+        </p:spPr>
+        <p:style>
+          <a:lnRef idx="1">
+            <a:schemeClr val="accent1"/>
+          </a:lnRef>
+          <a:fillRef idx="3">
+            <a:schemeClr val="accent1"/>
+          </a:fillRef>
+          <a:effectRef idx="2">
+            <a:schemeClr val="accent1"/>
+          </a:effectRef>
+          <a:fontRef idx="minor">
+            <a:schemeClr val="lt1"/>
+          </a:fontRef>
+        </p:style>
+        <p:txBody>
+          <a:bodyPr rtlCol="0" anchor="ctr"/>
+          <a:lstStyle/>
+          <a:p>
+            <a:pPr algn="ctr"/>
+          </a:p>
+        </p:txBody>
+      </p:sp>
+      <p:sp>
+        <p:nvSpPr>
+          <p:cNvPr id="18" name="TextBox 17"/>
+          <p:cNvSpPr txBox="1"/>
+          <p:nvPr/>
+        </p:nvSpPr>
+        <p:spPr>
+          <a:xfrm>
+            <a:off x="1280160" y="4983480"/>
+            <a:ext cx="9601200" cy="457200"/>
+          </a:xfrm>
+          <a:prstGeom prst="rect">
+            <a:avLst/>
+          </a:prstGeom>
+          <a:noFill/>
+        </p:spPr>
+        <p:txBody>
+          <a:bodyPr wrap="square" anchor="t">
+            <a:spAutoFit/>
+          </a:bodyPr>
+          <a:lstStyle/>
+          <a:p>
             <a:pPr algn="l"/>
             <a:r>
+              <a:rPr sz="1300" b="1" i="0">
+                <a:solidFill>
+                  <a:srgbClr val="A78BFA"/>
+                </a:solidFill>
+                <a:latin typeface="Calibri"/>
+              </a:rPr>
+              <a:t>Convergence</a:t>
+            </a:r>
+          </a:p>
+        </p:txBody>
+      </p:sp>
+      <p:sp>
+        <p:nvSpPr>
+          <p:cNvPr id="19" name="TextBox 18"/>
+          <p:cNvSpPr txBox="1"/>
+          <p:nvPr/>
+        </p:nvSpPr>
+        <p:spPr>
+          <a:xfrm>
+            <a:off x="1280160" y="5394960"/>
+            <a:ext cx="9601200" cy="914400"/>
+          </a:xfrm>
+          <a:prstGeom prst="rect">
+            <a:avLst/>
+          </a:prstGeom>
+          <a:noFill/>
+        </p:spPr>
+        <p:txBody>
+          <a:bodyPr wrap="square" anchor="t">
+            <a:spAutoFit/>
+          </a:bodyPr>
+          <a:lstStyle/>
+          <a:p>
+            <a:pPr algn="l"/>
+            <a:r>
+              <a:rPr sz="1200" b="0" i="0">
+                <a:solidFill>
+                  <a:srgbClr val="F8FAFC"/>
+                </a:solidFill>
+                <a:latin typeface="Calibri"/>
+              </a:rPr>
+              <a:t>Validation loss converged from approximately 0.51 at epoch 1 to approximately 0.43 by epoch 3, indicating the model fit the dataset early and continued to improve over the full training run. The final checkpoint ships with the application.</a:t>
+            </a:r>
+          </a:p>
+        </p:txBody>
+      </p:sp>
+    </p:spTree>
+  </p:cSld>
+  <p:clrMapOvr>
+    <a:masterClrMapping/>
+  </p:clrMapOvr>
+</p:sld>
+</file>
+
+<file path=ppt/slides/slide8.xml><?xml version="1.0" encoding="utf-8"?>
+<p:sld xmlns:a="http://schemas.openxmlformats.org/drawingml/2006/main" xmlns:p="http://schemas.openxmlformats.org/presentationml/2006/main" xmlns:r="http://schemas.openxmlformats.org/officeDocument/2006/relationships">
+  <p:cSld>
+    <p:bg>
+      <p:bgPr>
+        <a:solidFill>
+          <a:srgbClr val="0F172A"/>
+        </a:solidFill>
+        <a:effectLst/>
+      </p:bgPr>
+    </p:bg>
+    <p:spTree>
+      <p:nvGrpSpPr>
+        <p:cNvPr id="1" name=""/>
+        <p:cNvGrpSpPr/>
+        <p:nvPr/>
+      </p:nvGrpSpPr>
+      <p:grpSpPr/>
+      <p:sp>
+        <p:nvSpPr>
+          <p:cNvPr id="2" name="Rectangle 1"/>
+          <p:cNvSpPr/>
+          <p:nvPr/>
+        </p:nvSpPr>
+        <p:spPr>
+          <a:xfrm>
+            <a:off x="914400" y="868680"/>
+            <a:ext cx="73152" cy="411480"/>
+          </a:xfrm>
+          <a:prstGeom prst="rect">
+            <a:avLst/>
+          </a:prstGeom>
+          <a:solidFill>
+            <a:srgbClr val="A78BFA"/>
+          </a:solidFill>
+          <a:ln>
+            <a:noFill/>
+          </a:ln>
+        </p:spPr>
+        <p:style>
+          <a:lnRef idx="1">
+            <a:schemeClr val="accent1"/>
+          </a:lnRef>
+          <a:fillRef idx="3">
+            <a:schemeClr val="accent1"/>
+          </a:fillRef>
+          <a:effectRef idx="2">
+            <a:schemeClr val="accent1"/>
+          </a:effectRef>
+          <a:fontRef idx="minor">
+            <a:schemeClr val="lt1"/>
+          </a:fontRef>
+        </p:style>
+        <p:txBody>
+          <a:bodyPr rtlCol="0" anchor="ctr"/>
+          <a:lstStyle/>
+          <a:p>
+            <a:pPr algn="ctr"/>
+          </a:p>
+        </p:txBody>
+      </p:sp>
+      <p:sp>
+        <p:nvSpPr>
+          <p:cNvPr id="3" name="TextBox 2"/>
+          <p:cNvSpPr txBox="1"/>
+          <p:nvPr/>
+        </p:nvSpPr>
+        <p:spPr>
+          <a:xfrm>
+            <a:off x="1143000" y="777240"/>
+            <a:ext cx="10515600" cy="594360"/>
+          </a:xfrm>
+          <a:prstGeom prst="rect">
+            <a:avLst/>
+          </a:prstGeom>
+          <a:noFill/>
+        </p:spPr>
+        <p:txBody>
+          <a:bodyPr wrap="square" anchor="t">
+            <a:spAutoFit/>
+          </a:bodyPr>
+          <a:lstStyle/>
+          <a:p>
+            <a:pPr algn="l"/>
+            <a:r>
+              <a:rPr sz="2800" b="1" i="0">
+                <a:solidFill>
+                  <a:srgbClr val="F8FAFC"/>
+                </a:solidFill>
+                <a:latin typeface="Calibri"/>
+              </a:rPr>
+              <a:t>Tier model: functional free, quality-gated premium</a:t>
+            </a:r>
+          </a:p>
+        </p:txBody>
+      </p:sp>
+      <p:sp>
+        <p:nvSpPr>
+          <p:cNvPr id="4" name="TextBox 3"/>
+          <p:cNvSpPr txBox="1"/>
+          <p:nvPr/>
+        </p:nvSpPr>
+        <p:spPr>
+          <a:xfrm>
+            <a:off x="914400" y="1737360"/>
+            <a:ext cx="10332720" cy="457200"/>
+          </a:xfrm>
+          <a:prstGeom prst="rect">
+            <a:avLst/>
+          </a:prstGeom>
+          <a:noFill/>
+        </p:spPr>
+        <p:txBody>
+          <a:bodyPr wrap="square" anchor="t">
+            <a:spAutoFit/>
+          </a:bodyPr>
+          <a:lstStyle/>
+          <a:p>
+            <a:pPr algn="l"/>
+            <a:r>
               <a:rPr sz="1400" b="0" i="1">
                 <a:solidFill>
-                  <a:srgbClr val="64748B"/>
+                  <a:srgbClr val="94A3B8"/>
                 </a:solidFill>
                 <a:latin typeface="Calibri"/>
               </a:rPr>
-              <a:t>≈ 52× faster</a:t>
+              <a:t>The premium tier does not unlock new feature categories; it substitutes higher-quality engines for the same workflows.</a:t>
+            </a:r>
+          </a:p>
+        </p:txBody>
+      </p:sp>
+      <p:sp>
+        <p:nvSpPr>
+          <p:cNvPr id="5" name="Rounded Rectangle 4"/>
+          <p:cNvSpPr/>
+          <p:nvPr/>
+        </p:nvSpPr>
+        <p:spPr>
+          <a:xfrm>
+            <a:off x="548640" y="2651760"/>
+            <a:ext cx="5029200" cy="3474720"/>
+          </a:xfrm>
+          <a:prstGeom prst="roundRect">
+            <a:avLst/>
+          </a:prstGeom>
+          <a:solidFill>
+            <a:srgbClr val="1E293B"/>
+          </a:solidFill>
+          <a:ln w="25400">
+            <a:solidFill>
+              <a:srgbClr val="4ADE80"/>
+            </a:solidFill>
+          </a:ln>
+        </p:spPr>
+        <p:style>
+          <a:lnRef idx="1">
+            <a:schemeClr val="accent1"/>
+          </a:lnRef>
+          <a:fillRef idx="3">
+            <a:schemeClr val="accent1"/>
+          </a:fillRef>
+          <a:effectRef idx="2">
+            <a:schemeClr val="accent1"/>
+          </a:effectRef>
+          <a:fontRef idx="minor">
+            <a:schemeClr val="lt1"/>
+          </a:fontRef>
+        </p:style>
+        <p:txBody>
+          <a:bodyPr rtlCol="0" anchor="ctr"/>
+          <a:lstStyle/>
+          <a:p>
+            <a:pPr algn="ctr"/>
+          </a:p>
+        </p:txBody>
+      </p:sp>
+      <p:sp>
+        <p:nvSpPr>
+          <p:cNvPr id="6" name="TextBox 5"/>
+          <p:cNvSpPr txBox="1"/>
+          <p:nvPr/>
+        </p:nvSpPr>
+        <p:spPr>
+          <a:xfrm>
+            <a:off x="822959" y="2834640"/>
+            <a:ext cx="4572000" cy="457200"/>
+          </a:xfrm>
+          <a:prstGeom prst="rect">
+            <a:avLst/>
+          </a:prstGeom>
+          <a:noFill/>
+        </p:spPr>
+        <p:txBody>
+          <a:bodyPr wrap="square" anchor="t">
+            <a:spAutoFit/>
+          </a:bodyPr>
+          <a:lstStyle/>
+          <a:p>
+            <a:pPr algn="l"/>
+            <a:r>
+              <a:rPr sz="2000" b="1" i="0">
+                <a:solidFill>
+                  <a:srgbClr val="4ADE80"/>
+                </a:solidFill>
+                <a:latin typeface="Calibri"/>
+              </a:rPr>
+              <a:t>Free  ·  Pulsefy AI</a:t>
+            </a:r>
+          </a:p>
+        </p:txBody>
+      </p:sp>
+      <p:sp>
+        <p:nvSpPr>
+          <p:cNvPr id="7" name="TextBox 6"/>
+          <p:cNvSpPr txBox="1"/>
+          <p:nvPr/>
+        </p:nvSpPr>
+        <p:spPr>
+          <a:xfrm>
+            <a:off x="822959" y="3474720"/>
+            <a:ext cx="4572000" cy="548640"/>
+          </a:xfrm>
+          <a:prstGeom prst="rect">
+            <a:avLst/>
+          </a:prstGeom>
+          <a:noFill/>
+        </p:spPr>
+        <p:txBody>
+          <a:bodyPr wrap="square" anchor="t">
+            <a:spAutoFit/>
+          </a:bodyPr>
+          <a:lstStyle/>
+          <a:p>
+            <a:pPr algn="l"/>
+            <a:r>
+              <a:rPr sz="1300" b="0" i="0">
+                <a:solidFill>
+                  <a:srgbClr val="F8FAFC"/>
+                </a:solidFill>
+                <a:latin typeface="Calibri"/>
+              </a:rPr>
+              <a:t>Custom LSTM (908k parameters)</a:t>
+            </a:r>
+          </a:p>
+        </p:txBody>
+      </p:sp>
+      <p:sp>
+        <p:nvSpPr>
+          <p:cNvPr id="8" name="TextBox 7"/>
+          <p:cNvSpPr txBox="1"/>
+          <p:nvPr/>
+        </p:nvSpPr>
+        <p:spPr>
+          <a:xfrm>
+            <a:off x="822959" y="4114800"/>
+            <a:ext cx="4572000" cy="548640"/>
+          </a:xfrm>
+          <a:prstGeom prst="rect">
+            <a:avLst/>
+          </a:prstGeom>
+          <a:noFill/>
+        </p:spPr>
+        <p:txBody>
+          <a:bodyPr wrap="square" anchor="t">
+            <a:spAutoFit/>
+          </a:bodyPr>
+          <a:lstStyle/>
+          <a:p>
+            <a:pPr algn="l"/>
+            <a:r>
+              <a:rPr sz="1300" b="0" i="0">
+                <a:solidFill>
+                  <a:srgbClr val="F8FAFC"/>
+                </a:solidFill>
+                <a:latin typeface="Calibri"/>
+              </a:rPr>
+              <a:t>Music generation in 3–7 seconds</a:t>
+            </a:r>
+          </a:p>
+        </p:txBody>
+      </p:sp>
+      <p:sp>
+        <p:nvSpPr>
+          <p:cNvPr id="9" name="TextBox 8"/>
+          <p:cNvSpPr txBox="1"/>
+          <p:nvPr/>
+        </p:nvSpPr>
+        <p:spPr>
+          <a:xfrm>
+            <a:off x="822959" y="4754880"/>
+            <a:ext cx="4572000" cy="548640"/>
+          </a:xfrm>
+          <a:prstGeom prst="rect">
+            <a:avLst/>
+          </a:prstGeom>
+          <a:noFill/>
+        </p:spPr>
+        <p:txBody>
+          <a:bodyPr wrap="square" anchor="t">
+            <a:spAutoFit/>
+          </a:bodyPr>
+          <a:lstStyle/>
+          <a:p>
+            <a:pPr algn="l"/>
+            <a:r>
+              <a:rPr sz="1300" b="0" i="0">
+                <a:solidFill>
+                  <a:srgbClr val="F8FAFC"/>
+                </a:solidFill>
+                <a:latin typeface="Calibri"/>
+              </a:rPr>
+              <a:t>English voiceover via gTTS</a:t>
+            </a:r>
+          </a:p>
+        </p:txBody>
+      </p:sp>
+      <p:sp>
+        <p:nvSpPr>
+          <p:cNvPr id="10" name="TextBox 9"/>
+          <p:cNvSpPr txBox="1"/>
+          <p:nvPr/>
+        </p:nvSpPr>
+        <p:spPr>
+          <a:xfrm>
+            <a:off x="822959" y="5394960"/>
+            <a:ext cx="4572000" cy="548640"/>
+          </a:xfrm>
+          <a:prstGeom prst="rect">
+            <a:avLst/>
+          </a:prstGeom>
+          <a:noFill/>
+        </p:spPr>
+        <p:txBody>
+          <a:bodyPr wrap="square" anchor="t">
+            <a:spAutoFit/>
+          </a:bodyPr>
+          <a:lstStyle/>
+          <a:p>
+            <a:pPr algn="l"/>
+            <a:r>
+              <a:rPr sz="1300" b="0" i="0">
+                <a:solidFill>
+                  <a:srgbClr val="F8FAFC"/>
+                </a:solidFill>
+                <a:latin typeface="Calibri"/>
+              </a:rPr>
+              <a:t>Three scene images per ad</a:t>
+            </a:r>
+          </a:p>
+        </p:txBody>
+      </p:sp>
+      <p:sp>
+        <p:nvSpPr>
+          <p:cNvPr id="11" name="Rounded Rectangle 10"/>
+          <p:cNvSpPr/>
+          <p:nvPr/>
+        </p:nvSpPr>
+        <p:spPr>
+          <a:xfrm>
+            <a:off x="6583680" y="2651760"/>
+            <a:ext cx="5029200" cy="3474720"/>
+          </a:xfrm>
+          <a:prstGeom prst="roundRect">
+            <a:avLst/>
+          </a:prstGeom>
+          <a:solidFill>
+            <a:srgbClr val="1E293B"/>
+          </a:solidFill>
+          <a:ln w="25400">
+            <a:solidFill>
+              <a:srgbClr val="FB923C"/>
+            </a:solidFill>
+          </a:ln>
+        </p:spPr>
+        <p:style>
+          <a:lnRef idx="1">
+            <a:schemeClr val="accent1"/>
+          </a:lnRef>
+          <a:fillRef idx="3">
+            <a:schemeClr val="accent1"/>
+          </a:fillRef>
+          <a:effectRef idx="2">
+            <a:schemeClr val="accent1"/>
+          </a:effectRef>
+          <a:fontRef idx="minor">
+            <a:schemeClr val="lt1"/>
+          </a:fontRef>
+        </p:style>
+        <p:txBody>
+          <a:bodyPr rtlCol="0" anchor="ctr"/>
+          <a:lstStyle/>
+          <a:p>
+            <a:pPr algn="ctr"/>
+          </a:p>
+        </p:txBody>
+      </p:sp>
+      <p:sp>
+        <p:nvSpPr>
+          <p:cNvPr id="12" name="TextBox 11"/>
+          <p:cNvSpPr txBox="1"/>
+          <p:nvPr/>
+        </p:nvSpPr>
+        <p:spPr>
+          <a:xfrm>
+            <a:off x="6858000" y="2834640"/>
+            <a:ext cx="4572000" cy="457200"/>
+          </a:xfrm>
+          <a:prstGeom prst="rect">
+            <a:avLst/>
+          </a:prstGeom>
+          <a:noFill/>
+        </p:spPr>
+        <p:txBody>
+          <a:bodyPr wrap="square" anchor="t">
+            <a:spAutoFit/>
+          </a:bodyPr>
+          <a:lstStyle/>
+          <a:p>
+            <a:pPr algn="l"/>
+            <a:r>
+              <a:rPr sz="2000" b="1" i="0">
+                <a:solidFill>
+                  <a:srgbClr val="FB923C"/>
+                </a:solidFill>
+                <a:latin typeface="Calibri"/>
+              </a:rPr>
+              <a:t>Premium  ·  MusicGen</a:t>
+            </a:r>
+          </a:p>
+        </p:txBody>
+      </p:sp>
+      <p:sp>
+        <p:nvSpPr>
+          <p:cNvPr id="13" name="TextBox 12"/>
+          <p:cNvSpPr txBox="1"/>
+          <p:nvPr/>
+        </p:nvSpPr>
+        <p:spPr>
+          <a:xfrm>
+            <a:off x="6858000" y="3474720"/>
+            <a:ext cx="4572000" cy="548640"/>
+          </a:xfrm>
+          <a:prstGeom prst="rect">
+            <a:avLst/>
+          </a:prstGeom>
+          <a:noFill/>
+        </p:spPr>
+        <p:txBody>
+          <a:bodyPr wrap="square" anchor="t">
+            <a:spAutoFit/>
+          </a:bodyPr>
+          <a:lstStyle/>
+          <a:p>
+            <a:pPr algn="l"/>
+            <a:r>
+              <a:rPr sz="1300" b="0" i="0">
+                <a:solidFill>
+                  <a:srgbClr val="F8FAFC"/>
+                </a:solidFill>
+                <a:latin typeface="Calibri"/>
+              </a:rPr>
+              <a:t>Meta audiocraft (balanced quality)</a:t>
+            </a:r>
+          </a:p>
+        </p:txBody>
+      </p:sp>
+      <p:sp>
+        <p:nvSpPr>
+          <p:cNvPr id="14" name="TextBox 13"/>
+          <p:cNvSpPr txBox="1"/>
+          <p:nvPr/>
+        </p:nvSpPr>
+        <p:spPr>
+          <a:xfrm>
+            <a:off x="6858000" y="4114800"/>
+            <a:ext cx="4572000" cy="548640"/>
+          </a:xfrm>
+          <a:prstGeom prst="rect">
+            <a:avLst/>
+          </a:prstGeom>
+          <a:noFill/>
+        </p:spPr>
+        <p:txBody>
+          <a:bodyPr wrap="square" anchor="t">
+            <a:spAutoFit/>
+          </a:bodyPr>
+          <a:lstStyle/>
+          <a:p>
+            <a:pPr algn="l"/>
+            <a:r>
+              <a:rPr sz="1300" b="0" i="0">
+                <a:solidFill>
+                  <a:srgbClr val="F8FAFC"/>
+                </a:solidFill>
+                <a:latin typeface="Calibri"/>
+              </a:rPr>
+              <a:t>Music generation in 5–7 minutes</a:t>
+            </a:r>
+          </a:p>
+        </p:txBody>
+      </p:sp>
+      <p:sp>
+        <p:nvSpPr>
+          <p:cNvPr id="15" name="TextBox 14"/>
+          <p:cNvSpPr txBox="1"/>
+          <p:nvPr/>
+        </p:nvSpPr>
+        <p:spPr>
+          <a:xfrm>
+            <a:off x="6858000" y="4754880"/>
+            <a:ext cx="4572000" cy="548640"/>
+          </a:xfrm>
+          <a:prstGeom prst="rect">
+            <a:avLst/>
+          </a:prstGeom>
+          <a:noFill/>
+        </p:spPr>
+        <p:txBody>
+          <a:bodyPr wrap="square" anchor="t">
+            <a:spAutoFit/>
+          </a:bodyPr>
+          <a:lstStyle/>
+          <a:p>
+            <a:pPr algn="l"/>
+            <a:r>
+              <a:rPr sz="1300" b="0" i="0">
+                <a:solidFill>
+                  <a:srgbClr val="F8FAFC"/>
+                </a:solidFill>
+                <a:latin typeface="Calibri"/>
+              </a:rPr>
+              <a:t>Voiceover in dozens of languages</a:t>
+            </a:r>
+          </a:p>
+        </p:txBody>
+      </p:sp>
+      <p:sp>
+        <p:nvSpPr>
+          <p:cNvPr id="16" name="TextBox 15"/>
+          <p:cNvSpPr txBox="1"/>
+          <p:nvPr/>
+        </p:nvSpPr>
+        <p:spPr>
+          <a:xfrm>
+            <a:off x="6858000" y="5394960"/>
+            <a:ext cx="4572000" cy="548640"/>
+          </a:xfrm>
+          <a:prstGeom prst="rect">
+            <a:avLst/>
+          </a:prstGeom>
+          <a:noFill/>
+        </p:spPr>
+        <p:txBody>
+          <a:bodyPr wrap="square" anchor="t">
+            <a:spAutoFit/>
+          </a:bodyPr>
+          <a:lstStyle/>
+          <a:p>
+            <a:pPr algn="l"/>
+            <a:r>
+              <a:rPr sz="1300" b="0" i="0">
+                <a:solidFill>
+                  <a:srgbClr val="F8FAFC"/>
+                </a:solidFill>
+                <a:latin typeface="Calibri"/>
+              </a:rPr>
+              <a:t>Up to four scene images per ad</a:t>
+            </a:r>
+          </a:p>
+        </p:txBody>
+      </p:sp>
+    </p:spTree>
+  </p:cSld>
+  <p:clrMapOvr>
+    <a:masterClrMapping/>
+  </p:clrMapOvr>
+</p:sld>
+</file>
+
+<file path=ppt/slides/slide9.xml><?xml version="1.0" encoding="utf-8"?>
+<p:sld xmlns:a="http://schemas.openxmlformats.org/drawingml/2006/main" xmlns:p="http://schemas.openxmlformats.org/presentationml/2006/main" xmlns:r="http://schemas.openxmlformats.org/officeDocument/2006/relationships">
+  <p:cSld>
+    <p:bg>
+      <p:bgPr>
+        <a:solidFill>
+          <a:srgbClr val="0F172A"/>
+        </a:solidFill>
+        <a:effectLst/>
+      </p:bgPr>
+    </p:bg>
+    <p:spTree>
+      <p:nvGrpSpPr>
+        <p:cNvPr id="1" name=""/>
+        <p:cNvGrpSpPr/>
+        <p:nvPr/>
+      </p:nvGrpSpPr>
+      <p:grpSpPr/>
+      <p:sp>
+        <p:nvSpPr>
+          <p:cNvPr id="2" name="Rectangle 1"/>
+          <p:cNvSpPr/>
+          <p:nvPr/>
+        </p:nvSpPr>
+        <p:spPr>
+          <a:xfrm>
+            <a:off x="914400" y="868680"/>
+            <a:ext cx="73152" cy="411480"/>
+          </a:xfrm>
+          <a:prstGeom prst="rect">
+            <a:avLst/>
+          </a:prstGeom>
+          <a:solidFill>
+            <a:srgbClr val="A78BFA"/>
+          </a:solidFill>
+          <a:ln>
+            <a:noFill/>
+          </a:ln>
+        </p:spPr>
+        <p:style>
+          <a:lnRef idx="1">
+            <a:schemeClr val="accent1"/>
+          </a:lnRef>
+          <a:fillRef idx="3">
+            <a:schemeClr val="accent1"/>
+          </a:fillRef>
+          <a:effectRef idx="2">
+            <a:schemeClr val="accent1"/>
+          </a:effectRef>
+          <a:fontRef idx="minor">
+            <a:schemeClr val="lt1"/>
+          </a:fontRef>
+        </p:style>
+        <p:txBody>
+          <a:bodyPr rtlCol="0" anchor="ctr"/>
+          <a:lstStyle/>
+          <a:p>
+            <a:pPr algn="ctr"/>
+          </a:p>
+        </p:txBody>
+      </p:sp>
+      <p:sp>
+        <p:nvSpPr>
+          <p:cNvPr id="3" name="TextBox 2"/>
+          <p:cNvSpPr txBox="1"/>
+          <p:nvPr/>
+        </p:nvSpPr>
+        <p:spPr>
+          <a:xfrm>
+            <a:off x="1143000" y="777240"/>
+            <a:ext cx="10515600" cy="594360"/>
+          </a:xfrm>
+          <a:prstGeom prst="rect">
+            <a:avLst/>
+          </a:prstGeom>
+          <a:noFill/>
+        </p:spPr>
+        <p:txBody>
+          <a:bodyPr wrap="square" anchor="t">
+            <a:spAutoFit/>
+          </a:bodyPr>
+          <a:lstStyle/>
+          <a:p>
+            <a:pPr algn="l"/>
+            <a:r>
+              <a:rPr sz="2800" b="1" i="0">
+                <a:solidFill>
+                  <a:srgbClr val="F8FAFC"/>
+                </a:solidFill>
+                <a:latin typeface="Calibri"/>
+              </a:rPr>
+              <a:t>The Sound Studio</a:t>
+            </a:r>
+          </a:p>
+        </p:txBody>
+      </p:sp>
+      <p:sp>
+        <p:nvSpPr>
+          <p:cNvPr id="4" name="TextBox 3"/>
+          <p:cNvSpPr txBox="1"/>
+          <p:nvPr/>
+        </p:nvSpPr>
+        <p:spPr>
+          <a:xfrm>
+            <a:off x="914400" y="1691640"/>
+            <a:ext cx="10332720" cy="822960"/>
+          </a:xfrm>
+          <a:prstGeom prst="rect">
+            <a:avLst/>
+          </a:prstGeom>
+          <a:noFill/>
+        </p:spPr>
+        <p:txBody>
+          <a:bodyPr wrap="square" anchor="t">
+            <a:spAutoFit/>
+          </a:bodyPr>
+          <a:lstStyle/>
+          <a:p>
+            <a:pPr algn="l"/>
+            <a:r>
+              <a:rPr sz="1300" b="0" i="1">
+                <a:solidFill>
+                  <a:srgbClr val="94A3B8"/>
+                </a:solidFill>
+                <a:latin typeface="Calibri"/>
+              </a:rPr>
+              <a:t>Four tabs correspond to the four AI subsystems. The user moves between them at their own pace and the underlying session state persists across navigations.</a:t>
+            </a:r>
+          </a:p>
+        </p:txBody>
+      </p:sp>
+      <p:sp>
+        <p:nvSpPr>
+          <p:cNvPr id="5" name="Rectangle 4"/>
+          <p:cNvSpPr/>
+          <p:nvPr/>
+        </p:nvSpPr>
+        <p:spPr>
+          <a:xfrm>
+            <a:off x="914400" y="2697480"/>
+            <a:ext cx="10332720" cy="3657600"/>
+          </a:xfrm>
+          <a:prstGeom prst="rect">
+            <a:avLst/>
+          </a:prstGeom>
+          <a:solidFill>
+            <a:srgbClr val="1E293B"/>
+          </a:solidFill>
+          <a:ln w="12700">
+            <a:solidFill>
+              <a:srgbClr val="334155"/>
+            </a:solidFill>
+          </a:ln>
+        </p:spPr>
+        <p:style>
+          <a:lnRef idx="1">
+            <a:schemeClr val="accent1"/>
+          </a:lnRef>
+          <a:fillRef idx="3">
+            <a:schemeClr val="accent1"/>
+          </a:fillRef>
+          <a:effectRef idx="2">
+            <a:schemeClr val="accent1"/>
+          </a:effectRef>
+          <a:fontRef idx="minor">
+            <a:schemeClr val="lt1"/>
+          </a:fontRef>
+        </p:style>
+        <p:txBody>
+          <a:bodyPr rtlCol="0" anchor="ctr" wrap="square"/>
+          <a:lstStyle/>
+          <a:p>
+            <a:pPr algn="ctr"/>
+            <a:r>
+              <a:rPr sz="1300" i="1">
+                <a:solidFill>
+                  <a:srgbClr val="94A3B8"/>
+                </a:solidFill>
+              </a:rPr>
+              <a:t>[Insert: Sound Studio screenshot — Music tab with the
+Pulsefy AI vs MusicGen selector visible]</a:t>
             </a:r>
           </a:p>
         </p:txBody>

--- a/docs/Pulsefy_Defense_Presentation.pptx
+++ b/docs/Pulsefy_Defense_Presentation.pptx
@@ -4,21 +4,24 @@
   <p:sldMasterIdLst>
     <p:sldMasterId id="2147483648" r:id="rId1"/>
   </p:sldMasterIdLst>
+  <p:notesMasterIdLst>
+    <p:notesMasterId r:id="rId14"/>
+  </p:notesMasterIdLst>
   <p:sldIdLst>
-    <p:sldId id="256" r:id="rId7"/>
-    <p:sldId id="257" r:id="rId9"/>
-    <p:sldId id="258" r:id="rId10"/>
-    <p:sldId id="259" r:id="rId11"/>
-    <p:sldId id="260" r:id="rId12"/>
-    <p:sldId id="261" r:id="rId13"/>
-    <p:sldId id="262" r:id="rId14"/>
-    <p:sldId id="263" r:id="rId15"/>
-    <p:sldId id="264" r:id="rId16"/>
-    <p:sldId id="265" r:id="rId17"/>
-    <p:sldId id="266" r:id="rId18"/>
-    <p:sldId id="267" r:id="rId19"/>
+    <p:sldId id="256" r:id="rId2"/>
+    <p:sldId id="257" r:id="rId3"/>
+    <p:sldId id="258" r:id="rId4"/>
+    <p:sldId id="259" r:id="rId5"/>
+    <p:sldId id="260" r:id="rId6"/>
+    <p:sldId id="261" r:id="rId7"/>
+    <p:sldId id="262" r:id="rId8"/>
+    <p:sldId id="263" r:id="rId9"/>
+    <p:sldId id="264" r:id="rId10"/>
+    <p:sldId id="265" r:id="rId11"/>
+    <p:sldId id="266" r:id="rId12"/>
+    <p:sldId id="267" r:id="rId13"/>
   </p:sldIdLst>
-  <p:sldSz cx="12191695" cy="6858000" type="screen4x3"/>
+  <p:sldSz cx="12192000" cy="6858000"/>
   <p:notesSz cx="6858000" cy="9144000"/>
   <p:defaultTextStyle>
     <a:defPPr>
@@ -115,11 +118,27 @@
       </a:defRPr>
     </a:lvl9pPr>
   </p:defaultTextStyle>
+  <p:extLst>
+    <p:ext uri="{EFAFB233-063F-42B5-8137-9DF3F51BA10A}">
+      <p15:sldGuideLst xmlns:p15="http://schemas.microsoft.com/office/powerpoint/2012/main">
+        <p15:guide id="1" orient="horz" pos="2160">
+          <p15:clr>
+            <a:srgbClr val="A4A3A4"/>
+          </p15:clr>
+        </p15:guide>
+        <p15:guide id="2" pos="2880">
+          <p15:clr>
+            <a:srgbClr val="A4A3A4"/>
+          </p15:clr>
+        </p15:guide>
+      </p15:sldGuideLst>
+    </p:ext>
+  </p:extLst>
 </p:presentation>
 </file>
 
 <file path=ppt/notesMasters/notesMaster1.xml><?xml version="1.0" encoding="utf-8"?>
-<p:notesMaster xmlns:a="http://schemas.openxmlformats.org/drawingml/2006/main" xmlns:p="http://schemas.openxmlformats.org/presentationml/2006/main" xmlns:r="http://schemas.openxmlformats.org/officeDocument/2006/relationships">
+<p:notesMaster xmlns:a="http://schemas.openxmlformats.org/drawingml/2006/main" xmlns:r="http://schemas.openxmlformats.org/officeDocument/2006/relationships" xmlns:p="http://schemas.openxmlformats.org/presentationml/2006/main">
   <p:cSld>
     <p:bg>
       <p:bgRef idx="1001">
@@ -140,241 +159,16 @@
           <a:chExt cx="0" cy="0"/>
         </a:xfrm>
       </p:grpSpPr>
-      <p:sp>
-        <p:nvSpPr>
-          <p:cNvPr id="2" name="Header Placeholder 1"/>
-          <p:cNvSpPr>
-            <a:spLocks noGrp="1"/>
-          </p:cNvSpPr>
-          <p:nvPr>
-            <p:ph type="hdr" sz="quarter"/>
-          </p:nvPr>
-        </p:nvSpPr>
-        <p:spPr>
-          <a:xfrm>
-            <a:off x="0" y="0"/>
-            <a:ext cx="2971800" cy="457200"/>
-          </a:xfrm>
-          <a:prstGeom prst="rect">
-            <a:avLst/>
-          </a:prstGeom>
-        </p:spPr>
-        <p:txBody>
-          <a:bodyPr vert="horz" lIns="91440" tIns="45720" rIns="91440" bIns="45720" rtlCol="0"/>
-          <a:lstStyle>
-            <a:lvl1pPr algn="l">
-              <a:defRPr sz="1200"/>
-            </a:lvl1pPr>
-          </a:lstStyle>
-          <a:p>
-            <a:endParaRPr lang="en-US"/>
-          </a:p>
-        </p:txBody>
-      </p:sp>
-      <p:sp>
-        <p:nvSpPr>
-          <p:cNvPr id="3" name="Date Placeholder 2"/>
-          <p:cNvSpPr>
-            <a:spLocks noGrp="1"/>
-          </p:cNvSpPr>
-          <p:nvPr>
-            <p:ph type="dt" idx="1"/>
-          </p:nvPr>
-        </p:nvSpPr>
-        <p:spPr>
-          <a:xfrm>
-            <a:off x="3884613" y="0"/>
-            <a:ext cx="2971800" cy="457200"/>
-          </a:xfrm>
-          <a:prstGeom prst="rect">
-            <a:avLst/>
-          </a:prstGeom>
-        </p:spPr>
-        <p:txBody>
-          <a:bodyPr vert="horz" lIns="91440" tIns="45720" rIns="91440" bIns="45720" rtlCol="0"/>
-          <a:lstStyle>
-            <a:lvl1pPr algn="r">
-              <a:defRPr sz="1200"/>
-            </a:lvl1pPr>
-          </a:lstStyle>
-          <a:p>
-            <a:fld id="{0F89C1C7-3DCD-1040-A9CF-14679D8B5DDD}" type="datetimeFigureOut">
-              <a:rPr lang="en-US" smtClean="0"/>
-              <a:t>10/17/16</a:t>
-            </a:fld>
-            <a:endParaRPr lang="en-US"/>
-          </a:p>
-        </p:txBody>
-      </p:sp>
-      <p:sp>
-        <p:nvSpPr>
-          <p:cNvPr id="4" name="Slide Image Placeholder 3"/>
-          <p:cNvSpPr>
-            <a:spLocks noGrp="1" noRot="1" noChangeAspect="1"/>
-          </p:cNvSpPr>
-          <p:nvPr>
-            <p:ph type="sldImg" idx="2"/>
-          </p:nvPr>
-        </p:nvSpPr>
-        <p:spPr>
-          <a:xfrm>
-            <a:off x="1143000" y="685800"/>
-            <a:ext cx="4572000" cy="3429000"/>
-          </a:xfrm>
-          <a:prstGeom prst="rect">
-            <a:avLst/>
-          </a:prstGeom>
-          <a:noFill/>
-          <a:ln w="12700">
-            <a:solidFill>
-              <a:prstClr val="black"/>
-            </a:solidFill>
-          </a:ln>
-        </p:spPr>
-        <p:txBody>
-          <a:bodyPr vert="horz" lIns="91440" tIns="45720" rIns="91440" bIns="45720" rtlCol="0" anchor="ctr"/>
-          <a:lstStyle/>
-          <a:p>
-            <a:endParaRPr lang="en-US"/>
-          </a:p>
-        </p:txBody>
-      </p:sp>
-      <p:sp>
-        <p:nvSpPr>
-          <p:cNvPr id="5" name="Notes Placeholder 4"/>
-          <p:cNvSpPr>
-            <a:spLocks noGrp="1"/>
-          </p:cNvSpPr>
-          <p:nvPr>
-            <p:ph type="body" sz="quarter" idx="3"/>
-          </p:nvPr>
-        </p:nvSpPr>
-        <p:spPr>
-          <a:xfrm>
-            <a:off x="685800" y="4343400"/>
-            <a:ext cx="5486400" cy="4114800"/>
-          </a:xfrm>
-          <a:prstGeom prst="rect">
-            <a:avLst/>
-          </a:prstGeom>
-        </p:spPr>
-        <p:txBody>
-          <a:bodyPr vert="horz" lIns="91440" tIns="45720" rIns="91440" bIns="45720" rtlCol="0"/>
-          <a:lstStyle/>
-          <a:p>
-            <a:pPr lvl="0"/>
-            <a:r>
-              <a:rPr lang="en-US" smtClean="0"/>
-              <a:t>Click to edit Master text styles</a:t>
-            </a:r>
-          </a:p>
-          <a:p>
-            <a:pPr lvl="1"/>
-            <a:r>
-              <a:rPr lang="en-US" smtClean="0"/>
-              <a:t>Second level</a:t>
-            </a:r>
-          </a:p>
-          <a:p>
-            <a:pPr lvl="2"/>
-            <a:r>
-              <a:rPr lang="en-US" smtClean="0"/>
-              <a:t>Third level</a:t>
-            </a:r>
-          </a:p>
-          <a:p>
-            <a:pPr lvl="3"/>
-            <a:r>
-              <a:rPr lang="en-US" smtClean="0"/>
-              <a:t>Fourth level</a:t>
-            </a:r>
-          </a:p>
-          <a:p>
-            <a:pPr lvl="4"/>
-            <a:r>
-              <a:rPr lang="en-US" smtClean="0"/>
-              <a:t>Fifth level</a:t>
-            </a:r>
-            <a:endParaRPr lang="en-US"/>
-          </a:p>
-        </p:txBody>
-      </p:sp>
-      <p:sp>
-        <p:nvSpPr>
-          <p:cNvPr id="6" name="Footer Placeholder 5"/>
-          <p:cNvSpPr>
-            <a:spLocks noGrp="1"/>
-          </p:cNvSpPr>
-          <p:nvPr>
-            <p:ph type="ftr" sz="quarter" idx="4"/>
-          </p:nvPr>
-        </p:nvSpPr>
-        <p:spPr>
-          <a:xfrm>
-            <a:off x="0" y="8685213"/>
-            <a:ext cx="2971800" cy="457200"/>
-          </a:xfrm>
-          <a:prstGeom prst="rect">
-            <a:avLst/>
-          </a:prstGeom>
-        </p:spPr>
-        <p:txBody>
-          <a:bodyPr vert="horz" lIns="91440" tIns="45720" rIns="91440" bIns="45720" rtlCol="0" anchor="b"/>
-          <a:lstStyle>
-            <a:lvl1pPr algn="l">
-              <a:defRPr sz="1200"/>
-            </a:lvl1pPr>
-          </a:lstStyle>
-          <a:p>
-            <a:endParaRPr lang="en-US"/>
-          </a:p>
-        </p:txBody>
-      </p:sp>
-      <p:sp>
-        <p:nvSpPr>
-          <p:cNvPr id="7" name="Slide Number Placeholder 6"/>
-          <p:cNvSpPr>
-            <a:spLocks noGrp="1"/>
-          </p:cNvSpPr>
-          <p:nvPr>
-            <p:ph type="sldNum" sz="quarter" idx="5"/>
-          </p:nvPr>
-        </p:nvSpPr>
-        <p:spPr>
-          <a:xfrm>
-            <a:off x="3884613" y="8685213"/>
-            <a:ext cx="2971800" cy="457200"/>
-          </a:xfrm>
-          <a:prstGeom prst="rect">
-            <a:avLst/>
-          </a:prstGeom>
-        </p:spPr>
-        <p:txBody>
-          <a:bodyPr vert="horz" lIns="91440" tIns="45720" rIns="91440" bIns="45720" rtlCol="0" anchor="b"/>
-          <a:lstStyle>
-            <a:lvl1pPr algn="r">
-              <a:defRPr sz="1200"/>
-            </a:lvl1pPr>
-          </a:lstStyle>
-          <a:p>
-            <a:fld id="{BB5E49A5-4136-284D-997B-48E1D791AD67}" type="slidenum">
-              <a:rPr lang="en-US" smtClean="0"/>
-              <a:t>‹#›</a:t>
-            </a:fld>
-            <a:endParaRPr lang="en-US"/>
-          </a:p>
-        </p:txBody>
-      </p:sp>
     </p:spTree>
     <p:extLst>
       <p:ext uri="{BB962C8B-B14F-4D97-AF65-F5344CB8AC3E}">
-        <p14:creationId xmlns:p14="http://schemas.microsoft.com/office/powerpoint/2010/main" val="2623252185"/>
+        <p14:creationId xmlns:p14="http://schemas.microsoft.com/office/powerpoint/2010/main" val="151672876"/>
       </p:ext>
     </p:extLst>
   </p:cSld>
   <p:clrMap bg1="lt1" tx1="dk1" bg2="lt2" tx2="dk2" accent1="accent1" accent2="accent2" accent3="accent3" accent4="accent4" accent5="accent5" accent6="accent6" hlink="hlink" folHlink="folHlink"/>
   <p:notesStyle>
-    <a:lvl1pPr marL="0" algn="l" defTabSz="457200" rtl="0" eaLnBrk="1" latinLnBrk="0" hangingPunct="1">
+    <a:lvl1pPr marL="0" algn="l" defTabSz="914400" rtl="0" eaLnBrk="1" latinLnBrk="0" hangingPunct="1">
       <a:defRPr sz="1200" kern="1200">
         <a:solidFill>
           <a:schemeClr val="tx1"/>
@@ -384,7 +178,7 @@
         <a:cs typeface="+mn-cs"/>
       </a:defRPr>
     </a:lvl1pPr>
-    <a:lvl2pPr marL="457200" algn="l" defTabSz="457200" rtl="0" eaLnBrk="1" latinLnBrk="0" hangingPunct="1">
+    <a:lvl2pPr marL="457200" algn="l" defTabSz="914400" rtl="0" eaLnBrk="1" latinLnBrk="0" hangingPunct="1">
       <a:defRPr sz="1200" kern="1200">
         <a:solidFill>
           <a:schemeClr val="tx1"/>
@@ -394,7 +188,7 @@
         <a:cs typeface="+mn-cs"/>
       </a:defRPr>
     </a:lvl2pPr>
-    <a:lvl3pPr marL="914400" algn="l" defTabSz="457200" rtl="0" eaLnBrk="1" latinLnBrk="0" hangingPunct="1">
+    <a:lvl3pPr marL="914400" algn="l" defTabSz="914400" rtl="0" eaLnBrk="1" latinLnBrk="0" hangingPunct="1">
       <a:defRPr sz="1200" kern="1200">
         <a:solidFill>
           <a:schemeClr val="tx1"/>
@@ -404,7 +198,7 @@
         <a:cs typeface="+mn-cs"/>
       </a:defRPr>
     </a:lvl3pPr>
-    <a:lvl4pPr marL="1371600" algn="l" defTabSz="457200" rtl="0" eaLnBrk="1" latinLnBrk="0" hangingPunct="1">
+    <a:lvl4pPr marL="1371600" algn="l" defTabSz="914400" rtl="0" eaLnBrk="1" latinLnBrk="0" hangingPunct="1">
       <a:defRPr sz="1200" kern="1200">
         <a:solidFill>
           <a:schemeClr val="tx1"/>
@@ -414,7 +208,7 @@
         <a:cs typeface="+mn-cs"/>
       </a:defRPr>
     </a:lvl4pPr>
-    <a:lvl5pPr marL="1828800" algn="l" defTabSz="457200" rtl="0" eaLnBrk="1" latinLnBrk="0" hangingPunct="1">
+    <a:lvl5pPr marL="1828800" algn="l" defTabSz="914400" rtl="0" eaLnBrk="1" latinLnBrk="0" hangingPunct="1">
       <a:defRPr sz="1200" kern="1200">
         <a:solidFill>
           <a:schemeClr val="tx1"/>
@@ -424,7 +218,7 @@
         <a:cs typeface="+mn-cs"/>
       </a:defRPr>
     </a:lvl5pPr>
-    <a:lvl6pPr marL="2286000" algn="l" defTabSz="457200" rtl="0" eaLnBrk="1" latinLnBrk="0" hangingPunct="1">
+    <a:lvl6pPr marL="2286000" algn="l" defTabSz="914400" rtl="0" eaLnBrk="1" latinLnBrk="0" hangingPunct="1">
       <a:defRPr sz="1200" kern="1200">
         <a:solidFill>
           <a:schemeClr val="tx1"/>
@@ -434,7 +228,7 @@
         <a:cs typeface="+mn-cs"/>
       </a:defRPr>
     </a:lvl6pPr>
-    <a:lvl7pPr marL="2743200" algn="l" defTabSz="457200" rtl="0" eaLnBrk="1" latinLnBrk="0" hangingPunct="1">
+    <a:lvl7pPr marL="2743200" algn="l" defTabSz="914400" rtl="0" eaLnBrk="1" latinLnBrk="0" hangingPunct="1">
       <a:defRPr sz="1200" kern="1200">
         <a:solidFill>
           <a:schemeClr val="tx1"/>
@@ -444,7 +238,7 @@
         <a:cs typeface="+mn-cs"/>
       </a:defRPr>
     </a:lvl7pPr>
-    <a:lvl8pPr marL="3200400" algn="l" defTabSz="457200" rtl="0" eaLnBrk="1" latinLnBrk="0" hangingPunct="1">
+    <a:lvl8pPr marL="3200400" algn="l" defTabSz="914400" rtl="0" eaLnBrk="1" latinLnBrk="0" hangingPunct="1">
       <a:defRPr sz="1200" kern="1200">
         <a:solidFill>
           <a:schemeClr val="tx1"/>
@@ -454,7 +248,7 @@
         <a:cs typeface="+mn-cs"/>
       </a:defRPr>
     </a:lvl8pPr>
-    <a:lvl9pPr marL="3657600" algn="l" defTabSz="457200" rtl="0" eaLnBrk="1" latinLnBrk="0" hangingPunct="1">
+    <a:lvl9pPr marL="3657600" algn="l" defTabSz="914400" rtl="0" eaLnBrk="1" latinLnBrk="0" hangingPunct="1">
       <a:defRPr sz="1200" kern="1200">
         <a:solidFill>
           <a:schemeClr val="tx1"/>
@@ -469,7 +263,7 @@
 </file>
 
 <file path=ppt/notesSlides/notesSlide1.xml><?xml version="1.0" encoding="utf-8"?>
-<p:notes xmlns:a="http://schemas.openxmlformats.org/drawingml/2006/main" xmlns:p="http://schemas.openxmlformats.org/presentationml/2006/main" xmlns:r="http://schemas.openxmlformats.org/officeDocument/2006/relationships">
+<p:notes xmlns:a="http://schemas.openxmlformats.org/drawingml/2006/main" xmlns:r="http://schemas.openxmlformats.org/officeDocument/2006/relationships" xmlns:p="http://schemas.openxmlformats.org/presentationml/2006/main">
   <p:cSld>
     <p:spTree>
       <p:nvGrpSpPr>
@@ -489,7 +283,7 @@
         <p:nvSpPr>
           <p:cNvPr id="2" name="Slide Image Placeholder 1"/>
           <p:cNvSpPr>
-            <a:spLocks noGrp="1"/>
+            <a:spLocks noGrp="1" noRot="1" noChangeAspect="1"/>
           </p:cNvSpPr>
           <p:nvPr>
             <p:ph type="sldImg" idx="2"/>
@@ -504,7 +298,7 @@
             <a:spLocks noGrp="1"/>
           </p:cNvSpPr>
           <p:nvPr>
-            <p:ph type="body" idx="3" sz="quarter"/>
+            <p:ph type="body" sz="quarter" idx="3"/>
           </p:nvPr>
         </p:nvSpPr>
         <p:spPr/>
@@ -525,7 +319,7 @@
             <a:spLocks noGrp="1"/>
           </p:cNvSpPr>
           <p:nvPr>
-            <p:ph type="sldNum" idx="5" sz="quarter"/>
+            <p:ph type="sldNum" sz="quarter" idx="5"/>
           </p:nvPr>
         </p:nvSpPr>
         <p:spPr/>
@@ -539,7 +333,7 @@
 </file>
 
 <file path=ppt/notesSlides/notesSlide10.xml><?xml version="1.0" encoding="utf-8"?>
-<p:notes xmlns:a="http://schemas.openxmlformats.org/drawingml/2006/main" xmlns:p="http://schemas.openxmlformats.org/presentationml/2006/main" xmlns:r="http://schemas.openxmlformats.org/officeDocument/2006/relationships">
+<p:notes xmlns:a="http://schemas.openxmlformats.org/drawingml/2006/main" xmlns:r="http://schemas.openxmlformats.org/officeDocument/2006/relationships" xmlns:p="http://schemas.openxmlformats.org/presentationml/2006/main">
   <p:cSld>
     <p:spTree>
       <p:nvGrpSpPr>
@@ -559,7 +353,7 @@
         <p:nvSpPr>
           <p:cNvPr id="2" name="Slide Image Placeholder 1"/>
           <p:cNvSpPr>
-            <a:spLocks noGrp="1"/>
+            <a:spLocks noGrp="1" noRot="1" noChangeAspect="1"/>
           </p:cNvSpPr>
           <p:nvPr>
             <p:ph type="sldImg" idx="2"/>
@@ -574,7 +368,7 @@
             <a:spLocks noGrp="1"/>
           </p:cNvSpPr>
           <p:nvPr>
-            <p:ph type="body" idx="3" sz="quarter"/>
+            <p:ph type="body" sz="quarter" idx="3"/>
           </p:nvPr>
         </p:nvSpPr>
         <p:spPr/>
@@ -595,7 +389,7 @@
             <a:spLocks noGrp="1"/>
           </p:cNvSpPr>
           <p:nvPr>
-            <p:ph type="sldNum" idx="5" sz="quarter"/>
+            <p:ph type="sldNum" sz="quarter" idx="5"/>
           </p:nvPr>
         </p:nvSpPr>
         <p:spPr/>
@@ -609,7 +403,7 @@
 </file>
 
 <file path=ppt/notesSlides/notesSlide11.xml><?xml version="1.0" encoding="utf-8"?>
-<p:notes xmlns:a="http://schemas.openxmlformats.org/drawingml/2006/main" xmlns:p="http://schemas.openxmlformats.org/presentationml/2006/main" xmlns:r="http://schemas.openxmlformats.org/officeDocument/2006/relationships">
+<p:notes xmlns:a="http://schemas.openxmlformats.org/drawingml/2006/main" xmlns:r="http://schemas.openxmlformats.org/officeDocument/2006/relationships" xmlns:p="http://schemas.openxmlformats.org/presentationml/2006/main">
   <p:cSld>
     <p:spTree>
       <p:nvGrpSpPr>
@@ -629,7 +423,7 @@
         <p:nvSpPr>
           <p:cNvPr id="2" name="Slide Image Placeholder 1"/>
           <p:cNvSpPr>
-            <a:spLocks noGrp="1"/>
+            <a:spLocks noGrp="1" noRot="1" noChangeAspect="1"/>
           </p:cNvSpPr>
           <p:nvPr>
             <p:ph type="sldImg" idx="2"/>
@@ -644,7 +438,7 @@
             <a:spLocks noGrp="1"/>
           </p:cNvSpPr>
           <p:nvPr>
-            <p:ph type="body" idx="3" sz="quarter"/>
+            <p:ph type="body" sz="quarter" idx="3"/>
           </p:nvPr>
         </p:nvSpPr>
         <p:spPr/>
@@ -665,7 +459,7 @@
             <a:spLocks noGrp="1"/>
           </p:cNvSpPr>
           <p:nvPr>
-            <p:ph type="sldNum" idx="5" sz="quarter"/>
+            <p:ph type="sldNum" sz="quarter" idx="5"/>
           </p:nvPr>
         </p:nvSpPr>
         <p:spPr/>
@@ -679,7 +473,7 @@
 </file>
 
 <file path=ppt/notesSlides/notesSlide12.xml><?xml version="1.0" encoding="utf-8"?>
-<p:notes xmlns:a="http://schemas.openxmlformats.org/drawingml/2006/main" xmlns:p="http://schemas.openxmlformats.org/presentationml/2006/main" xmlns:r="http://schemas.openxmlformats.org/officeDocument/2006/relationships">
+<p:notes xmlns:a="http://schemas.openxmlformats.org/drawingml/2006/main" xmlns:r="http://schemas.openxmlformats.org/officeDocument/2006/relationships" xmlns:p="http://schemas.openxmlformats.org/presentationml/2006/main">
   <p:cSld>
     <p:spTree>
       <p:nvGrpSpPr>
@@ -699,7 +493,7 @@
         <p:nvSpPr>
           <p:cNvPr id="2" name="Slide Image Placeholder 1"/>
           <p:cNvSpPr>
-            <a:spLocks noGrp="1"/>
+            <a:spLocks noGrp="1" noRot="1" noChangeAspect="1"/>
           </p:cNvSpPr>
           <p:nvPr>
             <p:ph type="sldImg" idx="2"/>
@@ -714,7 +508,7 @@
             <a:spLocks noGrp="1"/>
           </p:cNvSpPr>
           <p:nvPr>
-            <p:ph type="body" idx="3" sz="quarter"/>
+            <p:ph type="body" sz="quarter" idx="3"/>
           </p:nvPr>
         </p:nvSpPr>
         <p:spPr/>
@@ -735,7 +529,7 @@
             <a:spLocks noGrp="1"/>
           </p:cNvSpPr>
           <p:nvPr>
-            <p:ph type="sldNum" idx="5" sz="quarter"/>
+            <p:ph type="sldNum" sz="quarter" idx="5"/>
           </p:nvPr>
         </p:nvSpPr>
         <p:spPr/>
@@ -749,7 +543,7 @@
 </file>
 
 <file path=ppt/notesSlides/notesSlide2.xml><?xml version="1.0" encoding="utf-8"?>
-<p:notes xmlns:a="http://schemas.openxmlformats.org/drawingml/2006/main" xmlns:p="http://schemas.openxmlformats.org/presentationml/2006/main" xmlns:r="http://schemas.openxmlformats.org/officeDocument/2006/relationships">
+<p:notes xmlns:a="http://schemas.openxmlformats.org/drawingml/2006/main" xmlns:r="http://schemas.openxmlformats.org/officeDocument/2006/relationships" xmlns:p="http://schemas.openxmlformats.org/presentationml/2006/main">
   <p:cSld>
     <p:spTree>
       <p:nvGrpSpPr>
@@ -769,7 +563,7 @@
         <p:nvSpPr>
           <p:cNvPr id="2" name="Slide Image Placeholder 1"/>
           <p:cNvSpPr>
-            <a:spLocks noGrp="1"/>
+            <a:spLocks noGrp="1" noRot="1" noChangeAspect="1"/>
           </p:cNvSpPr>
           <p:nvPr>
             <p:ph type="sldImg" idx="2"/>
@@ -784,7 +578,7 @@
             <a:spLocks noGrp="1"/>
           </p:cNvSpPr>
           <p:nvPr>
-            <p:ph type="body" idx="3" sz="quarter"/>
+            <p:ph type="body" sz="quarter" idx="3"/>
           </p:nvPr>
         </p:nvSpPr>
         <p:spPr/>
@@ -805,7 +599,7 @@
             <a:spLocks noGrp="1"/>
           </p:cNvSpPr>
           <p:nvPr>
-            <p:ph type="sldNum" idx="5" sz="quarter"/>
+            <p:ph type="sldNum" sz="quarter" idx="5"/>
           </p:nvPr>
         </p:nvSpPr>
         <p:spPr/>
@@ -819,7 +613,7 @@
 </file>
 
 <file path=ppt/notesSlides/notesSlide3.xml><?xml version="1.0" encoding="utf-8"?>
-<p:notes xmlns:a="http://schemas.openxmlformats.org/drawingml/2006/main" xmlns:p="http://schemas.openxmlformats.org/presentationml/2006/main" xmlns:r="http://schemas.openxmlformats.org/officeDocument/2006/relationships">
+<p:notes xmlns:a="http://schemas.openxmlformats.org/drawingml/2006/main" xmlns:r="http://schemas.openxmlformats.org/officeDocument/2006/relationships" xmlns:p="http://schemas.openxmlformats.org/presentationml/2006/main">
   <p:cSld>
     <p:spTree>
       <p:nvGrpSpPr>
@@ -839,7 +633,7 @@
         <p:nvSpPr>
           <p:cNvPr id="2" name="Slide Image Placeholder 1"/>
           <p:cNvSpPr>
-            <a:spLocks noGrp="1"/>
+            <a:spLocks noGrp="1" noRot="1" noChangeAspect="1"/>
           </p:cNvSpPr>
           <p:nvPr>
             <p:ph type="sldImg" idx="2"/>
@@ -854,7 +648,7 @@
             <a:spLocks noGrp="1"/>
           </p:cNvSpPr>
           <p:nvPr>
-            <p:ph type="body" idx="3" sz="quarter"/>
+            <p:ph type="body" sz="quarter" idx="3"/>
           </p:nvPr>
         </p:nvSpPr>
         <p:spPr/>
@@ -875,7 +669,7 @@
             <a:spLocks noGrp="1"/>
           </p:cNvSpPr>
           <p:nvPr>
-            <p:ph type="sldNum" idx="5" sz="quarter"/>
+            <p:ph type="sldNum" sz="quarter" idx="5"/>
           </p:nvPr>
         </p:nvSpPr>
         <p:spPr/>
@@ -889,7 +683,7 @@
 </file>
 
 <file path=ppt/notesSlides/notesSlide4.xml><?xml version="1.0" encoding="utf-8"?>
-<p:notes xmlns:a="http://schemas.openxmlformats.org/drawingml/2006/main" xmlns:p="http://schemas.openxmlformats.org/presentationml/2006/main" xmlns:r="http://schemas.openxmlformats.org/officeDocument/2006/relationships">
+<p:notes xmlns:a="http://schemas.openxmlformats.org/drawingml/2006/main" xmlns:r="http://schemas.openxmlformats.org/officeDocument/2006/relationships" xmlns:p="http://schemas.openxmlformats.org/presentationml/2006/main">
   <p:cSld>
     <p:spTree>
       <p:nvGrpSpPr>
@@ -909,7 +703,7 @@
         <p:nvSpPr>
           <p:cNvPr id="2" name="Slide Image Placeholder 1"/>
           <p:cNvSpPr>
-            <a:spLocks noGrp="1"/>
+            <a:spLocks noGrp="1" noRot="1" noChangeAspect="1"/>
           </p:cNvSpPr>
           <p:nvPr>
             <p:ph type="sldImg" idx="2"/>
@@ -924,7 +718,7 @@
             <a:spLocks noGrp="1"/>
           </p:cNvSpPr>
           <p:nvPr>
-            <p:ph type="body" idx="3" sz="quarter"/>
+            <p:ph type="body" sz="quarter" idx="3"/>
           </p:nvPr>
         </p:nvSpPr>
         <p:spPr/>
@@ -945,7 +739,7 @@
             <a:spLocks noGrp="1"/>
           </p:cNvSpPr>
           <p:nvPr>
-            <p:ph type="sldNum" idx="5" sz="quarter"/>
+            <p:ph type="sldNum" sz="quarter" idx="5"/>
           </p:nvPr>
         </p:nvSpPr>
         <p:spPr/>
@@ -959,7 +753,7 @@
 </file>
 
 <file path=ppt/notesSlides/notesSlide5.xml><?xml version="1.0" encoding="utf-8"?>
-<p:notes xmlns:a="http://schemas.openxmlformats.org/drawingml/2006/main" xmlns:p="http://schemas.openxmlformats.org/presentationml/2006/main" xmlns:r="http://schemas.openxmlformats.org/officeDocument/2006/relationships">
+<p:notes xmlns:a="http://schemas.openxmlformats.org/drawingml/2006/main" xmlns:r="http://schemas.openxmlformats.org/officeDocument/2006/relationships" xmlns:p="http://schemas.openxmlformats.org/presentationml/2006/main">
   <p:cSld>
     <p:spTree>
       <p:nvGrpSpPr>
@@ -979,7 +773,7 @@
         <p:nvSpPr>
           <p:cNvPr id="2" name="Slide Image Placeholder 1"/>
           <p:cNvSpPr>
-            <a:spLocks noGrp="1"/>
+            <a:spLocks noGrp="1" noRot="1" noChangeAspect="1"/>
           </p:cNvSpPr>
           <p:nvPr>
             <p:ph type="sldImg" idx="2"/>
@@ -994,7 +788,7 @@
             <a:spLocks noGrp="1"/>
           </p:cNvSpPr>
           <p:nvPr>
-            <p:ph type="body" idx="3" sz="quarter"/>
+            <p:ph type="body" sz="quarter" idx="3"/>
           </p:nvPr>
         </p:nvSpPr>
         <p:spPr/>
@@ -1015,7 +809,7 @@
             <a:spLocks noGrp="1"/>
           </p:cNvSpPr>
           <p:nvPr>
-            <p:ph type="sldNum" idx="5" sz="quarter"/>
+            <p:ph type="sldNum" sz="quarter" idx="5"/>
           </p:nvPr>
         </p:nvSpPr>
         <p:spPr/>
@@ -1029,7 +823,7 @@
 </file>
 
 <file path=ppt/notesSlides/notesSlide6.xml><?xml version="1.0" encoding="utf-8"?>
-<p:notes xmlns:a="http://schemas.openxmlformats.org/drawingml/2006/main" xmlns:p="http://schemas.openxmlformats.org/presentationml/2006/main" xmlns:r="http://schemas.openxmlformats.org/officeDocument/2006/relationships">
+<p:notes xmlns:a="http://schemas.openxmlformats.org/drawingml/2006/main" xmlns:r="http://schemas.openxmlformats.org/officeDocument/2006/relationships" xmlns:p="http://schemas.openxmlformats.org/presentationml/2006/main">
   <p:cSld>
     <p:spTree>
       <p:nvGrpSpPr>
@@ -1049,7 +843,7 @@
         <p:nvSpPr>
           <p:cNvPr id="2" name="Slide Image Placeholder 1"/>
           <p:cNvSpPr>
-            <a:spLocks noGrp="1"/>
+            <a:spLocks noGrp="1" noRot="1" noChangeAspect="1"/>
           </p:cNvSpPr>
           <p:nvPr>
             <p:ph type="sldImg" idx="2"/>
@@ -1064,7 +858,7 @@
             <a:spLocks noGrp="1"/>
           </p:cNvSpPr>
           <p:nvPr>
-            <p:ph type="body" idx="3" sz="quarter"/>
+            <p:ph type="body" sz="quarter" idx="3"/>
           </p:nvPr>
         </p:nvSpPr>
         <p:spPr/>
@@ -1085,7 +879,7 @@
             <a:spLocks noGrp="1"/>
           </p:cNvSpPr>
           <p:nvPr>
-            <p:ph type="sldNum" idx="5" sz="quarter"/>
+            <p:ph type="sldNum" sz="quarter" idx="5"/>
           </p:nvPr>
         </p:nvSpPr>
         <p:spPr/>
@@ -1099,7 +893,7 @@
 </file>
 
 <file path=ppt/notesSlides/notesSlide7.xml><?xml version="1.0" encoding="utf-8"?>
-<p:notes xmlns:a="http://schemas.openxmlformats.org/drawingml/2006/main" xmlns:p="http://schemas.openxmlformats.org/presentationml/2006/main" xmlns:r="http://schemas.openxmlformats.org/officeDocument/2006/relationships">
+<p:notes xmlns:a="http://schemas.openxmlformats.org/drawingml/2006/main" xmlns:r="http://schemas.openxmlformats.org/officeDocument/2006/relationships" xmlns:p="http://schemas.openxmlformats.org/presentationml/2006/main">
   <p:cSld>
     <p:spTree>
       <p:nvGrpSpPr>
@@ -1119,7 +913,7 @@
         <p:nvSpPr>
           <p:cNvPr id="2" name="Slide Image Placeholder 1"/>
           <p:cNvSpPr>
-            <a:spLocks noGrp="1"/>
+            <a:spLocks noGrp="1" noRot="1" noChangeAspect="1"/>
           </p:cNvSpPr>
           <p:nvPr>
             <p:ph type="sldImg" idx="2"/>
@@ -1134,7 +928,7 @@
             <a:spLocks noGrp="1"/>
           </p:cNvSpPr>
           <p:nvPr>
-            <p:ph type="body" idx="3" sz="quarter"/>
+            <p:ph type="body" sz="quarter" idx="3"/>
           </p:nvPr>
         </p:nvSpPr>
         <p:spPr/>
@@ -1155,7 +949,7 @@
             <a:spLocks noGrp="1"/>
           </p:cNvSpPr>
           <p:nvPr>
-            <p:ph type="sldNum" idx="5" sz="quarter"/>
+            <p:ph type="sldNum" sz="quarter" idx="5"/>
           </p:nvPr>
         </p:nvSpPr>
         <p:spPr/>
@@ -1169,7 +963,7 @@
 </file>
 
 <file path=ppt/notesSlides/notesSlide8.xml><?xml version="1.0" encoding="utf-8"?>
-<p:notes xmlns:a="http://schemas.openxmlformats.org/drawingml/2006/main" xmlns:p="http://schemas.openxmlformats.org/presentationml/2006/main" xmlns:r="http://schemas.openxmlformats.org/officeDocument/2006/relationships">
+<p:notes xmlns:a="http://schemas.openxmlformats.org/drawingml/2006/main" xmlns:r="http://schemas.openxmlformats.org/officeDocument/2006/relationships" xmlns:p="http://schemas.openxmlformats.org/presentationml/2006/main">
   <p:cSld>
     <p:spTree>
       <p:nvGrpSpPr>
@@ -1189,7 +983,7 @@
         <p:nvSpPr>
           <p:cNvPr id="2" name="Slide Image Placeholder 1"/>
           <p:cNvSpPr>
-            <a:spLocks noGrp="1"/>
+            <a:spLocks noGrp="1" noRot="1" noChangeAspect="1"/>
           </p:cNvSpPr>
           <p:nvPr>
             <p:ph type="sldImg" idx="2"/>
@@ -1204,7 +998,7 @@
             <a:spLocks noGrp="1"/>
           </p:cNvSpPr>
           <p:nvPr>
-            <p:ph type="body" idx="3" sz="quarter"/>
+            <p:ph type="body" sz="quarter" idx="3"/>
           </p:nvPr>
         </p:nvSpPr>
         <p:spPr/>
@@ -1225,7 +1019,7 @@
             <a:spLocks noGrp="1"/>
           </p:cNvSpPr>
           <p:nvPr>
-            <p:ph type="sldNum" idx="5" sz="quarter"/>
+            <p:ph type="sldNum" sz="quarter" idx="5"/>
           </p:nvPr>
         </p:nvSpPr>
         <p:spPr/>
@@ -1239,7 +1033,7 @@
 </file>
 
 <file path=ppt/notesSlides/notesSlide9.xml><?xml version="1.0" encoding="utf-8"?>
-<p:notes xmlns:a="http://schemas.openxmlformats.org/drawingml/2006/main" xmlns:p="http://schemas.openxmlformats.org/presentationml/2006/main" xmlns:r="http://schemas.openxmlformats.org/officeDocument/2006/relationships">
+<p:notes xmlns:a="http://schemas.openxmlformats.org/drawingml/2006/main" xmlns:r="http://schemas.openxmlformats.org/officeDocument/2006/relationships" xmlns:p="http://schemas.openxmlformats.org/presentationml/2006/main">
   <p:cSld>
     <p:spTree>
       <p:nvGrpSpPr>
@@ -1259,7 +1053,7 @@
         <p:nvSpPr>
           <p:cNvPr id="2" name="Slide Image Placeholder 1"/>
           <p:cNvSpPr>
-            <a:spLocks noGrp="1"/>
+            <a:spLocks noGrp="1" noRot="1" noChangeAspect="1"/>
           </p:cNvSpPr>
           <p:nvPr>
             <p:ph type="sldImg" idx="2"/>
@@ -1274,7 +1068,7 @@
             <a:spLocks noGrp="1"/>
           </p:cNvSpPr>
           <p:nvPr>
-            <p:ph type="body" idx="3" sz="quarter"/>
+            <p:ph type="body" sz="quarter" idx="3"/>
           </p:nvPr>
         </p:nvSpPr>
         <p:spPr/>
@@ -1295,7 +1089,7 @@
             <a:spLocks noGrp="1"/>
           </p:cNvSpPr>
           <p:nvPr>
-            <p:ph type="sldNum" idx="5" sz="quarter"/>
+            <p:ph type="sldNum" sz="quarter" idx="5"/>
           </p:nvPr>
         </p:nvSpPr>
         <p:spPr/>
@@ -1346,10 +1140,9 @@
           <a:lstStyle/>
           <a:p>
             <a:r>
-              <a:rPr lang="en-US" smtClean="0"/>
+              <a:rPr lang="en-US"/>
               <a:t>Click to edit Master title style</a:t>
             </a:r>
-            <a:endParaRPr lang="en-US"/>
           </a:p>
         </p:txBody>
       </p:sp>
@@ -1465,10 +1258,9 @@
           </a:lstStyle>
           <a:p>
             <a:r>
-              <a:rPr lang="en-US" smtClean="0"/>
+              <a:rPr lang="en-US"/>
               <a:t>Click to edit Master subtitle style</a:t>
             </a:r>
-            <a:endParaRPr lang="en-US"/>
           </a:p>
         </p:txBody>
       </p:sp>
@@ -1489,7 +1281,7 @@
           <a:p>
             <a:fld id="{5BCAD085-E8A6-8845-BD4E-CB4CCA059FC4}" type="datetimeFigureOut">
               <a:rPr lang="en-US" smtClean="0"/>
-              <a:t>1/27/13</a:t>
+              <a:t>6/27/26</a:t>
             </a:fld>
             <a:endParaRPr lang="en-US"/>
           </a:p>
@@ -1583,10 +1375,9 @@
           <a:lstStyle/>
           <a:p>
             <a:r>
-              <a:rPr lang="en-US" smtClean="0"/>
+              <a:rPr lang="en-US"/>
               <a:t>Click to edit Master title style</a:t>
             </a:r>
-            <a:endParaRPr lang="en-US"/>
           </a:p>
         </p:txBody>
       </p:sp>
@@ -1607,38 +1398,37 @@
           <a:p>
             <a:pPr lvl="0"/>
             <a:r>
-              <a:rPr lang="en-US" smtClean="0"/>
+              <a:rPr lang="en-US"/>
               <a:t>Click to edit Master text styles</a:t>
             </a:r>
           </a:p>
           <a:p>
             <a:pPr lvl="1"/>
             <a:r>
-              <a:rPr lang="en-US" smtClean="0"/>
+              <a:rPr lang="en-US"/>
               <a:t>Second level</a:t>
             </a:r>
           </a:p>
           <a:p>
             <a:pPr lvl="2"/>
             <a:r>
-              <a:rPr lang="en-US" smtClean="0"/>
+              <a:rPr lang="en-US"/>
               <a:t>Third level</a:t>
             </a:r>
           </a:p>
           <a:p>
             <a:pPr lvl="3"/>
             <a:r>
-              <a:rPr lang="en-US" smtClean="0"/>
+              <a:rPr lang="en-US"/>
               <a:t>Fourth level</a:t>
             </a:r>
           </a:p>
           <a:p>
             <a:pPr lvl="4"/>
             <a:r>
-              <a:rPr lang="en-US" smtClean="0"/>
+              <a:rPr lang="en-US"/>
               <a:t>Fifth level</a:t>
             </a:r>
-            <a:endParaRPr lang="en-US"/>
           </a:p>
         </p:txBody>
       </p:sp>
@@ -1659,7 +1449,7 @@
           <a:p>
             <a:fld id="{5BCAD085-E8A6-8845-BD4E-CB4CCA059FC4}" type="datetimeFigureOut">
               <a:rPr lang="en-US" smtClean="0"/>
-              <a:t>1/27/13</a:t>
+              <a:t>6/27/26</a:t>
             </a:fld>
             <a:endParaRPr lang="en-US"/>
           </a:p>
@@ -1758,10 +1548,9 @@
           <a:lstStyle/>
           <a:p>
             <a:r>
-              <a:rPr lang="en-US" smtClean="0"/>
+              <a:rPr lang="en-US"/>
               <a:t>Click to edit Master title style</a:t>
             </a:r>
-            <a:endParaRPr lang="en-US"/>
           </a:p>
         </p:txBody>
       </p:sp>
@@ -1787,38 +1576,37 @@
           <a:p>
             <a:pPr lvl="0"/>
             <a:r>
-              <a:rPr lang="en-US" smtClean="0"/>
+              <a:rPr lang="en-US"/>
               <a:t>Click to edit Master text styles</a:t>
             </a:r>
           </a:p>
           <a:p>
             <a:pPr lvl="1"/>
             <a:r>
-              <a:rPr lang="en-US" smtClean="0"/>
+              <a:rPr lang="en-US"/>
               <a:t>Second level</a:t>
             </a:r>
           </a:p>
           <a:p>
             <a:pPr lvl="2"/>
             <a:r>
-              <a:rPr lang="en-US" smtClean="0"/>
+              <a:rPr lang="en-US"/>
               <a:t>Third level</a:t>
             </a:r>
           </a:p>
           <a:p>
             <a:pPr lvl="3"/>
             <a:r>
-              <a:rPr lang="en-US" smtClean="0"/>
+              <a:rPr lang="en-US"/>
               <a:t>Fourth level</a:t>
             </a:r>
           </a:p>
           <a:p>
             <a:pPr lvl="4"/>
             <a:r>
-              <a:rPr lang="en-US" smtClean="0"/>
+              <a:rPr lang="en-US"/>
               <a:t>Fifth level</a:t>
             </a:r>
-            <a:endParaRPr lang="en-US"/>
           </a:p>
         </p:txBody>
       </p:sp>
@@ -1839,7 +1627,7 @@
           <a:p>
             <a:fld id="{5BCAD085-E8A6-8845-BD4E-CB4CCA059FC4}" type="datetimeFigureOut">
               <a:rPr lang="en-US" smtClean="0"/>
-              <a:t>1/27/13</a:t>
+              <a:t>6/27/26</a:t>
             </a:fld>
             <a:endParaRPr lang="en-US"/>
           </a:p>
@@ -1933,10 +1721,9 @@
           <a:lstStyle/>
           <a:p>
             <a:r>
-              <a:rPr lang="en-US" smtClean="0"/>
+              <a:rPr lang="en-US"/>
               <a:t>Click to edit Master title style</a:t>
             </a:r>
-            <a:endParaRPr lang="en-US"/>
           </a:p>
         </p:txBody>
       </p:sp>
@@ -1957,38 +1744,37 @@
           <a:p>
             <a:pPr lvl="0"/>
             <a:r>
-              <a:rPr lang="en-US" smtClean="0"/>
+              <a:rPr lang="en-US"/>
               <a:t>Click to edit Master text styles</a:t>
             </a:r>
           </a:p>
           <a:p>
             <a:pPr lvl="1"/>
             <a:r>
-              <a:rPr lang="en-US" smtClean="0"/>
+              <a:rPr lang="en-US"/>
               <a:t>Second level</a:t>
             </a:r>
           </a:p>
           <a:p>
             <a:pPr lvl="2"/>
             <a:r>
-              <a:rPr lang="en-US" smtClean="0"/>
+              <a:rPr lang="en-US"/>
               <a:t>Third level</a:t>
             </a:r>
           </a:p>
           <a:p>
             <a:pPr lvl="3"/>
             <a:r>
-              <a:rPr lang="en-US" smtClean="0"/>
+              <a:rPr lang="en-US"/>
               <a:t>Fourth level</a:t>
             </a:r>
           </a:p>
           <a:p>
             <a:pPr lvl="4"/>
             <a:r>
-              <a:rPr lang="en-US" smtClean="0"/>
+              <a:rPr lang="en-US"/>
               <a:t>Fifth level</a:t>
             </a:r>
-            <a:endParaRPr lang="en-US"/>
           </a:p>
         </p:txBody>
       </p:sp>
@@ -2009,7 +1795,7 @@
           <a:p>
             <a:fld id="{5BCAD085-E8A6-8845-BD4E-CB4CCA059FC4}" type="datetimeFigureOut">
               <a:rPr lang="en-US" smtClean="0"/>
-              <a:t>1/27/13</a:t>
+              <a:t>6/27/26</a:t>
             </a:fld>
             <a:endParaRPr lang="en-US"/>
           </a:p>
@@ -2112,10 +1898,9 @@
           </a:lstStyle>
           <a:p>
             <a:r>
-              <a:rPr lang="en-US" smtClean="0"/>
+              <a:rPr lang="en-US"/>
               <a:t>Click to edit Master title style</a:t>
             </a:r>
-            <a:endParaRPr lang="en-US"/>
           </a:p>
         </p:txBody>
       </p:sp>
@@ -2232,7 +2017,7 @@
           <a:p>
             <a:pPr lvl="0"/>
             <a:r>
-              <a:rPr lang="en-US" smtClean="0"/>
+              <a:rPr lang="en-US"/>
               <a:t>Click to edit Master text styles</a:t>
             </a:r>
           </a:p>
@@ -2255,7 +2040,7 @@
           <a:p>
             <a:fld id="{5BCAD085-E8A6-8845-BD4E-CB4CCA059FC4}" type="datetimeFigureOut">
               <a:rPr lang="en-US" smtClean="0"/>
-              <a:t>1/27/13</a:t>
+              <a:t>6/27/26</a:t>
             </a:fld>
             <a:endParaRPr lang="en-US"/>
           </a:p>
@@ -2349,10 +2134,9 @@
           <a:lstStyle/>
           <a:p>
             <a:r>
-              <a:rPr lang="en-US" smtClean="0"/>
+              <a:rPr lang="en-US"/>
               <a:t>Click to edit Master title style</a:t>
             </a:r>
-            <a:endParaRPr lang="en-US"/>
           </a:p>
         </p:txBody>
       </p:sp>
@@ -2406,38 +2190,37 @@
           <a:p>
             <a:pPr lvl="0"/>
             <a:r>
-              <a:rPr lang="en-US" smtClean="0"/>
+              <a:rPr lang="en-US"/>
               <a:t>Click to edit Master text styles</a:t>
             </a:r>
           </a:p>
           <a:p>
             <a:pPr lvl="1"/>
             <a:r>
-              <a:rPr lang="en-US" smtClean="0"/>
+              <a:rPr lang="en-US"/>
               <a:t>Second level</a:t>
             </a:r>
           </a:p>
           <a:p>
             <a:pPr lvl="2"/>
             <a:r>
-              <a:rPr lang="en-US" smtClean="0"/>
+              <a:rPr lang="en-US"/>
               <a:t>Third level</a:t>
             </a:r>
           </a:p>
           <a:p>
             <a:pPr lvl="3"/>
             <a:r>
-              <a:rPr lang="en-US" smtClean="0"/>
+              <a:rPr lang="en-US"/>
               <a:t>Fourth level</a:t>
             </a:r>
           </a:p>
           <a:p>
             <a:pPr lvl="4"/>
             <a:r>
-              <a:rPr lang="en-US" smtClean="0"/>
+              <a:rPr lang="en-US"/>
               <a:t>Fifth level</a:t>
             </a:r>
-            <a:endParaRPr lang="en-US"/>
           </a:p>
         </p:txBody>
       </p:sp>
@@ -2491,38 +2274,37 @@
           <a:p>
             <a:pPr lvl="0"/>
             <a:r>
-              <a:rPr lang="en-US" smtClean="0"/>
+              <a:rPr lang="en-US"/>
               <a:t>Click to edit Master text styles</a:t>
             </a:r>
           </a:p>
           <a:p>
             <a:pPr lvl="1"/>
             <a:r>
-              <a:rPr lang="en-US" smtClean="0"/>
+              <a:rPr lang="en-US"/>
               <a:t>Second level</a:t>
             </a:r>
           </a:p>
           <a:p>
             <a:pPr lvl="2"/>
             <a:r>
-              <a:rPr lang="en-US" smtClean="0"/>
+              <a:rPr lang="en-US"/>
               <a:t>Third level</a:t>
             </a:r>
           </a:p>
           <a:p>
             <a:pPr lvl="3"/>
             <a:r>
-              <a:rPr lang="en-US" smtClean="0"/>
+              <a:rPr lang="en-US"/>
               <a:t>Fourth level</a:t>
             </a:r>
           </a:p>
           <a:p>
             <a:pPr lvl="4"/>
             <a:r>
-              <a:rPr lang="en-US" smtClean="0"/>
+              <a:rPr lang="en-US"/>
               <a:t>Fifth level</a:t>
             </a:r>
-            <a:endParaRPr lang="en-US"/>
           </a:p>
         </p:txBody>
       </p:sp>
@@ -2543,7 +2325,7 @@
           <a:p>
             <a:fld id="{5BCAD085-E8A6-8845-BD4E-CB4CCA059FC4}" type="datetimeFigureOut">
               <a:rPr lang="en-US" smtClean="0"/>
-              <a:t>1/27/13</a:t>
+              <a:t>6/27/26</a:t>
             </a:fld>
             <a:endParaRPr lang="en-US"/>
           </a:p>
@@ -2641,10 +2423,9 @@
           </a:lstStyle>
           <a:p>
             <a:r>
-              <a:rPr lang="en-US" smtClean="0"/>
+              <a:rPr lang="en-US"/>
               <a:t>Click to edit Master title style</a:t>
             </a:r>
-            <a:endParaRPr lang="en-US"/>
           </a:p>
         </p:txBody>
       </p:sp>
@@ -2707,7 +2488,7 @@
           <a:p>
             <a:pPr lvl="0"/>
             <a:r>
-              <a:rPr lang="en-US" smtClean="0"/>
+              <a:rPr lang="en-US"/>
               <a:t>Click to edit Master text styles</a:t>
             </a:r>
           </a:p>
@@ -2763,38 +2544,37 @@
           <a:p>
             <a:pPr lvl="0"/>
             <a:r>
-              <a:rPr lang="en-US" smtClean="0"/>
+              <a:rPr lang="en-US"/>
               <a:t>Click to edit Master text styles</a:t>
             </a:r>
           </a:p>
           <a:p>
             <a:pPr lvl="1"/>
             <a:r>
-              <a:rPr lang="en-US" smtClean="0"/>
+              <a:rPr lang="en-US"/>
               <a:t>Second level</a:t>
             </a:r>
           </a:p>
           <a:p>
             <a:pPr lvl="2"/>
             <a:r>
-              <a:rPr lang="en-US" smtClean="0"/>
+              <a:rPr lang="en-US"/>
               <a:t>Third level</a:t>
             </a:r>
           </a:p>
           <a:p>
             <a:pPr lvl="3"/>
             <a:r>
-              <a:rPr lang="en-US" smtClean="0"/>
+              <a:rPr lang="en-US"/>
               <a:t>Fourth level</a:t>
             </a:r>
           </a:p>
           <a:p>
             <a:pPr lvl="4"/>
             <a:r>
-              <a:rPr lang="en-US" smtClean="0"/>
+              <a:rPr lang="en-US"/>
               <a:t>Fifth level</a:t>
             </a:r>
-            <a:endParaRPr lang="en-US"/>
           </a:p>
         </p:txBody>
       </p:sp>
@@ -2857,7 +2637,7 @@
           <a:p>
             <a:pPr lvl="0"/>
             <a:r>
-              <a:rPr lang="en-US" smtClean="0"/>
+              <a:rPr lang="en-US"/>
               <a:t>Click to edit Master text styles</a:t>
             </a:r>
           </a:p>
@@ -2913,38 +2693,37 @@
           <a:p>
             <a:pPr lvl="0"/>
             <a:r>
-              <a:rPr lang="en-US" smtClean="0"/>
+              <a:rPr lang="en-US"/>
               <a:t>Click to edit Master text styles</a:t>
             </a:r>
           </a:p>
           <a:p>
             <a:pPr lvl="1"/>
             <a:r>
-              <a:rPr lang="en-US" smtClean="0"/>
+              <a:rPr lang="en-US"/>
               <a:t>Second level</a:t>
             </a:r>
           </a:p>
           <a:p>
             <a:pPr lvl="2"/>
             <a:r>
-              <a:rPr lang="en-US" smtClean="0"/>
+              <a:rPr lang="en-US"/>
               <a:t>Third level</a:t>
             </a:r>
           </a:p>
           <a:p>
             <a:pPr lvl="3"/>
             <a:r>
-              <a:rPr lang="en-US" smtClean="0"/>
+              <a:rPr lang="en-US"/>
               <a:t>Fourth level</a:t>
             </a:r>
           </a:p>
           <a:p>
             <a:pPr lvl="4"/>
             <a:r>
-              <a:rPr lang="en-US" smtClean="0"/>
+              <a:rPr lang="en-US"/>
               <a:t>Fifth level</a:t>
             </a:r>
-            <a:endParaRPr lang="en-US"/>
           </a:p>
         </p:txBody>
       </p:sp>
@@ -2965,7 +2744,7 @@
           <a:p>
             <a:fld id="{5BCAD085-E8A6-8845-BD4E-CB4CCA059FC4}" type="datetimeFigureOut">
               <a:rPr lang="en-US" smtClean="0"/>
-              <a:t>1/27/13</a:t>
+              <a:t>6/27/26</a:t>
             </a:fld>
             <a:endParaRPr lang="en-US"/>
           </a:p>
@@ -3059,10 +2838,9 @@
           <a:lstStyle/>
           <a:p>
             <a:r>
-              <a:rPr lang="en-US" smtClean="0"/>
+              <a:rPr lang="en-US"/>
               <a:t>Click to edit Master title style</a:t>
             </a:r>
-            <a:endParaRPr lang="en-US"/>
           </a:p>
         </p:txBody>
       </p:sp>
@@ -3083,7 +2861,7 @@
           <a:p>
             <a:fld id="{5BCAD085-E8A6-8845-BD4E-CB4CCA059FC4}" type="datetimeFigureOut">
               <a:rPr lang="en-US" smtClean="0"/>
-              <a:t>1/27/13</a:t>
+              <a:t>6/27/26</a:t>
             </a:fld>
             <a:endParaRPr lang="en-US"/>
           </a:p>
@@ -3178,7 +2956,7 @@
           <a:p>
             <a:fld id="{5BCAD085-E8A6-8845-BD4E-CB4CCA059FC4}" type="datetimeFigureOut">
               <a:rPr lang="en-US" smtClean="0"/>
-              <a:t>1/27/13</a:t>
+              <a:t>6/27/26</a:t>
             </a:fld>
             <a:endParaRPr lang="en-US"/>
           </a:p>
@@ -3281,10 +3059,9 @@
           </a:lstStyle>
           <a:p>
             <a:r>
-              <a:rPr lang="en-US" smtClean="0"/>
+              <a:rPr lang="en-US"/>
               <a:t>Click to edit Master title style</a:t>
             </a:r>
-            <a:endParaRPr lang="en-US"/>
           </a:p>
         </p:txBody>
       </p:sp>
@@ -3338,38 +3115,37 @@
           <a:p>
             <a:pPr lvl="0"/>
             <a:r>
-              <a:rPr lang="en-US" smtClean="0"/>
+              <a:rPr lang="en-US"/>
               <a:t>Click to edit Master text styles</a:t>
             </a:r>
           </a:p>
           <a:p>
             <a:pPr lvl="1"/>
             <a:r>
-              <a:rPr lang="en-US" smtClean="0"/>
+              <a:rPr lang="en-US"/>
               <a:t>Second level</a:t>
             </a:r>
           </a:p>
           <a:p>
             <a:pPr lvl="2"/>
             <a:r>
-              <a:rPr lang="en-US" smtClean="0"/>
+              <a:rPr lang="en-US"/>
               <a:t>Third level</a:t>
             </a:r>
           </a:p>
           <a:p>
             <a:pPr lvl="3"/>
             <a:r>
-              <a:rPr lang="en-US" smtClean="0"/>
+              <a:rPr lang="en-US"/>
               <a:t>Fourth level</a:t>
             </a:r>
           </a:p>
           <a:p>
             <a:pPr lvl="4"/>
             <a:r>
-              <a:rPr lang="en-US" smtClean="0"/>
+              <a:rPr lang="en-US"/>
               <a:t>Fifth level</a:t>
             </a:r>
-            <a:endParaRPr lang="en-US"/>
           </a:p>
         </p:txBody>
       </p:sp>
@@ -3432,7 +3208,7 @@
           <a:p>
             <a:pPr lvl="0"/>
             <a:r>
-              <a:rPr lang="en-US" smtClean="0"/>
+              <a:rPr lang="en-US"/>
               <a:t>Click to edit Master text styles</a:t>
             </a:r>
           </a:p>
@@ -3455,7 +3231,7 @@
           <a:p>
             <a:fld id="{5BCAD085-E8A6-8845-BD4E-CB4CCA059FC4}" type="datetimeFigureOut">
               <a:rPr lang="en-US" smtClean="0"/>
-              <a:t>1/27/13</a:t>
+              <a:t>6/27/26</a:t>
             </a:fld>
             <a:endParaRPr lang="en-US"/>
           </a:p>
@@ -3558,10 +3334,9 @@
           </a:lstStyle>
           <a:p>
             <a:r>
-              <a:rPr lang="en-US" smtClean="0"/>
+              <a:rPr lang="en-US"/>
               <a:t>Click to edit Master title style</a:t>
             </a:r>
-            <a:endParaRPr lang="en-US"/>
           </a:p>
         </p:txBody>
       </p:sp>
@@ -3685,7 +3460,7 @@
           <a:p>
             <a:pPr lvl="0"/>
             <a:r>
-              <a:rPr lang="en-US" smtClean="0"/>
+              <a:rPr lang="en-US"/>
               <a:t>Click to edit Master text styles</a:t>
             </a:r>
           </a:p>
@@ -3708,7 +3483,7 @@
           <a:p>
             <a:fld id="{5BCAD085-E8A6-8845-BD4E-CB4CCA059FC4}" type="datetimeFigureOut">
               <a:rPr lang="en-US" smtClean="0"/>
-              <a:t>1/27/13</a:t>
+              <a:t>6/27/26</a:t>
             </a:fld>
             <a:endParaRPr lang="en-US"/>
           </a:p>
@@ -3817,10 +3592,9 @@
           <a:lstStyle/>
           <a:p>
             <a:r>
-              <a:rPr lang="en-US" smtClean="0"/>
+              <a:rPr lang="en-US"/>
               <a:t>Click to edit Master title style</a:t>
             </a:r>
-            <a:endParaRPr lang="en-US"/>
           </a:p>
         </p:txBody>
       </p:sp>
@@ -3851,38 +3625,37 @@
           <a:p>
             <a:pPr lvl="0"/>
             <a:r>
-              <a:rPr lang="en-US" smtClean="0"/>
+              <a:rPr lang="en-US"/>
               <a:t>Click to edit Master text styles</a:t>
             </a:r>
           </a:p>
           <a:p>
             <a:pPr lvl="1"/>
             <a:r>
-              <a:rPr lang="en-US" smtClean="0"/>
+              <a:rPr lang="en-US"/>
               <a:t>Second level</a:t>
             </a:r>
           </a:p>
           <a:p>
             <a:pPr lvl="2"/>
             <a:r>
-              <a:rPr lang="en-US" smtClean="0"/>
+              <a:rPr lang="en-US"/>
               <a:t>Third level</a:t>
             </a:r>
           </a:p>
           <a:p>
             <a:pPr lvl="3"/>
             <a:r>
-              <a:rPr lang="en-US" smtClean="0"/>
+              <a:rPr lang="en-US"/>
               <a:t>Fourth level</a:t>
             </a:r>
           </a:p>
           <a:p>
             <a:pPr lvl="4"/>
             <a:r>
-              <a:rPr lang="en-US" smtClean="0"/>
+              <a:rPr lang="en-US"/>
               <a:t>Fifth level</a:t>
             </a:r>
-            <a:endParaRPr lang="en-US"/>
           </a:p>
         </p:txBody>
       </p:sp>
@@ -3921,7 +3694,7 @@
           <a:p>
             <a:fld id="{5BCAD085-E8A6-8845-BD4E-CB4CCA059FC4}" type="datetimeFigureOut">
               <a:rPr lang="en-US" smtClean="0"/>
-              <a:t>1/27/13</a:t>
+              <a:t>6/27/26</a:t>
             </a:fld>
             <a:endParaRPr lang="en-US"/>
           </a:p>
@@ -4280,7 +4053,7 @@
 </file>
 
 <file path=ppt/slides/slide1.xml><?xml version="1.0" encoding="utf-8"?>
-<p:sld xmlns:a="http://schemas.openxmlformats.org/drawingml/2006/main" xmlns:p="http://schemas.openxmlformats.org/presentationml/2006/main" xmlns:r="http://schemas.openxmlformats.org/officeDocument/2006/relationships">
+<p:sld xmlns:a="http://schemas.openxmlformats.org/drawingml/2006/main" xmlns:r="http://schemas.openxmlformats.org/officeDocument/2006/relationships" xmlns:p="http://schemas.openxmlformats.org/presentationml/2006/main">
   <p:cSld>
     <p:bg>
       <p:bgPr>
@@ -4296,7 +4069,14 @@
         <p:cNvGrpSpPr/>
         <p:nvPr/>
       </p:nvGrpSpPr>
-      <p:grpSpPr/>
+      <p:grpSpPr>
+        <a:xfrm>
+          <a:off x="0" y="0"/>
+          <a:ext cx="0" cy="0"/>
+          <a:chOff x="0" y="0"/>
+          <a:chExt cx="0" cy="0"/>
+        </a:xfrm>
+      </p:grpSpPr>
       <p:sp>
         <p:nvSpPr>
           <p:cNvPr id="2" name="Rectangle 1"/>
@@ -4337,6 +4117,7 @@
           <a:lstStyle/>
           <a:p>
             <a:pPr algn="ctr"/>
+            <a:endParaRPr/>
           </a:p>
         </p:txBody>
       </p:sp>
@@ -4364,7 +4145,7 @@
           <a:p>
             <a:pPr algn="l"/>
             <a:r>
-              <a:rPr sz="8000" b="1" i="0">
+              <a:rPr sz="8000" b="1" i="0" dirty="0" err="1">
                 <a:solidFill>
                   <a:srgbClr val="F8FAFC"/>
                 </a:solidFill>
@@ -4372,6 +4153,12 @@
               </a:rPr>
               <a:t>Pulsefy</a:t>
             </a:r>
+            <a:endParaRPr sz="8000" b="1" i="0" dirty="0">
+              <a:solidFill>
+                <a:srgbClr val="F8FAFC"/>
+              </a:solidFill>
+              <a:latin typeface="Calibri"/>
+            </a:endParaRPr>
           </a:p>
         </p:txBody>
       </p:sp>
@@ -4419,7 +4206,7 @@
         <p:spPr>
           <a:xfrm>
             <a:off x="914400" y="5120640"/>
-            <a:ext cx="5029200" cy="365760"/>
+            <a:ext cx="5029200" cy="323165"/>
           </a:xfrm>
           <a:prstGeom prst="rect">
             <a:avLst/>
@@ -4434,13 +4221,31 @@
           <a:p>
             <a:pPr algn="l"/>
             <a:r>
-              <a:rPr sz="1500" b="1" i="0">
+              <a:rPr sz="1500" b="1" i="0" dirty="0">
                 <a:solidFill>
                   <a:srgbClr val="F8FAFC"/>
                 </a:solidFill>
                 <a:latin typeface="Calibri"/>
               </a:rPr>
-              <a:t>Vlad DUMITRU</a:t>
+              <a:t>Vlad</a:t>
+            </a:r>
+            <a:r>
+              <a:rPr lang="en-US" sz="1500" b="1" i="0" dirty="0">
+                <a:solidFill>
+                  <a:srgbClr val="F8FAFC"/>
+                </a:solidFill>
+                <a:latin typeface="Calibri"/>
+              </a:rPr>
+              <a:t>-Andrei</a:t>
+            </a:r>
+            <a:r>
+              <a:rPr sz="1500" b="1" i="0" dirty="0">
+                <a:solidFill>
+                  <a:srgbClr val="F8FAFC"/>
+                </a:solidFill>
+                <a:latin typeface="Calibri"/>
+              </a:rPr>
+              <a:t> DUMITRU</a:t>
             </a:r>
           </a:p>
         </p:txBody>
@@ -4559,7 +4364,7 @@
         <p:spPr>
           <a:xfrm>
             <a:off x="7132320" y="5760720"/>
-            <a:ext cx="4206240" cy="365760"/>
+            <a:ext cx="4206240" cy="246221"/>
           </a:xfrm>
           <a:prstGeom prst="rect">
             <a:avLst/>
@@ -4574,13 +4379,31 @@
           <a:p>
             <a:pPr algn="r"/>
             <a:r>
-              <a:rPr sz="1000" b="0" i="0">
+              <a:rPr sz="1000" b="0" i="0" dirty="0">
                 <a:solidFill>
                   <a:srgbClr val="94A3B8"/>
                 </a:solidFill>
                 <a:latin typeface="Calibri"/>
               </a:rPr>
-              <a:t>Faculty of Engineering in Foreign Languages, UPB</a:t>
+              <a:t>Faculty of Engineering in Foreign Languages, U</a:t>
+            </a:r>
+            <a:r>
+              <a:rPr lang="en-US" sz="1000" b="0" i="0" dirty="0">
+                <a:solidFill>
+                  <a:srgbClr val="94A3B8"/>
+                </a:solidFill>
+                <a:latin typeface="Calibri"/>
+              </a:rPr>
+              <a:t>NST</a:t>
+            </a:r>
+            <a:r>
+              <a:rPr sz="1000" b="0" i="0" dirty="0">
+                <a:solidFill>
+                  <a:srgbClr val="94A3B8"/>
+                </a:solidFill>
+                <a:latin typeface="Calibri"/>
+              </a:rPr>
+              <a:t>PB</a:t>
             </a:r>
           </a:p>
         </p:txBody>
@@ -4594,7 +4417,7 @@
 </file>
 
 <file path=ppt/slides/slide10.xml><?xml version="1.0" encoding="utf-8"?>
-<p:sld xmlns:a="http://schemas.openxmlformats.org/drawingml/2006/main" xmlns:p="http://schemas.openxmlformats.org/presentationml/2006/main" xmlns:r="http://schemas.openxmlformats.org/officeDocument/2006/relationships">
+<p:sld xmlns:a="http://schemas.openxmlformats.org/drawingml/2006/main" xmlns:r="http://schemas.openxmlformats.org/officeDocument/2006/relationships" xmlns:p="http://schemas.openxmlformats.org/presentationml/2006/main">
   <p:cSld>
     <p:bg>
       <p:bgPr>
@@ -4610,7 +4433,14 @@
         <p:cNvGrpSpPr/>
         <p:nvPr/>
       </p:nvGrpSpPr>
-      <p:grpSpPr/>
+      <p:grpSpPr>
+        <a:xfrm>
+          <a:off x="0" y="0"/>
+          <a:ext cx="0" cy="0"/>
+          <a:chOff x="0" y="0"/>
+          <a:chExt cx="0" cy="0"/>
+        </a:xfrm>
+      </p:grpSpPr>
       <p:sp>
         <p:nvSpPr>
           <p:cNvPr id="2" name="Rectangle 1"/>
@@ -4651,6 +4481,7 @@
           <a:lstStyle/>
           <a:p>
             <a:pPr algn="ctr"/>
+            <a:endParaRPr/>
           </a:p>
         </p:txBody>
       </p:sp>
@@ -4766,6 +4597,7 @@
           <a:lstStyle/>
           <a:p>
             <a:pPr algn="ctr"/>
+            <a:endParaRPr/>
           </a:p>
         </p:txBody>
       </p:sp>
@@ -4916,6 +4748,7 @@
           <a:lstStyle/>
           <a:p>
             <a:pPr algn="ctr"/>
+            <a:endParaRPr/>
           </a:p>
         </p:txBody>
       </p:sp>
@@ -5066,6 +4899,7 @@
           <a:lstStyle/>
           <a:p>
             <a:pPr algn="ctr"/>
+            <a:endParaRPr/>
           </a:p>
         </p:txBody>
       </p:sp>
@@ -5218,7 +5052,7 @@
 </file>
 
 <file path=ppt/slides/slide11.xml><?xml version="1.0" encoding="utf-8"?>
-<p:sld xmlns:a="http://schemas.openxmlformats.org/drawingml/2006/main" xmlns:p="http://schemas.openxmlformats.org/presentationml/2006/main" xmlns:r="http://schemas.openxmlformats.org/officeDocument/2006/relationships">
+<p:sld xmlns:a="http://schemas.openxmlformats.org/drawingml/2006/main" xmlns:r="http://schemas.openxmlformats.org/officeDocument/2006/relationships" xmlns:p="http://schemas.openxmlformats.org/presentationml/2006/main">
   <p:cSld>
     <p:bg>
       <p:bgPr>
@@ -5234,7 +5068,14 @@
         <p:cNvGrpSpPr/>
         <p:nvPr/>
       </p:nvGrpSpPr>
-      <p:grpSpPr/>
+      <p:grpSpPr>
+        <a:xfrm>
+          <a:off x="0" y="0"/>
+          <a:ext cx="0" cy="0"/>
+          <a:chOff x="0" y="0"/>
+          <a:chExt cx="0" cy="0"/>
+        </a:xfrm>
+      </p:grpSpPr>
       <p:sp>
         <p:nvSpPr>
           <p:cNvPr id="2" name="Rectangle 1"/>
@@ -5275,6 +5116,7 @@
           <a:lstStyle/>
           <a:p>
             <a:pPr algn="ctr"/>
+            <a:endParaRPr/>
           </a:p>
         </p:txBody>
       </p:sp>
@@ -5952,7 +5794,7 @@
 </file>
 
 <file path=ppt/slides/slide12.xml><?xml version="1.0" encoding="utf-8"?>
-<p:sld xmlns:a="http://schemas.openxmlformats.org/drawingml/2006/main" xmlns:p="http://schemas.openxmlformats.org/presentationml/2006/main" xmlns:r="http://schemas.openxmlformats.org/officeDocument/2006/relationships">
+<p:sld xmlns:a="http://schemas.openxmlformats.org/drawingml/2006/main" xmlns:r="http://schemas.openxmlformats.org/officeDocument/2006/relationships" xmlns:p="http://schemas.openxmlformats.org/presentationml/2006/main">
   <p:cSld>
     <p:bg>
       <p:bgPr>
@@ -5968,7 +5810,14 @@
         <p:cNvGrpSpPr/>
         <p:nvPr/>
       </p:nvGrpSpPr>
-      <p:grpSpPr/>
+      <p:grpSpPr>
+        <a:xfrm>
+          <a:off x="0" y="0"/>
+          <a:ext cx="0" cy="0"/>
+          <a:chOff x="0" y="0"/>
+          <a:chExt cx="0" cy="0"/>
+        </a:xfrm>
+      </p:grpSpPr>
       <p:sp>
         <p:nvSpPr>
           <p:cNvPr id="2" name="Rectangle 1"/>
@@ -6009,6 +5858,7 @@
           <a:lstStyle/>
           <a:p>
             <a:pPr algn="ctr"/>
+            <a:endParaRPr/>
           </a:p>
         </p:txBody>
       </p:sp>
@@ -6126,7 +5976,7 @@
 </file>
 
 <file path=ppt/slides/slide2.xml><?xml version="1.0" encoding="utf-8"?>
-<p:sld xmlns:a="http://schemas.openxmlformats.org/drawingml/2006/main" xmlns:p="http://schemas.openxmlformats.org/presentationml/2006/main" xmlns:r="http://schemas.openxmlformats.org/officeDocument/2006/relationships">
+<p:sld xmlns:a="http://schemas.openxmlformats.org/drawingml/2006/main" xmlns:r="http://schemas.openxmlformats.org/officeDocument/2006/relationships" xmlns:p="http://schemas.openxmlformats.org/presentationml/2006/main">
   <p:cSld>
     <p:bg>
       <p:bgPr>
@@ -6142,7 +5992,14 @@
         <p:cNvGrpSpPr/>
         <p:nvPr/>
       </p:nvGrpSpPr>
-      <p:grpSpPr/>
+      <p:grpSpPr>
+        <a:xfrm>
+          <a:off x="0" y="0"/>
+          <a:ext cx="0" cy="0"/>
+          <a:chOff x="0" y="0"/>
+          <a:chExt cx="0" cy="0"/>
+        </a:xfrm>
+      </p:grpSpPr>
       <p:sp>
         <p:nvSpPr>
           <p:cNvPr id="2" name="Rectangle 1"/>
@@ -6183,6 +6040,7 @@
           <a:lstStyle/>
           <a:p>
             <a:pPr algn="ctr"/>
+            <a:endParaRPr/>
           </a:p>
         </p:txBody>
       </p:sp>
@@ -6298,6 +6156,7 @@
           <a:lstStyle/>
           <a:p>
             <a:pPr algn="ctr"/>
+            <a:endParaRPr/>
           </a:p>
         </p:txBody>
       </p:sp>
@@ -6555,7 +6414,7 @@
 </file>
 
 <file path=ppt/slides/slide3.xml><?xml version="1.0" encoding="utf-8"?>
-<p:sld xmlns:a="http://schemas.openxmlformats.org/drawingml/2006/main" xmlns:p="http://schemas.openxmlformats.org/presentationml/2006/main" xmlns:r="http://schemas.openxmlformats.org/officeDocument/2006/relationships">
+<p:sld xmlns:a="http://schemas.openxmlformats.org/drawingml/2006/main" xmlns:r="http://schemas.openxmlformats.org/officeDocument/2006/relationships" xmlns:p="http://schemas.openxmlformats.org/presentationml/2006/main">
   <p:cSld>
     <p:bg>
       <p:bgPr>
@@ -6571,7 +6430,14 @@
         <p:cNvGrpSpPr/>
         <p:nvPr/>
       </p:nvGrpSpPr>
-      <p:grpSpPr/>
+      <p:grpSpPr>
+        <a:xfrm>
+          <a:off x="0" y="0"/>
+          <a:ext cx="0" cy="0"/>
+          <a:chOff x="0" y="0"/>
+          <a:chExt cx="0" cy="0"/>
+        </a:xfrm>
+      </p:grpSpPr>
       <p:sp>
         <p:nvSpPr>
           <p:cNvPr id="2" name="Rectangle 1"/>
@@ -6612,6 +6478,7 @@
           <a:lstStyle/>
           <a:p>
             <a:pPr algn="ctr"/>
+            <a:endParaRPr/>
           </a:p>
         </p:txBody>
       </p:sp>
@@ -6727,6 +6594,7 @@
           <a:lstStyle/>
           <a:p>
             <a:pPr algn="ctr"/>
+            <a:endParaRPr/>
           </a:p>
         </p:txBody>
       </p:sp>
@@ -6809,7 +6677,7 @@
 </file>
 
 <file path=ppt/slides/slide4.xml><?xml version="1.0" encoding="utf-8"?>
-<p:sld xmlns:a="http://schemas.openxmlformats.org/drawingml/2006/main" xmlns:p="http://schemas.openxmlformats.org/presentationml/2006/main" xmlns:r="http://schemas.openxmlformats.org/officeDocument/2006/relationships">
+<p:sld xmlns:a="http://schemas.openxmlformats.org/drawingml/2006/main" xmlns:r="http://schemas.openxmlformats.org/officeDocument/2006/relationships" xmlns:p="http://schemas.openxmlformats.org/presentationml/2006/main">
   <p:cSld>
     <p:bg>
       <p:bgPr>
@@ -6825,7 +6693,14 @@
         <p:cNvGrpSpPr/>
         <p:nvPr/>
       </p:nvGrpSpPr>
-      <p:grpSpPr/>
+      <p:grpSpPr>
+        <a:xfrm>
+          <a:off x="0" y="0"/>
+          <a:ext cx="0" cy="0"/>
+          <a:chOff x="0" y="0"/>
+          <a:chExt cx="0" cy="0"/>
+        </a:xfrm>
+      </p:grpSpPr>
       <p:sp>
         <p:nvSpPr>
           <p:cNvPr id="2" name="Rectangle 1"/>
@@ -6866,6 +6741,7 @@
           <a:lstStyle/>
           <a:p>
             <a:pPr algn="ctr"/>
+            <a:endParaRPr/>
           </a:p>
         </p:txBody>
       </p:sp>
@@ -6946,6 +6822,7 @@
           <a:lstStyle/>
           <a:p>
             <a:pPr algn="ctr"/>
+            <a:endParaRPr/>
           </a:p>
         </p:txBody>
       </p:sp>
@@ -7061,6 +6938,7 @@
           <a:lstStyle/>
           <a:p>
             <a:pPr algn="ctr"/>
+            <a:endParaRPr/>
           </a:p>
         </p:txBody>
       </p:sp>
@@ -7176,6 +7054,7 @@
           <a:lstStyle/>
           <a:p>
             <a:pPr algn="ctr"/>
+            <a:endParaRPr/>
           </a:p>
         </p:txBody>
       </p:sp>
@@ -7291,6 +7170,7 @@
           <a:lstStyle/>
           <a:p>
             <a:pPr algn="ctr"/>
+            <a:endParaRPr/>
           </a:p>
         </p:txBody>
       </p:sp>
@@ -7406,6 +7286,7 @@
           <a:lstStyle/>
           <a:p>
             <a:pPr algn="ctr"/>
+            <a:endParaRPr/>
           </a:p>
         </p:txBody>
       </p:sp>
@@ -7521,6 +7402,7 @@
           <a:lstStyle/>
           <a:p>
             <a:pPr algn="ctr"/>
+            <a:endParaRPr/>
           </a:p>
         </p:txBody>
       </p:sp>
@@ -7603,7 +7485,7 @@
 </file>
 
 <file path=ppt/slides/slide5.xml><?xml version="1.0" encoding="utf-8"?>
-<p:sld xmlns:a="http://schemas.openxmlformats.org/drawingml/2006/main" xmlns:p="http://schemas.openxmlformats.org/presentationml/2006/main" xmlns:r="http://schemas.openxmlformats.org/officeDocument/2006/relationships">
+<p:sld xmlns:a="http://schemas.openxmlformats.org/drawingml/2006/main" xmlns:r="http://schemas.openxmlformats.org/officeDocument/2006/relationships" xmlns:p="http://schemas.openxmlformats.org/presentationml/2006/main">
   <p:cSld>
     <p:bg>
       <p:bgPr>
@@ -7619,7 +7501,14 @@
         <p:cNvGrpSpPr/>
         <p:nvPr/>
       </p:nvGrpSpPr>
-      <p:grpSpPr/>
+      <p:grpSpPr>
+        <a:xfrm>
+          <a:off x="0" y="0"/>
+          <a:ext cx="0" cy="0"/>
+          <a:chOff x="0" y="0"/>
+          <a:chExt cx="0" cy="0"/>
+        </a:xfrm>
+      </p:grpSpPr>
       <p:sp>
         <p:nvSpPr>
           <p:cNvPr id="2" name="Rectangle 1"/>
@@ -7660,6 +7549,7 @@
           <a:lstStyle/>
           <a:p>
             <a:pPr algn="ctr"/>
+            <a:endParaRPr/>
           </a:p>
         </p:txBody>
       </p:sp>
@@ -8190,7 +8080,7 @@
 </file>
 
 <file path=ppt/slides/slide6.xml><?xml version="1.0" encoding="utf-8"?>
-<p:sld xmlns:a="http://schemas.openxmlformats.org/drawingml/2006/main" xmlns:p="http://schemas.openxmlformats.org/presentationml/2006/main" xmlns:r="http://schemas.openxmlformats.org/officeDocument/2006/relationships">
+<p:sld xmlns:a="http://schemas.openxmlformats.org/drawingml/2006/main" xmlns:r="http://schemas.openxmlformats.org/officeDocument/2006/relationships" xmlns:p="http://schemas.openxmlformats.org/presentationml/2006/main">
   <p:cSld>
     <p:bg>
       <p:bgPr>
@@ -8206,7 +8096,14 @@
         <p:cNvGrpSpPr/>
         <p:nvPr/>
       </p:nvGrpSpPr>
-      <p:grpSpPr/>
+      <p:grpSpPr>
+        <a:xfrm>
+          <a:off x="0" y="0"/>
+          <a:ext cx="0" cy="0"/>
+          <a:chOff x="0" y="0"/>
+          <a:chExt cx="0" cy="0"/>
+        </a:xfrm>
+      </p:grpSpPr>
       <p:sp>
         <p:nvSpPr>
           <p:cNvPr id="2" name="Rectangle 1"/>
@@ -8247,6 +8144,7 @@
           <a:lstStyle/>
           <a:p>
             <a:pPr algn="ctr"/>
+            <a:endParaRPr/>
           </a:p>
         </p:txBody>
       </p:sp>
@@ -8355,39 +8253,33 @@
           </a:p>
           <a:p>
             <a:pPr algn="l"/>
-            <a:r>
-              <a:rPr sz="1600" b="0" i="0">
+            <a:endParaRPr sz="1400" b="0" i="0">
+              <a:solidFill>
+                <a:srgbClr val="F8FAFC"/>
+              </a:solidFill>
+              <a:latin typeface="Calibri"/>
+            </a:endParaRPr>
+          </a:p>
+          <a:p>
+            <a:pPr algn="l"/>
+            <a:r>
+              <a:rPr sz="1400" b="0" i="0">
                 <a:solidFill>
                   <a:srgbClr val="F8FAFC"/>
                 </a:solidFill>
                 <a:latin typeface="Calibri"/>
               </a:rPr>
-              <a:t/>
+              <a:t>Building this rather than relying solely on Meta's MusicGen required end-to-end implementation of three components: a MIDI preprocessing and tokenisation pipeline, a PyTorch training loop with Apple Metal acceleration, and an inference path integrated with the Node.js backend through a Python subprocess.</a:t>
             </a:r>
           </a:p>
           <a:p>
             <a:pPr algn="l"/>
-            <a:r>
-              <a:rPr sz="1400" b="0" i="0">
-                <a:solidFill>
-                  <a:srgbClr val="F8FAFC"/>
-                </a:solidFill>
-                <a:latin typeface="Calibri"/>
-              </a:rPr>
-              <a:t>Building this rather than relying solely on Meta's MusicGen required end-to-end implementation of three components: a MIDI preprocessing and tokenisation pipeline, a PyTorch training loop with Apple Metal acceleration, and an inference path integrated with the Node.js backend through a Python subprocess.</a:t>
-            </a:r>
-          </a:p>
-          <a:p>
-            <a:pPr algn="l"/>
-            <a:r>
-              <a:rPr sz="1600" b="0" i="0">
-                <a:solidFill>
-                  <a:srgbClr val="F8FAFC"/>
-                </a:solidFill>
-                <a:latin typeface="Calibri"/>
-              </a:rPr>
-              <a:t/>
-            </a:r>
+            <a:endParaRPr sz="1400" b="0" i="0">
+              <a:solidFill>
+                <a:srgbClr val="F8FAFC"/>
+              </a:solidFill>
+              <a:latin typeface="Calibri"/>
+            </a:endParaRPr>
           </a:p>
           <a:p>
             <a:pPr algn="l"/>
@@ -8441,7 +8333,7 @@
           </a:fontRef>
         </p:style>
         <p:txBody>
-          <a:bodyPr rtlCol="0" anchor="ctr" wrap="square"/>
+          <a:bodyPr wrap="square" rtlCol="0" anchor="ctr"/>
           <a:lstStyle/>
           <a:p>
             <a:pPr algn="ctr"/>
@@ -8466,7 +8358,7 @@
 </file>
 
 <file path=ppt/slides/slide7.xml><?xml version="1.0" encoding="utf-8"?>
-<p:sld xmlns:a="http://schemas.openxmlformats.org/drawingml/2006/main" xmlns:p="http://schemas.openxmlformats.org/presentationml/2006/main" xmlns:r="http://schemas.openxmlformats.org/officeDocument/2006/relationships">
+<p:sld xmlns:a="http://schemas.openxmlformats.org/drawingml/2006/main" xmlns:r="http://schemas.openxmlformats.org/officeDocument/2006/relationships" xmlns:p="http://schemas.openxmlformats.org/presentationml/2006/main">
   <p:cSld>
     <p:bg>
       <p:bgPr>
@@ -8482,7 +8374,14 @@
         <p:cNvGrpSpPr/>
         <p:nvPr/>
       </p:nvGrpSpPr>
-      <p:grpSpPr/>
+      <p:grpSpPr>
+        <a:xfrm>
+          <a:off x="0" y="0"/>
+          <a:ext cx="0" cy="0"/>
+          <a:chOff x="0" y="0"/>
+          <a:chExt cx="0" cy="0"/>
+        </a:xfrm>
+      </p:grpSpPr>
       <p:sp>
         <p:nvSpPr>
           <p:cNvPr id="2" name="Rectangle 1"/>
@@ -8523,6 +8422,7 @@
           <a:lstStyle/>
           <a:p>
             <a:pPr algn="ctr"/>
+            <a:endParaRPr/>
           </a:p>
         </p:txBody>
       </p:sp>
@@ -9058,6 +8958,7 @@
           <a:lstStyle/>
           <a:p>
             <a:pPr algn="ctr"/>
+            <a:endParaRPr/>
           </a:p>
         </p:txBody>
       </p:sp>
@@ -9140,7 +9041,7 @@
 </file>
 
 <file path=ppt/slides/slide8.xml><?xml version="1.0" encoding="utf-8"?>
-<p:sld xmlns:a="http://schemas.openxmlformats.org/drawingml/2006/main" xmlns:p="http://schemas.openxmlformats.org/presentationml/2006/main" xmlns:r="http://schemas.openxmlformats.org/officeDocument/2006/relationships">
+<p:sld xmlns:a="http://schemas.openxmlformats.org/drawingml/2006/main" xmlns:r="http://schemas.openxmlformats.org/officeDocument/2006/relationships" xmlns:p="http://schemas.openxmlformats.org/presentationml/2006/main">
   <p:cSld>
     <p:bg>
       <p:bgPr>
@@ -9156,7 +9057,14 @@
         <p:cNvGrpSpPr/>
         <p:nvPr/>
       </p:nvGrpSpPr>
-      <p:grpSpPr/>
+      <p:grpSpPr>
+        <a:xfrm>
+          <a:off x="0" y="0"/>
+          <a:ext cx="0" cy="0"/>
+          <a:chOff x="0" y="0"/>
+          <a:chExt cx="0" cy="0"/>
+        </a:xfrm>
+      </p:grpSpPr>
       <p:sp>
         <p:nvSpPr>
           <p:cNvPr id="2" name="Rectangle 1"/>
@@ -9197,6 +9105,7 @@
           <a:lstStyle/>
           <a:p>
             <a:pPr algn="ctr"/>
+            <a:endParaRPr/>
           </a:p>
         </p:txBody>
       </p:sp>
@@ -9312,6 +9221,7 @@
           <a:lstStyle/>
           <a:p>
             <a:pPr algn="ctr"/>
+            <a:endParaRPr/>
           </a:p>
         </p:txBody>
       </p:sp>
@@ -9464,7 +9374,7 @@
         <p:spPr>
           <a:xfrm>
             <a:off x="822959" y="5394960"/>
-            <a:ext cx="4572000" cy="548640"/>
+            <a:ext cx="4572000" cy="292388"/>
           </a:xfrm>
           <a:prstGeom prst="rect">
             <a:avLst/>
@@ -9479,13 +9389,22 @@
           <a:p>
             <a:pPr algn="l"/>
             <a:r>
-              <a:rPr sz="1300" b="0" i="0">
+              <a:rPr lang="en-US" sz="1300" b="0" i="0" dirty="0">
                 <a:solidFill>
                   <a:srgbClr val="F8FAFC"/>
                 </a:solidFill>
                 <a:latin typeface="Calibri"/>
               </a:rPr>
-              <a:t>Three scene images per ad</a:t>
+              <a:t>Two</a:t>
+            </a:r>
+            <a:r>
+              <a:rPr sz="1300" b="0" i="0" dirty="0">
+                <a:solidFill>
+                  <a:srgbClr val="F8FAFC"/>
+                </a:solidFill>
+                <a:latin typeface="Calibri"/>
+              </a:rPr>
+              <a:t> scene images per ad</a:t>
             </a:r>
           </a:p>
         </p:txBody>
@@ -9532,6 +9451,7 @@
           <a:lstStyle/>
           <a:p>
             <a:pPr algn="ctr"/>
+            <a:endParaRPr/>
           </a:p>
         </p:txBody>
       </p:sp>
@@ -9719,7 +9639,7 @@
 </file>
 
 <file path=ppt/slides/slide9.xml><?xml version="1.0" encoding="utf-8"?>
-<p:sld xmlns:a="http://schemas.openxmlformats.org/drawingml/2006/main" xmlns:p="http://schemas.openxmlformats.org/presentationml/2006/main" xmlns:r="http://schemas.openxmlformats.org/officeDocument/2006/relationships">
+<p:sld xmlns:a="http://schemas.openxmlformats.org/drawingml/2006/main" xmlns:r="http://schemas.openxmlformats.org/officeDocument/2006/relationships" xmlns:p="http://schemas.openxmlformats.org/presentationml/2006/main">
   <p:cSld>
     <p:bg>
       <p:bgPr>
@@ -9735,7 +9655,14 @@
         <p:cNvGrpSpPr/>
         <p:nvPr/>
       </p:nvGrpSpPr>
-      <p:grpSpPr/>
+      <p:grpSpPr>
+        <a:xfrm>
+          <a:off x="0" y="0"/>
+          <a:ext cx="0" cy="0"/>
+          <a:chOff x="0" y="0"/>
+          <a:chExt cx="0" cy="0"/>
+        </a:xfrm>
+      </p:grpSpPr>
       <p:sp>
         <p:nvSpPr>
           <p:cNvPr id="2" name="Rectangle 1"/>
@@ -9776,6 +9703,7 @@
           <a:lstStyle/>
           <a:p>
             <a:pPr algn="ctr"/>
+            <a:endParaRPr/>
           </a:p>
         </p:txBody>
       </p:sp>
@@ -9887,7 +9815,7 @@
           </a:fontRef>
         </p:style>
         <p:txBody>
-          <a:bodyPr rtlCol="0" anchor="ctr" wrap="square"/>
+          <a:bodyPr wrap="square" rtlCol="0" anchor="ctr"/>
           <a:lstStyle/>
           <a:p>
             <a:pPr algn="ctr"/>
@@ -10242,44 +10170,44 @@
         <a:sysClr val="window" lastClr="FFFFFF"/>
       </a:lt1>
       <a:dk2>
-        <a:srgbClr val="1F497D"/>
+        <a:srgbClr val="0E2841"/>
       </a:dk2>
       <a:lt2>
-        <a:srgbClr val="EEECE1"/>
+        <a:srgbClr val="E8E8E8"/>
       </a:lt2>
       <a:accent1>
-        <a:srgbClr val="4F81BD"/>
+        <a:srgbClr val="156082"/>
       </a:accent1>
       <a:accent2>
-        <a:srgbClr val="C0504D"/>
+        <a:srgbClr val="E97132"/>
       </a:accent2>
       <a:accent3>
-        <a:srgbClr val="9BBB59"/>
+        <a:srgbClr val="196B24"/>
       </a:accent3>
       <a:accent4>
-        <a:srgbClr val="8064A2"/>
+        <a:srgbClr val="0F9ED5"/>
       </a:accent4>
       <a:accent5>
-        <a:srgbClr val="4BACC6"/>
+        <a:srgbClr val="A02B93"/>
       </a:accent5>
       <a:accent6>
-        <a:srgbClr val="F79646"/>
+        <a:srgbClr val="4EA72E"/>
       </a:accent6>
       <a:hlink>
-        <a:srgbClr val="0000FF"/>
+        <a:srgbClr val="467886"/>
       </a:hlink>
       <a:folHlink>
-        <a:srgbClr val="800080"/>
+        <a:srgbClr val="96607D"/>
       </a:folHlink>
     </a:clrScheme>
     <a:fontScheme name="Office">
       <a:majorFont>
-        <a:latin typeface="Calibri"/>
+        <a:latin typeface="Aptos Display" panose="02110004020202020204"/>
         <a:ea typeface=""/>
         <a:cs typeface=""/>
-        <a:font script="Jpan" typeface="ＭＳ Ｐゴシック"/>
+        <a:font script="Jpan" typeface="游ゴシック Light"/>
         <a:font script="Hang" typeface="맑은 고딕"/>
-        <a:font script="Hans" typeface="宋体"/>
+        <a:font script="Hans" typeface="等线 Light"/>
         <a:font script="Hant" typeface="新細明體"/>
         <a:font script="Arab" typeface="Times New Roman"/>
         <a:font script="Hebr" typeface="Times New Roman"/>
@@ -10307,14 +10235,31 @@
         <a:font script="Viet" typeface="Times New Roman"/>
         <a:font script="Uigh" typeface="Microsoft Uighur"/>
         <a:font script="Geor" typeface="Sylfaen"/>
+        <a:font script="Armn" typeface="Arial"/>
+        <a:font script="Bugi" typeface="Leelawadee UI"/>
+        <a:font script="Bopo" typeface="Microsoft JhengHei"/>
+        <a:font script="Java" typeface="Javanese Text"/>
+        <a:font script="Lisu" typeface="Segoe UI"/>
+        <a:font script="Mymr" typeface="Myanmar Text"/>
+        <a:font script="Nkoo" typeface="Ebrima"/>
+        <a:font script="Olck" typeface="Nirmala UI"/>
+        <a:font script="Osma" typeface="Ebrima"/>
+        <a:font script="Phag" typeface="Phagspa"/>
+        <a:font script="Syrn" typeface="Estrangelo Edessa"/>
+        <a:font script="Syrj" typeface="Estrangelo Edessa"/>
+        <a:font script="Syre" typeface="Estrangelo Edessa"/>
+        <a:font script="Sora" typeface="Nirmala UI"/>
+        <a:font script="Tale" typeface="Microsoft Tai Le"/>
+        <a:font script="Talu" typeface="Microsoft New Tai Lue"/>
+        <a:font script="Tfng" typeface="Ebrima"/>
       </a:majorFont>
       <a:minorFont>
-        <a:latin typeface="Calibri"/>
+        <a:latin typeface="Aptos" panose="02110004020202020204"/>
         <a:ea typeface=""/>
         <a:cs typeface=""/>
-        <a:font script="Jpan" typeface="ＭＳ Ｐゴシック"/>
+        <a:font script="Jpan" typeface="游ゴシック"/>
         <a:font script="Hang" typeface="맑은 고딕"/>
-        <a:font script="Hans" typeface="宋体"/>
+        <a:font script="Hans" typeface="等线"/>
         <a:font script="Hant" typeface="新細明體"/>
         <a:font script="Arab" typeface="Arial"/>
         <a:font script="Hebr" typeface="Arial"/>
@@ -10342,6 +10287,23 @@
         <a:font script="Viet" typeface="Arial"/>
         <a:font script="Uigh" typeface="Microsoft Uighur"/>
         <a:font script="Geor" typeface="Sylfaen"/>
+        <a:font script="Armn" typeface="Arial"/>
+        <a:font script="Bugi" typeface="Leelawadee UI"/>
+        <a:font script="Bopo" typeface="Microsoft JhengHei"/>
+        <a:font script="Java" typeface="Javanese Text"/>
+        <a:font script="Lisu" typeface="Segoe UI"/>
+        <a:font script="Mymr" typeface="Myanmar Text"/>
+        <a:font script="Nkoo" typeface="Ebrima"/>
+        <a:font script="Olck" typeface="Nirmala UI"/>
+        <a:font script="Osma" typeface="Ebrima"/>
+        <a:font script="Phag" typeface="Phagspa"/>
+        <a:font script="Syrn" typeface="Estrangelo Edessa"/>
+        <a:font script="Syrj" typeface="Estrangelo Edessa"/>
+        <a:font script="Syre" typeface="Estrangelo Edessa"/>
+        <a:font script="Sora" typeface="Nirmala UI"/>
+        <a:font script="Tale" typeface="Microsoft Tai Le"/>
+        <a:font script="Talu" typeface="Microsoft New Tai Lue"/>
+        <a:font script="Tfng" typeface="Ebrima"/>
       </a:minorFont>
     </a:fontScheme>
     <a:fmtScheme name="Office">
@@ -10353,180 +10315,136 @@
           <a:gsLst>
             <a:gs pos="0">
               <a:schemeClr val="phClr">
-                <a:tint val="50000"/>
-                <a:satMod val="300000"/>
+                <a:lumMod val="110000"/>
+                <a:satMod val="105000"/>
+                <a:tint val="67000"/>
               </a:schemeClr>
             </a:gs>
-            <a:gs pos="35000">
+            <a:gs pos="50000">
               <a:schemeClr val="phClr">
-                <a:tint val="37000"/>
-                <a:satMod val="300000"/>
+                <a:lumMod val="105000"/>
+                <a:satMod val="103000"/>
+                <a:tint val="73000"/>
               </a:schemeClr>
             </a:gs>
             <a:gs pos="100000">
               <a:schemeClr val="phClr">
-                <a:tint val="15000"/>
-                <a:satMod val="350000"/>
+                <a:lumMod val="105000"/>
+                <a:satMod val="109000"/>
+                <a:tint val="81000"/>
               </a:schemeClr>
             </a:gs>
           </a:gsLst>
-          <a:lin ang="16200000" scaled="1"/>
+          <a:lin ang="5400000" scaled="0"/>
         </a:gradFill>
         <a:gradFill rotWithShape="1">
           <a:gsLst>
             <a:gs pos="0">
               <a:schemeClr val="phClr">
-                <a:tint val="100000"/>
+                <a:satMod val="103000"/>
+                <a:lumMod val="102000"/>
+                <a:tint val="94000"/>
+              </a:schemeClr>
+            </a:gs>
+            <a:gs pos="50000">
+              <a:schemeClr val="phClr">
+                <a:satMod val="110000"/>
+                <a:lumMod val="100000"/>
                 <a:shade val="100000"/>
-                <a:satMod val="130000"/>
               </a:schemeClr>
             </a:gs>
             <a:gs pos="100000">
               <a:schemeClr val="phClr">
-                <a:tint val="50000"/>
-                <a:shade val="100000"/>
-                <a:satMod val="350000"/>
+                <a:lumMod val="99000"/>
+                <a:satMod val="120000"/>
+                <a:shade val="78000"/>
               </a:schemeClr>
             </a:gs>
           </a:gsLst>
-          <a:lin ang="16200000" scaled="0"/>
+          <a:lin ang="5400000" scaled="0"/>
         </a:gradFill>
       </a:fillStyleLst>
       <a:lnStyleLst>
-        <a:ln w="9525" cap="flat" cmpd="sng" algn="ctr">
+        <a:ln w="12700" cap="flat" cmpd="sng" algn="ctr">
           <a:solidFill>
-            <a:schemeClr val="phClr">
-              <a:shade val="95000"/>
-              <a:satMod val="105000"/>
-            </a:schemeClr>
+            <a:schemeClr val="phClr"/>
           </a:solidFill>
           <a:prstDash val="solid"/>
+          <a:miter lim="800000"/>
+        </a:ln>
+        <a:ln w="19050" cap="flat" cmpd="sng" algn="ctr">
+          <a:solidFill>
+            <a:schemeClr val="phClr"/>
+          </a:solidFill>
+          <a:prstDash val="solid"/>
+          <a:miter lim="800000"/>
         </a:ln>
         <a:ln w="25400" cap="flat" cmpd="sng" algn="ctr">
           <a:solidFill>
             <a:schemeClr val="phClr"/>
           </a:solidFill>
           <a:prstDash val="solid"/>
-        </a:ln>
-        <a:ln w="38100" cap="flat" cmpd="sng" algn="ctr">
-          <a:solidFill>
-            <a:schemeClr val="phClr"/>
-          </a:solidFill>
-          <a:prstDash val="solid"/>
+          <a:miter lim="800000"/>
         </a:ln>
       </a:lnStyleLst>
       <a:effectStyleLst>
         <a:effectStyle>
+          <a:effectLst/>
+        </a:effectStyle>
+        <a:effectStyle>
+          <a:effectLst/>
+        </a:effectStyle>
+        <a:effectStyle>
           <a:effectLst>
-            <a:outerShdw blurRad="40000" dist="20000" dir="5400000" rotWithShape="0">
+            <a:outerShdw blurRad="57150" dist="19050" dir="5400000" algn="ctr" rotWithShape="0">
               <a:srgbClr val="000000">
-                <a:alpha val="38000"/>
+                <a:alpha val="63000"/>
               </a:srgbClr>
             </a:outerShdw>
           </a:effectLst>
-        </a:effectStyle>
-        <a:effectStyle>
-          <a:effectLst>
-            <a:outerShdw blurRad="40000" dist="23000" dir="5400000" rotWithShape="0">
-              <a:srgbClr val="000000">
-                <a:alpha val="35000"/>
-              </a:srgbClr>
-            </a:outerShdw>
-          </a:effectLst>
-        </a:effectStyle>
-        <a:effectStyle>
-          <a:effectLst>
-            <a:outerShdw blurRad="40000" dist="23000" dir="5400000" rotWithShape="0">
-              <a:srgbClr val="000000">
-                <a:alpha val="35000"/>
-              </a:srgbClr>
-            </a:outerShdw>
-          </a:effectLst>
-          <a:scene3d>
-            <a:camera prst="orthographicFront">
-              <a:rot lat="0" lon="0" rev="0"/>
-            </a:camera>
-            <a:lightRig rig="threePt" dir="t">
-              <a:rot lat="0" lon="0" rev="1200000"/>
-            </a:lightRig>
-          </a:scene3d>
-          <a:sp3d>
-            <a:bevelT w="63500" h="25400"/>
-          </a:sp3d>
         </a:effectStyle>
       </a:effectStyleLst>
       <a:bgFillStyleLst>
         <a:solidFill>
           <a:schemeClr val="phClr"/>
         </a:solidFill>
+        <a:solidFill>
+          <a:schemeClr val="phClr">
+            <a:tint val="95000"/>
+            <a:satMod val="170000"/>
+          </a:schemeClr>
+        </a:solidFill>
         <a:gradFill rotWithShape="1">
           <a:gsLst>
             <a:gs pos="0">
               <a:schemeClr val="phClr">
-                <a:tint val="40000"/>
-                <a:satMod val="350000"/>
+                <a:tint val="93000"/>
+                <a:satMod val="150000"/>
+                <a:shade val="98000"/>
+                <a:lumMod val="102000"/>
               </a:schemeClr>
             </a:gs>
-            <a:gs pos="40000">
+            <a:gs pos="50000">
               <a:schemeClr val="phClr">
-                <a:tint val="45000"/>
-                <a:shade val="99000"/>
-                <a:satMod val="350000"/>
+                <a:tint val="98000"/>
+                <a:satMod val="130000"/>
+                <a:shade val="90000"/>
+                <a:lumMod val="103000"/>
               </a:schemeClr>
             </a:gs>
             <a:gs pos="100000">
               <a:schemeClr val="phClr">
-                <a:shade val="20000"/>
-                <a:satMod val="255000"/>
+                <a:shade val="63000"/>
+                <a:satMod val="120000"/>
               </a:schemeClr>
             </a:gs>
           </a:gsLst>
-          <a:path path="circle">
-            <a:fillToRect l="50000" t="-80000" r="50000" b="180000"/>
-          </a:path>
-        </a:gradFill>
-        <a:gradFill rotWithShape="1">
-          <a:gsLst>
-            <a:gs pos="0">
-              <a:schemeClr val="phClr">
-                <a:tint val="80000"/>
-                <a:satMod val="300000"/>
-              </a:schemeClr>
-            </a:gs>
-            <a:gs pos="100000">
-              <a:schemeClr val="phClr">
-                <a:shade val="30000"/>
-                <a:satMod val="200000"/>
-              </a:schemeClr>
-            </a:gs>
-          </a:gsLst>
-          <a:path path="circle">
-            <a:fillToRect l="50000" t="50000" r="50000" b="50000"/>
-          </a:path>
+          <a:lin ang="5400000" scaled="0"/>
         </a:gradFill>
       </a:bgFillStyleLst>
     </a:fmtScheme>
   </a:themeElements>
   <a:objectDefaults>
-    <a:spDef>
-      <a:spPr/>
-      <a:bodyPr/>
-      <a:lstStyle/>
-      <a:style>
-        <a:lnRef idx="1">
-          <a:schemeClr val="accent1"/>
-        </a:lnRef>
-        <a:fillRef idx="3">
-          <a:schemeClr val="accent1"/>
-        </a:fillRef>
-        <a:effectRef idx="2">
-          <a:schemeClr val="accent1"/>
-        </a:effectRef>
-        <a:fontRef idx="minor">
-          <a:schemeClr val="lt1"/>
-        </a:fontRef>
-      </a:style>
-    </a:spDef>
     <a:lnDef>
       <a:spPr/>
       <a:bodyPr/>
@@ -10548,5 +10466,10 @@
     </a:lnDef>
   </a:objectDefaults>
   <a:extraClrSchemeLst/>
+  <a:extLst>
+    <a:ext uri="{05A4C25C-085E-4340-85A3-A5531E510DB2}">
+      <thm15:themeFamily xmlns:thm15="http://schemas.microsoft.com/office/thememl/2012/main" name="Office Theme" id="{2E142A2C-CD16-42D6-873A-C26D2A0506FA}" vid="{1BDDFF52-6CD6-40A5-AB3C-68EB2F1E4D0A}"/>
+    </a:ext>
+  </a:extLst>
 </a:theme>
 </file>
--- a/docs/Pulsefy_Defense_Presentation.pptx
+++ b/docs/Pulsefy_Defense_Presentation.pptx
@@ -11,6 +11,7 @@
     <p:sldId id="256" r:id="rId2"/>
     <p:sldId id="257" r:id="rId3"/>
     <p:sldId id="258" r:id="rId4"/>
+    <p:sldId id="268" r:id="rId19"/>
     <p:sldId id="259" r:id="rId5"/>
     <p:sldId id="260" r:id="rId6"/>
     <p:sldId id="261" r:id="rId7"/>
@@ -542,6 +543,31 @@
 </p:notes>
 </file>
 
+<file path=ppt/notesSlides/notesSlide13.xml><?xml version="1.0" encoding="utf-8"?>
+<p:notes xmlns:a="http://schemas.openxmlformats.org/drawingml/2006/main" xmlns:p="http://schemas.openxmlformats.org/presentationml/2006/main" xmlns:r="http://schemas.openxmlformats.org/officeDocument/2006/relationships">
+  <p:cSld>
+    <p:spTree>
+      <p:nvGrpSpPr>
+        <p:cNvPr id="1" name=""/>
+        <p:cNvGrpSpPr/>
+        <p:nvPr/>
+      </p:nvGrpSpPr>
+      <p:grpSpPr>
+        <a:xfrm>
+          <a:off x="0" y="0"/>
+          <a:ext cx="0" cy="0"/>
+          <a:chOff x="0" y="0"/>
+          <a:chExt cx="0" cy="0"/>
+        </a:xfrm>
+      </p:grpSpPr>
+    </p:spTree>
+  </p:cSld>
+  <p:clrMapOvr>
+    <a:masterClrMapping/>
+  </p:clrMapOvr>
+</p:notes>
+</file>
+
 <file path=ppt/notesSlides/notesSlide2.xml><?xml version="1.0" encoding="utf-8"?>
 <p:notes xmlns:a="http://schemas.openxmlformats.org/drawingml/2006/main" xmlns:r="http://schemas.openxmlformats.org/officeDocument/2006/relationships" xmlns:p="http://schemas.openxmlformats.org/presentationml/2006/main">
   <p:cSld>
@@ -937,7 +963,7 @@
           <a:lstStyle/>
           <a:p>
             <a:r>
-              <a:t>The training corpus was 1,034 MIDI files, parsed into 573,692 tokens, used to train an LSTM with roughly 908 thousand parameters across two recurrent layers. Training ran for 30 epochs on Apple Metal hardware. Validation loss converged from 0.51 to 0.43 in the first three epochs, which indicates the architecture fits the dataset cleanly. The final checkpoint ships with the application.</a:t>
+              <a:t>I trained Pulsefy AI from scratch on a curated dataset of 1,034 MIDI files — Nottingham folk waltzes and Christmas tunes. Training ran for thirty epochs on my Mac, accelerated by Apple Metal. The end result is a saved model file that the application ships with. Conceptually, the model learned the same way a small language model learns text: by predicting one token at a time, getting feedback on whether the prediction was right, and adjusting its internal weights over thousands of iterations.</a:t>
             </a:r>
           </a:p>
         </p:txBody>
@@ -5032,13 +5058,66 @@
           <a:p>
             <a:pPr algn="l"/>
             <a:r>
-              <a:rPr sz="1100" b="0" i="1">
+              <a:rPr sz="1100" b="1">
                 <a:solidFill>
                   <a:srgbClr val="94A3B8"/>
                 </a:solidFill>
-                <a:latin typeface="Calibri"/>
-              </a:rPr>
-              <a:t>Quality assessment was out of scope for the thesis benchmark. A larger listening study with objective audio metrics is identified as future work.</a:t>
+              </a:rPr>
+              <a:t>How the 8-hour baseline was calculated:</a:t>
+            </a:r>
+          </a:p>
+          <a:p>
+            <a:r>
+              <a:rPr sz="1100">
+                <a:solidFill>
+                  <a:srgbClr val="94A3B8"/>
+                </a:solidFill>
+              </a:rPr>
+              <a:t>2 h product visuals in Canva + 2 h music in Suno or stock licensing + 1 h voiceover in ElevenLabs + 3 h editing and assembly in CapCut (breakdown from Chapter 1.2 of the thesis).</a:t>
+            </a:r>
+          </a:p>
+          <a:p>
+            <a:r>
+              <a:rPr sz="1000" i="1">
+                <a:solidFill>
+                  <a:srgbClr val="94A3B8"/>
+                </a:solidFill>
+              </a:rPr>
+              <a:t>Quality assessment of generated content was out of scope; identified as future work.</a:t>
+            </a:r>
+          </a:p>
+        </p:txBody>
+      </p:sp>
+      <p:sp>
+        <p:nvSpPr>
+          <p:cNvPr id="18" name="TextBox 17"/>
+          <p:cNvSpPr txBox="1"/>
+          <p:nvPr/>
+        </p:nvSpPr>
+        <p:spPr>
+          <a:xfrm>
+            <a:off x="11338560" y="640080"/>
+            <a:ext cx="640080" cy="640080"/>
+          </a:xfrm>
+          <a:prstGeom prst="rect">
+            <a:avLst/>
+          </a:prstGeom>
+          <a:noFill/>
+        </p:spPr>
+        <p:txBody>
+          <a:bodyPr wrap="none" anchor="ctr">
+            <a:spAutoFit/>
+          </a:bodyPr>
+          <a:lstStyle/>
+          <a:p>
+            <a:pPr algn="ctr"/>
+            <a:r>
+              <a:rPr sz="2800">
+                <a:solidFill>
+                  <a:srgbClr val="A78BFA"/>
+                </a:solidFill>
+              </a:rPr>
+              <a:t>★</a:t>
             </a:r>
           </a:p>
         </p:txBody>
@@ -5975,6 +6054,525 @@
 </p:sld>
 </file>
 
+<file path=ppt/slides/slide13.xml><?xml version="1.0" encoding="utf-8"?>
+<p:sld xmlns:a="http://schemas.openxmlformats.org/drawingml/2006/main" xmlns:p="http://schemas.openxmlformats.org/presentationml/2006/main" xmlns:r="http://schemas.openxmlformats.org/officeDocument/2006/relationships">
+  <p:cSld>
+    <p:bg>
+      <p:bgPr>
+        <a:solidFill>
+          <a:srgbClr val="0F172A"/>
+        </a:solidFill>
+        <a:effectLst/>
+      </p:bgPr>
+    </p:bg>
+    <p:spTree>
+      <p:nvGrpSpPr>
+        <p:cNvPr id="1" name=""/>
+        <p:cNvGrpSpPr/>
+        <p:nvPr/>
+      </p:nvGrpSpPr>
+      <p:grpSpPr/>
+      <p:sp>
+        <p:nvSpPr>
+          <p:cNvPr id="2" name="Rectangle 1"/>
+          <p:cNvSpPr/>
+          <p:nvPr/>
+        </p:nvSpPr>
+        <p:spPr>
+          <a:xfrm>
+            <a:off x="914400" y="868680"/>
+            <a:ext cx="73152" cy="411480"/>
+          </a:xfrm>
+          <a:prstGeom prst="rect">
+            <a:avLst/>
+          </a:prstGeom>
+          <a:solidFill>
+            <a:srgbClr val="A78BFA"/>
+          </a:solidFill>
+          <a:ln>
+            <a:noFill/>
+          </a:ln>
+        </p:spPr>
+        <p:style>
+          <a:lnRef idx="1">
+            <a:schemeClr val="accent1"/>
+          </a:lnRef>
+          <a:fillRef idx="3">
+            <a:schemeClr val="accent1"/>
+          </a:fillRef>
+          <a:effectRef idx="2">
+            <a:schemeClr val="accent1"/>
+          </a:effectRef>
+          <a:fontRef idx="minor">
+            <a:schemeClr val="lt1"/>
+          </a:fontRef>
+        </p:style>
+        <p:txBody>
+          <a:bodyPr rtlCol="0" anchor="ctr"/>
+          <a:lstStyle/>
+          <a:p>
+            <a:pPr algn="ctr"/>
+          </a:p>
+        </p:txBody>
+      </p:sp>
+      <p:sp>
+        <p:nvSpPr>
+          <p:cNvPr id="3" name="TextBox 2"/>
+          <p:cNvSpPr txBox="1"/>
+          <p:nvPr/>
+        </p:nvSpPr>
+        <p:spPr>
+          <a:xfrm>
+            <a:off x="1143000" y="777240"/>
+            <a:ext cx="10515600" cy="594360"/>
+          </a:xfrm>
+          <a:prstGeom prst="rect">
+            <a:avLst/>
+          </a:prstGeom>
+          <a:noFill/>
+        </p:spPr>
+        <p:txBody>
+          <a:bodyPr wrap="square" anchor="t">
+            <a:spAutoFit/>
+          </a:bodyPr>
+          <a:lstStyle/>
+          <a:p>
+            <a:pPr algn="l"/>
+            <a:r>
+              <a:rPr sz="2800" b="1" i="0">
+                <a:solidFill>
+                  <a:srgbClr val="F8FAFC"/>
+                </a:solidFill>
+                <a:latin typeface="Calibri"/>
+              </a:rPr>
+              <a:t>Who Pulsefy is for</a:t>
+            </a:r>
+          </a:p>
+        </p:txBody>
+      </p:sp>
+      <p:sp>
+        <p:nvSpPr>
+          <p:cNvPr id="4" name="TextBox 3"/>
+          <p:cNvSpPr txBox="1"/>
+          <p:nvPr/>
+        </p:nvSpPr>
+        <p:spPr>
+          <a:xfrm>
+            <a:off x="914400" y="1691640"/>
+            <a:ext cx="10332720" cy="457200"/>
+          </a:xfrm>
+          <a:prstGeom prst="rect">
+            <a:avLst/>
+          </a:prstGeom>
+          <a:noFill/>
+        </p:spPr>
+        <p:txBody>
+          <a:bodyPr wrap="square" anchor="t">
+            <a:spAutoFit/>
+          </a:bodyPr>
+          <a:lstStyle/>
+          <a:p>
+            <a:pPr algn="l"/>
+            <a:r>
+              <a:rPr sz="1400" b="0" i="1">
+                <a:solidFill>
+                  <a:srgbClr val="94A3B8"/>
+                </a:solidFill>
+                <a:latin typeface="Calibri"/>
+              </a:rPr>
+              <a:t>Three archetypes who produce ads themselves rather than commissioning them.</a:t>
+            </a:r>
+          </a:p>
+        </p:txBody>
+      </p:sp>
+      <p:sp>
+        <p:nvSpPr>
+          <p:cNvPr id="5" name="Rounded Rectangle 4"/>
+          <p:cNvSpPr/>
+          <p:nvPr/>
+        </p:nvSpPr>
+        <p:spPr>
+          <a:xfrm>
+            <a:off x="640080" y="2560320"/>
+            <a:ext cx="3520440" cy="3383280"/>
+          </a:xfrm>
+          <a:prstGeom prst="roundRect">
+            <a:avLst/>
+          </a:prstGeom>
+          <a:solidFill>
+            <a:srgbClr val="1E293B"/>
+          </a:solidFill>
+          <a:ln w="12700">
+            <a:solidFill>
+              <a:srgbClr val="334155"/>
+            </a:solidFill>
+          </a:ln>
+        </p:spPr>
+        <p:style>
+          <a:lnRef idx="1">
+            <a:schemeClr val="accent1"/>
+          </a:lnRef>
+          <a:fillRef idx="3">
+            <a:schemeClr val="accent1"/>
+          </a:fillRef>
+          <a:effectRef idx="2">
+            <a:schemeClr val="accent1"/>
+          </a:effectRef>
+          <a:fontRef idx="minor">
+            <a:schemeClr val="lt1"/>
+          </a:fontRef>
+        </p:style>
+        <p:txBody>
+          <a:bodyPr rtlCol="0" anchor="ctr"/>
+          <a:lstStyle/>
+          <a:p>
+            <a:pPr algn="ctr"/>
+          </a:p>
+        </p:txBody>
+      </p:sp>
+      <p:sp>
+        <p:nvSpPr>
+          <p:cNvPr id="6" name="TextBox 5"/>
+          <p:cNvSpPr txBox="1"/>
+          <p:nvPr/>
+        </p:nvSpPr>
+        <p:spPr>
+          <a:xfrm>
+            <a:off x="914400" y="2743200"/>
+            <a:ext cx="3108960" cy="457200"/>
+          </a:xfrm>
+          <a:prstGeom prst="rect">
+            <a:avLst/>
+          </a:prstGeom>
+          <a:noFill/>
+        </p:spPr>
+        <p:txBody>
+          <a:bodyPr wrap="square" anchor="t">
+            <a:spAutoFit/>
+          </a:bodyPr>
+          <a:lstStyle/>
+          <a:p>
+            <a:pPr algn="l"/>
+            <a:r>
+              <a:rPr sz="1600" b="1" i="0">
+                <a:solidFill>
+                  <a:srgbClr val="A78BFA"/>
+                </a:solidFill>
+                <a:latin typeface="Calibri"/>
+              </a:rPr>
+              <a:t>Solo creator</a:t>
+            </a:r>
+          </a:p>
+        </p:txBody>
+      </p:sp>
+      <p:sp>
+        <p:nvSpPr>
+          <p:cNvPr id="7" name="TextBox 6"/>
+          <p:cNvSpPr txBox="1"/>
+          <p:nvPr/>
+        </p:nvSpPr>
+        <p:spPr>
+          <a:xfrm>
+            <a:off x="914400" y="3383280"/>
+            <a:ext cx="3108960" cy="2468880"/>
+          </a:xfrm>
+          <a:prstGeom prst="rect">
+            <a:avLst/>
+          </a:prstGeom>
+          <a:noFill/>
+        </p:spPr>
+        <p:txBody>
+          <a:bodyPr wrap="square" anchor="t">
+            <a:spAutoFit/>
+          </a:bodyPr>
+          <a:lstStyle/>
+          <a:p>
+            <a:pPr algn="l"/>
+            <a:r>
+              <a:rPr sz="1200" b="0" i="0">
+                <a:solidFill>
+                  <a:srgbClr val="F8FAFC"/>
+                </a:solidFill>
+                <a:latin typeface="Calibri"/>
+              </a:rPr>
+              <a:t>A side-hustle TikTok or Reels creator producing promotional content for personal projects or sponsorships. Needs frequent output on a near-zero budget.</a:t>
+            </a:r>
+          </a:p>
+        </p:txBody>
+      </p:sp>
+      <p:sp>
+        <p:nvSpPr>
+          <p:cNvPr id="8" name="Rounded Rectangle 7"/>
+          <p:cNvSpPr/>
+          <p:nvPr/>
+        </p:nvSpPr>
+        <p:spPr>
+          <a:xfrm>
+            <a:off x="4343400" y="2560320"/>
+            <a:ext cx="3520440" cy="3383280"/>
+          </a:xfrm>
+          <a:prstGeom prst="roundRect">
+            <a:avLst/>
+          </a:prstGeom>
+          <a:solidFill>
+            <a:srgbClr val="1E293B"/>
+          </a:solidFill>
+          <a:ln w="12700">
+            <a:solidFill>
+              <a:srgbClr val="334155"/>
+            </a:solidFill>
+          </a:ln>
+        </p:spPr>
+        <p:style>
+          <a:lnRef idx="1">
+            <a:schemeClr val="accent1"/>
+          </a:lnRef>
+          <a:fillRef idx="3">
+            <a:schemeClr val="accent1"/>
+          </a:fillRef>
+          <a:effectRef idx="2">
+            <a:schemeClr val="accent1"/>
+          </a:effectRef>
+          <a:fontRef idx="minor">
+            <a:schemeClr val="lt1"/>
+          </a:fontRef>
+        </p:style>
+        <p:txBody>
+          <a:bodyPr rtlCol="0" anchor="ctr"/>
+          <a:lstStyle/>
+          <a:p>
+            <a:pPr algn="ctr"/>
+          </a:p>
+        </p:txBody>
+      </p:sp>
+      <p:sp>
+        <p:nvSpPr>
+          <p:cNvPr id="9" name="TextBox 8"/>
+          <p:cNvSpPr txBox="1"/>
+          <p:nvPr/>
+        </p:nvSpPr>
+        <p:spPr>
+          <a:xfrm>
+            <a:off x="4617720" y="2743200"/>
+            <a:ext cx="3108960" cy="457200"/>
+          </a:xfrm>
+          <a:prstGeom prst="rect">
+            <a:avLst/>
+          </a:prstGeom>
+          <a:noFill/>
+        </p:spPr>
+        <p:txBody>
+          <a:bodyPr wrap="square" anchor="t">
+            <a:spAutoFit/>
+          </a:bodyPr>
+          <a:lstStyle/>
+          <a:p>
+            <a:pPr algn="l"/>
+            <a:r>
+              <a:rPr sz="1600" b="1" i="0">
+                <a:solidFill>
+                  <a:srgbClr val="A78BFA"/>
+                </a:solidFill>
+                <a:latin typeface="Calibri"/>
+              </a:rPr>
+              <a:t>Small business owner</a:t>
+            </a:r>
+          </a:p>
+        </p:txBody>
+      </p:sp>
+      <p:sp>
+        <p:nvSpPr>
+          <p:cNvPr id="10" name="TextBox 9"/>
+          <p:cNvSpPr txBox="1"/>
+          <p:nvPr/>
+        </p:nvSpPr>
+        <p:spPr>
+          <a:xfrm>
+            <a:off x="4617720" y="3383280"/>
+            <a:ext cx="3108960" cy="2468880"/>
+          </a:xfrm>
+          <a:prstGeom prst="rect">
+            <a:avLst/>
+          </a:prstGeom>
+          <a:noFill/>
+        </p:spPr>
+        <p:txBody>
+          <a:bodyPr wrap="square" anchor="t">
+            <a:spAutoFit/>
+          </a:bodyPr>
+          <a:lstStyle/>
+          <a:p>
+            <a:pPr algn="l"/>
+            <a:r>
+              <a:rPr sz="1200" b="0" i="0">
+                <a:solidFill>
+                  <a:srgbClr val="F8FAFC"/>
+                </a:solidFill>
+                <a:latin typeface="Calibri"/>
+              </a:rPr>
+              <a:t>A retail, food, or services owner who advertises on Reels and TikTok but cannot afford an agency or hire a full-time designer.</a:t>
+            </a:r>
+          </a:p>
+        </p:txBody>
+      </p:sp>
+      <p:sp>
+        <p:nvSpPr>
+          <p:cNvPr id="11" name="Rounded Rectangle 10"/>
+          <p:cNvSpPr/>
+          <p:nvPr/>
+        </p:nvSpPr>
+        <p:spPr>
+          <a:xfrm>
+            <a:off x="8046720" y="2560320"/>
+            <a:ext cx="3520440" cy="3383280"/>
+          </a:xfrm>
+          <a:prstGeom prst="roundRect">
+            <a:avLst/>
+          </a:prstGeom>
+          <a:solidFill>
+            <a:srgbClr val="1E293B"/>
+          </a:solidFill>
+          <a:ln w="12700">
+            <a:solidFill>
+              <a:srgbClr val="334155"/>
+            </a:solidFill>
+          </a:ln>
+        </p:spPr>
+        <p:style>
+          <a:lnRef idx="1">
+            <a:schemeClr val="accent1"/>
+          </a:lnRef>
+          <a:fillRef idx="3">
+            <a:schemeClr val="accent1"/>
+          </a:fillRef>
+          <a:effectRef idx="2">
+            <a:schemeClr val="accent1"/>
+          </a:effectRef>
+          <a:fontRef idx="minor">
+            <a:schemeClr val="lt1"/>
+          </a:fontRef>
+        </p:style>
+        <p:txBody>
+          <a:bodyPr rtlCol="0" anchor="ctr"/>
+          <a:lstStyle/>
+          <a:p>
+            <a:pPr algn="ctr"/>
+          </a:p>
+        </p:txBody>
+      </p:sp>
+      <p:sp>
+        <p:nvSpPr>
+          <p:cNvPr id="12" name="TextBox 11"/>
+          <p:cNvSpPr txBox="1"/>
+          <p:nvPr/>
+        </p:nvSpPr>
+        <p:spPr>
+          <a:xfrm>
+            <a:off x="8321040" y="2743200"/>
+            <a:ext cx="3108960" cy="457200"/>
+          </a:xfrm>
+          <a:prstGeom prst="rect">
+            <a:avLst/>
+          </a:prstGeom>
+          <a:noFill/>
+        </p:spPr>
+        <p:txBody>
+          <a:bodyPr wrap="square" anchor="t">
+            <a:spAutoFit/>
+          </a:bodyPr>
+          <a:lstStyle/>
+          <a:p>
+            <a:pPr algn="l"/>
+            <a:r>
+              <a:rPr sz="1600" b="1" i="0">
+                <a:solidFill>
+                  <a:srgbClr val="A78BFA"/>
+                </a:solidFill>
+                <a:latin typeface="Calibri"/>
+              </a:rPr>
+              <a:t>In-house marketer</a:t>
+            </a:r>
+          </a:p>
+        </p:txBody>
+      </p:sp>
+      <p:sp>
+        <p:nvSpPr>
+          <p:cNvPr id="13" name="TextBox 12"/>
+          <p:cNvSpPr txBox="1"/>
+          <p:nvPr/>
+        </p:nvSpPr>
+        <p:spPr>
+          <a:xfrm>
+            <a:off x="8321040" y="3383280"/>
+            <a:ext cx="3108960" cy="2468880"/>
+          </a:xfrm>
+          <a:prstGeom prst="rect">
+            <a:avLst/>
+          </a:prstGeom>
+          <a:noFill/>
+        </p:spPr>
+        <p:txBody>
+          <a:bodyPr wrap="square" anchor="t">
+            <a:spAutoFit/>
+          </a:bodyPr>
+          <a:lstStyle/>
+          <a:p>
+            <a:pPr algn="l"/>
+            <a:r>
+              <a:rPr sz="1200" b="0" i="0">
+                <a:solidFill>
+                  <a:srgbClr val="F8FAFC"/>
+                </a:solidFill>
+                <a:latin typeface="Calibri"/>
+              </a:rPr>
+              <a:t>An early-stage startup employee who handles ads as one of many responsibilities. Needs to ship variants fast without learning four creative tools.</a:t>
+            </a:r>
+          </a:p>
+        </p:txBody>
+      </p:sp>
+      <p:sp>
+        <p:nvSpPr>
+          <p:cNvPr id="14" name="TextBox 13"/>
+          <p:cNvSpPr txBox="1"/>
+          <p:nvPr/>
+        </p:nvSpPr>
+        <p:spPr>
+          <a:xfrm>
+            <a:off x="914400" y="6126480"/>
+            <a:ext cx="10332720" cy="365760"/>
+          </a:xfrm>
+          <a:prstGeom prst="rect">
+            <a:avLst/>
+          </a:prstGeom>
+          <a:noFill/>
+        </p:spPr>
+        <p:txBody>
+          <a:bodyPr wrap="square" anchor="t">
+            <a:spAutoFit/>
+          </a:bodyPr>
+          <a:lstStyle/>
+          <a:p>
+            <a:pPr algn="ctr"/>
+            <a:r>
+              <a:rPr sz="1200" b="0" i="1">
+                <a:solidFill>
+                  <a:srgbClr val="94A3B8"/>
+                </a:solidFill>
+                <a:latin typeface="Calibri"/>
+              </a:rPr>
+              <a:t>None can justify an agency budget; all need to ship more ads, more often.</a:t>
+            </a:r>
+          </a:p>
+        </p:txBody>
+      </p:sp>
+    </p:spTree>
+  </p:cSld>
+  <p:clrMapOvr>
+    <a:masterClrMapping/>
+  </p:clrMapOvr>
+</p:sld>
+</file>
+
 <file path=ppt/slides/slide2.xml><?xml version="1.0" encoding="utf-8"?>
 <p:sld xmlns:a="http://schemas.openxmlformats.org/drawingml/2006/main" xmlns:r="http://schemas.openxmlformats.org/officeDocument/2006/relationships" xmlns:p="http://schemas.openxmlformats.org/presentationml/2006/main">
   <p:cSld>
@@ -6668,6 +7266,40 @@
           </a:p>
         </p:txBody>
       </p:sp>
+      <p:sp>
+        <p:nvSpPr>
+          <p:cNvPr id="8" name="TextBox 7"/>
+          <p:cNvSpPr txBox="1"/>
+          <p:nvPr/>
+        </p:nvSpPr>
+        <p:spPr>
+          <a:xfrm>
+            <a:off x="11338560" y="640080"/>
+            <a:ext cx="640080" cy="640080"/>
+          </a:xfrm>
+          <a:prstGeom prst="rect">
+            <a:avLst/>
+          </a:prstGeom>
+          <a:noFill/>
+        </p:spPr>
+        <p:txBody>
+          <a:bodyPr wrap="none" anchor="ctr">
+            <a:spAutoFit/>
+          </a:bodyPr>
+          <a:lstStyle/>
+          <a:p>
+            <a:pPr algn="ctr"/>
+            <a:r>
+              <a:rPr sz="2800">
+                <a:solidFill>
+                  <a:srgbClr val="A78BFA"/>
+                </a:solidFill>
+              </a:rPr>
+              <a:t>★</a:t>
+            </a:r>
+          </a:p>
+        </p:txBody>
+      </p:sp>
     </p:spTree>
   </p:cSld>
   <p:clrMapOvr>
@@ -7476,6 +8108,40 @@
           </a:p>
         </p:txBody>
       </p:sp>
+      <p:sp>
+        <p:nvSpPr>
+          <p:cNvPr id="22" name="TextBox 21"/>
+          <p:cNvSpPr txBox="1"/>
+          <p:nvPr/>
+        </p:nvSpPr>
+        <p:spPr>
+          <a:xfrm>
+            <a:off x="11338560" y="640080"/>
+            <a:ext cx="640080" cy="640080"/>
+          </a:xfrm>
+          <a:prstGeom prst="rect">
+            <a:avLst/>
+          </a:prstGeom>
+          <a:noFill/>
+        </p:spPr>
+        <p:txBody>
+          <a:bodyPr wrap="none" anchor="ctr">
+            <a:spAutoFit/>
+          </a:bodyPr>
+          <a:lstStyle/>
+          <a:p>
+            <a:pPr algn="ctr"/>
+            <a:r>
+              <a:rPr sz="2800">
+                <a:solidFill>
+                  <a:srgbClr val="A78BFA"/>
+                </a:solidFill>
+              </a:rPr>
+              <a:t>★</a:t>
+            </a:r>
+          </a:p>
+        </p:txBody>
+      </p:sp>
     </p:spTree>
   </p:cSld>
   <p:clrMapOvr>
@@ -8071,6 +8737,330 @@
           </a:p>
         </p:txBody>
       </p:sp>
+      <p:cxnSp>
+        <p:nvCxnSpPr>
+          <p:cNvPr id="12" name="Connector 11"/>
+          <p:cNvCxnSpPr/>
+          <p:nvPr/>
+        </p:nvCxnSpPr>
+        <p:spPr>
+          <a:xfrm flipV="1">
+            <a:off x="2377440" y="2057400"/>
+            <a:ext cx="685800" cy="1554480"/>
+          </a:xfrm>
+          <a:prstGeom prst="line">
+            <a:avLst/>
+          </a:prstGeom>
+          <a:ln w="19050">
+            <a:solidFill>
+              <a:srgbClr val="A78BFA"/>
+            </a:solidFill>
+            <a:tailEnd type="triangle" w="med" len="med"/>
+          </a:ln>
+        </p:spPr>
+        <p:style>
+          <a:lnRef idx="2">
+            <a:schemeClr val="accent1"/>
+          </a:lnRef>
+          <a:fillRef idx="0">
+            <a:schemeClr val="accent1"/>
+          </a:fillRef>
+          <a:effectRef idx="1">
+            <a:schemeClr val="accent1"/>
+          </a:effectRef>
+          <a:fontRef idx="minor">
+            <a:schemeClr val="tx1"/>
+          </a:fontRef>
+        </p:style>
+      </p:cxnSp>
+      <p:cxnSp>
+        <p:nvCxnSpPr>
+          <p:cNvPr id="13" name="Connector 12"/>
+          <p:cNvCxnSpPr/>
+          <p:nvPr/>
+        </p:nvCxnSpPr>
+        <p:spPr>
+          <a:xfrm flipV="1">
+            <a:off x="2377440" y="3246120"/>
+            <a:ext cx="685800" cy="365760"/>
+          </a:xfrm>
+          <a:prstGeom prst="line">
+            <a:avLst/>
+          </a:prstGeom>
+          <a:ln w="19050">
+            <a:solidFill>
+              <a:srgbClr val="A78BFA"/>
+            </a:solidFill>
+            <a:tailEnd type="triangle" w="med" len="med"/>
+          </a:ln>
+        </p:spPr>
+        <p:style>
+          <a:lnRef idx="2">
+            <a:schemeClr val="accent1"/>
+          </a:lnRef>
+          <a:fillRef idx="0">
+            <a:schemeClr val="accent1"/>
+          </a:fillRef>
+          <a:effectRef idx="1">
+            <a:schemeClr val="accent1"/>
+          </a:effectRef>
+          <a:fontRef idx="minor">
+            <a:schemeClr val="tx1"/>
+          </a:fontRef>
+        </p:style>
+      </p:cxnSp>
+      <p:cxnSp>
+        <p:nvCxnSpPr>
+          <p:cNvPr id="14" name="Connector 13"/>
+          <p:cNvCxnSpPr/>
+          <p:nvPr/>
+        </p:nvCxnSpPr>
+        <p:spPr>
+          <a:xfrm>
+            <a:off x="2377440" y="3611880"/>
+            <a:ext cx="685800" cy="822960"/>
+          </a:xfrm>
+          <a:prstGeom prst="line">
+            <a:avLst/>
+          </a:prstGeom>
+          <a:ln w="19050">
+            <a:solidFill>
+              <a:srgbClr val="A78BFA"/>
+            </a:solidFill>
+            <a:tailEnd type="triangle" w="med" len="med"/>
+          </a:ln>
+        </p:spPr>
+        <p:style>
+          <a:lnRef idx="2">
+            <a:schemeClr val="accent1"/>
+          </a:lnRef>
+          <a:fillRef idx="0">
+            <a:schemeClr val="accent1"/>
+          </a:fillRef>
+          <a:effectRef idx="1">
+            <a:schemeClr val="accent1"/>
+          </a:effectRef>
+          <a:fontRef idx="minor">
+            <a:schemeClr val="tx1"/>
+          </a:fontRef>
+        </p:style>
+      </p:cxnSp>
+      <p:cxnSp>
+        <p:nvCxnSpPr>
+          <p:cNvPr id="15" name="Connector 14"/>
+          <p:cNvCxnSpPr/>
+          <p:nvPr/>
+        </p:nvCxnSpPr>
+        <p:spPr>
+          <a:xfrm>
+            <a:off x="2377440" y="3611880"/>
+            <a:ext cx="685800" cy="2011680"/>
+          </a:xfrm>
+          <a:prstGeom prst="line">
+            <a:avLst/>
+          </a:prstGeom>
+          <a:ln w="19050">
+            <a:solidFill>
+              <a:srgbClr val="A78BFA"/>
+            </a:solidFill>
+            <a:tailEnd type="triangle" w="med" len="med"/>
+          </a:ln>
+        </p:spPr>
+        <p:style>
+          <a:lnRef idx="2">
+            <a:schemeClr val="accent1"/>
+          </a:lnRef>
+          <a:fillRef idx="0">
+            <a:schemeClr val="accent1"/>
+          </a:fillRef>
+          <a:effectRef idx="1">
+            <a:schemeClr val="accent1"/>
+          </a:effectRef>
+          <a:fontRef idx="minor">
+            <a:schemeClr val="tx1"/>
+          </a:fontRef>
+        </p:style>
+      </p:cxnSp>
+      <p:cxnSp>
+        <p:nvCxnSpPr>
+          <p:cNvPr id="16" name="Connector 15"/>
+          <p:cNvCxnSpPr/>
+          <p:nvPr/>
+        </p:nvCxnSpPr>
+        <p:spPr>
+          <a:xfrm>
+            <a:off x="6126480" y="2057400"/>
+            <a:ext cx="1188720" cy="1554480"/>
+          </a:xfrm>
+          <a:prstGeom prst="line">
+            <a:avLst/>
+          </a:prstGeom>
+          <a:ln w="19050">
+            <a:solidFill>
+              <a:srgbClr val="A78BFA"/>
+            </a:solidFill>
+            <a:tailEnd type="triangle" w="med" len="med"/>
+          </a:ln>
+        </p:spPr>
+        <p:style>
+          <a:lnRef idx="2">
+            <a:schemeClr val="accent1"/>
+          </a:lnRef>
+          <a:fillRef idx="0">
+            <a:schemeClr val="accent1"/>
+          </a:fillRef>
+          <a:effectRef idx="1">
+            <a:schemeClr val="accent1"/>
+          </a:effectRef>
+          <a:fontRef idx="minor">
+            <a:schemeClr val="tx1"/>
+          </a:fontRef>
+        </p:style>
+      </p:cxnSp>
+      <p:cxnSp>
+        <p:nvCxnSpPr>
+          <p:cNvPr id="17" name="Connector 16"/>
+          <p:cNvCxnSpPr/>
+          <p:nvPr/>
+        </p:nvCxnSpPr>
+        <p:spPr>
+          <a:xfrm>
+            <a:off x="6126480" y="3246120"/>
+            <a:ext cx="1188720" cy="365760"/>
+          </a:xfrm>
+          <a:prstGeom prst="line">
+            <a:avLst/>
+          </a:prstGeom>
+          <a:ln w="19050">
+            <a:solidFill>
+              <a:srgbClr val="A78BFA"/>
+            </a:solidFill>
+            <a:tailEnd type="triangle" w="med" len="med"/>
+          </a:ln>
+        </p:spPr>
+        <p:style>
+          <a:lnRef idx="2">
+            <a:schemeClr val="accent1"/>
+          </a:lnRef>
+          <a:fillRef idx="0">
+            <a:schemeClr val="accent1"/>
+          </a:fillRef>
+          <a:effectRef idx="1">
+            <a:schemeClr val="accent1"/>
+          </a:effectRef>
+          <a:fontRef idx="minor">
+            <a:schemeClr val="tx1"/>
+          </a:fontRef>
+        </p:style>
+      </p:cxnSp>
+      <p:cxnSp>
+        <p:nvCxnSpPr>
+          <p:cNvPr id="18" name="Connector 17"/>
+          <p:cNvCxnSpPr/>
+          <p:nvPr/>
+        </p:nvCxnSpPr>
+        <p:spPr>
+          <a:xfrm flipV="1">
+            <a:off x="6126480" y="3611880"/>
+            <a:ext cx="1188720" cy="822960"/>
+          </a:xfrm>
+          <a:prstGeom prst="line">
+            <a:avLst/>
+          </a:prstGeom>
+          <a:ln w="19050">
+            <a:solidFill>
+              <a:srgbClr val="A78BFA"/>
+            </a:solidFill>
+            <a:tailEnd type="triangle" w="med" len="med"/>
+          </a:ln>
+        </p:spPr>
+        <p:style>
+          <a:lnRef idx="2">
+            <a:schemeClr val="accent1"/>
+          </a:lnRef>
+          <a:fillRef idx="0">
+            <a:schemeClr val="accent1"/>
+          </a:fillRef>
+          <a:effectRef idx="1">
+            <a:schemeClr val="accent1"/>
+          </a:effectRef>
+          <a:fontRef idx="minor">
+            <a:schemeClr val="tx1"/>
+          </a:fontRef>
+        </p:style>
+      </p:cxnSp>
+      <p:cxnSp>
+        <p:nvCxnSpPr>
+          <p:cNvPr id="19" name="Connector 18"/>
+          <p:cNvCxnSpPr/>
+          <p:nvPr/>
+        </p:nvCxnSpPr>
+        <p:spPr>
+          <a:xfrm flipV="1">
+            <a:off x="6126480" y="3611880"/>
+            <a:ext cx="1188720" cy="2011680"/>
+          </a:xfrm>
+          <a:prstGeom prst="line">
+            <a:avLst/>
+          </a:prstGeom>
+          <a:ln w="19050">
+            <a:solidFill>
+              <a:srgbClr val="A78BFA"/>
+            </a:solidFill>
+            <a:tailEnd type="triangle" w="med" len="med"/>
+          </a:ln>
+        </p:spPr>
+        <p:style>
+          <a:lnRef idx="2">
+            <a:schemeClr val="accent1"/>
+          </a:lnRef>
+          <a:fillRef idx="0">
+            <a:schemeClr val="accent1"/>
+          </a:fillRef>
+          <a:effectRef idx="1">
+            <a:schemeClr val="accent1"/>
+          </a:effectRef>
+          <a:fontRef idx="minor">
+            <a:schemeClr val="tx1"/>
+          </a:fontRef>
+        </p:style>
+      </p:cxnSp>
+      <p:cxnSp>
+        <p:nvCxnSpPr>
+          <p:cNvPr id="20" name="Connector 19"/>
+          <p:cNvCxnSpPr/>
+          <p:nvPr/>
+        </p:nvCxnSpPr>
+        <p:spPr>
+          <a:xfrm>
+            <a:off x="9144000" y="3611880"/>
+            <a:ext cx="731520" cy="0"/>
+          </a:xfrm>
+          <a:prstGeom prst="line">
+            <a:avLst/>
+          </a:prstGeom>
+          <a:ln w="19050">
+            <a:solidFill>
+              <a:srgbClr val="A78BFA"/>
+            </a:solidFill>
+            <a:tailEnd type="triangle" w="med" len="med"/>
+          </a:ln>
+        </p:spPr>
+        <p:style>
+          <a:lnRef idx="2">
+            <a:schemeClr val="accent1"/>
+          </a:lnRef>
+          <a:fillRef idx="0">
+            <a:schemeClr val="accent1"/>
+          </a:fillRef>
+          <a:effectRef idx="1">
+            <a:schemeClr val="accent1"/>
+          </a:effectRef>
+          <a:fontRef idx="minor">
+            <a:schemeClr val="tx1"/>
+          </a:fontRef>
+        </p:style>
+      </p:cxnSp>
     </p:spTree>
   </p:cSld>
   <p:clrMapOvr>
@@ -8349,6 +9339,40 @@
           </a:p>
         </p:txBody>
       </p:sp>
+      <p:sp>
+        <p:nvSpPr>
+          <p:cNvPr id="7" name="TextBox 6"/>
+          <p:cNvSpPr txBox="1"/>
+          <p:nvPr/>
+        </p:nvSpPr>
+        <p:spPr>
+          <a:xfrm>
+            <a:off x="11338560" y="640080"/>
+            <a:ext cx="640080" cy="640080"/>
+          </a:xfrm>
+          <a:prstGeom prst="rect">
+            <a:avLst/>
+          </a:prstGeom>
+          <a:noFill/>
+        </p:spPr>
+        <p:txBody>
+          <a:bodyPr wrap="none" anchor="ctr">
+            <a:spAutoFit/>
+          </a:bodyPr>
+          <a:lstStyle/>
+          <a:p>
+            <a:pPr algn="ctr"/>
+            <a:r>
+              <a:rPr sz="2800">
+                <a:solidFill>
+                  <a:srgbClr val="A78BFA"/>
+                </a:solidFill>
+              </a:rPr>
+              <a:t>★</a:t>
+            </a:r>
+          </a:p>
+        </p:txBody>
+      </p:sp>
     </p:spTree>
   </p:cSld>
   <p:clrMapOvr>
@@ -8422,7 +9446,6 @@
           <a:lstStyle/>
           <a:p>
             <a:pPr algn="ctr"/>
-            <a:endParaRPr/>
           </a:p>
         </p:txBody>
       </p:sp>
@@ -8456,476 +9479,21 @@
                 </a:solidFill>
                 <a:latin typeface="Calibri"/>
               </a:rPr>
-              <a:t>Training methodology and results</a:t>
-            </a:r>
-          </a:p>
-        </p:txBody>
-      </p:sp>
-      <p:sp>
-        <p:nvSpPr>
-          <p:cNvPr id="4" name="TextBox 3"/>
-          <p:cNvSpPr txBox="1"/>
-          <p:nvPr/>
-        </p:nvSpPr>
-        <p:spPr>
-          <a:xfrm>
-            <a:off x="914400" y="1691640"/>
-            <a:ext cx="10332720" cy="457200"/>
-          </a:xfrm>
-          <a:prstGeom prst="rect">
-            <a:avLst/>
-          </a:prstGeom>
-          <a:noFill/>
-        </p:spPr>
-        <p:txBody>
-          <a:bodyPr wrap="square" anchor="t">
-            <a:spAutoFit/>
-          </a:bodyPr>
-          <a:lstStyle/>
-          <a:p>
-            <a:pPr algn="l"/>
-            <a:r>
-              <a:rPr sz="1400" b="0" i="1">
-                <a:solidFill>
-                  <a:srgbClr val="94A3B8"/>
-                </a:solidFill>
-                <a:latin typeface="Calibri"/>
-              </a:rPr>
-              <a:t>Pulsefy AI was trained on a curated MIDI corpus over thirty epochs.</a:t>
-            </a:r>
-          </a:p>
-        </p:txBody>
-      </p:sp>
-      <p:sp>
-        <p:nvSpPr>
-          <p:cNvPr id="5" name="TextBox 4"/>
-          <p:cNvSpPr txBox="1"/>
-          <p:nvPr/>
-        </p:nvSpPr>
-        <p:spPr>
-          <a:xfrm>
-            <a:off x="365760" y="2468880"/>
-            <a:ext cx="2743200" cy="365760"/>
-          </a:xfrm>
-          <a:prstGeom prst="rect">
-            <a:avLst/>
-          </a:prstGeom>
-          <a:noFill/>
-        </p:spPr>
-        <p:txBody>
-          <a:bodyPr wrap="square" anchor="t">
-            <a:spAutoFit/>
-          </a:bodyPr>
-          <a:lstStyle/>
-          <a:p>
-            <a:pPr algn="ctr"/>
-            <a:r>
-              <a:rPr sz="1200" b="0" i="0">
-                <a:solidFill>
-                  <a:srgbClr val="94A3B8"/>
-                </a:solidFill>
-                <a:latin typeface="Calibri"/>
-              </a:rPr>
-              <a:t>Input corpus</a:t>
-            </a:r>
-          </a:p>
-        </p:txBody>
-      </p:sp>
-      <p:sp>
-        <p:nvSpPr>
-          <p:cNvPr id="6" name="TextBox 5"/>
-          <p:cNvSpPr txBox="1"/>
-          <p:nvPr/>
-        </p:nvSpPr>
-        <p:spPr>
-          <a:xfrm>
-            <a:off x="365760" y="2880360"/>
-            <a:ext cx="2743200" cy="914400"/>
-          </a:xfrm>
-          <a:prstGeom prst="rect">
-            <a:avLst/>
-          </a:prstGeom>
-          <a:noFill/>
-        </p:spPr>
-        <p:txBody>
-          <a:bodyPr wrap="square" anchor="t">
-            <a:spAutoFit/>
-          </a:bodyPr>
-          <a:lstStyle/>
-          <a:p>
-            <a:pPr algn="ctr"/>
-            <a:r>
-              <a:rPr sz="3800" b="1" i="0">
-                <a:solidFill>
-                  <a:srgbClr val="A78BFA"/>
-                </a:solidFill>
-                <a:latin typeface="Calibri"/>
-              </a:rPr>
-              <a:t>1,034</a:t>
-            </a:r>
-          </a:p>
-        </p:txBody>
-      </p:sp>
-      <p:sp>
-        <p:nvSpPr>
-          <p:cNvPr id="7" name="TextBox 6"/>
-          <p:cNvSpPr txBox="1"/>
-          <p:nvPr/>
-        </p:nvSpPr>
-        <p:spPr>
-          <a:xfrm>
-            <a:off x="365760" y="4114800"/>
-            <a:ext cx="2743200" cy="457200"/>
-          </a:xfrm>
-          <a:prstGeom prst="rect">
-            <a:avLst/>
-          </a:prstGeom>
-          <a:noFill/>
-        </p:spPr>
-        <p:txBody>
-          <a:bodyPr wrap="square" anchor="t">
-            <a:spAutoFit/>
-          </a:bodyPr>
-          <a:lstStyle/>
-          <a:p>
-            <a:pPr algn="ctr"/>
-            <a:r>
-              <a:rPr sz="1100" b="0" i="1">
-                <a:solidFill>
-                  <a:srgbClr val="94A3B8"/>
-                </a:solidFill>
-                <a:latin typeface="Calibri"/>
-              </a:rPr>
-              <a:t>MIDI files (folk + Christmas)</a:t>
-            </a:r>
-          </a:p>
-        </p:txBody>
-      </p:sp>
-      <p:sp>
-        <p:nvSpPr>
-          <p:cNvPr id="8" name="TextBox 7"/>
-          <p:cNvSpPr txBox="1"/>
-          <p:nvPr/>
-        </p:nvSpPr>
-        <p:spPr>
-          <a:xfrm>
-            <a:off x="3291840" y="2468880"/>
-            <a:ext cx="2743200" cy="365760"/>
-          </a:xfrm>
-          <a:prstGeom prst="rect">
-            <a:avLst/>
-          </a:prstGeom>
-          <a:noFill/>
-        </p:spPr>
-        <p:txBody>
-          <a:bodyPr wrap="square" anchor="t">
-            <a:spAutoFit/>
-          </a:bodyPr>
-          <a:lstStyle/>
-          <a:p>
-            <a:pPr algn="ctr"/>
-            <a:r>
-              <a:rPr sz="1200" b="0" i="0">
-                <a:solidFill>
-                  <a:srgbClr val="94A3B8"/>
-                </a:solidFill>
-                <a:latin typeface="Calibri"/>
-              </a:rPr>
-              <a:t>Tokens</a:t>
-            </a:r>
-          </a:p>
-        </p:txBody>
-      </p:sp>
-      <p:sp>
-        <p:nvSpPr>
-          <p:cNvPr id="9" name="TextBox 8"/>
-          <p:cNvSpPr txBox="1"/>
-          <p:nvPr/>
-        </p:nvSpPr>
-        <p:spPr>
-          <a:xfrm>
-            <a:off x="3291840" y="2880360"/>
-            <a:ext cx="2743200" cy="914400"/>
-          </a:xfrm>
-          <a:prstGeom prst="rect">
-            <a:avLst/>
-          </a:prstGeom>
-          <a:noFill/>
-        </p:spPr>
-        <p:txBody>
-          <a:bodyPr wrap="square" anchor="t">
-            <a:spAutoFit/>
-          </a:bodyPr>
-          <a:lstStyle/>
-          <a:p>
-            <a:pPr algn="ctr"/>
-            <a:r>
-              <a:rPr sz="3800" b="1" i="0">
-                <a:solidFill>
-                  <a:srgbClr val="A78BFA"/>
-                </a:solidFill>
-                <a:latin typeface="Calibri"/>
-              </a:rPr>
-              <a:t>573,692</a:t>
-            </a:r>
-          </a:p>
-        </p:txBody>
-      </p:sp>
-      <p:sp>
-        <p:nvSpPr>
-          <p:cNvPr id="10" name="TextBox 9"/>
-          <p:cNvSpPr txBox="1"/>
-          <p:nvPr/>
-        </p:nvSpPr>
-        <p:spPr>
-          <a:xfrm>
-            <a:off x="3291840" y="4114800"/>
-            <a:ext cx="2743200" cy="457200"/>
-          </a:xfrm>
-          <a:prstGeom prst="rect">
-            <a:avLst/>
-          </a:prstGeom>
-          <a:noFill/>
-        </p:spPr>
-        <p:txBody>
-          <a:bodyPr wrap="square" anchor="t">
-            <a:spAutoFit/>
-          </a:bodyPr>
-          <a:lstStyle/>
-          <a:p>
-            <a:pPr algn="ctr"/>
-            <a:r>
-              <a:rPr sz="1100" b="0" i="1">
-                <a:solidFill>
-                  <a:srgbClr val="94A3B8"/>
-                </a:solidFill>
-                <a:latin typeface="Calibri"/>
-              </a:rPr>
-              <a:t>after preprocessing</a:t>
-            </a:r>
-          </a:p>
-        </p:txBody>
-      </p:sp>
-      <p:sp>
-        <p:nvSpPr>
-          <p:cNvPr id="11" name="TextBox 10"/>
-          <p:cNvSpPr txBox="1"/>
-          <p:nvPr/>
-        </p:nvSpPr>
-        <p:spPr>
-          <a:xfrm>
-            <a:off x="6126480" y="2468880"/>
-            <a:ext cx="2743200" cy="365760"/>
-          </a:xfrm>
-          <a:prstGeom prst="rect">
-            <a:avLst/>
-          </a:prstGeom>
-          <a:noFill/>
-        </p:spPr>
-        <p:txBody>
-          <a:bodyPr wrap="square" anchor="t">
-            <a:spAutoFit/>
-          </a:bodyPr>
-          <a:lstStyle/>
-          <a:p>
-            <a:pPr algn="ctr"/>
-            <a:r>
-              <a:rPr sz="1200" b="0" i="0">
-                <a:solidFill>
-                  <a:srgbClr val="94A3B8"/>
-                </a:solidFill>
-                <a:latin typeface="Calibri"/>
-              </a:rPr>
-              <a:t>Parameters</a:t>
-            </a:r>
-          </a:p>
-        </p:txBody>
-      </p:sp>
-      <p:sp>
-        <p:nvSpPr>
-          <p:cNvPr id="12" name="TextBox 11"/>
-          <p:cNvSpPr txBox="1"/>
-          <p:nvPr/>
-        </p:nvSpPr>
-        <p:spPr>
-          <a:xfrm>
-            <a:off x="6126480" y="2880360"/>
-            <a:ext cx="2743200" cy="914400"/>
-          </a:xfrm>
-          <a:prstGeom prst="rect">
-            <a:avLst/>
-          </a:prstGeom>
-          <a:noFill/>
-        </p:spPr>
-        <p:txBody>
-          <a:bodyPr wrap="square" anchor="t">
-            <a:spAutoFit/>
-          </a:bodyPr>
-          <a:lstStyle/>
-          <a:p>
-            <a:pPr algn="ctr"/>
-            <a:r>
-              <a:rPr sz="3800" b="1" i="0">
-                <a:solidFill>
-                  <a:srgbClr val="A78BFA"/>
-                </a:solidFill>
-                <a:latin typeface="Calibri"/>
-              </a:rPr>
-              <a:t>908,708</a:t>
-            </a:r>
-          </a:p>
-        </p:txBody>
-      </p:sp>
-      <p:sp>
-        <p:nvSpPr>
-          <p:cNvPr id="13" name="TextBox 12"/>
-          <p:cNvSpPr txBox="1"/>
-          <p:nvPr/>
-        </p:nvSpPr>
-        <p:spPr>
-          <a:xfrm>
-            <a:off x="6126480" y="4114800"/>
-            <a:ext cx="2743200" cy="457200"/>
-          </a:xfrm>
-          <a:prstGeom prst="rect">
-            <a:avLst/>
-          </a:prstGeom>
-          <a:noFill/>
-        </p:spPr>
-        <p:txBody>
-          <a:bodyPr wrap="square" anchor="t">
-            <a:spAutoFit/>
-          </a:bodyPr>
-          <a:lstStyle/>
-          <a:p>
-            <a:pPr algn="ctr"/>
-            <a:r>
-              <a:rPr sz="1100" b="0" i="1">
-                <a:solidFill>
-                  <a:srgbClr val="94A3B8"/>
-                </a:solidFill>
-                <a:latin typeface="Calibri"/>
-              </a:rPr>
-              <a:t>2 LSTM layers, 256 hidden</a:t>
-            </a:r>
-          </a:p>
-        </p:txBody>
-      </p:sp>
-      <p:sp>
-        <p:nvSpPr>
-          <p:cNvPr id="14" name="TextBox 13"/>
-          <p:cNvSpPr txBox="1"/>
-          <p:nvPr/>
-        </p:nvSpPr>
-        <p:spPr>
-          <a:xfrm>
-            <a:off x="8961120" y="2468880"/>
-            <a:ext cx="2743200" cy="365760"/>
-          </a:xfrm>
-          <a:prstGeom prst="rect">
-            <a:avLst/>
-          </a:prstGeom>
-          <a:noFill/>
-        </p:spPr>
-        <p:txBody>
-          <a:bodyPr wrap="square" anchor="t">
-            <a:spAutoFit/>
-          </a:bodyPr>
-          <a:lstStyle/>
-          <a:p>
-            <a:pPr algn="ctr"/>
-            <a:r>
-              <a:rPr sz="1200" b="0" i="0">
-                <a:solidFill>
-                  <a:srgbClr val="94A3B8"/>
-                </a:solidFill>
-                <a:latin typeface="Calibri"/>
-              </a:rPr>
-              <a:t>Epochs</a:t>
-            </a:r>
-          </a:p>
-        </p:txBody>
-      </p:sp>
-      <p:sp>
-        <p:nvSpPr>
-          <p:cNvPr id="15" name="TextBox 14"/>
-          <p:cNvSpPr txBox="1"/>
-          <p:nvPr/>
-        </p:nvSpPr>
-        <p:spPr>
-          <a:xfrm>
-            <a:off x="8961120" y="2880360"/>
-            <a:ext cx="2743200" cy="914400"/>
-          </a:xfrm>
-          <a:prstGeom prst="rect">
-            <a:avLst/>
-          </a:prstGeom>
-          <a:noFill/>
-        </p:spPr>
-        <p:txBody>
-          <a:bodyPr wrap="square" anchor="t">
-            <a:spAutoFit/>
-          </a:bodyPr>
-          <a:lstStyle/>
-          <a:p>
-            <a:pPr algn="ctr"/>
-            <a:r>
-              <a:rPr sz="3800" b="1" i="0">
-                <a:solidFill>
-                  <a:srgbClr val="A78BFA"/>
-                </a:solidFill>
-                <a:latin typeface="Calibri"/>
-              </a:rPr>
-              <a:t>30</a:t>
-            </a:r>
-          </a:p>
-        </p:txBody>
-      </p:sp>
-      <p:sp>
-        <p:nvSpPr>
-          <p:cNvPr id="16" name="TextBox 15"/>
-          <p:cNvSpPr txBox="1"/>
-          <p:nvPr/>
-        </p:nvSpPr>
-        <p:spPr>
-          <a:xfrm>
-            <a:off x="8961120" y="4114800"/>
-            <a:ext cx="2743200" cy="457200"/>
-          </a:xfrm>
-          <a:prstGeom prst="rect">
-            <a:avLst/>
-          </a:prstGeom>
-          <a:noFill/>
-        </p:spPr>
-        <p:txBody>
-          <a:bodyPr wrap="square" anchor="t">
-            <a:spAutoFit/>
-          </a:bodyPr>
-          <a:lstStyle/>
-          <a:p>
-            <a:pPr algn="ctr"/>
-            <a:r>
-              <a:rPr sz="1100" b="0" i="1">
-                <a:solidFill>
-                  <a:srgbClr val="94A3B8"/>
-                </a:solidFill>
-                <a:latin typeface="Calibri"/>
-              </a:rPr>
-              <a:t>on Apple Metal (MPS)</a:t>
-            </a:r>
-          </a:p>
-        </p:txBody>
-      </p:sp>
-      <p:sp>
-        <p:nvSpPr>
-          <p:cNvPr id="17" name="Rounded Rectangle 16"/>
+              <a:t>How Pulsefy AI was trained</a:t>
+            </a:r>
+          </a:p>
+        </p:txBody>
+      </p:sp>
+      <p:sp>
+        <p:nvSpPr>
+          <p:cNvPr id="4" name="Rounded Rectangle 3"/>
           <p:cNvSpPr/>
           <p:nvPr/>
         </p:nvSpPr>
         <p:spPr>
           <a:xfrm>
-            <a:off x="914400" y="4846320"/>
-            <a:ext cx="10332720" cy="1463040"/>
+            <a:off x="640080" y="2743200"/>
+            <a:ext cx="3383280" cy="1645920"/>
           </a:xfrm>
           <a:prstGeom prst="roundRect">
             <a:avLst/>
@@ -8933,9 +9501,9 @@
           <a:solidFill>
             <a:srgbClr val="1E293B"/>
           </a:solidFill>
-          <a:ln w="12700">
+          <a:ln w="19050">
             <a:solidFill>
-              <a:srgbClr val="334155"/>
+              <a:srgbClr val="A78BFA"/>
             </a:solidFill>
           </a:ln>
         </p:spPr>
@@ -8954,24 +9522,242 @@
           </a:fontRef>
         </p:style>
         <p:txBody>
-          <a:bodyPr rtlCol="0" anchor="ctr"/>
+          <a:bodyPr rtlCol="0" anchor="ctr" lIns="182880" rIns="182880"/>
           <a:lstStyle/>
           <a:p>
             <a:pPr algn="ctr"/>
-            <a:endParaRPr/>
-          </a:p>
-        </p:txBody>
-      </p:sp>
-      <p:sp>
-        <p:nvSpPr>
-          <p:cNvPr id="18" name="TextBox 17"/>
+            <a:r>
+              <a:rPr sz="2000" b="1">
+                <a:solidFill>
+                  <a:srgbClr val="F8FAFC"/>
+                </a:solidFill>
+              </a:rPr>
+              <a:t>1,034 MIDI files</a:t>
+            </a:r>
+          </a:p>
+          <a:p>
+            <a:pPr algn="ctr"/>
+            <a:r>
+              <a:rPr sz="1200" i="1">
+                <a:solidFill>
+                  <a:srgbClr val="94A3B8"/>
+                </a:solidFill>
+              </a:rPr>
+              <a:t>Nottingham folk + Christmas tunes</a:t>
+            </a:r>
+          </a:p>
+        </p:txBody>
+      </p:sp>
+      <p:sp>
+        <p:nvSpPr>
+          <p:cNvPr id="5" name="Rounded Rectangle 4"/>
+          <p:cNvSpPr/>
+          <p:nvPr/>
+        </p:nvSpPr>
+        <p:spPr>
+          <a:xfrm>
+            <a:off x="4389120" y="2743200"/>
+            <a:ext cx="3383280" cy="1645920"/>
+          </a:xfrm>
+          <a:prstGeom prst="roundRect">
+            <a:avLst/>
+          </a:prstGeom>
+          <a:solidFill>
+            <a:srgbClr val="1E293B"/>
+          </a:solidFill>
+          <a:ln w="19050">
+            <a:solidFill>
+              <a:srgbClr val="A78BFA"/>
+            </a:solidFill>
+          </a:ln>
+        </p:spPr>
+        <p:style>
+          <a:lnRef idx="1">
+            <a:schemeClr val="accent1"/>
+          </a:lnRef>
+          <a:fillRef idx="3">
+            <a:schemeClr val="accent1"/>
+          </a:fillRef>
+          <a:effectRef idx="2">
+            <a:schemeClr val="accent1"/>
+          </a:effectRef>
+          <a:fontRef idx="minor">
+            <a:schemeClr val="lt1"/>
+          </a:fontRef>
+        </p:style>
+        <p:txBody>
+          <a:bodyPr rtlCol="0" anchor="ctr" lIns="182880" rIns="182880"/>
+          <a:lstStyle/>
+          <a:p>
+            <a:pPr algn="ctr"/>
+            <a:r>
+              <a:rPr sz="2000" b="1">
+                <a:solidFill>
+                  <a:srgbClr val="F8FAFC"/>
+                </a:solidFill>
+              </a:rPr>
+              <a:t>Train for 30 epochs</a:t>
+            </a:r>
+          </a:p>
+          <a:p>
+            <a:pPr algn="ctr"/>
+            <a:r>
+              <a:rPr sz="1200" i="1">
+                <a:solidFill>
+                  <a:srgbClr val="94A3B8"/>
+                </a:solidFill>
+              </a:rPr>
+              <a:t>Apple Metal acceleration</a:t>
+            </a:r>
+          </a:p>
+        </p:txBody>
+      </p:sp>
+      <p:sp>
+        <p:nvSpPr>
+          <p:cNvPr id="6" name="Rounded Rectangle 5"/>
+          <p:cNvSpPr/>
+          <p:nvPr/>
+        </p:nvSpPr>
+        <p:spPr>
+          <a:xfrm>
+            <a:off x="8138160" y="2743200"/>
+            <a:ext cx="3383280" cy="1645920"/>
+          </a:xfrm>
+          <a:prstGeom prst="roundRect">
+            <a:avLst/>
+          </a:prstGeom>
+          <a:solidFill>
+            <a:srgbClr val="1E293B"/>
+          </a:solidFill>
+          <a:ln w="19050">
+            <a:solidFill>
+              <a:srgbClr val="A78BFA"/>
+            </a:solidFill>
+          </a:ln>
+        </p:spPr>
+        <p:style>
+          <a:lnRef idx="1">
+            <a:schemeClr val="accent1"/>
+          </a:lnRef>
+          <a:fillRef idx="3">
+            <a:schemeClr val="accent1"/>
+          </a:fillRef>
+          <a:effectRef idx="2">
+            <a:schemeClr val="accent1"/>
+          </a:effectRef>
+          <a:fontRef idx="minor">
+            <a:schemeClr val="lt1"/>
+          </a:fontRef>
+        </p:style>
+        <p:txBody>
+          <a:bodyPr rtlCol="0" anchor="ctr" lIns="182880" rIns="182880"/>
+          <a:lstStyle/>
+          <a:p>
+            <a:pPr algn="ctr"/>
+            <a:r>
+              <a:rPr sz="2000" b="1">
+                <a:solidFill>
+                  <a:srgbClr val="F8FAFC"/>
+                </a:solidFill>
+              </a:rPr>
+              <a:t>Pulsefy AI model</a:t>
+            </a:r>
+          </a:p>
+          <a:p>
+            <a:pPr algn="ctr"/>
+            <a:r>
+              <a:rPr sz="1200" i="1">
+                <a:solidFill>
+                  <a:srgbClr val="94A3B8"/>
+                </a:solidFill>
+              </a:rPr>
+              <a:t>saved as a .pt checkpoint</a:t>
+            </a:r>
+          </a:p>
+        </p:txBody>
+      </p:sp>
+      <p:cxnSp>
+        <p:nvCxnSpPr>
+          <p:cNvPr id="7" name="Connector 6"/>
+          <p:cNvCxnSpPr/>
+          <p:nvPr/>
+        </p:nvCxnSpPr>
+        <p:spPr>
+          <a:xfrm>
+            <a:off x="4023360" y="3566160"/>
+            <a:ext cx="365760" cy="0"/>
+          </a:xfrm>
+          <a:prstGeom prst="line">
+            <a:avLst/>
+          </a:prstGeom>
+          <a:ln w="19050">
+            <a:solidFill>
+              <a:srgbClr val="A78BFA"/>
+            </a:solidFill>
+            <a:tailEnd type="triangle" w="med" len="med"/>
+          </a:ln>
+        </p:spPr>
+        <p:style>
+          <a:lnRef idx="2">
+            <a:schemeClr val="accent1"/>
+          </a:lnRef>
+          <a:fillRef idx="0">
+            <a:schemeClr val="accent1"/>
+          </a:fillRef>
+          <a:effectRef idx="1">
+            <a:schemeClr val="accent1"/>
+          </a:effectRef>
+          <a:fontRef idx="minor">
+            <a:schemeClr val="tx1"/>
+          </a:fontRef>
+        </p:style>
+      </p:cxnSp>
+      <p:cxnSp>
+        <p:nvCxnSpPr>
+          <p:cNvPr id="8" name="Connector 7"/>
+          <p:cNvCxnSpPr/>
+          <p:nvPr/>
+        </p:nvCxnSpPr>
+        <p:spPr>
+          <a:xfrm>
+            <a:off x="7772400" y="3566160"/>
+            <a:ext cx="365760" cy="0"/>
+          </a:xfrm>
+          <a:prstGeom prst="line">
+            <a:avLst/>
+          </a:prstGeom>
+          <a:ln w="19050">
+            <a:solidFill>
+              <a:srgbClr val="A78BFA"/>
+            </a:solidFill>
+            <a:tailEnd type="triangle" w="med" len="med"/>
+          </a:ln>
+        </p:spPr>
+        <p:style>
+          <a:lnRef idx="2">
+            <a:schemeClr val="accent1"/>
+          </a:lnRef>
+          <a:fillRef idx="0">
+            <a:schemeClr val="accent1"/>
+          </a:fillRef>
+          <a:effectRef idx="1">
+            <a:schemeClr val="accent1"/>
+          </a:effectRef>
+          <a:fontRef idx="minor">
+            <a:schemeClr val="tx1"/>
+          </a:fontRef>
+        </p:style>
+      </p:cxnSp>
+      <p:sp>
+        <p:nvSpPr>
+          <p:cNvPr id="9" name="TextBox 8"/>
           <p:cNvSpPr txBox="1"/>
           <p:nvPr/>
         </p:nvSpPr>
         <p:spPr>
           <a:xfrm>
-            <a:off x="1280160" y="4983480"/>
-            <a:ext cx="9601200" cy="457200"/>
+            <a:off x="914400" y="5029200"/>
+            <a:ext cx="10332720" cy="914400"/>
           </a:xfrm>
           <a:prstGeom prst="rect">
             <a:avLst/>
@@ -8984,29 +9770,29 @@
           </a:bodyPr>
           <a:lstStyle/>
           <a:p>
-            <a:pPr algn="l"/>
-            <a:r>
-              <a:rPr sz="1300" b="1" i="0">
-                <a:solidFill>
-                  <a:srgbClr val="A78BFA"/>
+            <a:pPr algn="ctr"/>
+            <a:r>
+              <a:rPr sz="1400" b="0" i="1">
+                <a:solidFill>
+                  <a:srgbClr val="F8FAFC"/>
                 </a:solidFill>
                 <a:latin typeface="Calibri"/>
               </a:rPr>
-              <a:t>Convergence</a:t>
-            </a:r>
-          </a:p>
-        </p:txBody>
-      </p:sp>
-      <p:sp>
-        <p:nvSpPr>
-          <p:cNvPr id="19" name="TextBox 18"/>
+              <a:t>The model learned to predict the next musical event in a sequence — the same way a language model predicts the next word.</a:t>
+            </a:r>
+          </a:p>
+        </p:txBody>
+      </p:sp>
+      <p:sp>
+        <p:nvSpPr>
+          <p:cNvPr id="10" name="TextBox 9"/>
           <p:cNvSpPr txBox="1"/>
           <p:nvPr/>
         </p:nvSpPr>
         <p:spPr>
           <a:xfrm>
-            <a:off x="1280160" y="5394960"/>
-            <a:ext cx="9601200" cy="914400"/>
+            <a:off x="11338560" y="640080"/>
+            <a:ext cx="640080" cy="640080"/>
           </a:xfrm>
           <a:prstGeom prst="rect">
             <a:avLst/>
@@ -9014,20 +9800,19 @@
           <a:noFill/>
         </p:spPr>
         <p:txBody>
-          <a:bodyPr wrap="square" anchor="t">
+          <a:bodyPr wrap="none" anchor="ctr">
             <a:spAutoFit/>
           </a:bodyPr>
           <a:lstStyle/>
           <a:p>
-            <a:pPr algn="l"/>
-            <a:r>
-              <a:rPr sz="1200" b="0" i="0">
-                <a:solidFill>
-                  <a:srgbClr val="F8FAFC"/>
-                </a:solidFill>
-                <a:latin typeface="Calibri"/>
-              </a:rPr>
-              <a:t>Validation loss converged from approximately 0.51 at epoch 1 to approximately 0.43 by epoch 3, indicating the model fit the dataset early and continued to improve over the full training run. The final checkpoint ships with the application.</a:t>
+            <a:pPr algn="ctr"/>
+            <a:r>
+              <a:rPr sz="2800">
+                <a:solidFill>
+                  <a:srgbClr val="A78BFA"/>
+                </a:solidFill>
+              </a:rPr>
+              <a:t>★</a:t>
             </a:r>
           </a:p>
         </p:txBody>
